--- a/deck/Sentinel_AI_Kavach.pptx
+++ b/deck/Sentinel_AI_Kavach.pptx
@@ -34,6 +34,8 @@
     <p:sldId id="282" r:id="rId34"/>
     <p:sldId id="283" r:id="rId35"/>
     <p:sldId id="284" r:id="rId36"/>
+    <p:sldId id="285" r:id="rId37"/>
+    <p:sldId id="286" r:id="rId38"/>
   </p:sldIdLst>
   <p:sldSz cx="12191695" cy="6858000" type="screen4x3"/>
   <p:notesSz cx="6858000" cy="9144000"/>
@@ -950,7 +952,7 @@
           <a:lstStyle/>
           <a:p>
             <a:r>
-              <a:t>Sentinel is not a one-trick demo. Three independent classes each run the entire loop end-to-end against live targets.</a:t>
+              <a:t>Sentinel is not a one-trick demo. Five independent classes each run the entire loop end-to-end against live targets.</a:t>
             </a:r>
           </a:p>
         </p:txBody>
@@ -1230,7 +1232,7 @@
           <a:lstStyle/>
           <a:p>
             <a:r>
-              <a:t>The Login Tester unlocks the authenticated surface. Sentinel opens a visible browser, waits for you (including MFA), auto-detects success, and reasons over the real session — with credentials handled in memory only, never persisted or logged.</a:t>
+              <a:t>Privilege escalation as a rigorous differential. Sentinel replays the attacker's session against their own object (control) and a forbidden one (breach), plus an anonymous baseline; it confirms only when the control succeeds, the breach is granted, and anonymous is denied. An ownership-checked endpoint yields no finding — the honest control — then the shield denies the escalation and the judge re-proves.</a:t>
             </a:r>
           </a:p>
         </p:txBody>
@@ -1370,7 +1372,7 @@
           <a:lstStyle/>
           <a:p>
             <a:r>
-              <a:t>Chaining is where scanners over-claim. Sentinel proves each ingredient of a session-theft→authenticated-access chain independently and presents them together — but it does not auto-compose a causal exploit narrative. Honesty is the moat.</a:t>
+              <a:t>Injection judged by behaviour, not by regex. Sentinel sends a benign baseline plus length-matched boolean pairs and confirms only when the TRUE and FALSE arms diverge while the baseline stays anchored — so the differential emerges from the database actually evaluating the injected boolean. A parameterised filter collapses the differential to no finding; the request-guard virtual patch then blocks the payload and the judge re-proves.</a:t>
             </a:r>
           </a:p>
         </p:txBody>
@@ -1440,7 +1442,7 @@
           <a:lstStyle/>
           <a:p>
             <a:r>
-              <a:t>Target-agnosticism is structural: the engine carries no target-specific code, only the operator's oracle changes. We've run the full loop on two independent stacks — Juice Shop and VAmPI — to prove it generalizes.</a:t>
+              <a:t>The Login Tester unlocks the authenticated surface. Sentinel opens a visible browser, waits for you (including MFA), auto-detects success, and reasons over the real session — with credentials handled in memory only, never persisted or logged.</a:t>
             </a:r>
           </a:p>
         </p:txBody>
@@ -1510,7 +1512,7 @@
           <a:lstStyle/>
           <a:p>
             <a:r>
-              <a:t>Validation is first-class. The offline suite is deterministic and network-free; the single skip is the browser test that only runs with the opt-in extra. Tests cover confirmation, remediation proof, isolation, and — crucially — that compliant controls produce no finding.</a:t>
+              <a:t>Chaining is where scanners over-claim. Sentinel proves each ingredient of a session-theft→authenticated-access chain independently and presents them together — but it does not auto-compose a causal exploit narrative. Honesty is the moat.</a:t>
             </a:r>
           </a:p>
         </p:txBody>
@@ -1580,7 +1582,7 @@
           <a:lstStyle/>
           <a:p>
             <a:r>
-              <a:t>Local-first is a feature, not a limitation. The reasoning model runs on-box, the deterministic core works even if the model is down, and nothing egresses — which makes Sentinel deployable in air-gapped and regulated settings.</a:t>
+              <a:t>Target-agnosticism is structural: the engine carries no target-specific code, only the operator's oracle changes. We've run the full loop on two independent stacks — Juice Shop and VAmPI — to prove it generalizes.</a:t>
             </a:r>
           </a:p>
         </p:txBody>
@@ -1650,7 +1652,7 @@
           <a:lstStyle/>
           <a:p>
             <a:r>
-              <a:t>Autonomy is bounded by design: scope is enforced before a socket opens, probes are non-destructive, the shield is loopback-only, and the acting and judging stages are strictly separated. Credential handling is memory-only.</a:t>
+              <a:t>Validation is first-class. The offline suite is deterministic and network-free; the single skip is the browser test that only runs with the opt-in extra. Tests cover confirmation, remediation proof, isolation, and — crucially — that compliant controls produce no finding.</a:t>
             </a:r>
           </a:p>
         </p:txBody>
@@ -1720,7 +1722,7 @@
           <a:lstStyle/>
           <a:p>
             <a:r>
-              <a:t>Category-level, not a bake-off: signature scanners are fast but noisy and miss authorization; DAST and fuzzers explore but don't reason about intent or prove fixes. Sentinel's column is defined by reproduced verdicts, live fix-proofs, and full auditability.</a:t>
+              <a:t>Local-first is a feature, not a limitation. The reasoning model runs on-box, the deterministic core works even if the model is down, and nothing egresses — which makes Sentinel deployable in air-gapped and regulated settings.</a:t>
             </a:r>
           </a:p>
         </p:txBody>
@@ -1790,7 +1792,7 @@
           <a:lstStyle/>
           <a:p>
             <a:r>
-              <a:t>The wedge is trust plus closure: verdicts you can believe and fixes you can prove, in the classes that matter most, deployable where the sensitive targets actually live. Honesty about limits is itself a differentiator.</a:t>
+              <a:t>Autonomy is bounded by design: scope is enforced before a socket opens, probes are non-destructive, the shield is loopback-only, and the acting and judging stages are strictly separated. Credential handling is memory-only.</a:t>
             </a:r>
           </a:p>
         </p:txBody>
@@ -1860,7 +1862,7 @@
           <a:lstStyle/>
           <a:p>
             <a:r>
-              <a:t>We're candid about the line between done and next. Three classes, two targets, the Login Tester, and chaining ingredients ship today; full causal chaining, more classes, and a CI gate are the roadmap.</a:t>
+              <a:t>Category-level, not a bake-off: signature scanners are fast but noisy and miss authorization; DAST and fuzzers explore but don't reason about intent or prove fixes. Sentinel's column is defined by reproduced verdicts, live fix-proofs, and full auditability.</a:t>
             </a:r>
           </a:p>
         </p:txBody>
@@ -1930,7 +1932,7 @@
           <a:lstStyle/>
           <a:p>
             <a:r>
-              <a:t>We're raising $1M for ~18 months to expand the class coverage, ship full chaining, build a policy library and CI integrations, and land design partners in regulated environments where local-first is a hard requirement.</a:t>
+              <a:t>The wedge is trust plus closure: verdicts you can believe and fixes you can prove, in the classes that matter most, deployable where the sensitive targets actually live. Honesty about limits is itself a differentiator.</a:t>
             </a:r>
           </a:p>
         </p:txBody>
@@ -2000,7 +2002,7 @@
           <a:lstStyle/>
           <a:p>
             <a:r>
-              <a:t>Close: the future of security tooling isn't more signatures — it's reasoning that proves itself. That's Sentinel.</a:t>
+              <a:t>We're candid about the line between done and next. Five classes, two targets, the Login Tester, and chaining ingredients ship today; full causal chaining, more classes, and a CI gate are the roadmap.</a:t>
             </a:r>
           </a:p>
         </p:txBody>
@@ -2071,6 +2073,146 @@
           <a:p>
             <a:r>
               <a:t>Two curves cross: the authorization surface exploded with APIs while local models got good enough to reason on-prem. The missing piece is trust — an LLM alone can't be the authority. Sentinel supplies the deterministic ground truth that makes autonomous reasoning safe to ship.</a:t>
+            </a:r>
+          </a:p>
+        </p:txBody>
+      </p:sp>
+      <p:sp>
+        <p:nvSpPr>
+          <p:cNvPr id="4" name="Slide Number Placeholder 3"/>
+          <p:cNvSpPr>
+            <a:spLocks noGrp="1"/>
+          </p:cNvSpPr>
+          <p:nvPr>
+            <p:ph type="sldNum" idx="5" sz="quarter"/>
+          </p:nvPr>
+        </p:nvSpPr>
+        <p:spPr/>
+      </p:sp>
+    </p:spTree>
+  </p:cSld>
+  <p:clrMapOvr>
+    <a:masterClrMapping/>
+  </p:clrMapOvr>
+</p:notes>
+</file>
+
+<file path=ppt/notesSlides/notesSlide30.xml><?xml version="1.0" encoding="utf-8"?>
+<p:notes xmlns:a="http://schemas.openxmlformats.org/drawingml/2006/main" xmlns:p="http://schemas.openxmlformats.org/presentationml/2006/main" xmlns:r="http://schemas.openxmlformats.org/officeDocument/2006/relationships">
+  <p:cSld>
+    <p:spTree>
+      <p:nvGrpSpPr>
+        <p:cNvPr id="1" name=""/>
+        <p:cNvGrpSpPr/>
+        <p:nvPr/>
+      </p:nvGrpSpPr>
+      <p:grpSpPr>
+        <a:xfrm>
+          <a:off x="0" y="0"/>
+          <a:ext cx="0" cy="0"/>
+          <a:chOff x="0" y="0"/>
+          <a:chExt cx="0" cy="0"/>
+        </a:xfrm>
+      </p:grpSpPr>
+      <p:sp>
+        <p:nvSpPr>
+          <p:cNvPr id="2" name="Slide Image Placeholder 1"/>
+          <p:cNvSpPr>
+            <a:spLocks noGrp="1"/>
+          </p:cNvSpPr>
+          <p:nvPr>
+            <p:ph type="sldImg" idx="2"/>
+          </p:nvPr>
+        </p:nvSpPr>
+        <p:spPr/>
+      </p:sp>
+      <p:sp>
+        <p:nvSpPr>
+          <p:cNvPr id="3" name="Notes Placeholder 2"/>
+          <p:cNvSpPr>
+            <a:spLocks noGrp="1"/>
+          </p:cNvSpPr>
+          <p:nvPr>
+            <p:ph type="body" idx="3" sz="quarter"/>
+          </p:nvPr>
+        </p:nvSpPr>
+        <p:spPr/>
+        <p:txBody>
+          <a:bodyPr/>
+          <a:lstStyle/>
+          <a:p>
+            <a:r>
+              <a:t>We're raising $1M for ~18 months to expand the class coverage, ship full chaining, build a policy library and CI integrations, and land design partners in regulated environments where local-first is a hard requirement.</a:t>
+            </a:r>
+          </a:p>
+        </p:txBody>
+      </p:sp>
+      <p:sp>
+        <p:nvSpPr>
+          <p:cNvPr id="4" name="Slide Number Placeholder 3"/>
+          <p:cNvSpPr>
+            <a:spLocks noGrp="1"/>
+          </p:cNvSpPr>
+          <p:nvPr>
+            <p:ph type="sldNum" idx="5" sz="quarter"/>
+          </p:nvPr>
+        </p:nvSpPr>
+        <p:spPr/>
+      </p:sp>
+    </p:spTree>
+  </p:cSld>
+  <p:clrMapOvr>
+    <a:masterClrMapping/>
+  </p:clrMapOvr>
+</p:notes>
+</file>
+
+<file path=ppt/notesSlides/notesSlide31.xml><?xml version="1.0" encoding="utf-8"?>
+<p:notes xmlns:a="http://schemas.openxmlformats.org/drawingml/2006/main" xmlns:p="http://schemas.openxmlformats.org/presentationml/2006/main" xmlns:r="http://schemas.openxmlformats.org/officeDocument/2006/relationships">
+  <p:cSld>
+    <p:spTree>
+      <p:nvGrpSpPr>
+        <p:cNvPr id="1" name=""/>
+        <p:cNvGrpSpPr/>
+        <p:nvPr/>
+      </p:nvGrpSpPr>
+      <p:grpSpPr>
+        <a:xfrm>
+          <a:off x="0" y="0"/>
+          <a:ext cx="0" cy="0"/>
+          <a:chOff x="0" y="0"/>
+          <a:chExt cx="0" cy="0"/>
+        </a:xfrm>
+      </p:grpSpPr>
+      <p:sp>
+        <p:nvSpPr>
+          <p:cNvPr id="2" name="Slide Image Placeholder 1"/>
+          <p:cNvSpPr>
+            <a:spLocks noGrp="1"/>
+          </p:cNvSpPr>
+          <p:nvPr>
+            <p:ph type="sldImg" idx="2"/>
+          </p:nvPr>
+        </p:nvSpPr>
+        <p:spPr/>
+      </p:sp>
+      <p:sp>
+        <p:nvSpPr>
+          <p:cNvPr id="3" name="Notes Placeholder 2"/>
+          <p:cNvSpPr>
+            <a:spLocks noGrp="1"/>
+          </p:cNvSpPr>
+          <p:nvPr>
+            <p:ph type="body" idx="3" sz="quarter"/>
+          </p:nvPr>
+        </p:nvSpPr>
+        <p:spPr/>
+        <p:txBody>
+          <a:bodyPr/>
+          <a:lstStyle/>
+          <a:p>
+            <a:r>
+              <a:t>Close: the future of security tooling isn't more signatures — it's reasoning that proves itself. That's Sentinel.</a:t>
             </a:r>
           </a:p>
         </p:txBody>
@@ -5661,7 +5803,7 @@
                 </a:solidFill>
                 <a:latin typeface="Segoe UI"/>
               </a:rPr>
-              <a:t>Three vulnerability classes, each closing the full loop</a:t>
+              <a:t>Five vulnerability classes, each closing the full loop</a:t>
             </a:r>
           </a:p>
           <a:p>
@@ -6195,7 +6337,7 @@
                 </a:solidFill>
                 <a:latin typeface="Consolas"/>
               </a:rPr>
-              <a:t>11 / 29</a:t>
+              <a:t>11 / 31</a:t>
             </a:r>
           </a:p>
         </p:txBody>
@@ -6426,8 +6568,8 @@
         </p:blipFill>
         <p:spPr>
           <a:xfrm>
-            <a:off x="7480103" y="2331720"/>
-            <a:ext cx="3190632" cy="3794760"/>
+            <a:off x="7504996" y="2331720"/>
+            <a:ext cx="3140846" cy="3794760"/>
           </a:xfrm>
           <a:prstGeom prst="rect">
             <a:avLst/>
@@ -6655,7 +6797,7 @@
                 </a:solidFill>
                 <a:latin typeface="Consolas"/>
               </a:rPr>
-              <a:t>12 / 29</a:t>
+              <a:t>12 / 31</a:t>
             </a:r>
           </a:p>
         </p:txBody>
@@ -7115,7 +7257,7 @@
                 </a:solidFill>
                 <a:latin typeface="Consolas"/>
               </a:rPr>
-              <a:t>13 / 29</a:t>
+              <a:t>13 / 31</a:t>
             </a:r>
           </a:p>
         </p:txBody>
@@ -7575,7 +7717,7 @@
                 </a:solidFill>
                 <a:latin typeface="Consolas"/>
               </a:rPr>
-              <a:t>14 / 29</a:t>
+              <a:t>14 / 31</a:t>
             </a:r>
           </a:p>
         </p:txBody>
@@ -7652,7 +7794,7 @@
                 </a:solidFill>
                 <a:latin typeface="Consolas"/>
               </a:rPr>
-              <a:t>Three Vulnerability Classes</a:t>
+              <a:t>Five Vulnerability Classes</a:t>
             </a:r>
           </a:p>
         </p:txBody>
@@ -8147,7 +8289,7 @@
                 </a:solidFill>
                 <a:latin typeface="Consolas"/>
               </a:rPr>
-              <a:t>16 / 29</a:t>
+              <a:t>16 / 31</a:t>
             </a:r>
           </a:p>
         </p:txBody>
@@ -8607,7 +8749,7 @@
                 </a:solidFill>
                 <a:latin typeface="Consolas"/>
               </a:rPr>
-              <a:t>17 / 29</a:t>
+              <a:t>17 / 31</a:t>
             </a:r>
           </a:p>
         </p:txBody>
@@ -9067,7 +9209,7 @@
                 </a:solidFill>
                 <a:latin typeface="Consolas"/>
               </a:rPr>
-              <a:t>18 / 29</a:t>
+              <a:t>18 / 31</a:t>
             </a:r>
           </a:p>
         </p:txBody>
@@ -9219,7 +9361,7 @@
                 </a:solidFill>
                 <a:latin typeface="Consolas"/>
               </a:rPr>
-              <a:t>Login Tester — Authenticated Reasoning</a:t>
+              <a:t>Class 4 — Privilege Escalation</a:t>
             </a:r>
           </a:p>
         </p:txBody>
@@ -9277,14 +9419,14 @@
                 </a:solidFill>
                 <a:latin typeface="Consolas"/>
               </a:rPr>
-              <a:t>Turn anonymous scanning into authenticated proof</a:t>
+              <a:t>privilege_escalation — horizontal (BOLA) &amp; vertical</a:t>
             </a:r>
           </a:p>
         </p:txBody>
       </p:sp>
       <p:pic>
         <p:nvPicPr>
-          <p:cNvPr id="8" name="Picture 7" descr="shot_login.png"/>
+          <p:cNvPr id="8" name="Picture 7" descr="shot_privesc.png"/>
           <p:cNvPicPr>
             <a:picLocks noChangeAspect="1"/>
           </p:cNvPicPr>
@@ -9298,8 +9440,8 @@
         </p:blipFill>
         <p:spPr>
           <a:xfrm>
-            <a:off x="7802850" y="2331720"/>
-            <a:ext cx="2545138" cy="3794760"/>
+            <a:off x="7639437" y="2331720"/>
+            <a:ext cx="2871964" cy="3794760"/>
           </a:xfrm>
           <a:prstGeom prst="rect">
             <a:avLst/>
@@ -9349,7 +9491,7 @@
                 </a:solidFill>
                 <a:latin typeface="Segoe UI"/>
               </a:rPr>
-              <a:t>Drives a real browser; you log in (MFA supported)</a:t>
+              <a:t>Three-probe differential: control · breach · anon baseline</a:t>
             </a:r>
           </a:p>
           <a:p>
@@ -9374,7 +9516,7 @@
                 </a:solidFill>
                 <a:latin typeface="Segoe UI"/>
               </a:rPr>
-              <a:t>Auto-detects completion, captures the live session</a:t>
+              <a:t>CONFIRMED only if control succeeds AND breach granted</a:t>
             </a:r>
           </a:p>
           <a:p>
@@ -9399,7 +9541,7 @@
                 </a:solidFill>
                 <a:latin typeface="Segoe UI"/>
               </a:rPr>
-              <a:t>Runs authenticated authz + cookie analysis on it</a:t>
+              <a:t>AND the anonymous baseline is denied — no false positives</a:t>
             </a:r>
           </a:p>
           <a:p>
@@ -9411,7 +9553,7 @@
             <a:r>
               <a:rPr sz="1600" b="1">
                 <a:solidFill>
-                  <a:srgbClr val="E84BFF"/>
+                  <a:srgbClr val="22D3EE"/>
                 </a:solidFill>
                 <a:latin typeface="Segoe UI"/>
               </a:rPr>
@@ -9424,7 +9566,7 @@
                 </a:solidFill>
                 <a:latin typeface="Segoe UI"/>
               </a:rPr>
-              <a:t>Credentials via getpass — never stored, never logged</a:t>
+              <a:t>A properly owned /orders endpoint → DISPROVED, no finding</a:t>
             </a:r>
           </a:p>
           <a:p>
@@ -9436,7 +9578,7 @@
             <a:r>
               <a:rPr sz="1600" b="1">
                 <a:solidFill>
-                  <a:srgbClr val="E84BFF"/>
+                  <a:srgbClr val="2DD48F"/>
                 </a:solidFill>
                 <a:latin typeface="Segoe UI"/>
               </a:rPr>
@@ -9445,11 +9587,11 @@
             <a:r>
               <a:rPr sz="1600" b="0">
                 <a:solidFill>
-                  <a:srgbClr val="C4D2E4"/>
-                </a:solidFill>
-                <a:latin typeface="Segoe UI"/>
-              </a:rPr>
-              <a:t>In-memory for the run only, scope-bound to the host</a:t>
+                  <a:srgbClr val="EAF2FF"/>
+                </a:solidFill>
+                <a:latin typeface="Segoe UI"/>
+              </a:rPr>
+              <a:t>Shield denies the cross-boundary request → re-proven</a:t>
             </a:r>
           </a:p>
         </p:txBody>
@@ -9527,7 +9669,7 @@
                 </a:solidFill>
                 <a:latin typeface="Consolas"/>
               </a:rPr>
-              <a:t>19 / 29</a:t>
+              <a:t>19 / 31</a:t>
             </a:r>
           </a:p>
         </p:txBody>
@@ -9963,7 +10105,7 @@
                 </a:solidFill>
                 <a:latin typeface="Consolas"/>
               </a:rPr>
-              <a:t>02 / 29</a:t>
+              <a:t>02 / 31</a:t>
             </a:r>
           </a:p>
         </p:txBody>
@@ -10115,7 +10257,7 @@
                 </a:solidFill>
                 <a:latin typeface="Consolas"/>
               </a:rPr>
-              <a:t>Chaining — Ingredients, Honestly</a:t>
+              <a:t>Class 5 — SQL Injection</a:t>
             </a:r>
           </a:p>
         </p:txBody>
@@ -10173,21 +10315,45 @@
                 </a:solidFill>
                 <a:latin typeface="Consolas"/>
               </a:rPr>
-              <a:t>We prove the pieces; we don't fabricate the story</a:t>
-            </a:r>
-          </a:p>
-        </p:txBody>
-      </p:sp>
-      <p:sp>
-        <p:nvSpPr>
-          <p:cNvPr id="8" name="TextBox 7"/>
+              <a:t>injection — a boolean differential, not a signature</a:t>
+            </a:r>
+          </a:p>
+        </p:txBody>
+      </p:sp>
+      <p:pic>
+        <p:nvPicPr>
+          <p:cNvPr id="8" name="Picture 7" descr="shot_injection.png"/>
+          <p:cNvPicPr>
+            <a:picLocks noChangeAspect="1"/>
+          </p:cNvPicPr>
+          <p:nvPr/>
+        </p:nvPicPr>
+        <p:blipFill>
+          <a:blip r:embed="rId5"/>
+          <a:stretch>
+            <a:fillRect/>
+          </a:stretch>
+        </p:blipFill>
+        <p:spPr>
+          <a:xfrm>
+            <a:off x="7214645" y="2331720"/>
+            <a:ext cx="3721549" cy="3794760"/>
+          </a:xfrm>
+          <a:prstGeom prst="rect">
+            <a:avLst/>
+          </a:prstGeom>
+        </p:spPr>
+      </p:pic>
+      <p:sp>
+        <p:nvSpPr>
+          <p:cNvPr id="9" name="TextBox 8"/>
           <p:cNvSpPr txBox="1"/>
           <p:nvPr/>
         </p:nvSpPr>
         <p:spPr>
           <a:xfrm>
-            <a:off x="713232" y="2697480"/>
-            <a:ext cx="10789920" cy="3840480"/>
+            <a:off x="713232" y="2487168"/>
+            <a:ext cx="5440680" cy="3840480"/>
           </a:xfrm>
           <a:prstGeom prst="rect">
             <a:avLst/>
@@ -10202,133 +10368,133 @@
           <a:p>
             <a:pPr>
               <a:spcAft>
-                <a:spcPts val="1500"/>
+                <a:spcPts val="1200"/>
               </a:spcAft>
             </a:pPr>
             <a:r>
-              <a:rPr sz="1800" b="1">
-                <a:solidFill>
-                  <a:srgbClr val="2DD48F"/>
+              <a:rPr sz="1600" b="1">
+                <a:solidFill>
+                  <a:srgbClr val="22D3EE"/>
                 </a:solidFill>
                 <a:latin typeface="Segoe UI"/>
               </a:rPr>
               <a:t>»  </a:t>
             </a:r>
             <a:r>
-              <a:rPr sz="1800" b="0">
-                <a:solidFill>
-                  <a:srgbClr val="EAF2FF"/>
-                </a:solidFill>
-                <a:latin typeface="Segoe UI"/>
-              </a:rPr>
-              <a:t>Session captured (real cookies + bearer)</a:t>
+              <a:rPr sz="1600" b="0">
+                <a:solidFill>
+                  <a:srgbClr val="C4D2E4"/>
+                </a:solidFill>
+                <a:latin typeface="Segoe UI"/>
+              </a:rPr>
+              <a:t>Benign baseline + length-matched TRUE/FALSE payload pairs</a:t>
             </a:r>
           </a:p>
           <a:p>
             <a:pPr>
               <a:spcAft>
-                <a:spcPts val="1500"/>
+                <a:spcPts val="1200"/>
               </a:spcAft>
             </a:pPr>
             <a:r>
-              <a:rPr sz="1800" b="1">
-                <a:solidFill>
-                  <a:srgbClr val="2DD48F"/>
+              <a:rPr sz="1600" b="1">
+                <a:solidFill>
+                  <a:srgbClr val="22D3EE"/>
                 </a:solidFill>
                 <a:latin typeface="Segoe UI"/>
               </a:rPr>
               <a:t>»  </a:t>
             </a:r>
             <a:r>
-              <a:rPr sz="1800" b="0">
-                <a:solidFill>
-                  <a:srgbClr val="EAF2FF"/>
-                </a:solidFill>
-                <a:latin typeface="Segoe UI"/>
-              </a:rPr>
-              <a:t>Session cookie proven insecure (insecure_cookie CONFIRMED)</a:t>
+              <a:rPr sz="1600" b="0">
+                <a:solidFill>
+                  <a:srgbClr val="C4D2E4"/>
+                </a:solidFill>
+                <a:latin typeface="Segoe UI"/>
+              </a:rPr>
+              <a:t>CONFIRMED only when TRUE ≠ FALSE, anchored to the baseline</a:t>
             </a:r>
           </a:p>
           <a:p>
             <a:pPr>
               <a:spcAft>
-                <a:spcPts val="1500"/>
+                <a:spcPts val="1200"/>
               </a:spcAft>
             </a:pPr>
             <a:r>
-              <a:rPr sz="1800" b="1">
-                <a:solidFill>
-                  <a:srgbClr val="2DD48F"/>
+              <a:rPr sz="1600" b="1">
+                <a:solidFill>
+                  <a:srgbClr val="22D3EE"/>
                 </a:solidFill>
                 <a:latin typeface="Segoe UI"/>
               </a:rPr>
               <a:t>»  </a:t>
             </a:r>
             <a:r>
-              <a:rPr sz="1800" b="0">
-                <a:solidFill>
-                  <a:srgbClr val="EAF2FF"/>
-                </a:solidFill>
-                <a:latin typeface="Segoe UI"/>
-              </a:rPr>
-              <a:t>Resource reachable as that principal (authz CONFIRMED)</a:t>
+              <a:rPr sz="1600" b="0">
+                <a:solidFill>
+                  <a:srgbClr val="C4D2E4"/>
+                </a:solidFill>
+                <a:latin typeface="Segoe UI"/>
+              </a:rPr>
+              <a:t>Real SQL toggles the boolean — nothing pattern-matches '1=1'</a:t>
             </a:r>
           </a:p>
           <a:p>
             <a:pPr>
               <a:spcAft>
-                <a:spcPts val="1500"/>
+                <a:spcPts val="1200"/>
               </a:spcAft>
             </a:pPr>
             <a:r>
-              <a:rPr sz="1800" b="1">
-                <a:solidFill>
-                  <a:srgbClr val="E84BFF"/>
+              <a:rPr sz="1600" b="1">
+                <a:solidFill>
+                  <a:srgbClr val="22D3EE"/>
                 </a:solidFill>
                 <a:latin typeface="Segoe UI"/>
               </a:rPr>
               <a:t>»  </a:t>
             </a:r>
             <a:r>
-              <a:rPr sz="1800" b="0">
+              <a:rPr sz="1600" b="0">
                 <a:solidFill>
                   <a:srgbClr val="C4D2E4"/>
                 </a:solidFill>
                 <a:latin typeface="Segoe UI"/>
               </a:rPr>
-              <a:t>Presented as co-occurring evidence under one session</a:t>
+              <a:t>A bound/parameterised filter collapses → DISPROVED, no finding</a:t>
             </a:r>
           </a:p>
           <a:p>
             <a:pPr>
               <a:spcAft>
-                <a:spcPts val="1500"/>
+                <a:spcPts val="1200"/>
               </a:spcAft>
             </a:pPr>
             <a:r>
-              <a:rPr sz="1800" b="1">
-                <a:solidFill>
-                  <a:srgbClr val="E84BFF"/>
+              <a:rPr sz="1600" b="1">
+                <a:solidFill>
+                  <a:srgbClr val="2DD48F"/>
                 </a:solidFill>
                 <a:latin typeface="Segoe UI"/>
               </a:rPr>
               <a:t>»  </a:t>
             </a:r>
             <a:r>
-              <a:rPr sz="1800" b="0">
-                <a:solidFill>
-                  <a:srgbClr val="C4D2E4"/>
-                </a:solidFill>
-                <a:latin typeface="Segoe UI"/>
-              </a:rPr>
-              <a:t>Full causal chaining stays the honestly-labeled frontier</a:t>
-            </a:r>
-          </a:p>
-        </p:txBody>
-      </p:sp>
-      <p:sp>
-        <p:nvSpPr>
-          <p:cNvPr id="9" name="TextBox 8"/>
+              <a:rPr sz="1600" b="0">
+                <a:solidFill>
+                  <a:srgbClr val="EAF2FF"/>
+                </a:solidFill>
+                <a:latin typeface="Segoe UI"/>
+              </a:rPr>
+              <a:t>Request-guard shield blocks the payload → re-proven</a:t>
+            </a:r>
+          </a:p>
+        </p:txBody>
+      </p:sp>
+      <p:sp>
+        <p:nvSpPr>
+          <p:cNvPr id="10" name="TextBox 9"/>
           <p:cNvSpPr txBox="1"/>
           <p:nvPr/>
         </p:nvSpPr>
@@ -10371,7 +10537,7 @@
       </p:sp>
       <p:sp>
         <p:nvSpPr>
-          <p:cNvPr id="10" name="TextBox 9"/>
+          <p:cNvPr id="11" name="TextBox 10"/>
           <p:cNvSpPr txBox="1"/>
           <p:nvPr/>
         </p:nvSpPr>
@@ -10399,7 +10565,7 @@
                 </a:solidFill>
                 <a:latin typeface="Consolas"/>
               </a:rPr>
-              <a:t>20 / 29</a:t>
+              <a:t>20 / 31</a:t>
             </a:r>
           </a:p>
         </p:txBody>
@@ -10551,7 +10717,7 @@
                 </a:solidFill>
                 <a:latin typeface="Consolas"/>
               </a:rPr>
-              <a:t>Target-Agnostic — Two Live Stacks</a:t>
+              <a:t>Login Tester — Authenticated Reasoning</a:t>
             </a:r>
           </a:p>
         </p:txBody>
@@ -10609,14 +10775,14 @@
                 </a:solidFill>
                 <a:latin typeface="Consolas"/>
               </a:rPr>
-              <a:t>Zero target-specific code</a:t>
+              <a:t>Turn anonymous scanning into authenticated proof</a:t>
             </a:r>
           </a:p>
         </p:txBody>
       </p:sp>
       <p:pic>
         <p:nvPicPr>
-          <p:cNvPr id="8" name="Picture 7" descr="shot_outcome.png"/>
+          <p:cNvPr id="8" name="Picture 7" descr="shot_login.png"/>
           <p:cNvPicPr>
             <a:picLocks noChangeAspect="1"/>
           </p:cNvPicPr>
@@ -10630,8 +10796,8 @@
         </p:blipFill>
         <p:spPr>
           <a:xfrm>
-            <a:off x="6400800" y="3317098"/>
-            <a:ext cx="5349240" cy="1824003"/>
+            <a:off x="7834238" y="2331720"/>
+            <a:ext cx="2482363" cy="3794760"/>
           </a:xfrm>
           <a:prstGeom prst="rect">
             <a:avLst/>
@@ -10681,7 +10847,7 @@
                 </a:solidFill>
                 <a:latin typeface="Segoe UI"/>
               </a:rPr>
-              <a:t>Proven on OWASP Juice Shop and VAmPI</a:t>
+              <a:t>Drives a real browser; you log in (MFA supported)</a:t>
             </a:r>
           </a:p>
           <a:p>
@@ -10706,7 +10872,7 @@
                 </a:solidFill>
                 <a:latin typeface="Segoe UI"/>
               </a:rPr>
-              <a:t>Same engine, same judges, different oracles</a:t>
+              <a:t>Auto-detects completion, captures the live session</a:t>
             </a:r>
           </a:p>
           <a:p>
@@ -10731,7 +10897,7 @@
                 </a:solidFill>
                 <a:latin typeface="Segoe UI"/>
               </a:rPr>
-              <a:t>Oracles are operator data, not engine logic</a:t>
+              <a:t>Runs authenticated authz + cookie analysis on it</a:t>
             </a:r>
           </a:p>
           <a:p>
@@ -10743,7 +10909,7 @@
             <a:r>
               <a:rPr sz="1600" b="1">
                 <a:solidFill>
-                  <a:srgbClr val="22D3EE"/>
+                  <a:srgbClr val="E84BFF"/>
                 </a:solidFill>
                 <a:latin typeface="Segoe UI"/>
               </a:rPr>
@@ -10756,7 +10922,7 @@
                 </a:solidFill>
                 <a:latin typeface="Segoe UI"/>
               </a:rPr>
-              <a:t>New target = new policy file, no code change</a:t>
+              <a:t>Credentials via getpass — never stored, never logged</a:t>
             </a:r>
           </a:p>
           <a:p>
@@ -10768,7 +10934,7 @@
             <a:r>
               <a:rPr sz="1600" b="1">
                 <a:solidFill>
-                  <a:srgbClr val="22D3EE"/>
+                  <a:srgbClr val="E84BFF"/>
                 </a:solidFill>
                 <a:latin typeface="Segoe UI"/>
               </a:rPr>
@@ -10781,7 +10947,7 @@
                 </a:solidFill>
                 <a:latin typeface="Segoe UI"/>
               </a:rPr>
-              <a:t>The research frontier is reported, never faked</a:t>
+              <a:t>In-memory for the run only, scope-bound to the host</a:t>
             </a:r>
           </a:p>
         </p:txBody>
@@ -10859,7 +11025,7 @@
                 </a:solidFill>
                 <a:latin typeface="Consolas"/>
               </a:rPr>
-              <a:t>21 / 29</a:t>
+              <a:t>21 / 31</a:t>
             </a:r>
           </a:p>
         </p:txBody>
@@ -11011,7 +11177,7 @@
                 </a:solidFill>
                 <a:latin typeface="Consolas"/>
               </a:rPr>
-              <a:t>Test Results &amp; Validation</a:t>
+              <a:t>Chaining — Ingredients, Honestly</a:t>
             </a:r>
           </a:p>
         </p:txBody>
@@ -11069,276 +11235,20 @@
                 </a:solidFill>
                 <a:latin typeface="Consolas"/>
               </a:rPr>
-              <a:t>Green, deterministic, and honest about the one skip</a:t>
-            </a:r>
-          </a:p>
-        </p:txBody>
-      </p:sp>
-      <p:sp>
-        <p:nvSpPr>
-          <p:cNvPr id="8" name="Rounded Rectangle 7"/>
-          <p:cNvSpPr/>
-          <p:nvPr/>
-        </p:nvSpPr>
-        <p:spPr>
-          <a:xfrm>
-            <a:off x="603504" y="2395728"/>
-            <a:ext cx="2503170" cy="1143000"/>
-          </a:xfrm>
-          <a:prstGeom prst="roundRect">
-            <a:avLst/>
-          </a:prstGeom>
-          <a:noFill/>
-          <a:ln w="12700">
-            <a:solidFill>
-              <a:srgbClr val="22D3EE"/>
-            </a:solidFill>
-          </a:ln>
-        </p:spPr>
-        <p:style>
-          <a:lnRef idx="1">
-            <a:schemeClr val="accent1"/>
-          </a:lnRef>
-          <a:fillRef idx="3">
-            <a:schemeClr val="accent1"/>
-          </a:fillRef>
-          <a:effectRef idx="2">
-            <a:schemeClr val="accent1"/>
-          </a:effectRef>
-          <a:fontRef idx="minor">
-            <a:schemeClr val="lt1"/>
-          </a:fontRef>
-        </p:style>
-        <p:txBody>
-          <a:bodyPr rtlCol="0" anchor="ctr"/>
-          <a:lstStyle/>
-          <a:p>
-            <a:pPr algn="ctr"/>
-            <a:r>
-              <a:rPr sz="3200" b="1">
-                <a:solidFill>
-                  <a:srgbClr val="22D3EE"/>
-                </a:solidFill>
-                <a:latin typeface="Consolas"/>
-              </a:rPr>
-              <a:t>67</a:t>
-            </a:r>
-          </a:p>
-          <a:p>
-            <a:pPr algn="ctr"/>
-            <a:r>
-              <a:rPr sz="1100" b="0">
-                <a:solidFill>
-                  <a:srgbClr val="6B7A90"/>
-                </a:solidFill>
-                <a:latin typeface="Consolas"/>
-              </a:rPr>
-              <a:t>TESTS</a:t>
-            </a:r>
-          </a:p>
-        </p:txBody>
-      </p:sp>
-      <p:sp>
-        <p:nvSpPr>
-          <p:cNvPr id="9" name="Rounded Rectangle 8"/>
-          <p:cNvSpPr/>
-          <p:nvPr/>
-        </p:nvSpPr>
-        <p:spPr>
-          <a:xfrm>
-            <a:off x="3426714" y="2395728"/>
-            <a:ext cx="2503170" cy="1143000"/>
-          </a:xfrm>
-          <a:prstGeom prst="roundRect">
-            <a:avLst/>
-          </a:prstGeom>
-          <a:noFill/>
-          <a:ln w="12700">
-            <a:solidFill>
-              <a:srgbClr val="22D3EE"/>
-            </a:solidFill>
-          </a:ln>
-        </p:spPr>
-        <p:style>
-          <a:lnRef idx="1">
-            <a:schemeClr val="accent1"/>
-          </a:lnRef>
-          <a:fillRef idx="3">
-            <a:schemeClr val="accent1"/>
-          </a:fillRef>
-          <a:effectRef idx="2">
-            <a:schemeClr val="accent1"/>
-          </a:effectRef>
-          <a:fontRef idx="minor">
-            <a:schemeClr val="lt1"/>
-          </a:fontRef>
-        </p:style>
-        <p:txBody>
-          <a:bodyPr rtlCol="0" anchor="ctr"/>
-          <a:lstStyle/>
-          <a:p>
-            <a:pPr algn="ctr"/>
-            <a:r>
-              <a:rPr sz="3200" b="1">
-                <a:solidFill>
-                  <a:srgbClr val="22D3EE"/>
-                </a:solidFill>
-                <a:latin typeface="Consolas"/>
-              </a:rPr>
-              <a:t>66</a:t>
-            </a:r>
-          </a:p>
-          <a:p>
-            <a:pPr algn="ctr"/>
-            <a:r>
-              <a:rPr sz="1100" b="0">
-                <a:solidFill>
-                  <a:srgbClr val="6B7A90"/>
-                </a:solidFill>
-                <a:latin typeface="Consolas"/>
-              </a:rPr>
-              <a:t>PASSING</a:t>
-            </a:r>
-          </a:p>
-        </p:txBody>
-      </p:sp>
-      <p:sp>
-        <p:nvSpPr>
-          <p:cNvPr id="10" name="Rounded Rectangle 9"/>
-          <p:cNvSpPr/>
-          <p:nvPr/>
-        </p:nvSpPr>
-        <p:spPr>
-          <a:xfrm>
-            <a:off x="6249924" y="2395728"/>
-            <a:ext cx="2503170" cy="1143000"/>
-          </a:xfrm>
-          <a:prstGeom prst="roundRect">
-            <a:avLst/>
-          </a:prstGeom>
-          <a:noFill/>
-          <a:ln w="12700">
-            <a:solidFill>
-              <a:srgbClr val="22D3EE"/>
-            </a:solidFill>
-          </a:ln>
-        </p:spPr>
-        <p:style>
-          <a:lnRef idx="1">
-            <a:schemeClr val="accent1"/>
-          </a:lnRef>
-          <a:fillRef idx="3">
-            <a:schemeClr val="accent1"/>
-          </a:fillRef>
-          <a:effectRef idx="2">
-            <a:schemeClr val="accent1"/>
-          </a:effectRef>
-          <a:fontRef idx="minor">
-            <a:schemeClr val="lt1"/>
-          </a:fontRef>
-        </p:style>
-        <p:txBody>
-          <a:bodyPr rtlCol="0" anchor="ctr"/>
-          <a:lstStyle/>
-          <a:p>
-            <a:pPr algn="ctr"/>
-            <a:r>
-              <a:rPr sz="3200" b="1">
-                <a:solidFill>
-                  <a:srgbClr val="22D3EE"/>
-                </a:solidFill>
-                <a:latin typeface="Consolas"/>
-              </a:rPr>
-              <a:t>3</a:t>
-            </a:r>
-          </a:p>
-          <a:p>
-            <a:pPr algn="ctr"/>
-            <a:r>
-              <a:rPr sz="1100" b="0">
-                <a:solidFill>
-                  <a:srgbClr val="6B7A90"/>
-                </a:solidFill>
-                <a:latin typeface="Consolas"/>
-              </a:rPr>
-              <a:t>VULN CLASSES</a:t>
-            </a:r>
-          </a:p>
-        </p:txBody>
-      </p:sp>
-      <p:sp>
-        <p:nvSpPr>
-          <p:cNvPr id="11" name="Rounded Rectangle 10"/>
-          <p:cNvSpPr/>
-          <p:nvPr/>
-        </p:nvSpPr>
-        <p:spPr>
-          <a:xfrm>
-            <a:off x="9073134" y="2395728"/>
-            <a:ext cx="2503170" cy="1143000"/>
-          </a:xfrm>
-          <a:prstGeom prst="roundRect">
-            <a:avLst/>
-          </a:prstGeom>
-          <a:noFill/>
-          <a:ln w="12700">
-            <a:solidFill>
-              <a:srgbClr val="22D3EE"/>
-            </a:solidFill>
-          </a:ln>
-        </p:spPr>
-        <p:style>
-          <a:lnRef idx="1">
-            <a:schemeClr val="accent1"/>
-          </a:lnRef>
-          <a:fillRef idx="3">
-            <a:schemeClr val="accent1"/>
-          </a:fillRef>
-          <a:effectRef idx="2">
-            <a:schemeClr val="accent1"/>
-          </a:effectRef>
-          <a:fontRef idx="minor">
-            <a:schemeClr val="lt1"/>
-          </a:fontRef>
-        </p:style>
-        <p:txBody>
-          <a:bodyPr rtlCol="0" anchor="ctr"/>
-          <a:lstStyle/>
-          <a:p>
-            <a:pPr algn="ctr"/>
-            <a:r>
-              <a:rPr sz="3200" b="1">
-                <a:solidFill>
-                  <a:srgbClr val="22D3EE"/>
-                </a:solidFill>
-                <a:latin typeface="Consolas"/>
-              </a:rPr>
-              <a:t>2</a:t>
-            </a:r>
-          </a:p>
-          <a:p>
-            <a:pPr algn="ctr"/>
-            <a:r>
-              <a:rPr sz="1100" b="0">
-                <a:solidFill>
-                  <a:srgbClr val="6B7A90"/>
-                </a:solidFill>
-                <a:latin typeface="Consolas"/>
-              </a:rPr>
-              <a:t>LIVE STACKS</a:t>
-            </a:r>
-          </a:p>
-        </p:txBody>
-      </p:sp>
-      <p:sp>
-        <p:nvSpPr>
-          <p:cNvPr id="12" name="TextBox 11"/>
+              <a:t>We prove the pieces; we don't fabricate the story</a:t>
+            </a:r>
+          </a:p>
+        </p:txBody>
+      </p:sp>
+      <p:sp>
+        <p:nvSpPr>
+          <p:cNvPr id="8" name="TextBox 7"/>
           <p:cNvSpPr txBox="1"/>
           <p:nvPr/>
         </p:nvSpPr>
         <p:spPr>
           <a:xfrm>
-            <a:off x="713232" y="3840480"/>
+            <a:off x="713232" y="2697480"/>
             <a:ext cx="10789920" cy="3840480"/>
           </a:xfrm>
           <a:prstGeom prst="rect">
@@ -11354,11 +11264,11 @@
           <a:p>
             <a:pPr>
               <a:spcAft>
-                <a:spcPts val="1000"/>
+                <a:spcPts val="1500"/>
               </a:spcAft>
             </a:pPr>
             <a:r>
-              <a:rPr sz="1700" b="1">
+              <a:rPr sz="1800" b="1">
                 <a:solidFill>
                   <a:srgbClr val="2DD48F"/>
                 </a:solidFill>
@@ -11367,23 +11277,23 @@
               <a:t>»  </a:t>
             </a:r>
             <a:r>
-              <a:rPr sz="1700" b="0">
+              <a:rPr sz="1800" b="0">
                 <a:solidFill>
                   <a:srgbClr val="EAF2FF"/>
                 </a:solidFill>
                 <a:latin typeface="Segoe UI"/>
               </a:rPr>
-              <a:t>66 passing, 1 skipped (the opt-in live-browser path)</a:t>
+              <a:t>Session captured (real cookies + bearer)</a:t>
             </a:r>
           </a:p>
           <a:p>
             <a:pPr>
               <a:spcAft>
-                <a:spcPts val="1000"/>
+                <a:spcPts val="1500"/>
               </a:spcAft>
             </a:pPr>
             <a:r>
-              <a:rPr sz="1700" b="1">
+              <a:rPr sz="1800" b="1">
                 <a:solidFill>
                   <a:srgbClr val="2DD48F"/>
                 </a:solidFill>
@@ -11392,23 +11302,23 @@
               <a:t>»  </a:t>
             </a:r>
             <a:r>
-              <a:rPr sz="1700" b="0">
+              <a:rPr sz="1800" b="0">
                 <a:solidFill>
                   <a:srgbClr val="EAF2FF"/>
                 </a:solidFill>
                 <a:latin typeface="Segoe UI"/>
               </a:rPr>
-              <a:t>Full offline suite is network-free and runs in seconds</a:t>
+              <a:t>Session cookie proven insecure (insecure_cookie CONFIRMED)</a:t>
             </a:r>
           </a:p>
           <a:p>
             <a:pPr>
               <a:spcAft>
-                <a:spcPts val="1000"/>
+                <a:spcPts val="1500"/>
               </a:spcAft>
             </a:pPr>
             <a:r>
-              <a:rPr sz="1700" b="1">
+              <a:rPr sz="1800" b="1">
                 <a:solidFill>
                   <a:srgbClr val="2DD48F"/>
                 </a:solidFill>
@@ -11417,70 +11327,70 @@
               <a:t>»  </a:t>
             </a:r>
             <a:r>
-              <a:rPr sz="1700" b="0">
+              <a:rPr sz="1800" b="0">
                 <a:solidFill>
                   <a:srgbClr val="EAF2FF"/>
                 </a:solidFill>
                 <a:latin typeface="Segoe UI"/>
               </a:rPr>
-              <a:t>Each class: parse → CONFIRM → PATCH → PROVE, plus isolation</a:t>
+              <a:t>Resource reachable as that principal (authz CONFIRMED)</a:t>
             </a:r>
           </a:p>
           <a:p>
             <a:pPr>
               <a:spcAft>
-                <a:spcPts val="1000"/>
+                <a:spcPts val="1500"/>
               </a:spcAft>
             </a:pPr>
             <a:r>
-              <a:rPr sz="1700" b="1">
-                <a:solidFill>
-                  <a:srgbClr val="2DD48F"/>
+              <a:rPr sz="1800" b="1">
+                <a:solidFill>
+                  <a:srgbClr val="E84BFF"/>
                 </a:solidFill>
                 <a:latin typeface="Segoe UI"/>
               </a:rPr>
               <a:t>»  </a:t>
             </a:r>
             <a:r>
-              <a:rPr sz="1700" b="0">
-                <a:solidFill>
-                  <a:srgbClr val="EAF2FF"/>
-                </a:solidFill>
-                <a:latin typeface="Segoe UI"/>
-              </a:rPr>
-              <a:t>Live E2E validated on Juice Shop and VAmPI over real sockets</a:t>
+              <a:rPr sz="1800" b="0">
+                <a:solidFill>
+                  <a:srgbClr val="C4D2E4"/>
+                </a:solidFill>
+                <a:latin typeface="Segoe UI"/>
+              </a:rPr>
+              <a:t>Presented as co-occurring evidence under one session</a:t>
             </a:r>
           </a:p>
           <a:p>
             <a:pPr>
               <a:spcAft>
-                <a:spcPts val="1000"/>
+                <a:spcPts val="1500"/>
               </a:spcAft>
             </a:pPr>
             <a:r>
-              <a:rPr sz="1700" b="1">
-                <a:solidFill>
-                  <a:srgbClr val="22D3EE"/>
+              <a:rPr sz="1800" b="1">
+                <a:solidFill>
+                  <a:srgbClr val="E84BFF"/>
                 </a:solidFill>
                 <a:latin typeface="Segoe UI"/>
               </a:rPr>
               <a:t>»  </a:t>
             </a:r>
             <a:r>
-              <a:rPr sz="1700" b="0">
+              <a:rPr sz="1800" b="0">
                 <a:solidFill>
                   <a:srgbClr val="C4D2E4"/>
                 </a:solidFill>
                 <a:latin typeface="Segoe UI"/>
               </a:rPr>
-              <a:t>Compliant-control tests assert the honest 'no finding' path</a:t>
-            </a:r>
-          </a:p>
-        </p:txBody>
-      </p:sp>
-      <p:sp>
-        <p:nvSpPr>
-          <p:cNvPr id="13" name="TextBox 12"/>
+              <a:t>Full causal chaining stays the honestly-labeled frontier</a:t>
+            </a:r>
+          </a:p>
+        </p:txBody>
+      </p:sp>
+      <p:sp>
+        <p:nvSpPr>
+          <p:cNvPr id="9" name="TextBox 8"/>
           <p:cNvSpPr txBox="1"/>
           <p:nvPr/>
         </p:nvSpPr>
@@ -11523,7 +11433,7 @@
       </p:sp>
       <p:sp>
         <p:nvSpPr>
-          <p:cNvPr id="14" name="TextBox 13"/>
+          <p:cNvPr id="10" name="TextBox 9"/>
           <p:cNvSpPr txBox="1"/>
           <p:nvPr/>
         </p:nvSpPr>
@@ -11551,7 +11461,7 @@
                 </a:solidFill>
                 <a:latin typeface="Consolas"/>
               </a:rPr>
-              <a:t>22 / 29</a:t>
+              <a:t>22 / 31</a:t>
             </a:r>
           </a:p>
         </p:txBody>
@@ -11703,7 +11613,7 @@
                 </a:solidFill>
                 <a:latin typeface="Consolas"/>
               </a:rPr>
-              <a:t>Lightweight &amp; Local</a:t>
+              <a:t>Target-Agnostic — Two Live Stacks</a:t>
             </a:r>
           </a:p>
         </p:txBody>
@@ -11761,21 +11671,45 @@
                 </a:solidFill>
                 <a:latin typeface="Consolas"/>
               </a:rPr>
-              <a:t>Runs on a laptop; nothing leaves the box</a:t>
-            </a:r>
-          </a:p>
-        </p:txBody>
-      </p:sp>
-      <p:sp>
-        <p:nvSpPr>
-          <p:cNvPr id="8" name="TextBox 7"/>
+              <a:t>Zero target-specific code</a:t>
+            </a:r>
+          </a:p>
+        </p:txBody>
+      </p:sp>
+      <p:pic>
+        <p:nvPicPr>
+          <p:cNvPr id="8" name="Picture 7" descr="shot_outcome.png"/>
+          <p:cNvPicPr>
+            <a:picLocks noChangeAspect="1"/>
+          </p:cNvPicPr>
+          <p:nvPr/>
+        </p:nvPicPr>
+        <p:blipFill>
+          <a:blip r:embed="rId5"/>
+          <a:stretch>
+            <a:fillRect/>
+          </a:stretch>
+        </p:blipFill>
+        <p:spPr>
+          <a:xfrm>
+            <a:off x="6400800" y="3317098"/>
+            <a:ext cx="5349240" cy="1824003"/>
+          </a:xfrm>
+          <a:prstGeom prst="rect">
+            <a:avLst/>
+          </a:prstGeom>
+        </p:spPr>
+      </p:pic>
+      <p:sp>
+        <p:nvSpPr>
+          <p:cNvPr id="9" name="TextBox 8"/>
           <p:cNvSpPr txBox="1"/>
           <p:nvPr/>
         </p:nvSpPr>
         <p:spPr>
           <a:xfrm>
-            <a:off x="713232" y="2697480"/>
-            <a:ext cx="10789920" cy="3840480"/>
+            <a:off x="713232" y="2487168"/>
+            <a:ext cx="5440680" cy="3840480"/>
           </a:xfrm>
           <a:prstGeom prst="rect">
             <a:avLst/>
@@ -11790,11 +11724,11 @@
           <a:p>
             <a:pPr>
               <a:spcAft>
-                <a:spcPts val="1500"/>
+                <a:spcPts val="1200"/>
               </a:spcAft>
             </a:pPr>
             <a:r>
-              <a:rPr sz="1800" b="1">
+              <a:rPr sz="1600" b="1">
                 <a:solidFill>
                   <a:srgbClr val="22D3EE"/>
                 </a:solidFill>
@@ -11803,23 +11737,23 @@
               <a:t>»  </a:t>
             </a:r>
             <a:r>
-              <a:rPr sz="1800" b="0">
+              <a:rPr sz="1600" b="0">
                 <a:solidFill>
                   <a:srgbClr val="C4D2E4"/>
                 </a:solidFill>
                 <a:latin typeface="Segoe UI"/>
               </a:rPr>
-              <a:t>Local model via Ollama (qwen3:4b) — no cloud dependency</a:t>
+              <a:t>Proven on OWASP Juice Shop and VAmPI</a:t>
             </a:r>
           </a:p>
           <a:p>
             <a:pPr>
               <a:spcAft>
-                <a:spcPts val="1500"/>
+                <a:spcPts val="1200"/>
               </a:spcAft>
             </a:pPr>
             <a:r>
-              <a:rPr sz="1800" b="1">
+              <a:rPr sz="1600" b="1">
                 <a:solidFill>
                   <a:srgbClr val="22D3EE"/>
                 </a:solidFill>
@@ -11828,23 +11762,23 @@
               <a:t>»  </a:t>
             </a:r>
             <a:r>
-              <a:rPr sz="1800" b="0">
+              <a:rPr sz="1600" b="0">
                 <a:solidFill>
                   <a:srgbClr val="C4D2E4"/>
                 </a:solidFill>
                 <a:latin typeface="Segoe UI"/>
               </a:rPr>
-              <a:t>Core install is lightweight; Playwright is an opt-in extra</a:t>
+              <a:t>Same engine, same judges, different oracles</a:t>
             </a:r>
           </a:p>
           <a:p>
             <a:pPr>
               <a:spcAft>
-                <a:spcPts val="1500"/>
+                <a:spcPts val="1200"/>
               </a:spcAft>
             </a:pPr>
             <a:r>
-              <a:rPr sz="1800" b="1">
+              <a:rPr sz="1600" b="1">
                 <a:solidFill>
                   <a:srgbClr val="22D3EE"/>
                 </a:solidFill>
@@ -11853,23 +11787,23 @@
               <a:t>»  </a:t>
             </a:r>
             <a:r>
-              <a:rPr sz="1800" b="0">
+              <a:rPr sz="1600" b="0">
                 <a:solidFill>
                   <a:srgbClr val="C4D2E4"/>
                 </a:solidFill>
                 <a:latin typeface="Segoe UI"/>
               </a:rPr>
-              <a:t>No customer data or target traffic egresses anywhere</a:t>
+              <a:t>Oracles are operator data, not engine logic</a:t>
             </a:r>
           </a:p>
           <a:p>
             <a:pPr>
               <a:spcAft>
-                <a:spcPts val="1500"/>
+                <a:spcPts val="1200"/>
               </a:spcAft>
             </a:pPr>
             <a:r>
-              <a:rPr sz="1800" b="1">
+              <a:rPr sz="1600" b="1">
                 <a:solidFill>
                   <a:srgbClr val="22D3EE"/>
                 </a:solidFill>
@@ -11878,23 +11812,23 @@
               <a:t>»  </a:t>
             </a:r>
             <a:r>
-              <a:rPr sz="1800" b="0">
+              <a:rPr sz="1600" b="0">
                 <a:solidFill>
                   <a:srgbClr val="C4D2E4"/>
                 </a:solidFill>
                 <a:latin typeface="Segoe UI"/>
               </a:rPr>
-              <a:t>Deterministic core runs even with the model offline</a:t>
+              <a:t>New target = new policy file, no code change</a:t>
             </a:r>
           </a:p>
           <a:p>
             <a:pPr>
               <a:spcAft>
-                <a:spcPts val="1500"/>
+                <a:spcPts val="1200"/>
               </a:spcAft>
             </a:pPr>
             <a:r>
-              <a:rPr sz="1800" b="1">
+              <a:rPr sz="1600" b="1">
                 <a:solidFill>
                   <a:srgbClr val="22D3EE"/>
                 </a:solidFill>
@@ -11903,20 +11837,20 @@
               <a:t>»  </a:t>
             </a:r>
             <a:r>
-              <a:rPr sz="1800" b="0">
+              <a:rPr sz="1600" b="0">
                 <a:solidFill>
                   <a:srgbClr val="C4D2E4"/>
                 </a:solidFill>
                 <a:latin typeface="Segoe UI"/>
               </a:rPr>
-              <a:t>Deploys air-gapped — ideal for regulated environments</a:t>
-            </a:r>
-          </a:p>
-        </p:txBody>
-      </p:sp>
-      <p:sp>
-        <p:nvSpPr>
-          <p:cNvPr id="9" name="TextBox 8"/>
+              <a:t>The research frontier is reported, never faked</a:t>
+            </a:r>
+          </a:p>
+        </p:txBody>
+      </p:sp>
+      <p:sp>
+        <p:nvSpPr>
+          <p:cNvPr id="10" name="TextBox 9"/>
           <p:cNvSpPr txBox="1"/>
           <p:nvPr/>
         </p:nvSpPr>
@@ -11959,7 +11893,7 @@
       </p:sp>
       <p:sp>
         <p:nvSpPr>
-          <p:cNvPr id="10" name="TextBox 9"/>
+          <p:cNvPr id="11" name="TextBox 10"/>
           <p:cNvSpPr txBox="1"/>
           <p:nvPr/>
         </p:nvSpPr>
@@ -11987,7 +11921,7 @@
                 </a:solidFill>
                 <a:latin typeface="Consolas"/>
               </a:rPr>
-              <a:t>23 / 29</a:t>
+              <a:t>23 / 31</a:t>
             </a:r>
           </a:p>
         </p:txBody>
@@ -12139,7 +12073,7 @@
                 </a:solidFill>
                 <a:latin typeface="Consolas"/>
               </a:rPr>
-              <a:t>Safety &amp; Bounded Autonomy</a:t>
+              <a:t>Test Results &amp; Validation</a:t>
             </a:r>
           </a:p>
         </p:txBody>
@@ -12197,20 +12131,276 @@
                 </a:solidFill>
                 <a:latin typeface="Consolas"/>
               </a:rPr>
-              <a:t>Safe by construction</a:t>
-            </a:r>
-          </a:p>
-        </p:txBody>
-      </p:sp>
-      <p:sp>
-        <p:nvSpPr>
-          <p:cNvPr id="8" name="TextBox 7"/>
+              <a:t>Green, deterministic, and honest about the one skip</a:t>
+            </a:r>
+          </a:p>
+        </p:txBody>
+      </p:sp>
+      <p:sp>
+        <p:nvSpPr>
+          <p:cNvPr id="8" name="Rounded Rectangle 7"/>
+          <p:cNvSpPr/>
+          <p:nvPr/>
+        </p:nvSpPr>
+        <p:spPr>
+          <a:xfrm>
+            <a:off x="603504" y="2395728"/>
+            <a:ext cx="2503170" cy="1143000"/>
+          </a:xfrm>
+          <a:prstGeom prst="roundRect">
+            <a:avLst/>
+          </a:prstGeom>
+          <a:noFill/>
+          <a:ln w="12700">
+            <a:solidFill>
+              <a:srgbClr val="22D3EE"/>
+            </a:solidFill>
+          </a:ln>
+        </p:spPr>
+        <p:style>
+          <a:lnRef idx="1">
+            <a:schemeClr val="accent1"/>
+          </a:lnRef>
+          <a:fillRef idx="3">
+            <a:schemeClr val="accent1"/>
+          </a:fillRef>
+          <a:effectRef idx="2">
+            <a:schemeClr val="accent1"/>
+          </a:effectRef>
+          <a:fontRef idx="minor">
+            <a:schemeClr val="lt1"/>
+          </a:fontRef>
+        </p:style>
+        <p:txBody>
+          <a:bodyPr rtlCol="0" anchor="ctr"/>
+          <a:lstStyle/>
+          <a:p>
+            <a:pPr algn="ctr"/>
+            <a:r>
+              <a:rPr sz="3200" b="1">
+                <a:solidFill>
+                  <a:srgbClr val="22D3EE"/>
+                </a:solidFill>
+                <a:latin typeface="Consolas"/>
+              </a:rPr>
+              <a:t>123</a:t>
+            </a:r>
+          </a:p>
+          <a:p>
+            <a:pPr algn="ctr"/>
+            <a:r>
+              <a:rPr sz="1100" b="0">
+                <a:solidFill>
+                  <a:srgbClr val="6B7A90"/>
+                </a:solidFill>
+                <a:latin typeface="Consolas"/>
+              </a:rPr>
+              <a:t>TESTS</a:t>
+            </a:r>
+          </a:p>
+        </p:txBody>
+      </p:sp>
+      <p:sp>
+        <p:nvSpPr>
+          <p:cNvPr id="9" name="Rounded Rectangle 8"/>
+          <p:cNvSpPr/>
+          <p:nvPr/>
+        </p:nvSpPr>
+        <p:spPr>
+          <a:xfrm>
+            <a:off x="3426714" y="2395728"/>
+            <a:ext cx="2503170" cy="1143000"/>
+          </a:xfrm>
+          <a:prstGeom prst="roundRect">
+            <a:avLst/>
+          </a:prstGeom>
+          <a:noFill/>
+          <a:ln w="12700">
+            <a:solidFill>
+              <a:srgbClr val="22D3EE"/>
+            </a:solidFill>
+          </a:ln>
+        </p:spPr>
+        <p:style>
+          <a:lnRef idx="1">
+            <a:schemeClr val="accent1"/>
+          </a:lnRef>
+          <a:fillRef idx="3">
+            <a:schemeClr val="accent1"/>
+          </a:fillRef>
+          <a:effectRef idx="2">
+            <a:schemeClr val="accent1"/>
+          </a:effectRef>
+          <a:fontRef idx="minor">
+            <a:schemeClr val="lt1"/>
+          </a:fontRef>
+        </p:style>
+        <p:txBody>
+          <a:bodyPr rtlCol="0" anchor="ctr"/>
+          <a:lstStyle/>
+          <a:p>
+            <a:pPr algn="ctr"/>
+            <a:r>
+              <a:rPr sz="3200" b="1">
+                <a:solidFill>
+                  <a:srgbClr val="22D3EE"/>
+                </a:solidFill>
+                <a:latin typeface="Consolas"/>
+              </a:rPr>
+              <a:t>122</a:t>
+            </a:r>
+          </a:p>
+          <a:p>
+            <a:pPr algn="ctr"/>
+            <a:r>
+              <a:rPr sz="1100" b="0">
+                <a:solidFill>
+                  <a:srgbClr val="6B7A90"/>
+                </a:solidFill>
+                <a:latin typeface="Consolas"/>
+              </a:rPr>
+              <a:t>PASSING</a:t>
+            </a:r>
+          </a:p>
+        </p:txBody>
+      </p:sp>
+      <p:sp>
+        <p:nvSpPr>
+          <p:cNvPr id="10" name="Rounded Rectangle 9"/>
+          <p:cNvSpPr/>
+          <p:nvPr/>
+        </p:nvSpPr>
+        <p:spPr>
+          <a:xfrm>
+            <a:off x="6249924" y="2395728"/>
+            <a:ext cx="2503170" cy="1143000"/>
+          </a:xfrm>
+          <a:prstGeom prst="roundRect">
+            <a:avLst/>
+          </a:prstGeom>
+          <a:noFill/>
+          <a:ln w="12700">
+            <a:solidFill>
+              <a:srgbClr val="22D3EE"/>
+            </a:solidFill>
+          </a:ln>
+        </p:spPr>
+        <p:style>
+          <a:lnRef idx="1">
+            <a:schemeClr val="accent1"/>
+          </a:lnRef>
+          <a:fillRef idx="3">
+            <a:schemeClr val="accent1"/>
+          </a:fillRef>
+          <a:effectRef idx="2">
+            <a:schemeClr val="accent1"/>
+          </a:effectRef>
+          <a:fontRef idx="minor">
+            <a:schemeClr val="lt1"/>
+          </a:fontRef>
+        </p:style>
+        <p:txBody>
+          <a:bodyPr rtlCol="0" anchor="ctr"/>
+          <a:lstStyle/>
+          <a:p>
+            <a:pPr algn="ctr"/>
+            <a:r>
+              <a:rPr sz="3200" b="1">
+                <a:solidFill>
+                  <a:srgbClr val="22D3EE"/>
+                </a:solidFill>
+                <a:latin typeface="Consolas"/>
+              </a:rPr>
+              <a:t>5</a:t>
+            </a:r>
+          </a:p>
+          <a:p>
+            <a:pPr algn="ctr"/>
+            <a:r>
+              <a:rPr sz="1100" b="0">
+                <a:solidFill>
+                  <a:srgbClr val="6B7A90"/>
+                </a:solidFill>
+                <a:latin typeface="Consolas"/>
+              </a:rPr>
+              <a:t>VULN CLASSES</a:t>
+            </a:r>
+          </a:p>
+        </p:txBody>
+      </p:sp>
+      <p:sp>
+        <p:nvSpPr>
+          <p:cNvPr id="11" name="Rounded Rectangle 10"/>
+          <p:cNvSpPr/>
+          <p:nvPr/>
+        </p:nvSpPr>
+        <p:spPr>
+          <a:xfrm>
+            <a:off x="9073134" y="2395728"/>
+            <a:ext cx="2503170" cy="1143000"/>
+          </a:xfrm>
+          <a:prstGeom prst="roundRect">
+            <a:avLst/>
+          </a:prstGeom>
+          <a:noFill/>
+          <a:ln w="12700">
+            <a:solidFill>
+              <a:srgbClr val="22D3EE"/>
+            </a:solidFill>
+          </a:ln>
+        </p:spPr>
+        <p:style>
+          <a:lnRef idx="1">
+            <a:schemeClr val="accent1"/>
+          </a:lnRef>
+          <a:fillRef idx="3">
+            <a:schemeClr val="accent1"/>
+          </a:fillRef>
+          <a:effectRef idx="2">
+            <a:schemeClr val="accent1"/>
+          </a:effectRef>
+          <a:fontRef idx="minor">
+            <a:schemeClr val="lt1"/>
+          </a:fontRef>
+        </p:style>
+        <p:txBody>
+          <a:bodyPr rtlCol="0" anchor="ctr"/>
+          <a:lstStyle/>
+          <a:p>
+            <a:pPr algn="ctr"/>
+            <a:r>
+              <a:rPr sz="3200" b="1">
+                <a:solidFill>
+                  <a:srgbClr val="22D3EE"/>
+                </a:solidFill>
+                <a:latin typeface="Consolas"/>
+              </a:rPr>
+              <a:t>2</a:t>
+            </a:r>
+          </a:p>
+          <a:p>
+            <a:pPr algn="ctr"/>
+            <a:r>
+              <a:rPr sz="1100" b="0">
+                <a:solidFill>
+                  <a:srgbClr val="6B7A90"/>
+                </a:solidFill>
+                <a:latin typeface="Consolas"/>
+              </a:rPr>
+              <a:t>LIVE STACKS</a:t>
+            </a:r>
+          </a:p>
+        </p:txBody>
+      </p:sp>
+      <p:sp>
+        <p:nvSpPr>
+          <p:cNvPr id="12" name="TextBox 11"/>
           <p:cNvSpPr txBox="1"/>
           <p:nvPr/>
         </p:nvSpPr>
         <p:spPr>
           <a:xfrm>
-            <a:off x="713232" y="2697480"/>
+            <a:off x="713232" y="3840480"/>
             <a:ext cx="10789920" cy="3840480"/>
           </a:xfrm>
           <a:prstGeom prst="rect">
@@ -12226,11 +12416,11 @@
           <a:p>
             <a:pPr>
               <a:spcAft>
-                <a:spcPts val="1500"/>
+                <a:spcPts val="1000"/>
               </a:spcAft>
             </a:pPr>
             <a:r>
-              <a:rPr sz="1800" b="1">
+              <a:rPr sz="1700" b="1">
                 <a:solidFill>
                   <a:srgbClr val="2DD48F"/>
                 </a:solidFill>
@@ -12239,23 +12429,23 @@
               <a:t>»  </a:t>
             </a:r>
             <a:r>
-              <a:rPr sz="1800" b="0">
+              <a:rPr sz="1700" b="0">
                 <a:solidFill>
                   <a:srgbClr val="EAF2FF"/>
                 </a:solidFill>
                 <a:latin typeface="Segoe UI"/>
               </a:rPr>
-              <a:t>Pre-connection scope guard — out-of-scope probes refused</a:t>
+              <a:t>122 passing, 1 skipped (the opt-in live-browser path)</a:t>
             </a:r>
           </a:p>
           <a:p>
             <a:pPr>
               <a:spcAft>
-                <a:spcPts val="1500"/>
+                <a:spcPts val="1000"/>
               </a:spcAft>
             </a:pPr>
             <a:r>
-              <a:rPr sz="1800" b="1">
+              <a:rPr sz="1700" b="1">
                 <a:solidFill>
                   <a:srgbClr val="2DD48F"/>
                 </a:solidFill>
@@ -12264,23 +12454,23 @@
               <a:t>»  </a:t>
             </a:r>
             <a:r>
-              <a:rPr sz="1800" b="0">
+              <a:rPr sz="1700" b="0">
                 <a:solidFill>
                   <a:srgbClr val="EAF2FF"/>
                 </a:solidFill>
                 <a:latin typeface="Segoe UI"/>
               </a:rPr>
-              <a:t>Probes are local, bounded, and non-destructive</a:t>
+              <a:t>Full offline suite is network-free and runs in seconds</a:t>
             </a:r>
           </a:p>
           <a:p>
             <a:pPr>
               <a:spcAft>
-                <a:spcPts val="1500"/>
+                <a:spcPts val="1000"/>
               </a:spcAft>
             </a:pPr>
             <a:r>
-              <a:rPr sz="1800" b="1">
+              <a:rPr sz="1700" b="1">
                 <a:solidFill>
                   <a:srgbClr val="2DD48F"/>
                 </a:solidFill>
@@ -12289,23 +12479,23 @@
               <a:t>»  </a:t>
             </a:r>
             <a:r>
-              <a:rPr sz="1800" b="0">
+              <a:rPr sz="1700" b="0">
                 <a:solidFill>
                   <a:srgbClr val="EAF2FF"/>
                 </a:solidFill>
                 <a:latin typeface="Segoe UI"/>
               </a:rPr>
-              <a:t>The enforcer shield is ephemeral and loopback-only (SSRF-safe)</a:t>
+              <a:t>Each class: parse → CONFIRM → PATCH → PROVE, plus isolation</a:t>
             </a:r>
           </a:p>
           <a:p>
             <a:pPr>
               <a:spcAft>
-                <a:spcPts val="1500"/>
+                <a:spcPts val="1000"/>
               </a:spcAft>
             </a:pPr>
             <a:r>
-              <a:rPr sz="1800" b="1">
+              <a:rPr sz="1700" b="1">
                 <a:solidFill>
                   <a:srgbClr val="2DD48F"/>
                 </a:solidFill>
@@ -12314,45 +12504,45 @@
               <a:t>»  </a:t>
             </a:r>
             <a:r>
-              <a:rPr sz="1800" b="0">
+              <a:rPr sz="1700" b="0">
                 <a:solidFill>
                   <a:srgbClr val="EAF2FF"/>
                 </a:solidFill>
                 <a:latin typeface="Segoe UI"/>
               </a:rPr>
-              <a:t>Nothing both acts and judges — stages are separated</a:t>
+              <a:t>Live E2E validated on Juice Shop and VAmPI over real sockets</a:t>
             </a:r>
           </a:p>
           <a:p>
             <a:pPr>
               <a:spcAft>
-                <a:spcPts val="1500"/>
+                <a:spcPts val="1000"/>
               </a:spcAft>
             </a:pPr>
             <a:r>
-              <a:rPr sz="1800" b="1">
-                <a:solidFill>
-                  <a:srgbClr val="E84BFF"/>
+              <a:rPr sz="1700" b="1">
+                <a:solidFill>
+                  <a:srgbClr val="22D3EE"/>
                 </a:solidFill>
                 <a:latin typeface="Segoe UI"/>
               </a:rPr>
               <a:t>»  </a:t>
             </a:r>
             <a:r>
-              <a:rPr sz="1800" b="0">
+              <a:rPr sz="1700" b="0">
                 <a:solidFill>
                   <a:srgbClr val="C4D2E4"/>
                 </a:solidFill>
                 <a:latin typeface="Segoe UI"/>
               </a:rPr>
-              <a:t>Credentials never persisted or logged; in-memory per run</a:t>
-            </a:r>
-          </a:p>
-        </p:txBody>
-      </p:sp>
-      <p:sp>
-        <p:nvSpPr>
-          <p:cNvPr id="9" name="TextBox 8"/>
+              <a:t>Compliant-control tests assert the honest 'no finding' path</a:t>
+            </a:r>
+          </a:p>
+        </p:txBody>
+      </p:sp>
+      <p:sp>
+        <p:nvSpPr>
+          <p:cNvPr id="13" name="TextBox 12"/>
           <p:cNvSpPr txBox="1"/>
           <p:nvPr/>
         </p:nvSpPr>
@@ -12395,7 +12585,7 @@
       </p:sp>
       <p:sp>
         <p:nvSpPr>
-          <p:cNvPr id="10" name="TextBox 9"/>
+          <p:cNvPr id="14" name="TextBox 13"/>
           <p:cNvSpPr txBox="1"/>
           <p:nvPr/>
         </p:nvSpPr>
@@ -12423,7 +12613,7 @@
                 </a:solidFill>
                 <a:latin typeface="Consolas"/>
               </a:rPr>
-              <a:t>24 / 29</a:t>
+              <a:t>24 / 31</a:t>
             </a:r>
           </a:p>
         </p:txBody>
@@ -12575,7 +12765,7 @@
                 </a:solidFill>
                 <a:latin typeface="Consolas"/>
               </a:rPr>
-              <a:t>Market Landscape</a:t>
+              <a:t>Lightweight &amp; Local</a:t>
             </a:r>
           </a:p>
         </p:txBody>
@@ -12633,7 +12823,7 @@
                 </a:solidFill>
                 <a:latin typeface="Consolas"/>
               </a:rPr>
-              <a:t>Where autonomous, provable reasoning fits</a:t>
+              <a:t>Runs on a laptop; nothing leaves the box</a:t>
             </a:r>
           </a:p>
         </p:txBody>
@@ -12646,1103 +12836,8 @@
         </p:nvSpPr>
         <p:spPr>
           <a:xfrm>
-            <a:off x="6537960" y="2395728"/>
-            <a:ext cx="1691640" cy="640080"/>
-          </a:xfrm>
-          <a:prstGeom prst="rect">
-            <a:avLst/>
-          </a:prstGeom>
-          <a:noFill/>
-        </p:spPr>
-        <p:txBody>
-          <a:bodyPr wrap="square" anchor="b" lIns="0" rIns="0" tIns="0" bIns="0">
-            <a:spAutoFit/>
-          </a:bodyPr>
-          <a:lstStyle/>
-          <a:p>
-            <a:pPr algn="ctr"/>
-            <a:r>
-              <a:rPr sz="1200" b="1">
-                <a:solidFill>
-                  <a:srgbClr val="EAF2FF"/>
-                </a:solidFill>
-                <a:latin typeface="Consolas"/>
-              </a:rPr>
-              <a:t>Signature</a:t>
-            </a:r>
-          </a:p>
-          <a:p>
-            <a:pPr algn="ctr"/>
-            <a:r>
-              <a:rPr sz="1200" b="1">
-                <a:solidFill>
-                  <a:srgbClr val="EAF2FF"/>
-                </a:solidFill>
-                <a:latin typeface="Consolas"/>
-              </a:rPr>
-              <a:t>scanners</a:t>
-            </a:r>
-          </a:p>
-        </p:txBody>
-      </p:sp>
-      <p:sp>
-        <p:nvSpPr>
-          <p:cNvPr id="9" name="TextBox 8"/>
-          <p:cNvSpPr txBox="1"/>
-          <p:nvPr/>
-        </p:nvSpPr>
-        <p:spPr>
-          <a:xfrm>
-            <a:off x="8229600" y="2395728"/>
-            <a:ext cx="1691640" cy="640080"/>
-          </a:xfrm>
-          <a:prstGeom prst="rect">
-            <a:avLst/>
-          </a:prstGeom>
-          <a:noFill/>
-        </p:spPr>
-        <p:txBody>
-          <a:bodyPr wrap="square" anchor="b" lIns="0" rIns="0" tIns="0" bIns="0">
-            <a:spAutoFit/>
-          </a:bodyPr>
-          <a:lstStyle/>
-          <a:p>
-            <a:pPr algn="ctr"/>
-            <a:r>
-              <a:rPr sz="1200" b="1">
-                <a:solidFill>
-                  <a:srgbClr val="EAF2FF"/>
-                </a:solidFill>
-                <a:latin typeface="Consolas"/>
-              </a:rPr>
-              <a:t>DAST /</a:t>
-            </a:r>
-          </a:p>
-          <a:p>
-            <a:pPr algn="ctr"/>
-            <a:r>
-              <a:rPr sz="1200" b="1">
-                <a:solidFill>
-                  <a:srgbClr val="EAF2FF"/>
-                </a:solidFill>
-                <a:latin typeface="Consolas"/>
-              </a:rPr>
-              <a:t>fuzzers</a:t>
-            </a:r>
-          </a:p>
-        </p:txBody>
-      </p:sp>
-      <p:sp>
-        <p:nvSpPr>
-          <p:cNvPr id="10" name="TextBox 9"/>
-          <p:cNvSpPr txBox="1"/>
-          <p:nvPr/>
-        </p:nvSpPr>
-        <p:spPr>
-          <a:xfrm>
-            <a:off x="9921240" y="2395728"/>
-            <a:ext cx="1691640" cy="640080"/>
-          </a:xfrm>
-          <a:prstGeom prst="rect">
-            <a:avLst/>
-          </a:prstGeom>
-          <a:noFill/>
-        </p:spPr>
-        <p:txBody>
-          <a:bodyPr wrap="square" anchor="b" lIns="0" rIns="0" tIns="0" bIns="0">
-            <a:spAutoFit/>
-          </a:bodyPr>
-          <a:lstStyle/>
-          <a:p>
-            <a:pPr algn="ctr"/>
-            <a:r>
-              <a:rPr sz="1200" b="1">
-                <a:solidFill>
-                  <a:srgbClr val="EAF2FF"/>
-                </a:solidFill>
-                <a:latin typeface="Consolas"/>
-              </a:rPr>
-              <a:t>Sentinel</a:t>
-            </a:r>
-          </a:p>
-        </p:txBody>
-      </p:sp>
-      <p:sp>
-        <p:nvSpPr>
-          <p:cNvPr id="11" name="Rectangle 10"/>
-          <p:cNvSpPr/>
-          <p:nvPr/>
-        </p:nvSpPr>
-        <p:spPr>
-          <a:xfrm>
-            <a:off x="548640" y="3108960"/>
-            <a:ext cx="11064240" cy="475488"/>
-          </a:xfrm>
-          <a:prstGeom prst="rect">
-            <a:avLst/>
-          </a:prstGeom>
-          <a:solidFill>
-            <a:srgbClr val="101724"/>
-          </a:solidFill>
-          <a:ln>
-            <a:noFill/>
-          </a:ln>
-          <a:effectLst/>
-        </p:spPr>
-        <p:style>
-          <a:lnRef idx="1">
-            <a:schemeClr val="accent1"/>
-          </a:lnRef>
-          <a:fillRef idx="3">
-            <a:schemeClr val="accent1"/>
-          </a:fillRef>
-          <a:effectRef idx="2">
-            <a:schemeClr val="accent1"/>
-          </a:effectRef>
-          <a:fontRef idx="minor">
-            <a:schemeClr val="lt1"/>
-          </a:fontRef>
-        </p:style>
-        <p:txBody>
-          <a:bodyPr rtlCol="0" anchor="ctr"/>
-          <a:lstStyle/>
-          <a:p>
-            <a:pPr algn="ctr"/>
-          </a:p>
-        </p:txBody>
-      </p:sp>
-      <p:sp>
-        <p:nvSpPr>
-          <p:cNvPr id="12" name="TextBox 11"/>
-          <p:cNvSpPr txBox="1"/>
-          <p:nvPr/>
-        </p:nvSpPr>
-        <p:spPr>
-          <a:xfrm>
-            <a:off x="658368" y="3108960"/>
-            <a:ext cx="5669280" cy="475488"/>
-          </a:xfrm>
-          <a:prstGeom prst="rect">
-            <a:avLst/>
-          </a:prstGeom>
-          <a:noFill/>
-        </p:spPr>
-        <p:txBody>
-          <a:bodyPr wrap="square" anchor="ctr" lIns="0" rIns="0" tIns="0" bIns="0">
-            <a:spAutoFit/>
-          </a:bodyPr>
-          <a:lstStyle/>
-          <a:p>
-            <a:r>
-              <a:rPr sz="1400" b="0">
-                <a:solidFill>
-                  <a:srgbClr val="C4D2E4"/>
-                </a:solidFill>
-                <a:latin typeface="Segoe UI"/>
-              </a:rPr>
-              <a:t>Finds authorization / BOLA flaws</a:t>
-            </a:r>
-          </a:p>
-        </p:txBody>
-      </p:sp>
-      <p:sp>
-        <p:nvSpPr>
-          <p:cNvPr id="13" name="TextBox 12"/>
-          <p:cNvSpPr txBox="1"/>
-          <p:nvPr/>
-        </p:nvSpPr>
-        <p:spPr>
-          <a:xfrm>
-            <a:off x="6537960" y="3108960"/>
-            <a:ext cx="1691640" cy="475488"/>
-          </a:xfrm>
-          <a:prstGeom prst="rect">
-            <a:avLst/>
-          </a:prstGeom>
-          <a:noFill/>
-        </p:spPr>
-        <p:txBody>
-          <a:bodyPr wrap="square" anchor="ctr" lIns="0" rIns="0" tIns="0" bIns="0">
-            <a:spAutoFit/>
-          </a:bodyPr>
-          <a:lstStyle/>
-          <a:p>
-            <a:pPr algn="ctr"/>
-            <a:r>
-              <a:rPr sz="1800" b="1">
-                <a:solidFill>
-                  <a:srgbClr val="FF5C6E"/>
-                </a:solidFill>
-                <a:latin typeface="Segoe UI Symbol"/>
-              </a:rPr>
-              <a:t>✗</a:t>
-            </a:r>
-          </a:p>
-        </p:txBody>
-      </p:sp>
-      <p:sp>
-        <p:nvSpPr>
-          <p:cNvPr id="14" name="TextBox 13"/>
-          <p:cNvSpPr txBox="1"/>
-          <p:nvPr/>
-        </p:nvSpPr>
-        <p:spPr>
-          <a:xfrm>
-            <a:off x="8229600" y="3108960"/>
-            <a:ext cx="1691640" cy="475488"/>
-          </a:xfrm>
-          <a:prstGeom prst="rect">
-            <a:avLst/>
-          </a:prstGeom>
-          <a:noFill/>
-        </p:spPr>
-        <p:txBody>
-          <a:bodyPr wrap="square" anchor="ctr" lIns="0" rIns="0" tIns="0" bIns="0">
-            <a:spAutoFit/>
-          </a:bodyPr>
-          <a:lstStyle/>
-          <a:p>
-            <a:pPr algn="ctr"/>
-            <a:r>
-              <a:rPr sz="1800" b="1">
-                <a:solidFill>
-                  <a:srgbClr val="F5B301"/>
-                </a:solidFill>
-                <a:latin typeface="Segoe UI Symbol"/>
-              </a:rPr>
-              <a:t>~</a:t>
-            </a:r>
-          </a:p>
-        </p:txBody>
-      </p:sp>
-      <p:sp>
-        <p:nvSpPr>
-          <p:cNvPr id="15" name="TextBox 14"/>
-          <p:cNvSpPr txBox="1"/>
-          <p:nvPr/>
-        </p:nvSpPr>
-        <p:spPr>
-          <a:xfrm>
-            <a:off x="9921240" y="3108960"/>
-            <a:ext cx="1691640" cy="475488"/>
-          </a:xfrm>
-          <a:prstGeom prst="rect">
-            <a:avLst/>
-          </a:prstGeom>
-          <a:noFill/>
-        </p:spPr>
-        <p:txBody>
-          <a:bodyPr wrap="square" anchor="ctr" lIns="0" rIns="0" tIns="0" bIns="0">
-            <a:spAutoFit/>
-          </a:bodyPr>
-          <a:lstStyle/>
-          <a:p>
-            <a:pPr algn="ctr"/>
-            <a:r>
-              <a:rPr sz="1800" b="1">
-                <a:solidFill>
-                  <a:srgbClr val="2DD48F"/>
-                </a:solidFill>
-                <a:latin typeface="Segoe UI Symbol"/>
-              </a:rPr>
-              <a:t>✓</a:t>
-            </a:r>
-          </a:p>
-        </p:txBody>
-      </p:sp>
-      <p:sp>
-        <p:nvSpPr>
-          <p:cNvPr id="16" name="TextBox 15"/>
-          <p:cNvSpPr txBox="1"/>
-          <p:nvPr/>
-        </p:nvSpPr>
-        <p:spPr>
-          <a:xfrm>
-            <a:off x="658368" y="3584448"/>
-            <a:ext cx="5669280" cy="475488"/>
-          </a:xfrm>
-          <a:prstGeom prst="rect">
-            <a:avLst/>
-          </a:prstGeom>
-          <a:noFill/>
-        </p:spPr>
-        <p:txBody>
-          <a:bodyPr wrap="square" anchor="ctr" lIns="0" rIns="0" tIns="0" bIns="0">
-            <a:spAutoFit/>
-          </a:bodyPr>
-          <a:lstStyle/>
-          <a:p>
-            <a:r>
-              <a:rPr sz="1400" b="0">
-                <a:solidFill>
-                  <a:srgbClr val="C4D2E4"/>
-                </a:solidFill>
-                <a:latin typeface="Segoe UI"/>
-              </a:rPr>
-              <a:t>Verdict is a reproduced contradiction</a:t>
-            </a:r>
-          </a:p>
-        </p:txBody>
-      </p:sp>
-      <p:sp>
-        <p:nvSpPr>
-          <p:cNvPr id="17" name="TextBox 16"/>
-          <p:cNvSpPr txBox="1"/>
-          <p:nvPr/>
-        </p:nvSpPr>
-        <p:spPr>
-          <a:xfrm>
-            <a:off x="6537960" y="3584448"/>
-            <a:ext cx="1691640" cy="475488"/>
-          </a:xfrm>
-          <a:prstGeom prst="rect">
-            <a:avLst/>
-          </a:prstGeom>
-          <a:noFill/>
-        </p:spPr>
-        <p:txBody>
-          <a:bodyPr wrap="square" anchor="ctr" lIns="0" rIns="0" tIns="0" bIns="0">
-            <a:spAutoFit/>
-          </a:bodyPr>
-          <a:lstStyle/>
-          <a:p>
-            <a:pPr algn="ctr"/>
-            <a:r>
-              <a:rPr sz="1800" b="1">
-                <a:solidFill>
-                  <a:srgbClr val="FF5C6E"/>
-                </a:solidFill>
-                <a:latin typeface="Segoe UI Symbol"/>
-              </a:rPr>
-              <a:t>✗</a:t>
-            </a:r>
-          </a:p>
-        </p:txBody>
-      </p:sp>
-      <p:sp>
-        <p:nvSpPr>
-          <p:cNvPr id="18" name="TextBox 17"/>
-          <p:cNvSpPr txBox="1"/>
-          <p:nvPr/>
-        </p:nvSpPr>
-        <p:spPr>
-          <a:xfrm>
-            <a:off x="8229600" y="3584448"/>
-            <a:ext cx="1691640" cy="475488"/>
-          </a:xfrm>
-          <a:prstGeom prst="rect">
-            <a:avLst/>
-          </a:prstGeom>
-          <a:noFill/>
-        </p:spPr>
-        <p:txBody>
-          <a:bodyPr wrap="square" anchor="ctr" lIns="0" rIns="0" tIns="0" bIns="0">
-            <a:spAutoFit/>
-          </a:bodyPr>
-          <a:lstStyle/>
-          <a:p>
-            <a:pPr algn="ctr"/>
-            <a:r>
-              <a:rPr sz="1800" b="1">
-                <a:solidFill>
-                  <a:srgbClr val="FF5C6E"/>
-                </a:solidFill>
-                <a:latin typeface="Segoe UI Symbol"/>
-              </a:rPr>
-              <a:t>✗</a:t>
-            </a:r>
-          </a:p>
-        </p:txBody>
-      </p:sp>
-      <p:sp>
-        <p:nvSpPr>
-          <p:cNvPr id="19" name="TextBox 18"/>
-          <p:cNvSpPr txBox="1"/>
-          <p:nvPr/>
-        </p:nvSpPr>
-        <p:spPr>
-          <a:xfrm>
-            <a:off x="9921240" y="3584448"/>
-            <a:ext cx="1691640" cy="475488"/>
-          </a:xfrm>
-          <a:prstGeom prst="rect">
-            <a:avLst/>
-          </a:prstGeom>
-          <a:noFill/>
-        </p:spPr>
-        <p:txBody>
-          <a:bodyPr wrap="square" anchor="ctr" lIns="0" rIns="0" tIns="0" bIns="0">
-            <a:spAutoFit/>
-          </a:bodyPr>
-          <a:lstStyle/>
-          <a:p>
-            <a:pPr algn="ctr"/>
-            <a:r>
-              <a:rPr sz="1800" b="1">
-                <a:solidFill>
-                  <a:srgbClr val="2DD48F"/>
-                </a:solidFill>
-                <a:latin typeface="Segoe UI Symbol"/>
-              </a:rPr>
-              <a:t>✓</a:t>
-            </a:r>
-          </a:p>
-        </p:txBody>
-      </p:sp>
-      <p:sp>
-        <p:nvSpPr>
-          <p:cNvPr id="20" name="Rectangle 19"/>
-          <p:cNvSpPr/>
-          <p:nvPr/>
-        </p:nvSpPr>
-        <p:spPr>
-          <a:xfrm>
-            <a:off x="548640" y="4059936"/>
-            <a:ext cx="11064240" cy="475488"/>
-          </a:xfrm>
-          <a:prstGeom prst="rect">
-            <a:avLst/>
-          </a:prstGeom>
-          <a:solidFill>
-            <a:srgbClr val="101724"/>
-          </a:solidFill>
-          <a:ln>
-            <a:noFill/>
-          </a:ln>
-          <a:effectLst/>
-        </p:spPr>
-        <p:style>
-          <a:lnRef idx="1">
-            <a:schemeClr val="accent1"/>
-          </a:lnRef>
-          <a:fillRef idx="3">
-            <a:schemeClr val="accent1"/>
-          </a:fillRef>
-          <a:effectRef idx="2">
-            <a:schemeClr val="accent1"/>
-          </a:effectRef>
-          <a:fontRef idx="minor">
-            <a:schemeClr val="lt1"/>
-          </a:fontRef>
-        </p:style>
-        <p:txBody>
-          <a:bodyPr rtlCol="0" anchor="ctr"/>
-          <a:lstStyle/>
-          <a:p>
-            <a:pPr algn="ctr"/>
-          </a:p>
-        </p:txBody>
-      </p:sp>
-      <p:sp>
-        <p:nvSpPr>
-          <p:cNvPr id="21" name="TextBox 20"/>
-          <p:cNvSpPr txBox="1"/>
-          <p:nvPr/>
-        </p:nvSpPr>
-        <p:spPr>
-          <a:xfrm>
-            <a:off x="658368" y="4059936"/>
-            <a:ext cx="5669280" cy="475488"/>
-          </a:xfrm>
-          <a:prstGeom prst="rect">
-            <a:avLst/>
-          </a:prstGeom>
-          <a:noFill/>
-        </p:spPr>
-        <p:txBody>
-          <a:bodyPr wrap="square" anchor="ctr" lIns="0" rIns="0" tIns="0" bIns="0">
-            <a:spAutoFit/>
-          </a:bodyPr>
-          <a:lstStyle/>
-          <a:p>
-            <a:r>
-              <a:rPr sz="1400" b="0">
-                <a:solidFill>
-                  <a:srgbClr val="C4D2E4"/>
-                </a:solidFill>
-                <a:latin typeface="Segoe UI"/>
-              </a:rPr>
-              <a:t>Proves the fix, live</a:t>
-            </a:r>
-          </a:p>
-        </p:txBody>
-      </p:sp>
-      <p:sp>
-        <p:nvSpPr>
-          <p:cNvPr id="22" name="TextBox 21"/>
-          <p:cNvSpPr txBox="1"/>
-          <p:nvPr/>
-        </p:nvSpPr>
-        <p:spPr>
-          <a:xfrm>
-            <a:off x="6537960" y="4059936"/>
-            <a:ext cx="1691640" cy="475488"/>
-          </a:xfrm>
-          <a:prstGeom prst="rect">
-            <a:avLst/>
-          </a:prstGeom>
-          <a:noFill/>
-        </p:spPr>
-        <p:txBody>
-          <a:bodyPr wrap="square" anchor="ctr" lIns="0" rIns="0" tIns="0" bIns="0">
-            <a:spAutoFit/>
-          </a:bodyPr>
-          <a:lstStyle/>
-          <a:p>
-            <a:pPr algn="ctr"/>
-            <a:r>
-              <a:rPr sz="1800" b="1">
-                <a:solidFill>
-                  <a:srgbClr val="FF5C6E"/>
-                </a:solidFill>
-                <a:latin typeface="Segoe UI Symbol"/>
-              </a:rPr>
-              <a:t>✗</a:t>
-            </a:r>
-          </a:p>
-        </p:txBody>
-      </p:sp>
-      <p:sp>
-        <p:nvSpPr>
-          <p:cNvPr id="23" name="TextBox 22"/>
-          <p:cNvSpPr txBox="1"/>
-          <p:nvPr/>
-        </p:nvSpPr>
-        <p:spPr>
-          <a:xfrm>
-            <a:off x="8229600" y="4059936"/>
-            <a:ext cx="1691640" cy="475488"/>
-          </a:xfrm>
-          <a:prstGeom prst="rect">
-            <a:avLst/>
-          </a:prstGeom>
-          <a:noFill/>
-        </p:spPr>
-        <p:txBody>
-          <a:bodyPr wrap="square" anchor="ctr" lIns="0" rIns="0" tIns="0" bIns="0">
-            <a:spAutoFit/>
-          </a:bodyPr>
-          <a:lstStyle/>
-          <a:p>
-            <a:pPr algn="ctr"/>
-            <a:r>
-              <a:rPr sz="1800" b="1">
-                <a:solidFill>
-                  <a:srgbClr val="FF5C6E"/>
-                </a:solidFill>
-                <a:latin typeface="Segoe UI Symbol"/>
-              </a:rPr>
-              <a:t>✗</a:t>
-            </a:r>
-          </a:p>
-        </p:txBody>
-      </p:sp>
-      <p:sp>
-        <p:nvSpPr>
-          <p:cNvPr id="24" name="TextBox 23"/>
-          <p:cNvSpPr txBox="1"/>
-          <p:nvPr/>
-        </p:nvSpPr>
-        <p:spPr>
-          <a:xfrm>
-            <a:off x="9921240" y="4059936"/>
-            <a:ext cx="1691640" cy="475488"/>
-          </a:xfrm>
-          <a:prstGeom prst="rect">
-            <a:avLst/>
-          </a:prstGeom>
-          <a:noFill/>
-        </p:spPr>
-        <p:txBody>
-          <a:bodyPr wrap="square" anchor="ctr" lIns="0" rIns="0" tIns="0" bIns="0">
-            <a:spAutoFit/>
-          </a:bodyPr>
-          <a:lstStyle/>
-          <a:p>
-            <a:pPr algn="ctr"/>
-            <a:r>
-              <a:rPr sz="1800" b="1">
-                <a:solidFill>
-                  <a:srgbClr val="2DD48F"/>
-                </a:solidFill>
-                <a:latin typeface="Segoe UI Symbol"/>
-              </a:rPr>
-              <a:t>✓</a:t>
-            </a:r>
-          </a:p>
-        </p:txBody>
-      </p:sp>
-      <p:sp>
-        <p:nvSpPr>
-          <p:cNvPr id="25" name="TextBox 24"/>
-          <p:cNvSpPr txBox="1"/>
-          <p:nvPr/>
-        </p:nvSpPr>
-        <p:spPr>
-          <a:xfrm>
-            <a:off x="658368" y="4535424"/>
-            <a:ext cx="5669280" cy="475488"/>
-          </a:xfrm>
-          <a:prstGeom prst="rect">
-            <a:avLst/>
-          </a:prstGeom>
-          <a:noFill/>
-        </p:spPr>
-        <p:txBody>
-          <a:bodyPr wrap="square" anchor="ctr" lIns="0" rIns="0" tIns="0" bIns="0">
-            <a:spAutoFit/>
-          </a:bodyPr>
-          <a:lstStyle/>
-          <a:p>
-            <a:r>
-              <a:rPr sz="1400" b="0">
-                <a:solidFill>
-                  <a:srgbClr val="C4D2E4"/>
-                </a:solidFill>
-                <a:latin typeface="Segoe UI"/>
-              </a:rPr>
-              <a:t>Autonomous, self-directed research</a:t>
-            </a:r>
-          </a:p>
-        </p:txBody>
-      </p:sp>
-      <p:sp>
-        <p:nvSpPr>
-          <p:cNvPr id="26" name="TextBox 25"/>
-          <p:cNvSpPr txBox="1"/>
-          <p:nvPr/>
-        </p:nvSpPr>
-        <p:spPr>
-          <a:xfrm>
-            <a:off x="6537960" y="4535424"/>
-            <a:ext cx="1691640" cy="475488"/>
-          </a:xfrm>
-          <a:prstGeom prst="rect">
-            <a:avLst/>
-          </a:prstGeom>
-          <a:noFill/>
-        </p:spPr>
-        <p:txBody>
-          <a:bodyPr wrap="square" anchor="ctr" lIns="0" rIns="0" tIns="0" bIns="0">
-            <a:spAutoFit/>
-          </a:bodyPr>
-          <a:lstStyle/>
-          <a:p>
-            <a:pPr algn="ctr"/>
-            <a:r>
-              <a:rPr sz="1800" b="1">
-                <a:solidFill>
-                  <a:srgbClr val="FF5C6E"/>
-                </a:solidFill>
-                <a:latin typeface="Segoe UI Symbol"/>
-              </a:rPr>
-              <a:t>✗</a:t>
-            </a:r>
-          </a:p>
-        </p:txBody>
-      </p:sp>
-      <p:sp>
-        <p:nvSpPr>
-          <p:cNvPr id="27" name="TextBox 26"/>
-          <p:cNvSpPr txBox="1"/>
-          <p:nvPr/>
-        </p:nvSpPr>
-        <p:spPr>
-          <a:xfrm>
-            <a:off x="8229600" y="4535424"/>
-            <a:ext cx="1691640" cy="475488"/>
-          </a:xfrm>
-          <a:prstGeom prst="rect">
-            <a:avLst/>
-          </a:prstGeom>
-          <a:noFill/>
-        </p:spPr>
-        <p:txBody>
-          <a:bodyPr wrap="square" anchor="ctr" lIns="0" rIns="0" tIns="0" bIns="0">
-            <a:spAutoFit/>
-          </a:bodyPr>
-          <a:lstStyle/>
-          <a:p>
-            <a:pPr algn="ctr"/>
-            <a:r>
-              <a:rPr sz="1800" b="1">
-                <a:solidFill>
-                  <a:srgbClr val="F5B301"/>
-                </a:solidFill>
-                <a:latin typeface="Segoe UI Symbol"/>
-              </a:rPr>
-              <a:t>~</a:t>
-            </a:r>
-          </a:p>
-        </p:txBody>
-      </p:sp>
-      <p:sp>
-        <p:nvSpPr>
-          <p:cNvPr id="28" name="TextBox 27"/>
-          <p:cNvSpPr txBox="1"/>
-          <p:nvPr/>
-        </p:nvSpPr>
-        <p:spPr>
-          <a:xfrm>
-            <a:off x="9921240" y="4535424"/>
-            <a:ext cx="1691640" cy="475488"/>
-          </a:xfrm>
-          <a:prstGeom prst="rect">
-            <a:avLst/>
-          </a:prstGeom>
-          <a:noFill/>
-        </p:spPr>
-        <p:txBody>
-          <a:bodyPr wrap="square" anchor="ctr" lIns="0" rIns="0" tIns="0" bIns="0">
-            <a:spAutoFit/>
-          </a:bodyPr>
-          <a:lstStyle/>
-          <a:p>
-            <a:pPr algn="ctr"/>
-            <a:r>
-              <a:rPr sz="1800" b="1">
-                <a:solidFill>
-                  <a:srgbClr val="2DD48F"/>
-                </a:solidFill>
-                <a:latin typeface="Segoe UI Symbol"/>
-              </a:rPr>
-              <a:t>✓</a:t>
-            </a:r>
-          </a:p>
-        </p:txBody>
-      </p:sp>
-      <p:sp>
-        <p:nvSpPr>
-          <p:cNvPr id="29" name="Rectangle 28"/>
-          <p:cNvSpPr/>
-          <p:nvPr/>
-        </p:nvSpPr>
-        <p:spPr>
-          <a:xfrm>
-            <a:off x="548640" y="5010912"/>
-            <a:ext cx="11064240" cy="475488"/>
-          </a:xfrm>
-          <a:prstGeom prst="rect">
-            <a:avLst/>
-          </a:prstGeom>
-          <a:solidFill>
-            <a:srgbClr val="101724"/>
-          </a:solidFill>
-          <a:ln>
-            <a:noFill/>
-          </a:ln>
-          <a:effectLst/>
-        </p:spPr>
-        <p:style>
-          <a:lnRef idx="1">
-            <a:schemeClr val="accent1"/>
-          </a:lnRef>
-          <a:fillRef idx="3">
-            <a:schemeClr val="accent1"/>
-          </a:fillRef>
-          <a:effectRef idx="2">
-            <a:schemeClr val="accent1"/>
-          </a:effectRef>
-          <a:fontRef idx="minor">
-            <a:schemeClr val="lt1"/>
-          </a:fontRef>
-        </p:style>
-        <p:txBody>
-          <a:bodyPr rtlCol="0" anchor="ctr"/>
-          <a:lstStyle/>
-          <a:p>
-            <a:pPr algn="ctr"/>
-          </a:p>
-        </p:txBody>
-      </p:sp>
-      <p:sp>
-        <p:nvSpPr>
-          <p:cNvPr id="30" name="TextBox 29"/>
-          <p:cNvSpPr txBox="1"/>
-          <p:nvPr/>
-        </p:nvSpPr>
-        <p:spPr>
-          <a:xfrm>
-            <a:off x="658368" y="5010912"/>
-            <a:ext cx="5669280" cy="475488"/>
-          </a:xfrm>
-          <a:prstGeom prst="rect">
-            <a:avLst/>
-          </a:prstGeom>
-          <a:noFill/>
-        </p:spPr>
-        <p:txBody>
-          <a:bodyPr wrap="square" anchor="ctr" lIns="0" rIns="0" tIns="0" bIns="0">
-            <a:spAutoFit/>
-          </a:bodyPr>
-          <a:lstStyle/>
-          <a:p>
-            <a:r>
-              <a:rPr sz="1400" b="0">
-                <a:solidFill>
-                  <a:srgbClr val="C4D2E4"/>
-                </a:solidFill>
-                <a:latin typeface="Segoe UI"/>
-              </a:rPr>
-              <a:t>Local-first, no data egress</a:t>
-            </a:r>
-          </a:p>
-        </p:txBody>
-      </p:sp>
-      <p:sp>
-        <p:nvSpPr>
-          <p:cNvPr id="31" name="TextBox 30"/>
-          <p:cNvSpPr txBox="1"/>
-          <p:nvPr/>
-        </p:nvSpPr>
-        <p:spPr>
-          <a:xfrm>
-            <a:off x="6537960" y="5010912"/>
-            <a:ext cx="1691640" cy="475488"/>
-          </a:xfrm>
-          <a:prstGeom prst="rect">
-            <a:avLst/>
-          </a:prstGeom>
-          <a:noFill/>
-        </p:spPr>
-        <p:txBody>
-          <a:bodyPr wrap="square" anchor="ctr" lIns="0" rIns="0" tIns="0" bIns="0">
-            <a:spAutoFit/>
-          </a:bodyPr>
-          <a:lstStyle/>
-          <a:p>
-            <a:pPr algn="ctr"/>
-            <a:r>
-              <a:rPr sz="1800" b="1">
-                <a:solidFill>
-                  <a:srgbClr val="F5B301"/>
-                </a:solidFill>
-                <a:latin typeface="Segoe UI Symbol"/>
-              </a:rPr>
-              <a:t>~</a:t>
-            </a:r>
-          </a:p>
-        </p:txBody>
-      </p:sp>
-      <p:sp>
-        <p:nvSpPr>
-          <p:cNvPr id="32" name="TextBox 31"/>
-          <p:cNvSpPr txBox="1"/>
-          <p:nvPr/>
-        </p:nvSpPr>
-        <p:spPr>
-          <a:xfrm>
-            <a:off x="8229600" y="5010912"/>
-            <a:ext cx="1691640" cy="475488"/>
-          </a:xfrm>
-          <a:prstGeom prst="rect">
-            <a:avLst/>
-          </a:prstGeom>
-          <a:noFill/>
-        </p:spPr>
-        <p:txBody>
-          <a:bodyPr wrap="square" anchor="ctr" lIns="0" rIns="0" tIns="0" bIns="0">
-            <a:spAutoFit/>
-          </a:bodyPr>
-          <a:lstStyle/>
-          <a:p>
-            <a:pPr algn="ctr"/>
-            <a:r>
-              <a:rPr sz="1800" b="1">
-                <a:solidFill>
-                  <a:srgbClr val="F5B301"/>
-                </a:solidFill>
-                <a:latin typeface="Segoe UI Symbol"/>
-              </a:rPr>
-              <a:t>~</a:t>
-            </a:r>
-          </a:p>
-        </p:txBody>
-      </p:sp>
-      <p:sp>
-        <p:nvSpPr>
-          <p:cNvPr id="33" name="TextBox 32"/>
-          <p:cNvSpPr txBox="1"/>
-          <p:nvPr/>
-        </p:nvSpPr>
-        <p:spPr>
-          <a:xfrm>
-            <a:off x="9921240" y="5010912"/>
-            <a:ext cx="1691640" cy="475488"/>
-          </a:xfrm>
-          <a:prstGeom prst="rect">
-            <a:avLst/>
-          </a:prstGeom>
-          <a:noFill/>
-        </p:spPr>
-        <p:txBody>
-          <a:bodyPr wrap="square" anchor="ctr" lIns="0" rIns="0" tIns="0" bIns="0">
-            <a:spAutoFit/>
-          </a:bodyPr>
-          <a:lstStyle/>
-          <a:p>
-            <a:pPr algn="ctr"/>
-            <a:r>
-              <a:rPr sz="1800" b="1">
-                <a:solidFill>
-                  <a:srgbClr val="2DD48F"/>
-                </a:solidFill>
-                <a:latin typeface="Segoe UI Symbol"/>
-              </a:rPr>
-              <a:t>✓</a:t>
-            </a:r>
-          </a:p>
-        </p:txBody>
-      </p:sp>
-      <p:sp>
-        <p:nvSpPr>
-          <p:cNvPr id="34" name="TextBox 33"/>
-          <p:cNvSpPr txBox="1"/>
-          <p:nvPr/>
-        </p:nvSpPr>
-        <p:spPr>
-          <a:xfrm>
-            <a:off x="658368" y="5486400"/>
-            <a:ext cx="5669280" cy="475488"/>
-          </a:xfrm>
-          <a:prstGeom prst="rect">
-            <a:avLst/>
-          </a:prstGeom>
-          <a:noFill/>
-        </p:spPr>
-        <p:txBody>
-          <a:bodyPr wrap="square" anchor="ctr" lIns="0" rIns="0" tIns="0" bIns="0">
-            <a:spAutoFit/>
-          </a:bodyPr>
-          <a:lstStyle/>
-          <a:p>
-            <a:r>
-              <a:rPr sz="1400" b="0">
-                <a:solidFill>
-                  <a:srgbClr val="C4D2E4"/>
-                </a:solidFill>
-                <a:latin typeface="Segoe UI"/>
-              </a:rPr>
-              <a:t>Every decision auditable</a:t>
-            </a:r>
-          </a:p>
-        </p:txBody>
-      </p:sp>
-      <p:sp>
-        <p:nvSpPr>
-          <p:cNvPr id="35" name="TextBox 34"/>
-          <p:cNvSpPr txBox="1"/>
-          <p:nvPr/>
-        </p:nvSpPr>
-        <p:spPr>
-          <a:xfrm>
-            <a:off x="6537960" y="5486400"/>
-            <a:ext cx="1691640" cy="475488"/>
-          </a:xfrm>
-          <a:prstGeom prst="rect">
-            <a:avLst/>
-          </a:prstGeom>
-          <a:noFill/>
-        </p:spPr>
-        <p:txBody>
-          <a:bodyPr wrap="square" anchor="ctr" lIns="0" rIns="0" tIns="0" bIns="0">
-            <a:spAutoFit/>
-          </a:bodyPr>
-          <a:lstStyle/>
-          <a:p>
-            <a:pPr algn="ctr"/>
-            <a:r>
-              <a:rPr sz="1800" b="1">
-                <a:solidFill>
-                  <a:srgbClr val="F5B301"/>
-                </a:solidFill>
-                <a:latin typeface="Segoe UI Symbol"/>
-              </a:rPr>
-              <a:t>~</a:t>
-            </a:r>
-          </a:p>
-        </p:txBody>
-      </p:sp>
-      <p:sp>
-        <p:nvSpPr>
-          <p:cNvPr id="36" name="TextBox 35"/>
-          <p:cNvSpPr txBox="1"/>
-          <p:nvPr/>
-        </p:nvSpPr>
-        <p:spPr>
-          <a:xfrm>
-            <a:off x="8229600" y="5486400"/>
-            <a:ext cx="1691640" cy="475488"/>
-          </a:xfrm>
-          <a:prstGeom prst="rect">
-            <a:avLst/>
-          </a:prstGeom>
-          <a:noFill/>
-        </p:spPr>
-        <p:txBody>
-          <a:bodyPr wrap="square" anchor="ctr" lIns="0" rIns="0" tIns="0" bIns="0">
-            <a:spAutoFit/>
-          </a:bodyPr>
-          <a:lstStyle/>
-          <a:p>
-            <a:pPr algn="ctr"/>
-            <a:r>
-              <a:rPr sz="1800" b="1">
-                <a:solidFill>
-                  <a:srgbClr val="FF5C6E"/>
-                </a:solidFill>
-                <a:latin typeface="Segoe UI Symbol"/>
-              </a:rPr>
-              <a:t>✗</a:t>
-            </a:r>
-          </a:p>
-        </p:txBody>
-      </p:sp>
-      <p:sp>
-        <p:nvSpPr>
-          <p:cNvPr id="37" name="TextBox 36"/>
-          <p:cNvSpPr txBox="1"/>
-          <p:nvPr/>
-        </p:nvSpPr>
-        <p:spPr>
-          <a:xfrm>
-            <a:off x="9921240" y="5486400"/>
-            <a:ext cx="1691640" cy="475488"/>
-          </a:xfrm>
-          <a:prstGeom prst="rect">
-            <a:avLst/>
-          </a:prstGeom>
-          <a:noFill/>
-        </p:spPr>
-        <p:txBody>
-          <a:bodyPr wrap="square" anchor="ctr" lIns="0" rIns="0" tIns="0" bIns="0">
-            <a:spAutoFit/>
-          </a:bodyPr>
-          <a:lstStyle/>
-          <a:p>
-            <a:pPr algn="ctr"/>
-            <a:r>
-              <a:rPr sz="1800" b="1">
-                <a:solidFill>
-                  <a:srgbClr val="2DD48F"/>
-                </a:solidFill>
-                <a:latin typeface="Segoe UI Symbol"/>
-              </a:rPr>
-              <a:t>✓</a:t>
-            </a:r>
-          </a:p>
-        </p:txBody>
-      </p:sp>
-      <p:sp>
-        <p:nvSpPr>
-          <p:cNvPr id="38" name="TextBox 37"/>
-          <p:cNvSpPr txBox="1"/>
-          <p:nvPr/>
-        </p:nvSpPr>
-        <p:spPr>
-          <a:xfrm>
-            <a:off x="566928" y="6382512"/>
-            <a:ext cx="8229600" cy="365760"/>
+            <a:off x="713232" y="2697480"/>
+            <a:ext cx="10789920" cy="3840480"/>
           </a:xfrm>
           <a:prstGeom prst="rect">
             <a:avLst/>
@@ -13755,37 +12850,142 @@
           </a:bodyPr>
           <a:lstStyle/>
           <a:p>
-            <a:r>
-              <a:rPr sz="1000" b="1">
+            <a:pPr>
+              <a:spcAft>
+                <a:spcPts val="1500"/>
+              </a:spcAft>
+            </a:pPr>
+            <a:r>
+              <a:rPr sz="1800" b="1">
                 <a:solidFill>
                   <a:srgbClr val="22D3EE"/>
                 </a:solidFill>
-                <a:latin typeface="Consolas"/>
-              </a:rPr>
-              <a:t>SENTINEL</a:t>
-            </a:r>
-            <a:r>
-              <a:rPr sz="1000" b="0">
-                <a:solidFill>
-                  <a:srgbClr val="6B7A90"/>
-                </a:solidFill>
-                <a:latin typeface="Consolas"/>
-              </a:rPr>
-              <a:t>   ·   find → reason → prove → patch → prove</a:t>
-            </a:r>
-          </a:p>
-        </p:txBody>
-      </p:sp>
-      <p:sp>
-        <p:nvSpPr>
-          <p:cNvPr id="39" name="TextBox 38"/>
+                <a:latin typeface="Segoe UI"/>
+              </a:rPr>
+              <a:t>»  </a:t>
+            </a:r>
+            <a:r>
+              <a:rPr sz="1800" b="0">
+                <a:solidFill>
+                  <a:srgbClr val="C4D2E4"/>
+                </a:solidFill>
+                <a:latin typeface="Segoe UI"/>
+              </a:rPr>
+              <a:t>Local model via Ollama (qwen3:4b) — no cloud dependency</a:t>
+            </a:r>
+          </a:p>
+          <a:p>
+            <a:pPr>
+              <a:spcAft>
+                <a:spcPts val="1500"/>
+              </a:spcAft>
+            </a:pPr>
+            <a:r>
+              <a:rPr sz="1800" b="1">
+                <a:solidFill>
+                  <a:srgbClr val="22D3EE"/>
+                </a:solidFill>
+                <a:latin typeface="Segoe UI"/>
+              </a:rPr>
+              <a:t>»  </a:t>
+            </a:r>
+            <a:r>
+              <a:rPr sz="1800" b="0">
+                <a:solidFill>
+                  <a:srgbClr val="C4D2E4"/>
+                </a:solidFill>
+                <a:latin typeface="Segoe UI"/>
+              </a:rPr>
+              <a:t>Core install is lightweight; Playwright is an opt-in extra</a:t>
+            </a:r>
+          </a:p>
+          <a:p>
+            <a:pPr>
+              <a:spcAft>
+                <a:spcPts val="1500"/>
+              </a:spcAft>
+            </a:pPr>
+            <a:r>
+              <a:rPr sz="1800" b="1">
+                <a:solidFill>
+                  <a:srgbClr val="22D3EE"/>
+                </a:solidFill>
+                <a:latin typeface="Segoe UI"/>
+              </a:rPr>
+              <a:t>»  </a:t>
+            </a:r>
+            <a:r>
+              <a:rPr sz="1800" b="0">
+                <a:solidFill>
+                  <a:srgbClr val="C4D2E4"/>
+                </a:solidFill>
+                <a:latin typeface="Segoe UI"/>
+              </a:rPr>
+              <a:t>No customer data or target traffic egresses anywhere</a:t>
+            </a:r>
+          </a:p>
+          <a:p>
+            <a:pPr>
+              <a:spcAft>
+                <a:spcPts val="1500"/>
+              </a:spcAft>
+            </a:pPr>
+            <a:r>
+              <a:rPr sz="1800" b="1">
+                <a:solidFill>
+                  <a:srgbClr val="22D3EE"/>
+                </a:solidFill>
+                <a:latin typeface="Segoe UI"/>
+              </a:rPr>
+              <a:t>»  </a:t>
+            </a:r>
+            <a:r>
+              <a:rPr sz="1800" b="0">
+                <a:solidFill>
+                  <a:srgbClr val="C4D2E4"/>
+                </a:solidFill>
+                <a:latin typeface="Segoe UI"/>
+              </a:rPr>
+              <a:t>Deterministic core runs even with the model offline</a:t>
+            </a:r>
+          </a:p>
+          <a:p>
+            <a:pPr>
+              <a:spcAft>
+                <a:spcPts val="1500"/>
+              </a:spcAft>
+            </a:pPr>
+            <a:r>
+              <a:rPr sz="1800" b="1">
+                <a:solidFill>
+                  <a:srgbClr val="22D3EE"/>
+                </a:solidFill>
+                <a:latin typeface="Segoe UI"/>
+              </a:rPr>
+              <a:t>»  </a:t>
+            </a:r>
+            <a:r>
+              <a:rPr sz="1800" b="0">
+                <a:solidFill>
+                  <a:srgbClr val="C4D2E4"/>
+                </a:solidFill>
+                <a:latin typeface="Segoe UI"/>
+              </a:rPr>
+              <a:t>Deploys air-gapped — ideal for regulated environments</a:t>
+            </a:r>
+          </a:p>
+        </p:txBody>
+      </p:sp>
+      <p:sp>
+        <p:nvSpPr>
+          <p:cNvPr id="9" name="TextBox 8"/>
           <p:cNvSpPr txBox="1"/>
           <p:nvPr/>
         </p:nvSpPr>
         <p:spPr>
           <a:xfrm>
-            <a:off x="10789920" y="6382512"/>
-            <a:ext cx="914400" cy="365760"/>
+            <a:off x="566928" y="6382512"/>
+            <a:ext cx="8229600" cy="365760"/>
           </a:xfrm>
           <a:prstGeom prst="rect">
             <a:avLst/>
@@ -13798,6 +12998,49 @@
           </a:bodyPr>
           <a:lstStyle/>
           <a:p>
+            <a:r>
+              <a:rPr sz="1000" b="1">
+                <a:solidFill>
+                  <a:srgbClr val="22D3EE"/>
+                </a:solidFill>
+                <a:latin typeface="Consolas"/>
+              </a:rPr>
+              <a:t>SENTINEL</a:t>
+            </a:r>
+            <a:r>
+              <a:rPr sz="1000" b="0">
+                <a:solidFill>
+                  <a:srgbClr val="6B7A90"/>
+                </a:solidFill>
+                <a:latin typeface="Consolas"/>
+              </a:rPr>
+              <a:t>   ·   find → reason → prove → patch → prove</a:t>
+            </a:r>
+          </a:p>
+        </p:txBody>
+      </p:sp>
+      <p:sp>
+        <p:nvSpPr>
+          <p:cNvPr id="10" name="TextBox 9"/>
+          <p:cNvSpPr txBox="1"/>
+          <p:nvPr/>
+        </p:nvSpPr>
+        <p:spPr>
+          <a:xfrm>
+            <a:off x="10789920" y="6382512"/>
+            <a:ext cx="914400" cy="365760"/>
+          </a:xfrm>
+          <a:prstGeom prst="rect">
+            <a:avLst/>
+          </a:prstGeom>
+          <a:noFill/>
+        </p:spPr>
+        <p:txBody>
+          <a:bodyPr wrap="square" anchor="t" lIns="0" rIns="0" tIns="0" bIns="0">
+            <a:spAutoFit/>
+          </a:bodyPr>
+          <a:lstStyle/>
+          <a:p>
             <a:pPr algn="r"/>
             <a:r>
               <a:rPr sz="1000" b="0">
@@ -13806,7 +13049,7 @@
                 </a:solidFill>
                 <a:latin typeface="Consolas"/>
               </a:rPr>
-              <a:t>25 / 29</a:t>
+              <a:t>25 / 31</a:t>
             </a:r>
           </a:p>
         </p:txBody>
@@ -13958,7 +13201,7 @@
                 </a:solidFill>
                 <a:latin typeface="Consolas"/>
               </a:rPr>
-              <a:t>Why Sentinel Wins</a:t>
+              <a:t>Safety &amp; Bounded Autonomy</a:t>
             </a:r>
           </a:p>
         </p:txBody>
@@ -14016,7 +13259,7 @@
                 </a:solidFill>
                 <a:latin typeface="Consolas"/>
               </a:rPr>
-              <a:t>The defensible core</a:t>
+              <a:t>Safe by construction</a:t>
             </a:r>
           </a:p>
         </p:txBody>
@@ -14051,7 +13294,7 @@
             <a:r>
               <a:rPr sz="1800" b="1">
                 <a:solidFill>
-                  <a:srgbClr val="22D3EE"/>
+                  <a:srgbClr val="2DD48F"/>
                 </a:solidFill>
                 <a:latin typeface="Segoe UI"/>
               </a:rPr>
@@ -14060,11 +13303,11 @@
             <a:r>
               <a:rPr sz="1800" b="0">
                 <a:solidFill>
-                  <a:srgbClr val="C4D2E4"/>
-                </a:solidFill>
-                <a:latin typeface="Segoe UI"/>
-              </a:rPr>
-              <a:t>Trust: a finding is a reproduced contradiction, provably</a:t>
+                  <a:srgbClr val="EAF2FF"/>
+                </a:solidFill>
+                <a:latin typeface="Segoe UI"/>
+              </a:rPr>
+              <a:t>Pre-connection scope guard — out-of-scope probes refused</a:t>
             </a:r>
           </a:p>
           <a:p>
@@ -14076,7 +13319,7 @@
             <a:r>
               <a:rPr sz="1800" b="1">
                 <a:solidFill>
-                  <a:srgbClr val="22D3EE"/>
+                  <a:srgbClr val="2DD48F"/>
                 </a:solidFill>
                 <a:latin typeface="Segoe UI"/>
               </a:rPr>
@@ -14085,11 +13328,11 @@
             <a:r>
               <a:rPr sz="1800" b="0">
                 <a:solidFill>
-                  <a:srgbClr val="C4D2E4"/>
-                </a:solidFill>
-                <a:latin typeface="Segoe UI"/>
-              </a:rPr>
-              <a:t>Closure: it doesn't just find — it patches and re-proves</a:t>
+                  <a:srgbClr val="EAF2FF"/>
+                </a:solidFill>
+                <a:latin typeface="Segoe UI"/>
+              </a:rPr>
+              <a:t>Probes are local, bounded, and non-destructive</a:t>
             </a:r>
           </a:p>
           <a:p>
@@ -14101,7 +13344,7 @@
             <a:r>
               <a:rPr sz="1800" b="1">
                 <a:solidFill>
-                  <a:srgbClr val="22D3EE"/>
+                  <a:srgbClr val="2DD48F"/>
                 </a:solidFill>
                 <a:latin typeface="Segoe UI"/>
               </a:rPr>
@@ -14110,11 +13353,11 @@
             <a:r>
               <a:rPr sz="1800" b="0">
                 <a:solidFill>
-                  <a:srgbClr val="C4D2E4"/>
-                </a:solidFill>
-                <a:latin typeface="Segoe UI"/>
-              </a:rPr>
-              <a:t>Reach: the classes signatures miss (authz, session)</a:t>
+                  <a:srgbClr val="EAF2FF"/>
+                </a:solidFill>
+                <a:latin typeface="Segoe UI"/>
+              </a:rPr>
+              <a:t>The enforcer shield is ephemeral and loopback-only (SSRF-safe)</a:t>
             </a:r>
           </a:p>
           <a:p>
@@ -14126,7 +13369,7 @@
             <a:r>
               <a:rPr sz="1800" b="1">
                 <a:solidFill>
-                  <a:srgbClr val="22D3EE"/>
+                  <a:srgbClr val="2DD48F"/>
                 </a:solidFill>
                 <a:latin typeface="Segoe UI"/>
               </a:rPr>
@@ -14135,11 +13378,11 @@
             <a:r>
               <a:rPr sz="1800" b="0">
                 <a:solidFill>
-                  <a:srgbClr val="C4D2E4"/>
-                </a:solidFill>
-                <a:latin typeface="Segoe UI"/>
-              </a:rPr>
-              <a:t>Honesty: compliant controls and frontiers labeled, not faked</a:t>
+                  <a:srgbClr val="EAF2FF"/>
+                </a:solidFill>
+                <a:latin typeface="Segoe UI"/>
+              </a:rPr>
+              <a:t>Nothing both acts and judges — stages are separated</a:t>
             </a:r>
           </a:p>
           <a:p>
@@ -14151,7 +13394,7 @@
             <a:r>
               <a:rPr sz="1800" b="1">
                 <a:solidFill>
-                  <a:srgbClr val="22D3EE"/>
+                  <a:srgbClr val="E84BFF"/>
                 </a:solidFill>
                 <a:latin typeface="Segoe UI"/>
               </a:rPr>
@@ -14164,7 +13407,7 @@
                 </a:solidFill>
                 <a:latin typeface="Segoe UI"/>
               </a:rPr>
-              <a:t>Deployability: local, auditable, air-gap-ready</a:t>
+              <a:t>Credentials never persisted or logged; in-memory per run</a:t>
             </a:r>
           </a:p>
         </p:txBody>
@@ -14242,7 +13485,7 @@
                 </a:solidFill>
                 <a:latin typeface="Consolas"/>
               </a:rPr>
-              <a:t>26 / 29</a:t>
+              <a:t>26 / 31</a:t>
             </a:r>
           </a:p>
         </p:txBody>
@@ -14394,7 +13637,7 @@
                 </a:solidFill>
                 <a:latin typeface="Consolas"/>
               </a:rPr>
-              <a:t>Status &amp; Roadmap</a:t>
+              <a:t>Market Landscape</a:t>
             </a:r>
           </a:p>
         </p:txBody>
@@ -14452,7 +13695,7 @@
                 </a:solidFill>
                 <a:latin typeface="Consolas"/>
               </a:rPr>
-              <a:t>Honest today; a clear path to more</a:t>
+              <a:t>Where autonomous, provable reasoning fits</a:t>
             </a:r>
           </a:p>
         </p:txBody>
@@ -14465,8 +13708,1103 @@
         </p:nvSpPr>
         <p:spPr>
           <a:xfrm>
-            <a:off x="713232" y="2697480"/>
-            <a:ext cx="10789920" cy="3840480"/>
+            <a:off x="6537960" y="2395728"/>
+            <a:ext cx="1691640" cy="640080"/>
+          </a:xfrm>
+          <a:prstGeom prst="rect">
+            <a:avLst/>
+          </a:prstGeom>
+          <a:noFill/>
+        </p:spPr>
+        <p:txBody>
+          <a:bodyPr wrap="square" anchor="b" lIns="0" rIns="0" tIns="0" bIns="0">
+            <a:spAutoFit/>
+          </a:bodyPr>
+          <a:lstStyle/>
+          <a:p>
+            <a:pPr algn="ctr"/>
+            <a:r>
+              <a:rPr sz="1200" b="1">
+                <a:solidFill>
+                  <a:srgbClr val="EAF2FF"/>
+                </a:solidFill>
+                <a:latin typeface="Consolas"/>
+              </a:rPr>
+              <a:t>Signature</a:t>
+            </a:r>
+          </a:p>
+          <a:p>
+            <a:pPr algn="ctr"/>
+            <a:r>
+              <a:rPr sz="1200" b="1">
+                <a:solidFill>
+                  <a:srgbClr val="EAF2FF"/>
+                </a:solidFill>
+                <a:latin typeface="Consolas"/>
+              </a:rPr>
+              <a:t>scanners</a:t>
+            </a:r>
+          </a:p>
+        </p:txBody>
+      </p:sp>
+      <p:sp>
+        <p:nvSpPr>
+          <p:cNvPr id="9" name="TextBox 8"/>
+          <p:cNvSpPr txBox="1"/>
+          <p:nvPr/>
+        </p:nvSpPr>
+        <p:spPr>
+          <a:xfrm>
+            <a:off x="8229600" y="2395728"/>
+            <a:ext cx="1691640" cy="640080"/>
+          </a:xfrm>
+          <a:prstGeom prst="rect">
+            <a:avLst/>
+          </a:prstGeom>
+          <a:noFill/>
+        </p:spPr>
+        <p:txBody>
+          <a:bodyPr wrap="square" anchor="b" lIns="0" rIns="0" tIns="0" bIns="0">
+            <a:spAutoFit/>
+          </a:bodyPr>
+          <a:lstStyle/>
+          <a:p>
+            <a:pPr algn="ctr"/>
+            <a:r>
+              <a:rPr sz="1200" b="1">
+                <a:solidFill>
+                  <a:srgbClr val="EAF2FF"/>
+                </a:solidFill>
+                <a:latin typeface="Consolas"/>
+              </a:rPr>
+              <a:t>DAST /</a:t>
+            </a:r>
+          </a:p>
+          <a:p>
+            <a:pPr algn="ctr"/>
+            <a:r>
+              <a:rPr sz="1200" b="1">
+                <a:solidFill>
+                  <a:srgbClr val="EAF2FF"/>
+                </a:solidFill>
+                <a:latin typeface="Consolas"/>
+              </a:rPr>
+              <a:t>fuzzers</a:t>
+            </a:r>
+          </a:p>
+        </p:txBody>
+      </p:sp>
+      <p:sp>
+        <p:nvSpPr>
+          <p:cNvPr id="10" name="TextBox 9"/>
+          <p:cNvSpPr txBox="1"/>
+          <p:nvPr/>
+        </p:nvSpPr>
+        <p:spPr>
+          <a:xfrm>
+            <a:off x="9921240" y="2395728"/>
+            <a:ext cx="1691640" cy="640080"/>
+          </a:xfrm>
+          <a:prstGeom prst="rect">
+            <a:avLst/>
+          </a:prstGeom>
+          <a:noFill/>
+        </p:spPr>
+        <p:txBody>
+          <a:bodyPr wrap="square" anchor="b" lIns="0" rIns="0" tIns="0" bIns="0">
+            <a:spAutoFit/>
+          </a:bodyPr>
+          <a:lstStyle/>
+          <a:p>
+            <a:pPr algn="ctr"/>
+            <a:r>
+              <a:rPr sz="1200" b="1">
+                <a:solidFill>
+                  <a:srgbClr val="EAF2FF"/>
+                </a:solidFill>
+                <a:latin typeface="Consolas"/>
+              </a:rPr>
+              <a:t>Sentinel</a:t>
+            </a:r>
+          </a:p>
+        </p:txBody>
+      </p:sp>
+      <p:sp>
+        <p:nvSpPr>
+          <p:cNvPr id="11" name="Rectangle 10"/>
+          <p:cNvSpPr/>
+          <p:nvPr/>
+        </p:nvSpPr>
+        <p:spPr>
+          <a:xfrm>
+            <a:off x="548640" y="3108960"/>
+            <a:ext cx="11064240" cy="475488"/>
+          </a:xfrm>
+          <a:prstGeom prst="rect">
+            <a:avLst/>
+          </a:prstGeom>
+          <a:solidFill>
+            <a:srgbClr val="101724"/>
+          </a:solidFill>
+          <a:ln>
+            <a:noFill/>
+          </a:ln>
+          <a:effectLst/>
+        </p:spPr>
+        <p:style>
+          <a:lnRef idx="1">
+            <a:schemeClr val="accent1"/>
+          </a:lnRef>
+          <a:fillRef idx="3">
+            <a:schemeClr val="accent1"/>
+          </a:fillRef>
+          <a:effectRef idx="2">
+            <a:schemeClr val="accent1"/>
+          </a:effectRef>
+          <a:fontRef idx="minor">
+            <a:schemeClr val="lt1"/>
+          </a:fontRef>
+        </p:style>
+        <p:txBody>
+          <a:bodyPr rtlCol="0" anchor="ctr"/>
+          <a:lstStyle/>
+          <a:p>
+            <a:pPr algn="ctr"/>
+          </a:p>
+        </p:txBody>
+      </p:sp>
+      <p:sp>
+        <p:nvSpPr>
+          <p:cNvPr id="12" name="TextBox 11"/>
+          <p:cNvSpPr txBox="1"/>
+          <p:nvPr/>
+        </p:nvSpPr>
+        <p:spPr>
+          <a:xfrm>
+            <a:off x="658368" y="3108960"/>
+            <a:ext cx="5669280" cy="475488"/>
+          </a:xfrm>
+          <a:prstGeom prst="rect">
+            <a:avLst/>
+          </a:prstGeom>
+          <a:noFill/>
+        </p:spPr>
+        <p:txBody>
+          <a:bodyPr wrap="square" anchor="ctr" lIns="0" rIns="0" tIns="0" bIns="0">
+            <a:spAutoFit/>
+          </a:bodyPr>
+          <a:lstStyle/>
+          <a:p>
+            <a:r>
+              <a:rPr sz="1400" b="0">
+                <a:solidFill>
+                  <a:srgbClr val="C4D2E4"/>
+                </a:solidFill>
+                <a:latin typeface="Segoe UI"/>
+              </a:rPr>
+              <a:t>Finds authorization / BOLA flaws</a:t>
+            </a:r>
+          </a:p>
+        </p:txBody>
+      </p:sp>
+      <p:sp>
+        <p:nvSpPr>
+          <p:cNvPr id="13" name="TextBox 12"/>
+          <p:cNvSpPr txBox="1"/>
+          <p:nvPr/>
+        </p:nvSpPr>
+        <p:spPr>
+          <a:xfrm>
+            <a:off x="6537960" y="3108960"/>
+            <a:ext cx="1691640" cy="475488"/>
+          </a:xfrm>
+          <a:prstGeom prst="rect">
+            <a:avLst/>
+          </a:prstGeom>
+          <a:noFill/>
+        </p:spPr>
+        <p:txBody>
+          <a:bodyPr wrap="square" anchor="ctr" lIns="0" rIns="0" tIns="0" bIns="0">
+            <a:spAutoFit/>
+          </a:bodyPr>
+          <a:lstStyle/>
+          <a:p>
+            <a:pPr algn="ctr"/>
+            <a:r>
+              <a:rPr sz="1800" b="1">
+                <a:solidFill>
+                  <a:srgbClr val="FF5C6E"/>
+                </a:solidFill>
+                <a:latin typeface="Segoe UI Symbol"/>
+              </a:rPr>
+              <a:t>✗</a:t>
+            </a:r>
+          </a:p>
+        </p:txBody>
+      </p:sp>
+      <p:sp>
+        <p:nvSpPr>
+          <p:cNvPr id="14" name="TextBox 13"/>
+          <p:cNvSpPr txBox="1"/>
+          <p:nvPr/>
+        </p:nvSpPr>
+        <p:spPr>
+          <a:xfrm>
+            <a:off x="8229600" y="3108960"/>
+            <a:ext cx="1691640" cy="475488"/>
+          </a:xfrm>
+          <a:prstGeom prst="rect">
+            <a:avLst/>
+          </a:prstGeom>
+          <a:noFill/>
+        </p:spPr>
+        <p:txBody>
+          <a:bodyPr wrap="square" anchor="ctr" lIns="0" rIns="0" tIns="0" bIns="0">
+            <a:spAutoFit/>
+          </a:bodyPr>
+          <a:lstStyle/>
+          <a:p>
+            <a:pPr algn="ctr"/>
+            <a:r>
+              <a:rPr sz="1800" b="1">
+                <a:solidFill>
+                  <a:srgbClr val="F5B301"/>
+                </a:solidFill>
+                <a:latin typeface="Segoe UI Symbol"/>
+              </a:rPr>
+              <a:t>~</a:t>
+            </a:r>
+          </a:p>
+        </p:txBody>
+      </p:sp>
+      <p:sp>
+        <p:nvSpPr>
+          <p:cNvPr id="15" name="TextBox 14"/>
+          <p:cNvSpPr txBox="1"/>
+          <p:nvPr/>
+        </p:nvSpPr>
+        <p:spPr>
+          <a:xfrm>
+            <a:off x="9921240" y="3108960"/>
+            <a:ext cx="1691640" cy="475488"/>
+          </a:xfrm>
+          <a:prstGeom prst="rect">
+            <a:avLst/>
+          </a:prstGeom>
+          <a:noFill/>
+        </p:spPr>
+        <p:txBody>
+          <a:bodyPr wrap="square" anchor="ctr" lIns="0" rIns="0" tIns="0" bIns="0">
+            <a:spAutoFit/>
+          </a:bodyPr>
+          <a:lstStyle/>
+          <a:p>
+            <a:pPr algn="ctr"/>
+            <a:r>
+              <a:rPr sz="1800" b="1">
+                <a:solidFill>
+                  <a:srgbClr val="2DD48F"/>
+                </a:solidFill>
+                <a:latin typeface="Segoe UI Symbol"/>
+              </a:rPr>
+              <a:t>✓</a:t>
+            </a:r>
+          </a:p>
+        </p:txBody>
+      </p:sp>
+      <p:sp>
+        <p:nvSpPr>
+          <p:cNvPr id="16" name="TextBox 15"/>
+          <p:cNvSpPr txBox="1"/>
+          <p:nvPr/>
+        </p:nvSpPr>
+        <p:spPr>
+          <a:xfrm>
+            <a:off x="658368" y="3584448"/>
+            <a:ext cx="5669280" cy="475488"/>
+          </a:xfrm>
+          <a:prstGeom prst="rect">
+            <a:avLst/>
+          </a:prstGeom>
+          <a:noFill/>
+        </p:spPr>
+        <p:txBody>
+          <a:bodyPr wrap="square" anchor="ctr" lIns="0" rIns="0" tIns="0" bIns="0">
+            <a:spAutoFit/>
+          </a:bodyPr>
+          <a:lstStyle/>
+          <a:p>
+            <a:r>
+              <a:rPr sz="1400" b="0">
+                <a:solidFill>
+                  <a:srgbClr val="C4D2E4"/>
+                </a:solidFill>
+                <a:latin typeface="Segoe UI"/>
+              </a:rPr>
+              <a:t>Verdict is a reproduced contradiction</a:t>
+            </a:r>
+          </a:p>
+        </p:txBody>
+      </p:sp>
+      <p:sp>
+        <p:nvSpPr>
+          <p:cNvPr id="17" name="TextBox 16"/>
+          <p:cNvSpPr txBox="1"/>
+          <p:nvPr/>
+        </p:nvSpPr>
+        <p:spPr>
+          <a:xfrm>
+            <a:off x="6537960" y="3584448"/>
+            <a:ext cx="1691640" cy="475488"/>
+          </a:xfrm>
+          <a:prstGeom prst="rect">
+            <a:avLst/>
+          </a:prstGeom>
+          <a:noFill/>
+        </p:spPr>
+        <p:txBody>
+          <a:bodyPr wrap="square" anchor="ctr" lIns="0" rIns="0" tIns="0" bIns="0">
+            <a:spAutoFit/>
+          </a:bodyPr>
+          <a:lstStyle/>
+          <a:p>
+            <a:pPr algn="ctr"/>
+            <a:r>
+              <a:rPr sz="1800" b="1">
+                <a:solidFill>
+                  <a:srgbClr val="FF5C6E"/>
+                </a:solidFill>
+                <a:latin typeface="Segoe UI Symbol"/>
+              </a:rPr>
+              <a:t>✗</a:t>
+            </a:r>
+          </a:p>
+        </p:txBody>
+      </p:sp>
+      <p:sp>
+        <p:nvSpPr>
+          <p:cNvPr id="18" name="TextBox 17"/>
+          <p:cNvSpPr txBox="1"/>
+          <p:nvPr/>
+        </p:nvSpPr>
+        <p:spPr>
+          <a:xfrm>
+            <a:off x="8229600" y="3584448"/>
+            <a:ext cx="1691640" cy="475488"/>
+          </a:xfrm>
+          <a:prstGeom prst="rect">
+            <a:avLst/>
+          </a:prstGeom>
+          <a:noFill/>
+        </p:spPr>
+        <p:txBody>
+          <a:bodyPr wrap="square" anchor="ctr" lIns="0" rIns="0" tIns="0" bIns="0">
+            <a:spAutoFit/>
+          </a:bodyPr>
+          <a:lstStyle/>
+          <a:p>
+            <a:pPr algn="ctr"/>
+            <a:r>
+              <a:rPr sz="1800" b="1">
+                <a:solidFill>
+                  <a:srgbClr val="FF5C6E"/>
+                </a:solidFill>
+                <a:latin typeface="Segoe UI Symbol"/>
+              </a:rPr>
+              <a:t>✗</a:t>
+            </a:r>
+          </a:p>
+        </p:txBody>
+      </p:sp>
+      <p:sp>
+        <p:nvSpPr>
+          <p:cNvPr id="19" name="TextBox 18"/>
+          <p:cNvSpPr txBox="1"/>
+          <p:nvPr/>
+        </p:nvSpPr>
+        <p:spPr>
+          <a:xfrm>
+            <a:off x="9921240" y="3584448"/>
+            <a:ext cx="1691640" cy="475488"/>
+          </a:xfrm>
+          <a:prstGeom prst="rect">
+            <a:avLst/>
+          </a:prstGeom>
+          <a:noFill/>
+        </p:spPr>
+        <p:txBody>
+          <a:bodyPr wrap="square" anchor="ctr" lIns="0" rIns="0" tIns="0" bIns="0">
+            <a:spAutoFit/>
+          </a:bodyPr>
+          <a:lstStyle/>
+          <a:p>
+            <a:pPr algn="ctr"/>
+            <a:r>
+              <a:rPr sz="1800" b="1">
+                <a:solidFill>
+                  <a:srgbClr val="2DD48F"/>
+                </a:solidFill>
+                <a:latin typeface="Segoe UI Symbol"/>
+              </a:rPr>
+              <a:t>✓</a:t>
+            </a:r>
+          </a:p>
+        </p:txBody>
+      </p:sp>
+      <p:sp>
+        <p:nvSpPr>
+          <p:cNvPr id="20" name="Rectangle 19"/>
+          <p:cNvSpPr/>
+          <p:nvPr/>
+        </p:nvSpPr>
+        <p:spPr>
+          <a:xfrm>
+            <a:off x="548640" y="4059936"/>
+            <a:ext cx="11064240" cy="475488"/>
+          </a:xfrm>
+          <a:prstGeom prst="rect">
+            <a:avLst/>
+          </a:prstGeom>
+          <a:solidFill>
+            <a:srgbClr val="101724"/>
+          </a:solidFill>
+          <a:ln>
+            <a:noFill/>
+          </a:ln>
+          <a:effectLst/>
+        </p:spPr>
+        <p:style>
+          <a:lnRef idx="1">
+            <a:schemeClr val="accent1"/>
+          </a:lnRef>
+          <a:fillRef idx="3">
+            <a:schemeClr val="accent1"/>
+          </a:fillRef>
+          <a:effectRef idx="2">
+            <a:schemeClr val="accent1"/>
+          </a:effectRef>
+          <a:fontRef idx="minor">
+            <a:schemeClr val="lt1"/>
+          </a:fontRef>
+        </p:style>
+        <p:txBody>
+          <a:bodyPr rtlCol="0" anchor="ctr"/>
+          <a:lstStyle/>
+          <a:p>
+            <a:pPr algn="ctr"/>
+          </a:p>
+        </p:txBody>
+      </p:sp>
+      <p:sp>
+        <p:nvSpPr>
+          <p:cNvPr id="21" name="TextBox 20"/>
+          <p:cNvSpPr txBox="1"/>
+          <p:nvPr/>
+        </p:nvSpPr>
+        <p:spPr>
+          <a:xfrm>
+            <a:off x="658368" y="4059936"/>
+            <a:ext cx="5669280" cy="475488"/>
+          </a:xfrm>
+          <a:prstGeom prst="rect">
+            <a:avLst/>
+          </a:prstGeom>
+          <a:noFill/>
+        </p:spPr>
+        <p:txBody>
+          <a:bodyPr wrap="square" anchor="ctr" lIns="0" rIns="0" tIns="0" bIns="0">
+            <a:spAutoFit/>
+          </a:bodyPr>
+          <a:lstStyle/>
+          <a:p>
+            <a:r>
+              <a:rPr sz="1400" b="0">
+                <a:solidFill>
+                  <a:srgbClr val="C4D2E4"/>
+                </a:solidFill>
+                <a:latin typeface="Segoe UI"/>
+              </a:rPr>
+              <a:t>Proves the fix, live</a:t>
+            </a:r>
+          </a:p>
+        </p:txBody>
+      </p:sp>
+      <p:sp>
+        <p:nvSpPr>
+          <p:cNvPr id="22" name="TextBox 21"/>
+          <p:cNvSpPr txBox="1"/>
+          <p:nvPr/>
+        </p:nvSpPr>
+        <p:spPr>
+          <a:xfrm>
+            <a:off x="6537960" y="4059936"/>
+            <a:ext cx="1691640" cy="475488"/>
+          </a:xfrm>
+          <a:prstGeom prst="rect">
+            <a:avLst/>
+          </a:prstGeom>
+          <a:noFill/>
+        </p:spPr>
+        <p:txBody>
+          <a:bodyPr wrap="square" anchor="ctr" lIns="0" rIns="0" tIns="0" bIns="0">
+            <a:spAutoFit/>
+          </a:bodyPr>
+          <a:lstStyle/>
+          <a:p>
+            <a:pPr algn="ctr"/>
+            <a:r>
+              <a:rPr sz="1800" b="1">
+                <a:solidFill>
+                  <a:srgbClr val="FF5C6E"/>
+                </a:solidFill>
+                <a:latin typeface="Segoe UI Symbol"/>
+              </a:rPr>
+              <a:t>✗</a:t>
+            </a:r>
+          </a:p>
+        </p:txBody>
+      </p:sp>
+      <p:sp>
+        <p:nvSpPr>
+          <p:cNvPr id="23" name="TextBox 22"/>
+          <p:cNvSpPr txBox="1"/>
+          <p:nvPr/>
+        </p:nvSpPr>
+        <p:spPr>
+          <a:xfrm>
+            <a:off x="8229600" y="4059936"/>
+            <a:ext cx="1691640" cy="475488"/>
+          </a:xfrm>
+          <a:prstGeom prst="rect">
+            <a:avLst/>
+          </a:prstGeom>
+          <a:noFill/>
+        </p:spPr>
+        <p:txBody>
+          <a:bodyPr wrap="square" anchor="ctr" lIns="0" rIns="0" tIns="0" bIns="0">
+            <a:spAutoFit/>
+          </a:bodyPr>
+          <a:lstStyle/>
+          <a:p>
+            <a:pPr algn="ctr"/>
+            <a:r>
+              <a:rPr sz="1800" b="1">
+                <a:solidFill>
+                  <a:srgbClr val="FF5C6E"/>
+                </a:solidFill>
+                <a:latin typeface="Segoe UI Symbol"/>
+              </a:rPr>
+              <a:t>✗</a:t>
+            </a:r>
+          </a:p>
+        </p:txBody>
+      </p:sp>
+      <p:sp>
+        <p:nvSpPr>
+          <p:cNvPr id="24" name="TextBox 23"/>
+          <p:cNvSpPr txBox="1"/>
+          <p:nvPr/>
+        </p:nvSpPr>
+        <p:spPr>
+          <a:xfrm>
+            <a:off x="9921240" y="4059936"/>
+            <a:ext cx="1691640" cy="475488"/>
+          </a:xfrm>
+          <a:prstGeom prst="rect">
+            <a:avLst/>
+          </a:prstGeom>
+          <a:noFill/>
+        </p:spPr>
+        <p:txBody>
+          <a:bodyPr wrap="square" anchor="ctr" lIns="0" rIns="0" tIns="0" bIns="0">
+            <a:spAutoFit/>
+          </a:bodyPr>
+          <a:lstStyle/>
+          <a:p>
+            <a:pPr algn="ctr"/>
+            <a:r>
+              <a:rPr sz="1800" b="1">
+                <a:solidFill>
+                  <a:srgbClr val="2DD48F"/>
+                </a:solidFill>
+                <a:latin typeface="Segoe UI Symbol"/>
+              </a:rPr>
+              <a:t>✓</a:t>
+            </a:r>
+          </a:p>
+        </p:txBody>
+      </p:sp>
+      <p:sp>
+        <p:nvSpPr>
+          <p:cNvPr id="25" name="TextBox 24"/>
+          <p:cNvSpPr txBox="1"/>
+          <p:nvPr/>
+        </p:nvSpPr>
+        <p:spPr>
+          <a:xfrm>
+            <a:off x="658368" y="4535424"/>
+            <a:ext cx="5669280" cy="475488"/>
+          </a:xfrm>
+          <a:prstGeom prst="rect">
+            <a:avLst/>
+          </a:prstGeom>
+          <a:noFill/>
+        </p:spPr>
+        <p:txBody>
+          <a:bodyPr wrap="square" anchor="ctr" lIns="0" rIns="0" tIns="0" bIns="0">
+            <a:spAutoFit/>
+          </a:bodyPr>
+          <a:lstStyle/>
+          <a:p>
+            <a:r>
+              <a:rPr sz="1400" b="0">
+                <a:solidFill>
+                  <a:srgbClr val="C4D2E4"/>
+                </a:solidFill>
+                <a:latin typeface="Segoe UI"/>
+              </a:rPr>
+              <a:t>Autonomous, self-directed research</a:t>
+            </a:r>
+          </a:p>
+        </p:txBody>
+      </p:sp>
+      <p:sp>
+        <p:nvSpPr>
+          <p:cNvPr id="26" name="TextBox 25"/>
+          <p:cNvSpPr txBox="1"/>
+          <p:nvPr/>
+        </p:nvSpPr>
+        <p:spPr>
+          <a:xfrm>
+            <a:off x="6537960" y="4535424"/>
+            <a:ext cx="1691640" cy="475488"/>
+          </a:xfrm>
+          <a:prstGeom prst="rect">
+            <a:avLst/>
+          </a:prstGeom>
+          <a:noFill/>
+        </p:spPr>
+        <p:txBody>
+          <a:bodyPr wrap="square" anchor="ctr" lIns="0" rIns="0" tIns="0" bIns="0">
+            <a:spAutoFit/>
+          </a:bodyPr>
+          <a:lstStyle/>
+          <a:p>
+            <a:pPr algn="ctr"/>
+            <a:r>
+              <a:rPr sz="1800" b="1">
+                <a:solidFill>
+                  <a:srgbClr val="FF5C6E"/>
+                </a:solidFill>
+                <a:latin typeface="Segoe UI Symbol"/>
+              </a:rPr>
+              <a:t>✗</a:t>
+            </a:r>
+          </a:p>
+        </p:txBody>
+      </p:sp>
+      <p:sp>
+        <p:nvSpPr>
+          <p:cNvPr id="27" name="TextBox 26"/>
+          <p:cNvSpPr txBox="1"/>
+          <p:nvPr/>
+        </p:nvSpPr>
+        <p:spPr>
+          <a:xfrm>
+            <a:off x="8229600" y="4535424"/>
+            <a:ext cx="1691640" cy="475488"/>
+          </a:xfrm>
+          <a:prstGeom prst="rect">
+            <a:avLst/>
+          </a:prstGeom>
+          <a:noFill/>
+        </p:spPr>
+        <p:txBody>
+          <a:bodyPr wrap="square" anchor="ctr" lIns="0" rIns="0" tIns="0" bIns="0">
+            <a:spAutoFit/>
+          </a:bodyPr>
+          <a:lstStyle/>
+          <a:p>
+            <a:pPr algn="ctr"/>
+            <a:r>
+              <a:rPr sz="1800" b="1">
+                <a:solidFill>
+                  <a:srgbClr val="F5B301"/>
+                </a:solidFill>
+                <a:latin typeface="Segoe UI Symbol"/>
+              </a:rPr>
+              <a:t>~</a:t>
+            </a:r>
+          </a:p>
+        </p:txBody>
+      </p:sp>
+      <p:sp>
+        <p:nvSpPr>
+          <p:cNvPr id="28" name="TextBox 27"/>
+          <p:cNvSpPr txBox="1"/>
+          <p:nvPr/>
+        </p:nvSpPr>
+        <p:spPr>
+          <a:xfrm>
+            <a:off x="9921240" y="4535424"/>
+            <a:ext cx="1691640" cy="475488"/>
+          </a:xfrm>
+          <a:prstGeom prst="rect">
+            <a:avLst/>
+          </a:prstGeom>
+          <a:noFill/>
+        </p:spPr>
+        <p:txBody>
+          <a:bodyPr wrap="square" anchor="ctr" lIns="0" rIns="0" tIns="0" bIns="0">
+            <a:spAutoFit/>
+          </a:bodyPr>
+          <a:lstStyle/>
+          <a:p>
+            <a:pPr algn="ctr"/>
+            <a:r>
+              <a:rPr sz="1800" b="1">
+                <a:solidFill>
+                  <a:srgbClr val="2DD48F"/>
+                </a:solidFill>
+                <a:latin typeface="Segoe UI Symbol"/>
+              </a:rPr>
+              <a:t>✓</a:t>
+            </a:r>
+          </a:p>
+        </p:txBody>
+      </p:sp>
+      <p:sp>
+        <p:nvSpPr>
+          <p:cNvPr id="29" name="Rectangle 28"/>
+          <p:cNvSpPr/>
+          <p:nvPr/>
+        </p:nvSpPr>
+        <p:spPr>
+          <a:xfrm>
+            <a:off x="548640" y="5010912"/>
+            <a:ext cx="11064240" cy="475488"/>
+          </a:xfrm>
+          <a:prstGeom prst="rect">
+            <a:avLst/>
+          </a:prstGeom>
+          <a:solidFill>
+            <a:srgbClr val="101724"/>
+          </a:solidFill>
+          <a:ln>
+            <a:noFill/>
+          </a:ln>
+          <a:effectLst/>
+        </p:spPr>
+        <p:style>
+          <a:lnRef idx="1">
+            <a:schemeClr val="accent1"/>
+          </a:lnRef>
+          <a:fillRef idx="3">
+            <a:schemeClr val="accent1"/>
+          </a:fillRef>
+          <a:effectRef idx="2">
+            <a:schemeClr val="accent1"/>
+          </a:effectRef>
+          <a:fontRef idx="minor">
+            <a:schemeClr val="lt1"/>
+          </a:fontRef>
+        </p:style>
+        <p:txBody>
+          <a:bodyPr rtlCol="0" anchor="ctr"/>
+          <a:lstStyle/>
+          <a:p>
+            <a:pPr algn="ctr"/>
+          </a:p>
+        </p:txBody>
+      </p:sp>
+      <p:sp>
+        <p:nvSpPr>
+          <p:cNvPr id="30" name="TextBox 29"/>
+          <p:cNvSpPr txBox="1"/>
+          <p:nvPr/>
+        </p:nvSpPr>
+        <p:spPr>
+          <a:xfrm>
+            <a:off x="658368" y="5010912"/>
+            <a:ext cx="5669280" cy="475488"/>
+          </a:xfrm>
+          <a:prstGeom prst="rect">
+            <a:avLst/>
+          </a:prstGeom>
+          <a:noFill/>
+        </p:spPr>
+        <p:txBody>
+          <a:bodyPr wrap="square" anchor="ctr" lIns="0" rIns="0" tIns="0" bIns="0">
+            <a:spAutoFit/>
+          </a:bodyPr>
+          <a:lstStyle/>
+          <a:p>
+            <a:r>
+              <a:rPr sz="1400" b="0">
+                <a:solidFill>
+                  <a:srgbClr val="C4D2E4"/>
+                </a:solidFill>
+                <a:latin typeface="Segoe UI"/>
+              </a:rPr>
+              <a:t>Local-first, no data egress</a:t>
+            </a:r>
+          </a:p>
+        </p:txBody>
+      </p:sp>
+      <p:sp>
+        <p:nvSpPr>
+          <p:cNvPr id="31" name="TextBox 30"/>
+          <p:cNvSpPr txBox="1"/>
+          <p:nvPr/>
+        </p:nvSpPr>
+        <p:spPr>
+          <a:xfrm>
+            <a:off x="6537960" y="5010912"/>
+            <a:ext cx="1691640" cy="475488"/>
+          </a:xfrm>
+          <a:prstGeom prst="rect">
+            <a:avLst/>
+          </a:prstGeom>
+          <a:noFill/>
+        </p:spPr>
+        <p:txBody>
+          <a:bodyPr wrap="square" anchor="ctr" lIns="0" rIns="0" tIns="0" bIns="0">
+            <a:spAutoFit/>
+          </a:bodyPr>
+          <a:lstStyle/>
+          <a:p>
+            <a:pPr algn="ctr"/>
+            <a:r>
+              <a:rPr sz="1800" b="1">
+                <a:solidFill>
+                  <a:srgbClr val="F5B301"/>
+                </a:solidFill>
+                <a:latin typeface="Segoe UI Symbol"/>
+              </a:rPr>
+              <a:t>~</a:t>
+            </a:r>
+          </a:p>
+        </p:txBody>
+      </p:sp>
+      <p:sp>
+        <p:nvSpPr>
+          <p:cNvPr id="32" name="TextBox 31"/>
+          <p:cNvSpPr txBox="1"/>
+          <p:nvPr/>
+        </p:nvSpPr>
+        <p:spPr>
+          <a:xfrm>
+            <a:off x="8229600" y="5010912"/>
+            <a:ext cx="1691640" cy="475488"/>
+          </a:xfrm>
+          <a:prstGeom prst="rect">
+            <a:avLst/>
+          </a:prstGeom>
+          <a:noFill/>
+        </p:spPr>
+        <p:txBody>
+          <a:bodyPr wrap="square" anchor="ctr" lIns="0" rIns="0" tIns="0" bIns="0">
+            <a:spAutoFit/>
+          </a:bodyPr>
+          <a:lstStyle/>
+          <a:p>
+            <a:pPr algn="ctr"/>
+            <a:r>
+              <a:rPr sz="1800" b="1">
+                <a:solidFill>
+                  <a:srgbClr val="F5B301"/>
+                </a:solidFill>
+                <a:latin typeface="Segoe UI Symbol"/>
+              </a:rPr>
+              <a:t>~</a:t>
+            </a:r>
+          </a:p>
+        </p:txBody>
+      </p:sp>
+      <p:sp>
+        <p:nvSpPr>
+          <p:cNvPr id="33" name="TextBox 32"/>
+          <p:cNvSpPr txBox="1"/>
+          <p:nvPr/>
+        </p:nvSpPr>
+        <p:spPr>
+          <a:xfrm>
+            <a:off x="9921240" y="5010912"/>
+            <a:ext cx="1691640" cy="475488"/>
+          </a:xfrm>
+          <a:prstGeom prst="rect">
+            <a:avLst/>
+          </a:prstGeom>
+          <a:noFill/>
+        </p:spPr>
+        <p:txBody>
+          <a:bodyPr wrap="square" anchor="ctr" lIns="0" rIns="0" tIns="0" bIns="0">
+            <a:spAutoFit/>
+          </a:bodyPr>
+          <a:lstStyle/>
+          <a:p>
+            <a:pPr algn="ctr"/>
+            <a:r>
+              <a:rPr sz="1800" b="1">
+                <a:solidFill>
+                  <a:srgbClr val="2DD48F"/>
+                </a:solidFill>
+                <a:latin typeface="Segoe UI Symbol"/>
+              </a:rPr>
+              <a:t>✓</a:t>
+            </a:r>
+          </a:p>
+        </p:txBody>
+      </p:sp>
+      <p:sp>
+        <p:nvSpPr>
+          <p:cNvPr id="34" name="TextBox 33"/>
+          <p:cNvSpPr txBox="1"/>
+          <p:nvPr/>
+        </p:nvSpPr>
+        <p:spPr>
+          <a:xfrm>
+            <a:off x="658368" y="5486400"/>
+            <a:ext cx="5669280" cy="475488"/>
+          </a:xfrm>
+          <a:prstGeom prst="rect">
+            <a:avLst/>
+          </a:prstGeom>
+          <a:noFill/>
+        </p:spPr>
+        <p:txBody>
+          <a:bodyPr wrap="square" anchor="ctr" lIns="0" rIns="0" tIns="0" bIns="0">
+            <a:spAutoFit/>
+          </a:bodyPr>
+          <a:lstStyle/>
+          <a:p>
+            <a:r>
+              <a:rPr sz="1400" b="0">
+                <a:solidFill>
+                  <a:srgbClr val="C4D2E4"/>
+                </a:solidFill>
+                <a:latin typeface="Segoe UI"/>
+              </a:rPr>
+              <a:t>Every decision auditable</a:t>
+            </a:r>
+          </a:p>
+        </p:txBody>
+      </p:sp>
+      <p:sp>
+        <p:nvSpPr>
+          <p:cNvPr id="35" name="TextBox 34"/>
+          <p:cNvSpPr txBox="1"/>
+          <p:nvPr/>
+        </p:nvSpPr>
+        <p:spPr>
+          <a:xfrm>
+            <a:off x="6537960" y="5486400"/>
+            <a:ext cx="1691640" cy="475488"/>
+          </a:xfrm>
+          <a:prstGeom prst="rect">
+            <a:avLst/>
+          </a:prstGeom>
+          <a:noFill/>
+        </p:spPr>
+        <p:txBody>
+          <a:bodyPr wrap="square" anchor="ctr" lIns="0" rIns="0" tIns="0" bIns="0">
+            <a:spAutoFit/>
+          </a:bodyPr>
+          <a:lstStyle/>
+          <a:p>
+            <a:pPr algn="ctr"/>
+            <a:r>
+              <a:rPr sz="1800" b="1">
+                <a:solidFill>
+                  <a:srgbClr val="F5B301"/>
+                </a:solidFill>
+                <a:latin typeface="Segoe UI Symbol"/>
+              </a:rPr>
+              <a:t>~</a:t>
+            </a:r>
+          </a:p>
+        </p:txBody>
+      </p:sp>
+      <p:sp>
+        <p:nvSpPr>
+          <p:cNvPr id="36" name="TextBox 35"/>
+          <p:cNvSpPr txBox="1"/>
+          <p:nvPr/>
+        </p:nvSpPr>
+        <p:spPr>
+          <a:xfrm>
+            <a:off x="8229600" y="5486400"/>
+            <a:ext cx="1691640" cy="475488"/>
+          </a:xfrm>
+          <a:prstGeom prst="rect">
+            <a:avLst/>
+          </a:prstGeom>
+          <a:noFill/>
+        </p:spPr>
+        <p:txBody>
+          <a:bodyPr wrap="square" anchor="ctr" lIns="0" rIns="0" tIns="0" bIns="0">
+            <a:spAutoFit/>
+          </a:bodyPr>
+          <a:lstStyle/>
+          <a:p>
+            <a:pPr algn="ctr"/>
+            <a:r>
+              <a:rPr sz="1800" b="1">
+                <a:solidFill>
+                  <a:srgbClr val="FF5C6E"/>
+                </a:solidFill>
+                <a:latin typeface="Segoe UI Symbol"/>
+              </a:rPr>
+              <a:t>✗</a:t>
+            </a:r>
+          </a:p>
+        </p:txBody>
+      </p:sp>
+      <p:sp>
+        <p:nvSpPr>
+          <p:cNvPr id="37" name="TextBox 36"/>
+          <p:cNvSpPr txBox="1"/>
+          <p:nvPr/>
+        </p:nvSpPr>
+        <p:spPr>
+          <a:xfrm>
+            <a:off x="9921240" y="5486400"/>
+            <a:ext cx="1691640" cy="475488"/>
+          </a:xfrm>
+          <a:prstGeom prst="rect">
+            <a:avLst/>
+          </a:prstGeom>
+          <a:noFill/>
+        </p:spPr>
+        <p:txBody>
+          <a:bodyPr wrap="square" anchor="ctr" lIns="0" rIns="0" tIns="0" bIns="0">
+            <a:spAutoFit/>
+          </a:bodyPr>
+          <a:lstStyle/>
+          <a:p>
+            <a:pPr algn="ctr"/>
+            <a:r>
+              <a:rPr sz="1800" b="1">
+                <a:solidFill>
+                  <a:srgbClr val="2DD48F"/>
+                </a:solidFill>
+                <a:latin typeface="Segoe UI Symbol"/>
+              </a:rPr>
+              <a:t>✓</a:t>
+            </a:r>
+          </a:p>
+        </p:txBody>
+      </p:sp>
+      <p:sp>
+        <p:nvSpPr>
+          <p:cNvPr id="38" name="TextBox 37"/>
+          <p:cNvSpPr txBox="1"/>
+          <p:nvPr/>
+        </p:nvSpPr>
+        <p:spPr>
+          <a:xfrm>
+            <a:off x="566928" y="6382512"/>
+            <a:ext cx="8229600" cy="365760"/>
           </a:xfrm>
           <a:prstGeom prst="rect">
             <a:avLst/>
@@ -14479,142 +14817,37 @@
           </a:bodyPr>
           <a:lstStyle/>
           <a:p>
-            <a:pPr>
-              <a:spcAft>
-                <a:spcPts val="1500"/>
-              </a:spcAft>
-            </a:pPr>
-            <a:r>
-              <a:rPr sz="1800" b="1">
-                <a:solidFill>
-                  <a:srgbClr val="2DD48F"/>
-                </a:solidFill>
-                <a:latin typeface="Segoe UI"/>
-              </a:rPr>
-              <a:t>»  </a:t>
-            </a:r>
-            <a:r>
-              <a:rPr sz="1800" b="0">
-                <a:solidFill>
-                  <a:srgbClr val="EAF2FF"/>
-                </a:solidFill>
-                <a:latin typeface="Segoe UI"/>
-              </a:rPr>
-              <a:t>Today: 3 classes live end-to-end on 2 stacks; 67 tests</a:t>
-            </a:r>
-          </a:p>
-          <a:p>
-            <a:pPr>
-              <a:spcAft>
-                <a:spcPts val="1500"/>
-              </a:spcAft>
-            </a:pPr>
-            <a:r>
-              <a:rPr sz="1800" b="1">
-                <a:solidFill>
-                  <a:srgbClr val="2DD48F"/>
-                </a:solidFill>
-                <a:latin typeface="Segoe UI"/>
-              </a:rPr>
-              <a:t>»  </a:t>
-            </a:r>
-            <a:r>
-              <a:rPr sz="1800" b="0">
-                <a:solidFill>
-                  <a:srgbClr val="EAF2FF"/>
-                </a:solidFill>
-                <a:latin typeface="Segoe UI"/>
-              </a:rPr>
-              <a:t>Today: Login Tester + authenticated reasoning + chaining ingredients</a:t>
-            </a:r>
-          </a:p>
-          <a:p>
-            <a:pPr>
-              <a:spcAft>
-                <a:spcPts val="1500"/>
-              </a:spcAft>
-            </a:pPr>
-            <a:r>
-              <a:rPr sz="1800" b="1">
-                <a:solidFill>
-                  <a:srgbClr val="F5B301"/>
-                </a:solidFill>
-                <a:latin typeface="Segoe UI"/>
-              </a:rPr>
-              <a:t>»  </a:t>
-            </a:r>
-            <a:r>
-              <a:rPr sz="1800" b="0">
-                <a:solidFill>
-                  <a:srgbClr val="EAF2FF"/>
-                </a:solidFill>
-                <a:latin typeface="Segoe UI"/>
-              </a:rPr>
-              <a:t>Next: full causal chaining (compose proven ingredients)</a:t>
-            </a:r>
-          </a:p>
-          <a:p>
-            <a:pPr>
-              <a:spcAft>
-                <a:spcPts val="1500"/>
-              </a:spcAft>
-            </a:pPr>
-            <a:r>
-              <a:rPr sz="1800" b="1">
-                <a:solidFill>
-                  <a:srgbClr val="F5B301"/>
-                </a:solidFill>
-                <a:latin typeface="Segoe UI"/>
-              </a:rPr>
-              <a:t>»  </a:t>
-            </a:r>
-            <a:r>
-              <a:rPr sz="1800" b="0">
-                <a:solidFill>
-                  <a:srgbClr val="EAF2FF"/>
-                </a:solidFill>
-                <a:latin typeface="Segoe UI"/>
-              </a:rPr>
-              <a:t>Next: more OWASP classes (injection, SSRF, IDOR variants)</a:t>
-            </a:r>
-          </a:p>
-          <a:p>
-            <a:pPr>
-              <a:spcAft>
-                <a:spcPts val="1500"/>
-              </a:spcAft>
-            </a:pPr>
-            <a:r>
-              <a:rPr sz="1800" b="1">
-                <a:solidFill>
-                  <a:srgbClr val="F5B301"/>
-                </a:solidFill>
-                <a:latin typeface="Segoe UI"/>
-              </a:rPr>
-              <a:t>»  </a:t>
-            </a:r>
-            <a:r>
-              <a:rPr sz="1800" b="0">
-                <a:solidFill>
-                  <a:srgbClr val="EAF2FF"/>
-                </a:solidFill>
-                <a:latin typeface="Segoe UI"/>
-              </a:rPr>
-              <a:t>Next: CI/CD gate + policy library for common stacks</a:t>
-            </a:r>
-          </a:p>
-        </p:txBody>
-      </p:sp>
-      <p:sp>
-        <p:nvSpPr>
-          <p:cNvPr id="9" name="TextBox 8"/>
+            <a:r>
+              <a:rPr sz="1000" b="1">
+                <a:solidFill>
+                  <a:srgbClr val="22D3EE"/>
+                </a:solidFill>
+                <a:latin typeface="Consolas"/>
+              </a:rPr>
+              <a:t>SENTINEL</a:t>
+            </a:r>
+            <a:r>
+              <a:rPr sz="1000" b="0">
+                <a:solidFill>
+                  <a:srgbClr val="6B7A90"/>
+                </a:solidFill>
+                <a:latin typeface="Consolas"/>
+              </a:rPr>
+              <a:t>   ·   find → reason → prove → patch → prove</a:t>
+            </a:r>
+          </a:p>
+        </p:txBody>
+      </p:sp>
+      <p:sp>
+        <p:nvSpPr>
+          <p:cNvPr id="39" name="TextBox 38"/>
           <p:cNvSpPr txBox="1"/>
           <p:nvPr/>
         </p:nvSpPr>
         <p:spPr>
           <a:xfrm>
-            <a:off x="566928" y="6382512"/>
-            <a:ext cx="8229600" cy="365760"/>
+            <a:off x="10789920" y="6382512"/>
+            <a:ext cx="914400" cy="365760"/>
           </a:xfrm>
           <a:prstGeom prst="rect">
             <a:avLst/>
@@ -14627,58 +14860,15 @@
           </a:bodyPr>
           <a:lstStyle/>
           <a:p>
-            <a:r>
-              <a:rPr sz="1000" b="1">
-                <a:solidFill>
-                  <a:srgbClr val="22D3EE"/>
+            <a:pPr algn="r"/>
+            <a:r>
+              <a:rPr sz="1000" b="0">
+                <a:solidFill>
+                  <a:srgbClr val="6B7A90"/>
                 </a:solidFill>
                 <a:latin typeface="Consolas"/>
               </a:rPr>
-              <a:t>SENTINEL</a:t>
-            </a:r>
-            <a:r>
-              <a:rPr sz="1000" b="0">
-                <a:solidFill>
-                  <a:srgbClr val="6B7A90"/>
-                </a:solidFill>
-                <a:latin typeface="Consolas"/>
-              </a:rPr>
-              <a:t>   ·   find → reason → prove → patch → prove</a:t>
-            </a:r>
-          </a:p>
-        </p:txBody>
-      </p:sp>
-      <p:sp>
-        <p:nvSpPr>
-          <p:cNvPr id="10" name="TextBox 9"/>
-          <p:cNvSpPr txBox="1"/>
-          <p:nvPr/>
-        </p:nvSpPr>
-        <p:spPr>
-          <a:xfrm>
-            <a:off x="10789920" y="6382512"/>
-            <a:ext cx="914400" cy="365760"/>
-          </a:xfrm>
-          <a:prstGeom prst="rect">
-            <a:avLst/>
-          </a:prstGeom>
-          <a:noFill/>
-        </p:spPr>
-        <p:txBody>
-          <a:bodyPr wrap="square" anchor="t" lIns="0" rIns="0" tIns="0" bIns="0">
-            <a:spAutoFit/>
-          </a:bodyPr>
-          <a:lstStyle/>
-          <a:p>
-            <a:pPr algn="r"/>
-            <a:r>
-              <a:rPr sz="1000" b="0">
-                <a:solidFill>
-                  <a:srgbClr val="6B7A90"/>
-                </a:solidFill>
-                <a:latin typeface="Consolas"/>
-              </a:rPr>
-              <a:t>27 / 29</a:t>
+              <a:t>27 / 31</a:t>
             </a:r>
           </a:p>
         </p:txBody>
@@ -14830,7 +15020,7 @@
                 </a:solidFill>
                 <a:latin typeface="Consolas"/>
               </a:rPr>
-              <a:t>The Ask</a:t>
+              <a:t>Why Sentinel Wins</a:t>
             </a:r>
           </a:p>
         </p:txBody>
@@ -14888,212 +15078,20 @@
                 </a:solidFill>
                 <a:latin typeface="Consolas"/>
               </a:rPr>
-              <a:t>$1M to turn a proven engine into a platform</a:t>
-            </a:r>
-          </a:p>
-        </p:txBody>
-      </p:sp>
-      <p:sp>
-        <p:nvSpPr>
-          <p:cNvPr id="8" name="Rounded Rectangle 7"/>
-          <p:cNvSpPr/>
-          <p:nvPr/>
-        </p:nvSpPr>
-        <p:spPr>
-          <a:xfrm>
-            <a:off x="603504" y="2395728"/>
-            <a:ext cx="3444240" cy="1143000"/>
-          </a:xfrm>
-          <a:prstGeom prst="roundRect">
-            <a:avLst/>
-          </a:prstGeom>
-          <a:noFill/>
-          <a:ln w="12700">
-            <a:solidFill>
-              <a:srgbClr val="22D3EE"/>
-            </a:solidFill>
-          </a:ln>
-        </p:spPr>
-        <p:style>
-          <a:lnRef idx="1">
-            <a:schemeClr val="accent1"/>
-          </a:lnRef>
-          <a:fillRef idx="3">
-            <a:schemeClr val="accent1"/>
-          </a:fillRef>
-          <a:effectRef idx="2">
-            <a:schemeClr val="accent1"/>
-          </a:effectRef>
-          <a:fontRef idx="minor">
-            <a:schemeClr val="lt1"/>
-          </a:fontRef>
-        </p:style>
-        <p:txBody>
-          <a:bodyPr rtlCol="0" anchor="ctr"/>
-          <a:lstStyle/>
-          <a:p>
-            <a:pPr algn="ctr"/>
-            <a:r>
-              <a:rPr sz="3200" b="1">
-                <a:solidFill>
-                  <a:srgbClr val="22D3EE"/>
-                </a:solidFill>
-                <a:latin typeface="Consolas"/>
-              </a:rPr>
-              <a:t>$1M</a:t>
-            </a:r>
-          </a:p>
-          <a:p>
-            <a:pPr algn="ctr"/>
-            <a:r>
-              <a:rPr sz="1100" b="0">
-                <a:solidFill>
-                  <a:srgbClr val="6B7A90"/>
-                </a:solidFill>
-                <a:latin typeface="Consolas"/>
-              </a:rPr>
-              <a:t>SEED</a:t>
-            </a:r>
-          </a:p>
-        </p:txBody>
-      </p:sp>
-      <p:sp>
-        <p:nvSpPr>
-          <p:cNvPr id="9" name="Rounded Rectangle 8"/>
-          <p:cNvSpPr/>
-          <p:nvPr/>
-        </p:nvSpPr>
-        <p:spPr>
-          <a:xfrm>
-            <a:off x="4367784" y="2395728"/>
-            <a:ext cx="3444240" cy="1143000"/>
-          </a:xfrm>
-          <a:prstGeom prst="roundRect">
-            <a:avLst/>
-          </a:prstGeom>
-          <a:noFill/>
-          <a:ln w="12700">
-            <a:solidFill>
-              <a:srgbClr val="22D3EE"/>
-            </a:solidFill>
-          </a:ln>
-        </p:spPr>
-        <p:style>
-          <a:lnRef idx="1">
-            <a:schemeClr val="accent1"/>
-          </a:lnRef>
-          <a:fillRef idx="3">
-            <a:schemeClr val="accent1"/>
-          </a:fillRef>
-          <a:effectRef idx="2">
-            <a:schemeClr val="accent1"/>
-          </a:effectRef>
-          <a:fontRef idx="minor">
-            <a:schemeClr val="lt1"/>
-          </a:fontRef>
-        </p:style>
-        <p:txBody>
-          <a:bodyPr rtlCol="0" anchor="ctr"/>
-          <a:lstStyle/>
-          <a:p>
-            <a:pPr algn="ctr"/>
-            <a:r>
-              <a:rPr sz="3200" b="1">
-                <a:solidFill>
-                  <a:srgbClr val="22D3EE"/>
-                </a:solidFill>
-                <a:latin typeface="Consolas"/>
-              </a:rPr>
-              <a:t>18</a:t>
-            </a:r>
-          </a:p>
-          <a:p>
-            <a:pPr algn="ctr"/>
-            <a:r>
-              <a:rPr sz="1100" b="0">
-                <a:solidFill>
-                  <a:srgbClr val="6B7A90"/>
-                </a:solidFill>
-                <a:latin typeface="Consolas"/>
-              </a:rPr>
-              <a:t>MONTHS RUNWAY</a:t>
-            </a:r>
-          </a:p>
-        </p:txBody>
-      </p:sp>
-      <p:sp>
-        <p:nvSpPr>
-          <p:cNvPr id="10" name="Rounded Rectangle 9"/>
-          <p:cNvSpPr/>
-          <p:nvPr/>
-        </p:nvSpPr>
-        <p:spPr>
-          <a:xfrm>
-            <a:off x="8132064" y="2395728"/>
-            <a:ext cx="3444240" cy="1143000"/>
-          </a:xfrm>
-          <a:prstGeom prst="roundRect">
-            <a:avLst/>
-          </a:prstGeom>
-          <a:noFill/>
-          <a:ln w="12700">
-            <a:solidFill>
-              <a:srgbClr val="22D3EE"/>
-            </a:solidFill>
-          </a:ln>
-        </p:spPr>
-        <p:style>
-          <a:lnRef idx="1">
-            <a:schemeClr val="accent1"/>
-          </a:lnRef>
-          <a:fillRef idx="3">
-            <a:schemeClr val="accent1"/>
-          </a:fillRef>
-          <a:effectRef idx="2">
-            <a:schemeClr val="accent1"/>
-          </a:effectRef>
-          <a:fontRef idx="minor">
-            <a:schemeClr val="lt1"/>
-          </a:fontRef>
-        </p:style>
-        <p:txBody>
-          <a:bodyPr rtlCol="0" anchor="ctr"/>
-          <a:lstStyle/>
-          <a:p>
-            <a:pPr algn="ctr"/>
-            <a:r>
-              <a:rPr sz="3200" b="1">
-                <a:solidFill>
-                  <a:srgbClr val="22D3EE"/>
-                </a:solidFill>
-                <a:latin typeface="Consolas"/>
-              </a:rPr>
-              <a:t>3→8</a:t>
-            </a:r>
-          </a:p>
-          <a:p>
-            <a:pPr algn="ctr"/>
-            <a:r>
-              <a:rPr sz="1100" b="0">
-                <a:solidFill>
-                  <a:srgbClr val="6B7A90"/>
-                </a:solidFill>
-                <a:latin typeface="Consolas"/>
-              </a:rPr>
-              <a:t>VULN CLASSES</a:t>
-            </a:r>
-          </a:p>
-        </p:txBody>
-      </p:sp>
-      <p:sp>
-        <p:nvSpPr>
-          <p:cNvPr id="11" name="TextBox 10"/>
+              <a:t>The defensible core</a:t>
+            </a:r>
+          </a:p>
+        </p:txBody>
+      </p:sp>
+      <p:sp>
+        <p:nvSpPr>
+          <p:cNvPr id="8" name="TextBox 7"/>
           <p:cNvSpPr txBox="1"/>
           <p:nvPr/>
         </p:nvSpPr>
         <p:spPr>
           <a:xfrm>
-            <a:off x="713232" y="3840480"/>
+            <a:off x="713232" y="2697480"/>
             <a:ext cx="10789920" cy="3840480"/>
           </a:xfrm>
           <a:prstGeom prst="rect">
@@ -15109,11 +15107,11 @@
           <a:p>
             <a:pPr>
               <a:spcAft>
-                <a:spcPts val="1000"/>
+                <a:spcPts val="1500"/>
               </a:spcAft>
             </a:pPr>
             <a:r>
-              <a:rPr sz="1700" b="1">
+              <a:rPr sz="1800" b="1">
                 <a:solidFill>
                   <a:srgbClr val="22D3EE"/>
                 </a:solidFill>
@@ -15122,23 +15120,23 @@
               <a:t>»  </a:t>
             </a:r>
             <a:r>
-              <a:rPr sz="1700" b="0">
+              <a:rPr sz="1800" b="0">
                 <a:solidFill>
                   <a:srgbClr val="C4D2E4"/>
                 </a:solidFill>
                 <a:latin typeface="Segoe UI"/>
               </a:rPr>
-              <a:t>Engineering: full chaining + the next OWASP classes</a:t>
+              <a:t>Trust: a finding is a reproduced contradiction, provably</a:t>
             </a:r>
           </a:p>
           <a:p>
             <a:pPr>
               <a:spcAft>
-                <a:spcPts val="1000"/>
+                <a:spcPts val="1500"/>
               </a:spcAft>
             </a:pPr>
             <a:r>
-              <a:rPr sz="1700" b="1">
+              <a:rPr sz="1800" b="1">
                 <a:solidFill>
                   <a:srgbClr val="22D3EE"/>
                 </a:solidFill>
@@ -15147,23 +15145,23 @@
               <a:t>»  </a:t>
             </a:r>
             <a:r>
-              <a:rPr sz="1700" b="0">
+              <a:rPr sz="1800" b="0">
                 <a:solidFill>
                   <a:srgbClr val="C4D2E4"/>
                 </a:solidFill>
                 <a:latin typeface="Segoe UI"/>
               </a:rPr>
-              <a:t>Policy library: ready-made oracles for common stacks</a:t>
+              <a:t>Closure: it doesn't just find — it patches and re-proves</a:t>
             </a:r>
           </a:p>
           <a:p>
             <a:pPr>
               <a:spcAft>
-                <a:spcPts val="1000"/>
+                <a:spcPts val="1500"/>
               </a:spcAft>
             </a:pPr>
             <a:r>
-              <a:rPr sz="1700" b="1">
+              <a:rPr sz="1800" b="1">
                 <a:solidFill>
                   <a:srgbClr val="22D3EE"/>
                 </a:solidFill>
@@ -15172,23 +15170,23 @@
               <a:t>»  </a:t>
             </a:r>
             <a:r>
-              <a:rPr sz="1700" b="0">
+              <a:rPr sz="1800" b="0">
                 <a:solidFill>
                   <a:srgbClr val="C4D2E4"/>
                 </a:solidFill>
                 <a:latin typeface="Segoe UI"/>
               </a:rPr>
-              <a:t>Integrations: CI/CD gate, ticketing, SIEM export</a:t>
+              <a:t>Reach: the classes signatures miss (authz, session)</a:t>
             </a:r>
           </a:p>
           <a:p>
             <a:pPr>
               <a:spcAft>
-                <a:spcPts val="1000"/>
+                <a:spcPts val="1500"/>
               </a:spcAft>
             </a:pPr>
             <a:r>
-              <a:rPr sz="1700" b="1">
+              <a:rPr sz="1800" b="1">
                 <a:solidFill>
                   <a:srgbClr val="22D3EE"/>
                 </a:solidFill>
@@ -15197,23 +15195,23 @@
               <a:t>»  </a:t>
             </a:r>
             <a:r>
-              <a:rPr sz="1700" b="0">
+              <a:rPr sz="1800" b="0">
                 <a:solidFill>
                   <a:srgbClr val="C4D2E4"/>
                 </a:solidFill>
                 <a:latin typeface="Segoe UI"/>
               </a:rPr>
-              <a:t>Design partners: regulated, air-gap-first customers</a:t>
+              <a:t>Honesty: compliant controls and frontiers labeled, not faked</a:t>
             </a:r>
           </a:p>
           <a:p>
             <a:pPr>
               <a:spcAft>
-                <a:spcPts val="1000"/>
+                <a:spcPts val="1500"/>
               </a:spcAft>
             </a:pPr>
             <a:r>
-              <a:rPr sz="1700" b="1">
+              <a:rPr sz="1800" b="1">
                 <a:solidFill>
                   <a:srgbClr val="22D3EE"/>
                 </a:solidFill>
@@ -15222,20 +15220,20 @@
               <a:t>»  </a:t>
             </a:r>
             <a:r>
-              <a:rPr sz="1700" b="0">
+              <a:rPr sz="1800" b="0">
                 <a:solidFill>
                   <a:srgbClr val="C4D2E4"/>
                 </a:solidFill>
                 <a:latin typeface="Segoe UI"/>
               </a:rPr>
-              <a:t>Outcome: from autonomous finder to autonomous fixer</a:t>
-            </a:r>
-          </a:p>
-        </p:txBody>
-      </p:sp>
-      <p:sp>
-        <p:nvSpPr>
-          <p:cNvPr id="12" name="TextBox 11"/>
+              <a:t>Deployability: local, auditable, air-gap-ready</a:t>
+            </a:r>
+          </a:p>
+        </p:txBody>
+      </p:sp>
+      <p:sp>
+        <p:nvSpPr>
+          <p:cNvPr id="9" name="TextBox 8"/>
           <p:cNvSpPr txBox="1"/>
           <p:nvPr/>
         </p:nvSpPr>
@@ -15278,7 +15276,7 @@
       </p:sp>
       <p:sp>
         <p:nvSpPr>
-          <p:cNvPr id="13" name="TextBox 12"/>
+          <p:cNvPr id="10" name="TextBox 9"/>
           <p:cNvSpPr txBox="1"/>
           <p:nvPr/>
         </p:nvSpPr>
@@ -15306,7 +15304,7 @@
                 </a:solidFill>
                 <a:latin typeface="Consolas"/>
               </a:rPr>
-              <a:t>28 / 29</a:t>
+              <a:t>28 / 31</a:t>
             </a:r>
           </a:p>
         </p:txBody>
@@ -15331,7 +15329,7 @@
       <p:grpSpPr/>
       <p:pic>
         <p:nvPicPr>
-          <p:cNvPr id="2" name="Picture 1" descr="deck_bg_divider.png"/>
+          <p:cNvPr id="2" name="Picture 1" descr="deck_bg.png"/>
           <p:cNvPicPr>
             <a:picLocks noChangeAspect="1"/>
           </p:cNvPicPr>
@@ -15353,44 +15351,9 @@
           </a:prstGeom>
         </p:spPr>
       </p:pic>
-      <p:sp>
-        <p:nvSpPr>
-          <p:cNvPr id="3" name="TextBox 2"/>
-          <p:cNvSpPr txBox="1"/>
-          <p:nvPr/>
-        </p:nvSpPr>
-        <p:spPr>
-          <a:xfrm>
-            <a:off x="914400" y="2514600"/>
-            <a:ext cx="10362895" cy="1371600"/>
-          </a:xfrm>
-          <a:prstGeom prst="rect">
-            <a:avLst/>
-          </a:prstGeom>
-          <a:noFill/>
-        </p:spPr>
-        <p:txBody>
-          <a:bodyPr wrap="square" anchor="ctr" lIns="0" rIns="0" tIns="0" bIns="0">
-            <a:spAutoFit/>
-          </a:bodyPr>
-          <a:lstStyle/>
-          <a:p>
-            <a:pPr algn="ctr"/>
-            <a:r>
-              <a:rPr sz="4000" b="1">
-                <a:solidFill>
-                  <a:srgbClr val="EAF2FF"/>
-                </a:solidFill>
-                <a:latin typeface="Consolas"/>
-              </a:rPr>
-              <a:t>Reason. Prove. Remediate.</a:t>
-            </a:r>
-          </a:p>
-        </p:txBody>
-      </p:sp>
       <p:pic>
         <p:nvPicPr>
-          <p:cNvPr id="4" name="Picture 3" descr="deck_rule.png"/>
+          <p:cNvPr id="3" name="Picture 2" descr="sentinel_mark.png"/>
           <p:cNvPicPr>
             <a:picLocks noChangeAspect="1"/>
           </p:cNvPicPr>
@@ -15404,14 +15367,66 @@
         </p:blipFill>
         <p:spPr>
           <a:xfrm>
-            <a:off x="4541367" y="3977639"/>
-            <a:ext cx="3108960" cy="56692"/>
+            <a:off x="566928" y="457200"/>
+            <a:ext cx="749808" cy="749808"/>
           </a:xfrm>
           <a:prstGeom prst="rect">
             <a:avLst/>
           </a:prstGeom>
         </p:spPr>
       </p:pic>
+      <p:sp>
+        <p:nvSpPr>
+          <p:cNvPr id="4" name="Rounded Rectangle 3"/>
+          <p:cNvSpPr/>
+          <p:nvPr/>
+        </p:nvSpPr>
+        <p:spPr>
+          <a:xfrm>
+            <a:off x="10195560" y="457200"/>
+            <a:ext cx="1554480" cy="384048"/>
+          </a:xfrm>
+          <a:prstGeom prst="roundRect">
+            <a:avLst/>
+          </a:prstGeom>
+          <a:noFill/>
+          <a:ln w="12700">
+            <a:solidFill>
+              <a:srgbClr val="22D3EE"/>
+            </a:solidFill>
+          </a:ln>
+        </p:spPr>
+        <p:style>
+          <a:lnRef idx="1">
+            <a:schemeClr val="accent1"/>
+          </a:lnRef>
+          <a:fillRef idx="3">
+            <a:schemeClr val="accent1"/>
+          </a:fillRef>
+          <a:effectRef idx="2">
+            <a:schemeClr val="accent1"/>
+          </a:effectRef>
+          <a:fontRef idx="minor">
+            <a:schemeClr val="lt1"/>
+          </a:fontRef>
+        </p:style>
+        <p:txBody>
+          <a:bodyPr rtlCol="0" anchor="ctr" tIns="0" bIns="0"/>
+          <a:lstStyle/>
+          <a:p>
+            <a:pPr algn="ctr"/>
+            <a:r>
+              <a:rPr sz="1200" b="1">
+                <a:solidFill>
+                  <a:srgbClr val="22D3EE"/>
+                </a:solidFill>
+                <a:latin typeface="Consolas"/>
+              </a:rPr>
+              <a:t>AI KAVACH</a:t>
+            </a:r>
+          </a:p>
+        </p:txBody>
+      </p:sp>
       <p:sp>
         <p:nvSpPr>
           <p:cNvPr id="5" name="TextBox 4"/>
@@ -15420,8 +15435,66 @@
         </p:nvSpPr>
         <p:spPr>
           <a:xfrm>
-            <a:off x="914400" y="4160520"/>
-            <a:ext cx="10362895" cy="731520"/>
+            <a:off x="1508760" y="475488"/>
+            <a:ext cx="8503920" cy="1051560"/>
+          </a:xfrm>
+          <a:prstGeom prst="rect">
+            <a:avLst/>
+          </a:prstGeom>
+          <a:noFill/>
+        </p:spPr>
+        <p:txBody>
+          <a:bodyPr wrap="square" anchor="ctr" lIns="0" rIns="0" tIns="0" bIns="0">
+            <a:spAutoFit/>
+          </a:bodyPr>
+          <a:lstStyle/>
+          <a:p>
+            <a:r>
+              <a:rPr sz="3100" b="1">
+                <a:solidFill>
+                  <a:srgbClr val="EAF2FF"/>
+                </a:solidFill>
+                <a:latin typeface="Consolas"/>
+              </a:rPr>
+              <a:t>Status &amp; Roadmap</a:t>
+            </a:r>
+          </a:p>
+        </p:txBody>
+      </p:sp>
+      <p:pic>
+        <p:nvPicPr>
+          <p:cNvPr id="6" name="Picture 5" descr="deck_rule.png"/>
+          <p:cNvPicPr>
+            <a:picLocks noChangeAspect="1"/>
+          </p:cNvPicPr>
+          <p:nvPr/>
+        </p:nvPicPr>
+        <p:blipFill>
+          <a:blip r:embed="rId4"/>
+          <a:stretch>
+            <a:fillRect/>
+          </a:stretch>
+        </p:blipFill>
+        <p:spPr>
+          <a:xfrm>
+            <a:off x="640080" y="1664208"/>
+            <a:ext cx="3108960" cy="56692"/>
+          </a:xfrm>
+          <a:prstGeom prst="rect">
+            <a:avLst/>
+          </a:prstGeom>
+        </p:spPr>
+      </p:pic>
+      <p:sp>
+        <p:nvSpPr>
+          <p:cNvPr id="7" name="TextBox 6"/>
+          <p:cNvSpPr txBox="1"/>
+          <p:nvPr/>
+        </p:nvSpPr>
+        <p:spPr>
+          <a:xfrm>
+            <a:off x="658368" y="1847088"/>
+            <a:ext cx="10881360" cy="548640"/>
           </a:xfrm>
           <a:prstGeom prst="rect">
             <a:avLst/>
@@ -15434,15 +15507,240 @@
           </a:bodyPr>
           <a:lstStyle/>
           <a:p>
-            <a:pPr algn="ctr"/>
+            <a:r>
+              <a:rPr sz="1600" b="0">
+                <a:solidFill>
+                  <a:srgbClr val="22D3EE"/>
+                </a:solidFill>
+                <a:latin typeface="Consolas"/>
+              </a:rPr>
+              <a:t>Honest today; a clear path to more</a:t>
+            </a:r>
+          </a:p>
+        </p:txBody>
+      </p:sp>
+      <p:sp>
+        <p:nvSpPr>
+          <p:cNvPr id="8" name="TextBox 7"/>
+          <p:cNvSpPr txBox="1"/>
+          <p:nvPr/>
+        </p:nvSpPr>
+        <p:spPr>
+          <a:xfrm>
+            <a:off x="713232" y="2697480"/>
+            <a:ext cx="10789920" cy="3840480"/>
+          </a:xfrm>
+          <a:prstGeom prst="rect">
+            <a:avLst/>
+          </a:prstGeom>
+          <a:noFill/>
+        </p:spPr>
+        <p:txBody>
+          <a:bodyPr wrap="square" anchor="t" lIns="0" rIns="0" tIns="0" bIns="0">
+            <a:spAutoFit/>
+          </a:bodyPr>
+          <a:lstStyle/>
+          <a:p>
+            <a:pPr>
+              <a:spcAft>
+                <a:spcPts val="1500"/>
+              </a:spcAft>
+            </a:pPr>
+            <a:r>
+              <a:rPr sz="1800" b="1">
+                <a:solidFill>
+                  <a:srgbClr val="2DD48F"/>
+                </a:solidFill>
+                <a:latin typeface="Segoe UI"/>
+              </a:rPr>
+              <a:t>»  </a:t>
+            </a:r>
             <a:r>
               <a:rPr sz="1800" b="0">
                 <a:solidFill>
+                  <a:srgbClr val="EAF2FF"/>
+                </a:solidFill>
+                <a:latin typeface="Segoe UI"/>
+              </a:rPr>
+              <a:t>Today: 5 classes live end-to-end on 2 stacks; 122 tests</a:t>
+            </a:r>
+          </a:p>
+          <a:p>
+            <a:pPr>
+              <a:spcAft>
+                <a:spcPts val="1500"/>
+              </a:spcAft>
+            </a:pPr>
+            <a:r>
+              <a:rPr sz="1800" b="1">
+                <a:solidFill>
+                  <a:srgbClr val="2DD48F"/>
+                </a:solidFill>
+                <a:latin typeface="Segoe UI"/>
+              </a:rPr>
+              <a:t>»  </a:t>
+            </a:r>
+            <a:r>
+              <a:rPr sz="1800" b="0">
+                <a:solidFill>
+                  <a:srgbClr val="EAF2FF"/>
+                </a:solidFill>
+                <a:latin typeface="Segoe UI"/>
+              </a:rPr>
+              <a:t>Today: Login Tester + authenticated reasoning + chaining ingredients</a:t>
+            </a:r>
+          </a:p>
+          <a:p>
+            <a:pPr>
+              <a:spcAft>
+                <a:spcPts val="1500"/>
+              </a:spcAft>
+            </a:pPr>
+            <a:r>
+              <a:rPr sz="1800" b="1">
+                <a:solidFill>
+                  <a:srgbClr val="F5B301"/>
+                </a:solidFill>
+                <a:latin typeface="Segoe UI"/>
+              </a:rPr>
+              <a:t>»  </a:t>
+            </a:r>
+            <a:r>
+              <a:rPr sz="1800" b="0">
+                <a:solidFill>
+                  <a:srgbClr val="EAF2FF"/>
+                </a:solidFill>
+                <a:latin typeface="Segoe UI"/>
+              </a:rPr>
+              <a:t>Next: full causal chaining (compose proven ingredients)</a:t>
+            </a:r>
+          </a:p>
+          <a:p>
+            <a:pPr>
+              <a:spcAft>
+                <a:spcPts val="1500"/>
+              </a:spcAft>
+            </a:pPr>
+            <a:r>
+              <a:rPr sz="1800" b="1">
+                <a:solidFill>
+                  <a:srgbClr val="F5B301"/>
+                </a:solidFill>
+                <a:latin typeface="Segoe UI"/>
+              </a:rPr>
+              <a:t>»  </a:t>
+            </a:r>
+            <a:r>
+              <a:rPr sz="1800" b="0">
+                <a:solidFill>
+                  <a:srgbClr val="EAF2FF"/>
+                </a:solidFill>
+                <a:latin typeface="Segoe UI"/>
+              </a:rPr>
+              <a:t>Next: more OWASP classes (SSRF, XSS, mass assignment)</a:t>
+            </a:r>
+          </a:p>
+          <a:p>
+            <a:pPr>
+              <a:spcAft>
+                <a:spcPts val="1500"/>
+              </a:spcAft>
+            </a:pPr>
+            <a:r>
+              <a:rPr sz="1800" b="1">
+                <a:solidFill>
+                  <a:srgbClr val="F5B301"/>
+                </a:solidFill>
+                <a:latin typeface="Segoe UI"/>
+              </a:rPr>
+              <a:t>»  </a:t>
+            </a:r>
+            <a:r>
+              <a:rPr sz="1800" b="0">
+                <a:solidFill>
+                  <a:srgbClr val="EAF2FF"/>
+                </a:solidFill>
+                <a:latin typeface="Segoe UI"/>
+              </a:rPr>
+              <a:t>Next: CI/CD gate + policy library for common stacks</a:t>
+            </a:r>
+          </a:p>
+        </p:txBody>
+      </p:sp>
+      <p:sp>
+        <p:nvSpPr>
+          <p:cNvPr id="9" name="TextBox 8"/>
+          <p:cNvSpPr txBox="1"/>
+          <p:nvPr/>
+        </p:nvSpPr>
+        <p:spPr>
+          <a:xfrm>
+            <a:off x="566928" y="6382512"/>
+            <a:ext cx="8229600" cy="365760"/>
+          </a:xfrm>
+          <a:prstGeom prst="rect">
+            <a:avLst/>
+          </a:prstGeom>
+          <a:noFill/>
+        </p:spPr>
+        <p:txBody>
+          <a:bodyPr wrap="square" anchor="t" lIns="0" rIns="0" tIns="0" bIns="0">
+            <a:spAutoFit/>
+          </a:bodyPr>
+          <a:lstStyle/>
+          <a:p>
+            <a:r>
+              <a:rPr sz="1000" b="1">
+                <a:solidFill>
                   <a:srgbClr val="22D3EE"/>
                 </a:solidFill>
                 <a:latin typeface="Consolas"/>
               </a:rPr>
-              <a:t>Autonomous security you can actually trust</a:t>
+              <a:t>SENTINEL</a:t>
+            </a:r>
+            <a:r>
+              <a:rPr sz="1000" b="0">
+                <a:solidFill>
+                  <a:srgbClr val="6B7A90"/>
+                </a:solidFill>
+                <a:latin typeface="Consolas"/>
+              </a:rPr>
+              <a:t>   ·   find → reason → prove → patch → prove</a:t>
+            </a:r>
+          </a:p>
+        </p:txBody>
+      </p:sp>
+      <p:sp>
+        <p:nvSpPr>
+          <p:cNvPr id="10" name="TextBox 9"/>
+          <p:cNvSpPr txBox="1"/>
+          <p:nvPr/>
+        </p:nvSpPr>
+        <p:spPr>
+          <a:xfrm>
+            <a:off x="10789920" y="6382512"/>
+            <a:ext cx="914400" cy="365760"/>
+          </a:xfrm>
+          <a:prstGeom prst="rect">
+            <a:avLst/>
+          </a:prstGeom>
+          <a:noFill/>
+        </p:spPr>
+        <p:txBody>
+          <a:bodyPr wrap="square" anchor="t" lIns="0" rIns="0" tIns="0" bIns="0">
+            <a:spAutoFit/>
+          </a:bodyPr>
+          <a:lstStyle/>
+          <a:p>
+            <a:pPr algn="r"/>
+            <a:r>
+              <a:rPr sz="1000" b="0">
+                <a:solidFill>
+                  <a:srgbClr val="6B7A90"/>
+                </a:solidFill>
+                <a:latin typeface="Consolas"/>
+              </a:rPr>
+              <a:t>29 / 31</a:t>
             </a:r>
           </a:p>
         </p:txBody>
@@ -15878,7 +16176,771 @@
                 </a:solidFill>
                 <a:latin typeface="Consolas"/>
               </a:rPr>
-              <a:t>03 / 29</a:t>
+              <a:t>03 / 31</a:t>
+            </a:r>
+          </a:p>
+        </p:txBody>
+      </p:sp>
+    </p:spTree>
+  </p:cSld>
+  <p:clrMapOvr>
+    <a:masterClrMapping/>
+  </p:clrMapOvr>
+</p:sld>
+</file>
+
+<file path=ppt/slides/slide30.xml><?xml version="1.0" encoding="utf-8"?>
+<p:sld xmlns:a="http://schemas.openxmlformats.org/drawingml/2006/main" xmlns:p="http://schemas.openxmlformats.org/presentationml/2006/main" xmlns:r="http://schemas.openxmlformats.org/officeDocument/2006/relationships">
+  <p:cSld>
+    <p:spTree>
+      <p:nvGrpSpPr>
+        <p:cNvPr id="1" name=""/>
+        <p:cNvGrpSpPr/>
+        <p:nvPr/>
+      </p:nvGrpSpPr>
+      <p:grpSpPr/>
+      <p:pic>
+        <p:nvPicPr>
+          <p:cNvPr id="2" name="Picture 1" descr="deck_bg.png"/>
+          <p:cNvPicPr>
+            <a:picLocks noChangeAspect="1"/>
+          </p:cNvPicPr>
+          <p:nvPr/>
+        </p:nvPicPr>
+        <p:blipFill>
+          <a:blip r:embed="rId2"/>
+          <a:stretch>
+            <a:fillRect/>
+          </a:stretch>
+        </p:blipFill>
+        <p:spPr>
+          <a:xfrm>
+            <a:off x="0" y="0"/>
+            <a:ext cx="12191695" cy="6858000"/>
+          </a:xfrm>
+          <a:prstGeom prst="rect">
+            <a:avLst/>
+          </a:prstGeom>
+        </p:spPr>
+      </p:pic>
+      <p:pic>
+        <p:nvPicPr>
+          <p:cNvPr id="3" name="Picture 2" descr="sentinel_mark.png"/>
+          <p:cNvPicPr>
+            <a:picLocks noChangeAspect="1"/>
+          </p:cNvPicPr>
+          <p:nvPr/>
+        </p:nvPicPr>
+        <p:blipFill>
+          <a:blip r:embed="rId3"/>
+          <a:stretch>
+            <a:fillRect/>
+          </a:stretch>
+        </p:blipFill>
+        <p:spPr>
+          <a:xfrm>
+            <a:off x="566928" y="457200"/>
+            <a:ext cx="749808" cy="749808"/>
+          </a:xfrm>
+          <a:prstGeom prst="rect">
+            <a:avLst/>
+          </a:prstGeom>
+        </p:spPr>
+      </p:pic>
+      <p:sp>
+        <p:nvSpPr>
+          <p:cNvPr id="4" name="Rounded Rectangle 3"/>
+          <p:cNvSpPr/>
+          <p:nvPr/>
+        </p:nvSpPr>
+        <p:spPr>
+          <a:xfrm>
+            <a:off x="10195560" y="457200"/>
+            <a:ext cx="1554480" cy="384048"/>
+          </a:xfrm>
+          <a:prstGeom prst="roundRect">
+            <a:avLst/>
+          </a:prstGeom>
+          <a:noFill/>
+          <a:ln w="12700">
+            <a:solidFill>
+              <a:srgbClr val="22D3EE"/>
+            </a:solidFill>
+          </a:ln>
+        </p:spPr>
+        <p:style>
+          <a:lnRef idx="1">
+            <a:schemeClr val="accent1"/>
+          </a:lnRef>
+          <a:fillRef idx="3">
+            <a:schemeClr val="accent1"/>
+          </a:fillRef>
+          <a:effectRef idx="2">
+            <a:schemeClr val="accent1"/>
+          </a:effectRef>
+          <a:fontRef idx="minor">
+            <a:schemeClr val="lt1"/>
+          </a:fontRef>
+        </p:style>
+        <p:txBody>
+          <a:bodyPr rtlCol="0" anchor="ctr" tIns="0" bIns="0"/>
+          <a:lstStyle/>
+          <a:p>
+            <a:pPr algn="ctr"/>
+            <a:r>
+              <a:rPr sz="1200" b="1">
+                <a:solidFill>
+                  <a:srgbClr val="22D3EE"/>
+                </a:solidFill>
+                <a:latin typeface="Consolas"/>
+              </a:rPr>
+              <a:t>AI KAVACH</a:t>
+            </a:r>
+          </a:p>
+        </p:txBody>
+      </p:sp>
+      <p:sp>
+        <p:nvSpPr>
+          <p:cNvPr id="5" name="TextBox 4"/>
+          <p:cNvSpPr txBox="1"/>
+          <p:nvPr/>
+        </p:nvSpPr>
+        <p:spPr>
+          <a:xfrm>
+            <a:off x="1508760" y="475488"/>
+            <a:ext cx="8503920" cy="1051560"/>
+          </a:xfrm>
+          <a:prstGeom prst="rect">
+            <a:avLst/>
+          </a:prstGeom>
+          <a:noFill/>
+        </p:spPr>
+        <p:txBody>
+          <a:bodyPr wrap="square" anchor="ctr" lIns="0" rIns="0" tIns="0" bIns="0">
+            <a:spAutoFit/>
+          </a:bodyPr>
+          <a:lstStyle/>
+          <a:p>
+            <a:r>
+              <a:rPr sz="3100" b="1">
+                <a:solidFill>
+                  <a:srgbClr val="EAF2FF"/>
+                </a:solidFill>
+                <a:latin typeface="Consolas"/>
+              </a:rPr>
+              <a:t>The Ask</a:t>
+            </a:r>
+          </a:p>
+        </p:txBody>
+      </p:sp>
+      <p:pic>
+        <p:nvPicPr>
+          <p:cNvPr id="6" name="Picture 5" descr="deck_rule.png"/>
+          <p:cNvPicPr>
+            <a:picLocks noChangeAspect="1"/>
+          </p:cNvPicPr>
+          <p:nvPr/>
+        </p:nvPicPr>
+        <p:blipFill>
+          <a:blip r:embed="rId4"/>
+          <a:stretch>
+            <a:fillRect/>
+          </a:stretch>
+        </p:blipFill>
+        <p:spPr>
+          <a:xfrm>
+            <a:off x="640080" y="1664208"/>
+            <a:ext cx="3108960" cy="56692"/>
+          </a:xfrm>
+          <a:prstGeom prst="rect">
+            <a:avLst/>
+          </a:prstGeom>
+        </p:spPr>
+      </p:pic>
+      <p:sp>
+        <p:nvSpPr>
+          <p:cNvPr id="7" name="TextBox 6"/>
+          <p:cNvSpPr txBox="1"/>
+          <p:nvPr/>
+        </p:nvSpPr>
+        <p:spPr>
+          <a:xfrm>
+            <a:off x="658368" y="1847088"/>
+            <a:ext cx="10881360" cy="548640"/>
+          </a:xfrm>
+          <a:prstGeom prst="rect">
+            <a:avLst/>
+          </a:prstGeom>
+          <a:noFill/>
+        </p:spPr>
+        <p:txBody>
+          <a:bodyPr wrap="square" anchor="t" lIns="0" rIns="0" tIns="0" bIns="0">
+            <a:spAutoFit/>
+          </a:bodyPr>
+          <a:lstStyle/>
+          <a:p>
+            <a:r>
+              <a:rPr sz="1600" b="0">
+                <a:solidFill>
+                  <a:srgbClr val="22D3EE"/>
+                </a:solidFill>
+                <a:latin typeface="Consolas"/>
+              </a:rPr>
+              <a:t>$1M to turn a proven engine into a platform</a:t>
+            </a:r>
+          </a:p>
+        </p:txBody>
+      </p:sp>
+      <p:sp>
+        <p:nvSpPr>
+          <p:cNvPr id="8" name="Rounded Rectangle 7"/>
+          <p:cNvSpPr/>
+          <p:nvPr/>
+        </p:nvSpPr>
+        <p:spPr>
+          <a:xfrm>
+            <a:off x="603504" y="2395728"/>
+            <a:ext cx="3444240" cy="1143000"/>
+          </a:xfrm>
+          <a:prstGeom prst="roundRect">
+            <a:avLst/>
+          </a:prstGeom>
+          <a:noFill/>
+          <a:ln w="12700">
+            <a:solidFill>
+              <a:srgbClr val="22D3EE"/>
+            </a:solidFill>
+          </a:ln>
+        </p:spPr>
+        <p:style>
+          <a:lnRef idx="1">
+            <a:schemeClr val="accent1"/>
+          </a:lnRef>
+          <a:fillRef idx="3">
+            <a:schemeClr val="accent1"/>
+          </a:fillRef>
+          <a:effectRef idx="2">
+            <a:schemeClr val="accent1"/>
+          </a:effectRef>
+          <a:fontRef idx="minor">
+            <a:schemeClr val="lt1"/>
+          </a:fontRef>
+        </p:style>
+        <p:txBody>
+          <a:bodyPr rtlCol="0" anchor="ctr"/>
+          <a:lstStyle/>
+          <a:p>
+            <a:pPr algn="ctr"/>
+            <a:r>
+              <a:rPr sz="3200" b="1">
+                <a:solidFill>
+                  <a:srgbClr val="22D3EE"/>
+                </a:solidFill>
+                <a:latin typeface="Consolas"/>
+              </a:rPr>
+              <a:t>$1M</a:t>
+            </a:r>
+          </a:p>
+          <a:p>
+            <a:pPr algn="ctr"/>
+            <a:r>
+              <a:rPr sz="1100" b="0">
+                <a:solidFill>
+                  <a:srgbClr val="6B7A90"/>
+                </a:solidFill>
+                <a:latin typeface="Consolas"/>
+              </a:rPr>
+              <a:t>SEED</a:t>
+            </a:r>
+          </a:p>
+        </p:txBody>
+      </p:sp>
+      <p:sp>
+        <p:nvSpPr>
+          <p:cNvPr id="9" name="Rounded Rectangle 8"/>
+          <p:cNvSpPr/>
+          <p:nvPr/>
+        </p:nvSpPr>
+        <p:spPr>
+          <a:xfrm>
+            <a:off x="4367784" y="2395728"/>
+            <a:ext cx="3444240" cy="1143000"/>
+          </a:xfrm>
+          <a:prstGeom prst="roundRect">
+            <a:avLst/>
+          </a:prstGeom>
+          <a:noFill/>
+          <a:ln w="12700">
+            <a:solidFill>
+              <a:srgbClr val="22D3EE"/>
+            </a:solidFill>
+          </a:ln>
+        </p:spPr>
+        <p:style>
+          <a:lnRef idx="1">
+            <a:schemeClr val="accent1"/>
+          </a:lnRef>
+          <a:fillRef idx="3">
+            <a:schemeClr val="accent1"/>
+          </a:fillRef>
+          <a:effectRef idx="2">
+            <a:schemeClr val="accent1"/>
+          </a:effectRef>
+          <a:fontRef idx="minor">
+            <a:schemeClr val="lt1"/>
+          </a:fontRef>
+        </p:style>
+        <p:txBody>
+          <a:bodyPr rtlCol="0" anchor="ctr"/>
+          <a:lstStyle/>
+          <a:p>
+            <a:pPr algn="ctr"/>
+            <a:r>
+              <a:rPr sz="3200" b="1">
+                <a:solidFill>
+                  <a:srgbClr val="22D3EE"/>
+                </a:solidFill>
+                <a:latin typeface="Consolas"/>
+              </a:rPr>
+              <a:t>18</a:t>
+            </a:r>
+          </a:p>
+          <a:p>
+            <a:pPr algn="ctr"/>
+            <a:r>
+              <a:rPr sz="1100" b="0">
+                <a:solidFill>
+                  <a:srgbClr val="6B7A90"/>
+                </a:solidFill>
+                <a:latin typeface="Consolas"/>
+              </a:rPr>
+              <a:t>MONTHS RUNWAY</a:t>
+            </a:r>
+          </a:p>
+        </p:txBody>
+      </p:sp>
+      <p:sp>
+        <p:nvSpPr>
+          <p:cNvPr id="10" name="Rounded Rectangle 9"/>
+          <p:cNvSpPr/>
+          <p:nvPr/>
+        </p:nvSpPr>
+        <p:spPr>
+          <a:xfrm>
+            <a:off x="8132064" y="2395728"/>
+            <a:ext cx="3444240" cy="1143000"/>
+          </a:xfrm>
+          <a:prstGeom prst="roundRect">
+            <a:avLst/>
+          </a:prstGeom>
+          <a:noFill/>
+          <a:ln w="12700">
+            <a:solidFill>
+              <a:srgbClr val="22D3EE"/>
+            </a:solidFill>
+          </a:ln>
+        </p:spPr>
+        <p:style>
+          <a:lnRef idx="1">
+            <a:schemeClr val="accent1"/>
+          </a:lnRef>
+          <a:fillRef idx="3">
+            <a:schemeClr val="accent1"/>
+          </a:fillRef>
+          <a:effectRef idx="2">
+            <a:schemeClr val="accent1"/>
+          </a:effectRef>
+          <a:fontRef idx="minor">
+            <a:schemeClr val="lt1"/>
+          </a:fontRef>
+        </p:style>
+        <p:txBody>
+          <a:bodyPr rtlCol="0" anchor="ctr"/>
+          <a:lstStyle/>
+          <a:p>
+            <a:pPr algn="ctr"/>
+            <a:r>
+              <a:rPr sz="3200" b="1">
+                <a:solidFill>
+                  <a:srgbClr val="22D3EE"/>
+                </a:solidFill>
+                <a:latin typeface="Consolas"/>
+              </a:rPr>
+              <a:t>5→8</a:t>
+            </a:r>
+          </a:p>
+          <a:p>
+            <a:pPr algn="ctr"/>
+            <a:r>
+              <a:rPr sz="1100" b="0">
+                <a:solidFill>
+                  <a:srgbClr val="6B7A90"/>
+                </a:solidFill>
+                <a:latin typeface="Consolas"/>
+              </a:rPr>
+              <a:t>VULN CLASSES</a:t>
+            </a:r>
+          </a:p>
+        </p:txBody>
+      </p:sp>
+      <p:sp>
+        <p:nvSpPr>
+          <p:cNvPr id="11" name="TextBox 10"/>
+          <p:cNvSpPr txBox="1"/>
+          <p:nvPr/>
+        </p:nvSpPr>
+        <p:spPr>
+          <a:xfrm>
+            <a:off x="713232" y="3840480"/>
+            <a:ext cx="10789920" cy="3840480"/>
+          </a:xfrm>
+          <a:prstGeom prst="rect">
+            <a:avLst/>
+          </a:prstGeom>
+          <a:noFill/>
+        </p:spPr>
+        <p:txBody>
+          <a:bodyPr wrap="square" anchor="t" lIns="0" rIns="0" tIns="0" bIns="0">
+            <a:spAutoFit/>
+          </a:bodyPr>
+          <a:lstStyle/>
+          <a:p>
+            <a:pPr>
+              <a:spcAft>
+                <a:spcPts val="1000"/>
+              </a:spcAft>
+            </a:pPr>
+            <a:r>
+              <a:rPr sz="1700" b="1">
+                <a:solidFill>
+                  <a:srgbClr val="22D3EE"/>
+                </a:solidFill>
+                <a:latin typeface="Segoe UI"/>
+              </a:rPr>
+              <a:t>»  </a:t>
+            </a:r>
+            <a:r>
+              <a:rPr sz="1700" b="0">
+                <a:solidFill>
+                  <a:srgbClr val="C4D2E4"/>
+                </a:solidFill>
+                <a:latin typeface="Segoe UI"/>
+              </a:rPr>
+              <a:t>Engineering: full chaining + the next OWASP classes</a:t>
+            </a:r>
+          </a:p>
+          <a:p>
+            <a:pPr>
+              <a:spcAft>
+                <a:spcPts val="1000"/>
+              </a:spcAft>
+            </a:pPr>
+            <a:r>
+              <a:rPr sz="1700" b="1">
+                <a:solidFill>
+                  <a:srgbClr val="22D3EE"/>
+                </a:solidFill>
+                <a:latin typeface="Segoe UI"/>
+              </a:rPr>
+              <a:t>»  </a:t>
+            </a:r>
+            <a:r>
+              <a:rPr sz="1700" b="0">
+                <a:solidFill>
+                  <a:srgbClr val="C4D2E4"/>
+                </a:solidFill>
+                <a:latin typeface="Segoe UI"/>
+              </a:rPr>
+              <a:t>Policy library: ready-made oracles for common stacks</a:t>
+            </a:r>
+          </a:p>
+          <a:p>
+            <a:pPr>
+              <a:spcAft>
+                <a:spcPts val="1000"/>
+              </a:spcAft>
+            </a:pPr>
+            <a:r>
+              <a:rPr sz="1700" b="1">
+                <a:solidFill>
+                  <a:srgbClr val="22D3EE"/>
+                </a:solidFill>
+                <a:latin typeface="Segoe UI"/>
+              </a:rPr>
+              <a:t>»  </a:t>
+            </a:r>
+            <a:r>
+              <a:rPr sz="1700" b="0">
+                <a:solidFill>
+                  <a:srgbClr val="C4D2E4"/>
+                </a:solidFill>
+                <a:latin typeface="Segoe UI"/>
+              </a:rPr>
+              <a:t>Integrations: CI/CD gate, ticketing, SIEM export</a:t>
+            </a:r>
+          </a:p>
+          <a:p>
+            <a:pPr>
+              <a:spcAft>
+                <a:spcPts val="1000"/>
+              </a:spcAft>
+            </a:pPr>
+            <a:r>
+              <a:rPr sz="1700" b="1">
+                <a:solidFill>
+                  <a:srgbClr val="22D3EE"/>
+                </a:solidFill>
+                <a:latin typeface="Segoe UI"/>
+              </a:rPr>
+              <a:t>»  </a:t>
+            </a:r>
+            <a:r>
+              <a:rPr sz="1700" b="0">
+                <a:solidFill>
+                  <a:srgbClr val="C4D2E4"/>
+                </a:solidFill>
+                <a:latin typeface="Segoe UI"/>
+              </a:rPr>
+              <a:t>Design partners: regulated, air-gap-first customers</a:t>
+            </a:r>
+          </a:p>
+          <a:p>
+            <a:pPr>
+              <a:spcAft>
+                <a:spcPts val="1000"/>
+              </a:spcAft>
+            </a:pPr>
+            <a:r>
+              <a:rPr sz="1700" b="1">
+                <a:solidFill>
+                  <a:srgbClr val="22D3EE"/>
+                </a:solidFill>
+                <a:latin typeface="Segoe UI"/>
+              </a:rPr>
+              <a:t>»  </a:t>
+            </a:r>
+            <a:r>
+              <a:rPr sz="1700" b="0">
+                <a:solidFill>
+                  <a:srgbClr val="C4D2E4"/>
+                </a:solidFill>
+                <a:latin typeface="Segoe UI"/>
+              </a:rPr>
+              <a:t>Outcome: from autonomous finder to autonomous fixer</a:t>
+            </a:r>
+          </a:p>
+        </p:txBody>
+      </p:sp>
+      <p:sp>
+        <p:nvSpPr>
+          <p:cNvPr id="12" name="TextBox 11"/>
+          <p:cNvSpPr txBox="1"/>
+          <p:nvPr/>
+        </p:nvSpPr>
+        <p:spPr>
+          <a:xfrm>
+            <a:off x="566928" y="6382512"/>
+            <a:ext cx="8229600" cy="365760"/>
+          </a:xfrm>
+          <a:prstGeom prst="rect">
+            <a:avLst/>
+          </a:prstGeom>
+          <a:noFill/>
+        </p:spPr>
+        <p:txBody>
+          <a:bodyPr wrap="square" anchor="t" lIns="0" rIns="0" tIns="0" bIns="0">
+            <a:spAutoFit/>
+          </a:bodyPr>
+          <a:lstStyle/>
+          <a:p>
+            <a:r>
+              <a:rPr sz="1000" b="1">
+                <a:solidFill>
+                  <a:srgbClr val="22D3EE"/>
+                </a:solidFill>
+                <a:latin typeface="Consolas"/>
+              </a:rPr>
+              <a:t>SENTINEL</a:t>
+            </a:r>
+            <a:r>
+              <a:rPr sz="1000" b="0">
+                <a:solidFill>
+                  <a:srgbClr val="6B7A90"/>
+                </a:solidFill>
+                <a:latin typeface="Consolas"/>
+              </a:rPr>
+              <a:t>   ·   find → reason → prove → patch → prove</a:t>
+            </a:r>
+          </a:p>
+        </p:txBody>
+      </p:sp>
+      <p:sp>
+        <p:nvSpPr>
+          <p:cNvPr id="13" name="TextBox 12"/>
+          <p:cNvSpPr txBox="1"/>
+          <p:nvPr/>
+        </p:nvSpPr>
+        <p:spPr>
+          <a:xfrm>
+            <a:off x="10789920" y="6382512"/>
+            <a:ext cx="914400" cy="365760"/>
+          </a:xfrm>
+          <a:prstGeom prst="rect">
+            <a:avLst/>
+          </a:prstGeom>
+          <a:noFill/>
+        </p:spPr>
+        <p:txBody>
+          <a:bodyPr wrap="square" anchor="t" lIns="0" rIns="0" tIns="0" bIns="0">
+            <a:spAutoFit/>
+          </a:bodyPr>
+          <a:lstStyle/>
+          <a:p>
+            <a:pPr algn="r"/>
+            <a:r>
+              <a:rPr sz="1000" b="0">
+                <a:solidFill>
+                  <a:srgbClr val="6B7A90"/>
+                </a:solidFill>
+                <a:latin typeface="Consolas"/>
+              </a:rPr>
+              <a:t>30 / 31</a:t>
+            </a:r>
+          </a:p>
+        </p:txBody>
+      </p:sp>
+    </p:spTree>
+  </p:cSld>
+  <p:clrMapOvr>
+    <a:masterClrMapping/>
+  </p:clrMapOvr>
+</p:sld>
+</file>
+
+<file path=ppt/slides/slide31.xml><?xml version="1.0" encoding="utf-8"?>
+<p:sld xmlns:a="http://schemas.openxmlformats.org/drawingml/2006/main" xmlns:p="http://schemas.openxmlformats.org/presentationml/2006/main" xmlns:r="http://schemas.openxmlformats.org/officeDocument/2006/relationships">
+  <p:cSld>
+    <p:spTree>
+      <p:nvGrpSpPr>
+        <p:cNvPr id="1" name=""/>
+        <p:cNvGrpSpPr/>
+        <p:nvPr/>
+      </p:nvGrpSpPr>
+      <p:grpSpPr/>
+      <p:pic>
+        <p:nvPicPr>
+          <p:cNvPr id="2" name="Picture 1" descr="deck_bg_divider.png"/>
+          <p:cNvPicPr>
+            <a:picLocks noChangeAspect="1"/>
+          </p:cNvPicPr>
+          <p:nvPr/>
+        </p:nvPicPr>
+        <p:blipFill>
+          <a:blip r:embed="rId2"/>
+          <a:stretch>
+            <a:fillRect/>
+          </a:stretch>
+        </p:blipFill>
+        <p:spPr>
+          <a:xfrm>
+            <a:off x="0" y="0"/>
+            <a:ext cx="12191695" cy="6858000"/>
+          </a:xfrm>
+          <a:prstGeom prst="rect">
+            <a:avLst/>
+          </a:prstGeom>
+        </p:spPr>
+      </p:pic>
+      <p:sp>
+        <p:nvSpPr>
+          <p:cNvPr id="3" name="TextBox 2"/>
+          <p:cNvSpPr txBox="1"/>
+          <p:nvPr/>
+        </p:nvSpPr>
+        <p:spPr>
+          <a:xfrm>
+            <a:off x="914400" y="2514600"/>
+            <a:ext cx="10362895" cy="1371600"/>
+          </a:xfrm>
+          <a:prstGeom prst="rect">
+            <a:avLst/>
+          </a:prstGeom>
+          <a:noFill/>
+        </p:spPr>
+        <p:txBody>
+          <a:bodyPr wrap="square" anchor="ctr" lIns="0" rIns="0" tIns="0" bIns="0">
+            <a:spAutoFit/>
+          </a:bodyPr>
+          <a:lstStyle/>
+          <a:p>
+            <a:pPr algn="ctr"/>
+            <a:r>
+              <a:rPr sz="4000" b="1">
+                <a:solidFill>
+                  <a:srgbClr val="EAF2FF"/>
+                </a:solidFill>
+                <a:latin typeface="Consolas"/>
+              </a:rPr>
+              <a:t>Reason. Prove. Remediate.</a:t>
+            </a:r>
+          </a:p>
+        </p:txBody>
+      </p:sp>
+      <p:pic>
+        <p:nvPicPr>
+          <p:cNvPr id="4" name="Picture 3" descr="deck_rule.png"/>
+          <p:cNvPicPr>
+            <a:picLocks noChangeAspect="1"/>
+          </p:cNvPicPr>
+          <p:nvPr/>
+        </p:nvPicPr>
+        <p:blipFill>
+          <a:blip r:embed="rId3"/>
+          <a:stretch>
+            <a:fillRect/>
+          </a:stretch>
+        </p:blipFill>
+        <p:spPr>
+          <a:xfrm>
+            <a:off x="4541367" y="3977639"/>
+            <a:ext cx="3108960" cy="56692"/>
+          </a:xfrm>
+          <a:prstGeom prst="rect">
+            <a:avLst/>
+          </a:prstGeom>
+        </p:spPr>
+      </p:pic>
+      <p:sp>
+        <p:nvSpPr>
+          <p:cNvPr id="5" name="TextBox 4"/>
+          <p:cNvSpPr txBox="1"/>
+          <p:nvPr/>
+        </p:nvSpPr>
+        <p:spPr>
+          <a:xfrm>
+            <a:off x="914400" y="4160520"/>
+            <a:ext cx="10362895" cy="731520"/>
+          </a:xfrm>
+          <a:prstGeom prst="rect">
+            <a:avLst/>
+          </a:prstGeom>
+          <a:noFill/>
+        </p:spPr>
+        <p:txBody>
+          <a:bodyPr wrap="square" anchor="t" lIns="0" rIns="0" tIns="0" bIns="0">
+            <a:spAutoFit/>
+          </a:bodyPr>
+          <a:lstStyle/>
+          <a:p>
+            <a:pPr algn="ctr"/>
+            <a:r>
+              <a:rPr sz="1800" b="0">
+                <a:solidFill>
+                  <a:srgbClr val="22D3EE"/>
+                </a:solidFill>
+                <a:latin typeface="Consolas"/>
+              </a:rPr>
+              <a:t>Autonomous security you can actually trust</a:t>
             </a:r>
           </a:p>
         </p:txBody>
@@ -16314,7 +17376,7 @@
                 </a:solidFill>
                 <a:latin typeface="Consolas"/>
               </a:rPr>
-              <a:t>04 / 29</a:t>
+              <a:t>04 / 31</a:t>
             </a:r>
           </a:p>
         </p:txBody>
@@ -16750,7 +17812,7 @@
                 </a:solidFill>
                 <a:latin typeface="Consolas"/>
               </a:rPr>
-              <a:t>05 / 29</a:t>
+              <a:t>05 / 31</a:t>
             </a:r>
           </a:p>
         </p:txBody>
@@ -17322,7 +18384,7 @@
                 </a:solidFill>
                 <a:latin typeface="Consolas"/>
               </a:rPr>
-              <a:t>07 / 29</a:t>
+              <a:t>07 / 31</a:t>
             </a:r>
           </a:p>
         </p:txBody>
@@ -17758,7 +18820,7 @@
                 </a:solidFill>
                 <a:latin typeface="Consolas"/>
               </a:rPr>
-              <a:t>08 / 29</a:t>
+              <a:t>08 / 31</a:t>
             </a:r>
           </a:p>
         </p:txBody>
@@ -18066,7 +19128,7 @@
                 </a:solidFill>
                 <a:latin typeface="Segoe UI"/>
               </a:rPr>
-              <a:t>Pure judges per class: authorization, header posture, cookies</a:t>
+              <a:t>A pure judge per class: authz, posture, cookies, privesc, injection</a:t>
             </a:r>
           </a:p>
           <a:p>
@@ -18194,7 +19256,7 @@
                 </a:solidFill>
                 <a:latin typeface="Consolas"/>
               </a:rPr>
-              <a:t>09 / 29</a:t>
+              <a:t>09 / 31</a:t>
             </a:r>
           </a:p>
         </p:txBody>

--- a/deck/Sentinel_AI_Kavach.pptx
+++ b/deck/Sentinel_AI_Kavach.pptx
@@ -36,6 +36,8 @@
     <p:sldId id="284" r:id="rId36"/>
     <p:sldId id="285" r:id="rId37"/>
     <p:sldId id="286" r:id="rId38"/>
+    <p:sldId id="287" r:id="rId39"/>
+    <p:sldId id="288" r:id="rId40"/>
   </p:sldIdLst>
   <p:sldSz cx="12191695" cy="6858000" type="screen4x3"/>
   <p:notesSz cx="6858000" cy="9144000"/>
@@ -952,7 +954,7 @@
           <a:lstStyle/>
           <a:p>
             <a:r>
-              <a:t>Sentinel is not a one-trick demo. Five independent classes each run the entire loop end-to-end against live targets.</a:t>
+              <a:t>Sentinel is not a one-trick demo. Ten independent classes each run the entire loop end-to-end against live targets — every one gated by the same epistemic contract.</a:t>
             </a:r>
           </a:p>
         </p:txBody>
@@ -1442,7 +1444,7 @@
           <a:lstStyle/>
           <a:p>
             <a:r>
-              <a:t>The Login Tester unlocks the authenticated surface. Sentinel opens a visible browser, waits for you (including MFA), auto-detects success, and reasons over the real session — with credentials handled in memory only, never persisted or logged.</a:t>
+              <a:t>Coverage doubled without loosening the bar. SSTI confirms only when injected arithmetic actually evaluates; open-redirect and CORS each ride a two-probe differential against an unroutable nonce that is observed or echoed but never contacted; SSRF proves the fetch by an out-of-band callback to Sentinel's own loopback beacon; broken-auth replays a genuine, a forged, and an absent token. Ten classes, one contract.</a:t>
             </a:r>
           </a:p>
         </p:txBody>
@@ -1512,7 +1514,7 @@
           <a:lstStyle/>
           <a:p>
             <a:r>
-              <a:t>Chaining is where scanners over-claim. Sentinel proves each ingredient of a session-theft→authenticated-access chain independently and presents them together — but it does not auto-compose a causal exploit narrative. Honesty is the moat.</a:t>
+              <a:t>The two most sophisticated classes are also where honesty matters most. SSRF needs no operator oracle — the only URL Sentinel ever injects is its own loopback collaborator, so a callback is unambiguous and safe. Broken-auth confirms only when a token Sentinel itself minted (carrying a benign marker) is accepted as the sole authenticator. And when a fix cannot be proven by a request-guard — HS256-confusion or a cracked weak secret — Sentinel returns ADVISORY_ONLY with the durable handler-side fix, rather than manufacturing a fix-proof.</a:t>
             </a:r>
           </a:p>
         </p:txBody>
@@ -1582,7 +1584,7 @@
           <a:lstStyle/>
           <a:p>
             <a:r>
-              <a:t>Target-agnosticism is structural: the engine carries no target-specific code, only the operator's oracle changes. We've run the full loop on two independent stacks — Juice Shop and VAmPI — to prove it generalizes.</a:t>
+              <a:t>The Login Tester unlocks the authenticated surface. Sentinel opens a visible browser, waits for you (including MFA), auto-detects success, and reasons over the real session — with credentials handled in memory only, never persisted or logged.</a:t>
             </a:r>
           </a:p>
         </p:txBody>
@@ -1652,7 +1654,7 @@
           <a:lstStyle/>
           <a:p>
             <a:r>
-              <a:t>Validation is first-class. The offline suite is deterministic and network-free; the single skip is the browser test that only runs with the opt-in extra. Tests cover confirmation, remediation proof, isolation, and — crucially — that compliant controls produce no finding.</a:t>
+              <a:t>Chaining is where scanners over-claim. Sentinel proves each ingredient of a session-theft→authenticated-access chain independently and presents them together — but it does not auto-compose a causal exploit narrative. Honesty is the moat.</a:t>
             </a:r>
           </a:p>
         </p:txBody>
@@ -1722,7 +1724,7 @@
           <a:lstStyle/>
           <a:p>
             <a:r>
-              <a:t>Local-first is a feature, not a limitation. The reasoning model runs on-box, the deterministic core works even if the model is down, and nothing egresses — which makes Sentinel deployable in air-gapped and regulated settings.</a:t>
+              <a:t>Target-agnosticism is structural: the engine carries no target-specific code, only the operator's oracle changes. We've run the full loop on two independent stacks — Juice Shop and VAmPI — to prove it generalizes.</a:t>
             </a:r>
           </a:p>
         </p:txBody>
@@ -1792,7 +1794,7 @@
           <a:lstStyle/>
           <a:p>
             <a:r>
-              <a:t>Autonomy is bounded by design: scope is enforced before a socket opens, probes are non-destructive, the shield is loopback-only, and the acting and judging stages are strictly separated. Credential handling is memory-only.</a:t>
+              <a:t>Validation is first-class. The offline suite is deterministic and network-free; the single skip is the browser test that only runs with the opt-in extra. Tests cover confirmation, remediation proof, isolation, and — crucially — that compliant controls produce no finding.</a:t>
             </a:r>
           </a:p>
         </p:txBody>
@@ -1862,7 +1864,7 @@
           <a:lstStyle/>
           <a:p>
             <a:r>
-              <a:t>Category-level, not a bake-off: signature scanners are fast but noisy and miss authorization; DAST and fuzzers explore but don't reason about intent or prove fixes. Sentinel's column is defined by reproduced verdicts, live fix-proofs, and full auditability.</a:t>
+              <a:t>Local-first is a feature, not a limitation. The reasoning model runs on-box, the deterministic core works even if the model is down, and nothing egresses — which makes Sentinel deployable in air-gapped and regulated settings.</a:t>
             </a:r>
           </a:p>
         </p:txBody>
@@ -1932,7 +1934,7 @@
           <a:lstStyle/>
           <a:p>
             <a:r>
-              <a:t>The wedge is trust plus closure: verdicts you can believe and fixes you can prove, in the classes that matter most, deployable where the sensitive targets actually live. Honesty about limits is itself a differentiator.</a:t>
+              <a:t>Autonomy is bounded by design: scope is enforced before a socket opens, probes are non-destructive, the shield is loopback-only, and the acting and judging stages are strictly separated. Credential handling is memory-only.</a:t>
             </a:r>
           </a:p>
         </p:txBody>
@@ -2002,7 +2004,7 @@
           <a:lstStyle/>
           <a:p>
             <a:r>
-              <a:t>We're candid about the line between done and next. Five classes, two targets, the Login Tester, and chaining ingredients ship today; full causal chaining, more classes, and a CI gate are the roadmap.</a:t>
+              <a:t>Category-level, not a bake-off: signature scanners are fast but noisy and miss authorization; DAST and fuzzers explore but don't reason about intent or prove fixes. Sentinel's column is defined by reproduced verdicts, live fix-proofs, and full auditability.</a:t>
             </a:r>
           </a:p>
         </p:txBody>
@@ -2142,7 +2144,7 @@
           <a:lstStyle/>
           <a:p>
             <a:r>
-              <a:t>We're raising $1M for ~18 months to expand the class coverage, ship full chaining, build a policy library and CI integrations, and land design partners in regulated environments where local-first is a hard requirement.</a:t>
+              <a:t>The wedge is trust plus closure: verdicts you can believe and fixes you can prove, in the classes that matter most, deployable where the sensitive targets actually live. Honesty about limits is itself a differentiator.</a:t>
             </a:r>
           </a:p>
         </p:txBody>
@@ -2168,6 +2170,146 @@
 </file>
 
 <file path=ppt/notesSlides/notesSlide31.xml><?xml version="1.0" encoding="utf-8"?>
+<p:notes xmlns:a="http://schemas.openxmlformats.org/drawingml/2006/main" xmlns:p="http://schemas.openxmlformats.org/presentationml/2006/main" xmlns:r="http://schemas.openxmlformats.org/officeDocument/2006/relationships">
+  <p:cSld>
+    <p:spTree>
+      <p:nvGrpSpPr>
+        <p:cNvPr id="1" name=""/>
+        <p:cNvGrpSpPr/>
+        <p:nvPr/>
+      </p:nvGrpSpPr>
+      <p:grpSpPr>
+        <a:xfrm>
+          <a:off x="0" y="0"/>
+          <a:ext cx="0" cy="0"/>
+          <a:chOff x="0" y="0"/>
+          <a:chExt cx="0" cy="0"/>
+        </a:xfrm>
+      </p:grpSpPr>
+      <p:sp>
+        <p:nvSpPr>
+          <p:cNvPr id="2" name="Slide Image Placeholder 1"/>
+          <p:cNvSpPr>
+            <a:spLocks noGrp="1"/>
+          </p:cNvSpPr>
+          <p:nvPr>
+            <p:ph type="sldImg" idx="2"/>
+          </p:nvPr>
+        </p:nvSpPr>
+        <p:spPr/>
+      </p:sp>
+      <p:sp>
+        <p:nvSpPr>
+          <p:cNvPr id="3" name="Notes Placeholder 2"/>
+          <p:cNvSpPr>
+            <a:spLocks noGrp="1"/>
+          </p:cNvSpPr>
+          <p:nvPr>
+            <p:ph type="body" idx="3" sz="quarter"/>
+          </p:nvPr>
+        </p:nvSpPr>
+        <p:spPr/>
+        <p:txBody>
+          <a:bodyPr/>
+          <a:lstStyle/>
+          <a:p>
+            <a:r>
+              <a:t>We're candid about the line between done and next. Ten classes, two targets, the Login Tester, and chaining ingredients ship today; provable 2-link chaining, the last two OWASP classes (reflected XSS + path traversal), and a CI gate are the roadmap.</a:t>
+            </a:r>
+          </a:p>
+        </p:txBody>
+      </p:sp>
+      <p:sp>
+        <p:nvSpPr>
+          <p:cNvPr id="4" name="Slide Number Placeholder 3"/>
+          <p:cNvSpPr>
+            <a:spLocks noGrp="1"/>
+          </p:cNvSpPr>
+          <p:nvPr>
+            <p:ph type="sldNum" idx="5" sz="quarter"/>
+          </p:nvPr>
+        </p:nvSpPr>
+        <p:spPr/>
+      </p:sp>
+    </p:spTree>
+  </p:cSld>
+  <p:clrMapOvr>
+    <a:masterClrMapping/>
+  </p:clrMapOvr>
+</p:notes>
+</file>
+
+<file path=ppt/notesSlides/notesSlide32.xml><?xml version="1.0" encoding="utf-8"?>
+<p:notes xmlns:a="http://schemas.openxmlformats.org/drawingml/2006/main" xmlns:p="http://schemas.openxmlformats.org/presentationml/2006/main" xmlns:r="http://schemas.openxmlformats.org/officeDocument/2006/relationships">
+  <p:cSld>
+    <p:spTree>
+      <p:nvGrpSpPr>
+        <p:cNvPr id="1" name=""/>
+        <p:cNvGrpSpPr/>
+        <p:nvPr/>
+      </p:nvGrpSpPr>
+      <p:grpSpPr>
+        <a:xfrm>
+          <a:off x="0" y="0"/>
+          <a:ext cx="0" cy="0"/>
+          <a:chOff x="0" y="0"/>
+          <a:chExt cx="0" cy="0"/>
+        </a:xfrm>
+      </p:grpSpPr>
+      <p:sp>
+        <p:nvSpPr>
+          <p:cNvPr id="2" name="Slide Image Placeholder 1"/>
+          <p:cNvSpPr>
+            <a:spLocks noGrp="1"/>
+          </p:cNvSpPr>
+          <p:nvPr>
+            <p:ph type="sldImg" idx="2"/>
+          </p:nvPr>
+        </p:nvSpPr>
+        <p:spPr/>
+      </p:sp>
+      <p:sp>
+        <p:nvSpPr>
+          <p:cNvPr id="3" name="Notes Placeholder 2"/>
+          <p:cNvSpPr>
+            <a:spLocks noGrp="1"/>
+          </p:cNvSpPr>
+          <p:nvPr>
+            <p:ph type="body" idx="3" sz="quarter"/>
+          </p:nvPr>
+        </p:nvSpPr>
+        <p:spPr/>
+        <p:txBody>
+          <a:bodyPr/>
+          <a:lstStyle/>
+          <a:p>
+            <a:r>
+              <a:t>We're raising $1M for ~18 months to expand the class coverage, ship full chaining, build a policy library and CI integrations, and land design partners in regulated environments where local-first is a hard requirement.</a:t>
+            </a:r>
+          </a:p>
+        </p:txBody>
+      </p:sp>
+      <p:sp>
+        <p:nvSpPr>
+          <p:cNvPr id="4" name="Slide Number Placeholder 3"/>
+          <p:cNvSpPr>
+            <a:spLocks noGrp="1"/>
+          </p:cNvSpPr>
+          <p:nvPr>
+            <p:ph type="sldNum" idx="5" sz="quarter"/>
+          </p:nvPr>
+        </p:nvSpPr>
+        <p:spPr/>
+      </p:sp>
+    </p:spTree>
+  </p:cSld>
+  <p:clrMapOvr>
+    <a:masterClrMapping/>
+  </p:clrMapOvr>
+</p:notes>
+</file>
+
+<file path=ppt/notesSlides/notesSlide33.xml><?xml version="1.0" encoding="utf-8"?>
 <p:notes xmlns:a="http://schemas.openxmlformats.org/drawingml/2006/main" xmlns:p="http://schemas.openxmlformats.org/presentationml/2006/main" xmlns:r="http://schemas.openxmlformats.org/officeDocument/2006/relationships">
   <p:cSld>
     <p:spTree>
@@ -5803,7 +5945,7 @@
                 </a:solidFill>
                 <a:latin typeface="Segoe UI"/>
               </a:rPr>
-              <a:t>Five vulnerability classes, each closing the full loop</a:t>
+              <a:t>Ten vulnerability classes, each closing the full loop live</a:t>
             </a:r>
           </a:p>
           <a:p>
@@ -6337,7 +6479,7 @@
                 </a:solidFill>
                 <a:latin typeface="Consolas"/>
               </a:rPr>
-              <a:t>11 / 31</a:t>
+              <a:t>11 / 33</a:t>
             </a:r>
           </a:p>
         </p:txBody>
@@ -6797,7 +6939,7 @@
                 </a:solidFill>
                 <a:latin typeface="Consolas"/>
               </a:rPr>
-              <a:t>12 / 31</a:t>
+              <a:t>12 / 33</a:t>
             </a:r>
           </a:p>
         </p:txBody>
@@ -7257,7 +7399,7 @@
                 </a:solidFill>
                 <a:latin typeface="Consolas"/>
               </a:rPr>
-              <a:t>13 / 31</a:t>
+              <a:t>13 / 33</a:t>
             </a:r>
           </a:p>
         </p:txBody>
@@ -7717,7 +7859,7 @@
                 </a:solidFill>
                 <a:latin typeface="Consolas"/>
               </a:rPr>
-              <a:t>14 / 31</a:t>
+              <a:t>14 / 33</a:t>
             </a:r>
           </a:p>
         </p:txBody>
@@ -7794,7 +7936,7 @@
                 </a:solidFill>
                 <a:latin typeface="Consolas"/>
               </a:rPr>
-              <a:t>Five Vulnerability Classes</a:t>
+              <a:t>Ten Vulnerability Classes</a:t>
             </a:r>
           </a:p>
         </p:txBody>
@@ -8289,7 +8431,7 @@
                 </a:solidFill>
                 <a:latin typeface="Consolas"/>
               </a:rPr>
-              <a:t>16 / 31</a:t>
+              <a:t>16 / 33</a:t>
             </a:r>
           </a:p>
         </p:txBody>
@@ -8749,7 +8891,7 @@
                 </a:solidFill>
                 <a:latin typeface="Consolas"/>
               </a:rPr>
-              <a:t>17 / 31</a:t>
+              <a:t>17 / 33</a:t>
             </a:r>
           </a:p>
         </p:txBody>
@@ -9209,7 +9351,7 @@
                 </a:solidFill>
                 <a:latin typeface="Consolas"/>
               </a:rPr>
-              <a:t>18 / 31</a:t>
+              <a:t>18 / 33</a:t>
             </a:r>
           </a:p>
         </p:txBody>
@@ -9669,7 +9811,7 @@
                 </a:solidFill>
                 <a:latin typeface="Consolas"/>
               </a:rPr>
-              <a:t>19 / 31</a:t>
+              <a:t>19 / 33</a:t>
             </a:r>
           </a:p>
         </p:txBody>
@@ -10105,7 +10247,7 @@
                 </a:solidFill>
                 <a:latin typeface="Consolas"/>
               </a:rPr>
-              <a:t>02 / 31</a:t>
+              <a:t>02 / 33</a:t>
             </a:r>
           </a:p>
         </p:txBody>
@@ -10565,7 +10707,7 @@
                 </a:solidFill>
                 <a:latin typeface="Consolas"/>
               </a:rPr>
-              <a:t>20 / 31</a:t>
+              <a:t>20 / 33</a:t>
             </a:r>
           </a:p>
         </p:txBody>
@@ -10717,7 +10859,7 @@
                 </a:solidFill>
                 <a:latin typeface="Consolas"/>
               </a:rPr>
-              <a:t>Login Tester — Authenticated Reasoning</a:t>
+              <a:t>Classes 6–10 — Five More, Same Contract</a:t>
             </a:r>
           </a:p>
         </p:txBody>
@@ -10775,45 +10917,21 @@
                 </a:solidFill>
                 <a:latin typeface="Consolas"/>
               </a:rPr>
-              <a:t>Turn anonymous scanning into authenticated proof</a:t>
-            </a:r>
-          </a:p>
-        </p:txBody>
-      </p:sp>
-      <p:pic>
-        <p:nvPicPr>
-          <p:cNvPr id="8" name="Picture 7" descr="shot_login.png"/>
-          <p:cNvPicPr>
-            <a:picLocks noChangeAspect="1"/>
-          </p:cNvPicPr>
-          <p:nvPr/>
-        </p:nvPicPr>
-        <p:blipFill>
-          <a:blip r:embed="rId5"/>
-          <a:stretch>
-            <a:fillRect/>
-          </a:stretch>
-        </p:blipFill>
-        <p:spPr>
-          <a:xfrm>
-            <a:off x="7834238" y="2331720"/>
-            <a:ext cx="2482363" cy="3794760"/>
-          </a:xfrm>
-          <a:prstGeom prst="rect">
-            <a:avLst/>
-          </a:prstGeom>
-        </p:spPr>
-      </p:pic>
-      <p:sp>
-        <p:nvSpPr>
-          <p:cNvPr id="9" name="TextBox 8"/>
+              <a:t>Every class is its own differential with an explicit anchor</a:t>
+            </a:r>
+          </a:p>
+        </p:txBody>
+      </p:sp>
+      <p:sp>
+        <p:nvSpPr>
+          <p:cNvPr id="8" name="TextBox 7"/>
           <p:cNvSpPr txBox="1"/>
           <p:nvPr/>
         </p:nvSpPr>
         <p:spPr>
           <a:xfrm>
-            <a:off x="713232" y="2487168"/>
-            <a:ext cx="5440680" cy="3840480"/>
+            <a:off x="713232" y="2697480"/>
+            <a:ext cx="10789920" cy="3840480"/>
           </a:xfrm>
           <a:prstGeom prst="rect">
             <a:avLst/>
@@ -10828,11 +10946,11 @@
           <a:p>
             <a:pPr>
               <a:spcAft>
-                <a:spcPts val="1200"/>
+                <a:spcPts val="1500"/>
               </a:spcAft>
             </a:pPr>
             <a:r>
-              <a:rPr sz="1600" b="1">
+              <a:rPr sz="1800" b="1">
                 <a:solidFill>
                   <a:srgbClr val="22D3EE"/>
                 </a:solidFill>
@@ -10841,23 +10959,23 @@
               <a:t>»  </a:t>
             </a:r>
             <a:r>
-              <a:rPr sz="1600" b="0">
+              <a:rPr sz="1800" b="0">
                 <a:solidFill>
                   <a:srgbClr val="C4D2E4"/>
                 </a:solidFill>
                 <a:latin typeface="Segoe UI"/>
               </a:rPr>
-              <a:t>Drives a real browser; you log in (MFA supported)</a:t>
+              <a:t>SSTI — {{7*7}} evaluates to 49 vs the literal; behaviour, not a regex</a:t>
             </a:r>
           </a:p>
           <a:p>
             <a:pPr>
               <a:spcAft>
-                <a:spcPts val="1200"/>
+                <a:spcPts val="1500"/>
               </a:spcAft>
             </a:pPr>
             <a:r>
-              <a:rPr sz="1600" b="1">
+              <a:rPr sz="1800" b="1">
                 <a:solidFill>
                   <a:srgbClr val="22D3EE"/>
                 </a:solidFill>
@@ -10866,23 +10984,23 @@
               <a:t>»  </a:t>
             </a:r>
             <a:r>
-              <a:rPr sz="1600" b="0">
+              <a:rPr sz="1800" b="0">
                 <a:solidFill>
                   <a:srgbClr val="C4D2E4"/>
                 </a:solidFill>
                 <a:latin typeface="Segoe UI"/>
               </a:rPr>
-              <a:t>Auto-detects completion, captures the live session</a:t>
+              <a:t>Open redirect — two-probe host differential; off-origin host OBSERVED, never followed</a:t>
             </a:r>
           </a:p>
           <a:p>
             <a:pPr>
               <a:spcAft>
-                <a:spcPts val="1200"/>
+                <a:spcPts val="1500"/>
               </a:spcAft>
             </a:pPr>
             <a:r>
-              <a:rPr sz="1600" b="1">
+              <a:rPr sz="1800" b="1">
                 <a:solidFill>
                   <a:srgbClr val="22D3EE"/>
                 </a:solidFill>
@@ -10891,70 +11009,70 @@
               <a:t>»  </a:t>
             </a:r>
             <a:r>
-              <a:rPr sz="1600" b="0">
+              <a:rPr sz="1800" b="0">
                 <a:solidFill>
                   <a:srgbClr val="C4D2E4"/>
                 </a:solidFill>
                 <a:latin typeface="Segoe UI"/>
               </a:rPr>
-              <a:t>Runs authenticated authz + cookie analysis on it</a:t>
+              <a:t>CORS — two-probe Origin differential; nonce origin reflected AND credentialed</a:t>
             </a:r>
           </a:p>
           <a:p>
             <a:pPr>
               <a:spcAft>
-                <a:spcPts val="1200"/>
+                <a:spcPts val="1500"/>
               </a:spcAft>
             </a:pPr>
             <a:r>
-              <a:rPr sz="1600" b="1">
-                <a:solidFill>
-                  <a:srgbClr val="E84BFF"/>
+              <a:rPr sz="1800" b="1">
+                <a:solidFill>
+                  <a:srgbClr val="22D3EE"/>
                 </a:solidFill>
                 <a:latin typeface="Segoe UI"/>
               </a:rPr>
               <a:t>»  </a:t>
             </a:r>
             <a:r>
-              <a:rPr sz="1600" b="0">
+              <a:rPr sz="1800" b="0">
                 <a:solidFill>
                   <a:srgbClr val="C4D2E4"/>
                 </a:solidFill>
                 <a:latin typeface="Segoe UI"/>
               </a:rPr>
-              <a:t>Credentials via getpass — never stored, never logged</a:t>
+              <a:t>SSRF — out-of-band callback to Sentinel's OWN loopback collaborator</a:t>
             </a:r>
           </a:p>
           <a:p>
             <a:pPr>
               <a:spcAft>
-                <a:spcPts val="1200"/>
+                <a:spcPts val="1500"/>
               </a:spcAft>
             </a:pPr>
             <a:r>
-              <a:rPr sz="1600" b="1">
-                <a:solidFill>
-                  <a:srgbClr val="E84BFF"/>
+              <a:rPr sz="1800" b="1">
+                <a:solidFill>
+                  <a:srgbClr val="22D3EE"/>
                 </a:solidFill>
                 <a:latin typeface="Segoe UI"/>
               </a:rPr>
               <a:t>»  </a:t>
             </a:r>
             <a:r>
-              <a:rPr sz="1600" b="0">
+              <a:rPr sz="1800" b="0">
                 <a:solidFill>
                   <a:srgbClr val="C4D2E4"/>
                 </a:solidFill>
                 <a:latin typeface="Segoe UI"/>
               </a:rPr>
-              <a:t>In-memory for the run only, scope-bound to the host</a:t>
-            </a:r>
-          </a:p>
-        </p:txBody>
-      </p:sp>
-      <p:sp>
-        <p:nvSpPr>
-          <p:cNvPr id="10" name="TextBox 9"/>
+              <a:t>Broken auth / JWT — three-probe genuine · forged · absent token differential</a:t>
+            </a:r>
+          </a:p>
+        </p:txBody>
+      </p:sp>
+      <p:sp>
+        <p:nvSpPr>
+          <p:cNvPr id="9" name="TextBox 8"/>
           <p:cNvSpPr txBox="1"/>
           <p:nvPr/>
         </p:nvSpPr>
@@ -10997,7 +11115,7 @@
       </p:sp>
       <p:sp>
         <p:nvSpPr>
-          <p:cNvPr id="11" name="TextBox 10"/>
+          <p:cNvPr id="10" name="TextBox 9"/>
           <p:cNvSpPr txBox="1"/>
           <p:nvPr/>
         </p:nvSpPr>
@@ -11025,7 +11143,7 @@
                 </a:solidFill>
                 <a:latin typeface="Consolas"/>
               </a:rPr>
-              <a:t>21 / 31</a:t>
+              <a:t>21 / 33</a:t>
             </a:r>
           </a:p>
         </p:txBody>
@@ -11177,7 +11295,7 @@
                 </a:solidFill>
                 <a:latin typeface="Consolas"/>
               </a:rPr>
-              <a:t>Chaining — Ingredients, Honestly</a:t>
+              <a:t>The Hardest Two, Done Honestly</a:t>
             </a:r>
           </a:p>
         </p:txBody>
@@ -11235,7 +11353,7 @@
                 </a:solidFill>
                 <a:latin typeface="Consolas"/>
               </a:rPr>
-              <a:t>We prove the pieces; we don't fabricate the story</a:t>
+              <a:t>Zero-oracle SSRF · token forgery — and where we stop</a:t>
             </a:r>
           </a:p>
         </p:txBody>
@@ -11270,7 +11388,7 @@
             <a:r>
               <a:rPr sz="1800" b="1">
                 <a:solidFill>
-                  <a:srgbClr val="2DD48F"/>
+                  <a:srgbClr val="22D3EE"/>
                 </a:solidFill>
                 <a:latin typeface="Segoe UI"/>
               </a:rPr>
@@ -11279,11 +11397,11 @@
             <a:r>
               <a:rPr sz="1800" b="0">
                 <a:solidFill>
-                  <a:srgbClr val="EAF2FF"/>
-                </a:solidFill>
-                <a:latin typeface="Segoe UI"/>
-              </a:rPr>
-              <a:t>Session captured (real cookies + bearer)</a:t>
+                  <a:srgbClr val="C4D2E4"/>
+                </a:solidFill>
+                <a:latin typeface="Segoe UI"/>
+              </a:rPr>
+              <a:t>SSRF is zero-oracle: only Sentinel's own 127.0.0.1 collaborator is ever injected</a:t>
             </a:r>
           </a:p>
           <a:p>
@@ -11295,7 +11413,7 @@
             <a:r>
               <a:rPr sz="1800" b="1">
                 <a:solidFill>
-                  <a:srgbClr val="2DD48F"/>
+                  <a:srgbClr val="22D3EE"/>
                 </a:solidFill>
                 <a:latin typeface="Segoe UI"/>
               </a:rPr>
@@ -11304,11 +11422,11 @@
             <a:r>
               <a:rPr sz="1800" b="0">
                 <a:solidFill>
-                  <a:srgbClr val="EAF2FF"/>
-                </a:solidFill>
-                <a:latin typeface="Segoe UI"/>
-              </a:rPr>
-              <a:t>Session cookie proven insecure (insecure_cookie CONFIRMED)</a:t>
+                  <a:srgbClr val="C4D2E4"/>
+                </a:solidFill>
+                <a:latin typeface="Segoe UI"/>
+              </a:rPr>
+              <a:t>— never a metadata IP, an RFC-1918 host, or any third party</a:t>
             </a:r>
           </a:p>
           <a:p>
@@ -11320,7 +11438,7 @@
             <a:r>
               <a:rPr sz="1800" b="1">
                 <a:solidFill>
-                  <a:srgbClr val="2DD48F"/>
+                  <a:srgbClr val="22D3EE"/>
                 </a:solidFill>
                 <a:latin typeface="Segoe UI"/>
               </a:rPr>
@@ -11329,11 +11447,11 @@
             <a:r>
               <a:rPr sz="1800" b="0">
                 <a:solidFill>
-                  <a:srgbClr val="EAF2FF"/>
-                </a:solidFill>
-                <a:latin typeface="Segoe UI"/>
-              </a:rPr>
-              <a:t>Resource reachable as that principal (authz CONFIRMED)</a:t>
+                  <a:srgbClr val="C4D2E4"/>
+                </a:solidFill>
+                <a:latin typeface="Segoe UI"/>
+              </a:rPr>
+              <a:t>Broken auth: a forged token as SOLE authenticator must be accepted to CONFIRM</a:t>
             </a:r>
           </a:p>
           <a:p>
@@ -11345,7 +11463,7 @@
             <a:r>
               <a:rPr sz="1800" b="1">
                 <a:solidFill>
-                  <a:srgbClr val="E84BFF"/>
+                  <a:srgbClr val="2DD48F"/>
                 </a:solidFill>
                 <a:latin typeface="Segoe UI"/>
               </a:rPr>
@@ -11354,11 +11472,11 @@
             <a:r>
               <a:rPr sz="1800" b="0">
                 <a:solidFill>
-                  <a:srgbClr val="C4D2E4"/>
-                </a:solidFill>
-                <a:latin typeface="Segoe UI"/>
-              </a:rPr>
-              <a:t>Presented as co-occurring evidence under one session</a:t>
+                  <a:srgbClr val="EAF2FF"/>
+                </a:solidFill>
+                <a:latin typeface="Segoe UI"/>
+              </a:rPr>
+              <a:t>Every forgery carries a benign marker — acceptance proves OUR minted token passed</a:t>
             </a:r>
           </a:p>
           <a:p>
@@ -11383,7 +11501,7 @@
                 </a:solidFill>
                 <a:latin typeface="Segoe UI"/>
               </a:rPr>
-              <a:t>Full causal chaining stays the honestly-labeled frontier</a:t>
+              <a:t>alg-none → full PATCH+PROVE; signed-forgery classes → ADVISORY_ONLY, never a fake fix-proof</a:t>
             </a:r>
           </a:p>
         </p:txBody>
@@ -11461,7 +11579,7 @@
                 </a:solidFill>
                 <a:latin typeface="Consolas"/>
               </a:rPr>
-              <a:t>22 / 31</a:t>
+              <a:t>22 / 33</a:t>
             </a:r>
           </a:p>
         </p:txBody>
@@ -11613,7 +11731,7 @@
                 </a:solidFill>
                 <a:latin typeface="Consolas"/>
               </a:rPr>
-              <a:t>Target-Agnostic — Two Live Stacks</a:t>
+              <a:t>Login Tester — Authenticated Reasoning</a:t>
             </a:r>
           </a:p>
         </p:txBody>
@@ -11671,14 +11789,14 @@
                 </a:solidFill>
                 <a:latin typeface="Consolas"/>
               </a:rPr>
-              <a:t>Zero target-specific code</a:t>
+              <a:t>Turn anonymous scanning into authenticated proof</a:t>
             </a:r>
           </a:p>
         </p:txBody>
       </p:sp>
       <p:pic>
         <p:nvPicPr>
-          <p:cNvPr id="8" name="Picture 7" descr="shot_outcome.png"/>
+          <p:cNvPr id="8" name="Picture 7" descr="shot_login.png"/>
           <p:cNvPicPr>
             <a:picLocks noChangeAspect="1"/>
           </p:cNvPicPr>
@@ -11692,8 +11810,8 @@
         </p:blipFill>
         <p:spPr>
           <a:xfrm>
-            <a:off x="6400800" y="3317098"/>
-            <a:ext cx="5349240" cy="1824003"/>
+            <a:off x="7834238" y="2331720"/>
+            <a:ext cx="2482363" cy="3794760"/>
           </a:xfrm>
           <a:prstGeom prst="rect">
             <a:avLst/>
@@ -11743,7 +11861,7 @@
                 </a:solidFill>
                 <a:latin typeface="Segoe UI"/>
               </a:rPr>
-              <a:t>Proven on OWASP Juice Shop and VAmPI</a:t>
+              <a:t>Drives a real browser; you log in (MFA supported)</a:t>
             </a:r>
           </a:p>
           <a:p>
@@ -11768,7 +11886,7 @@
                 </a:solidFill>
                 <a:latin typeface="Segoe UI"/>
               </a:rPr>
-              <a:t>Same engine, same judges, different oracles</a:t>
+              <a:t>Auto-detects completion, captures the live session</a:t>
             </a:r>
           </a:p>
           <a:p>
@@ -11793,7 +11911,7 @@
                 </a:solidFill>
                 <a:latin typeface="Segoe UI"/>
               </a:rPr>
-              <a:t>Oracles are operator data, not engine logic</a:t>
+              <a:t>Runs authenticated authz + cookie analysis on it</a:t>
             </a:r>
           </a:p>
           <a:p>
@@ -11805,7 +11923,7 @@
             <a:r>
               <a:rPr sz="1600" b="1">
                 <a:solidFill>
-                  <a:srgbClr val="22D3EE"/>
+                  <a:srgbClr val="E84BFF"/>
                 </a:solidFill>
                 <a:latin typeface="Segoe UI"/>
               </a:rPr>
@@ -11818,7 +11936,7 @@
                 </a:solidFill>
                 <a:latin typeface="Segoe UI"/>
               </a:rPr>
-              <a:t>New target = new policy file, no code change</a:t>
+              <a:t>Credentials via getpass — never stored, never logged</a:t>
             </a:r>
           </a:p>
           <a:p>
@@ -11830,7 +11948,7 @@
             <a:r>
               <a:rPr sz="1600" b="1">
                 <a:solidFill>
-                  <a:srgbClr val="22D3EE"/>
+                  <a:srgbClr val="E84BFF"/>
                 </a:solidFill>
                 <a:latin typeface="Segoe UI"/>
               </a:rPr>
@@ -11843,7 +11961,7 @@
                 </a:solidFill>
                 <a:latin typeface="Segoe UI"/>
               </a:rPr>
-              <a:t>The research frontier is reported, never faked</a:t>
+              <a:t>In-memory for the run only, scope-bound to the host</a:t>
             </a:r>
           </a:p>
         </p:txBody>
@@ -11921,7 +12039,7 @@
                 </a:solidFill>
                 <a:latin typeface="Consolas"/>
               </a:rPr>
-              <a:t>23 / 31</a:t>
+              <a:t>23 / 33</a:t>
             </a:r>
           </a:p>
         </p:txBody>
@@ -12073,7 +12191,7 @@
                 </a:solidFill>
                 <a:latin typeface="Consolas"/>
               </a:rPr>
-              <a:t>Test Results &amp; Validation</a:t>
+              <a:t>Chaining — Ingredients, Honestly</a:t>
             </a:r>
           </a:p>
         </p:txBody>
@@ -12131,276 +12249,20 @@
                 </a:solidFill>
                 <a:latin typeface="Consolas"/>
               </a:rPr>
-              <a:t>Green, deterministic, and honest about the one skip</a:t>
-            </a:r>
-          </a:p>
-        </p:txBody>
-      </p:sp>
-      <p:sp>
-        <p:nvSpPr>
-          <p:cNvPr id="8" name="Rounded Rectangle 7"/>
-          <p:cNvSpPr/>
-          <p:nvPr/>
-        </p:nvSpPr>
-        <p:spPr>
-          <a:xfrm>
-            <a:off x="603504" y="2395728"/>
-            <a:ext cx="2503170" cy="1143000"/>
-          </a:xfrm>
-          <a:prstGeom prst="roundRect">
-            <a:avLst/>
-          </a:prstGeom>
-          <a:noFill/>
-          <a:ln w="12700">
-            <a:solidFill>
-              <a:srgbClr val="22D3EE"/>
-            </a:solidFill>
-          </a:ln>
-        </p:spPr>
-        <p:style>
-          <a:lnRef idx="1">
-            <a:schemeClr val="accent1"/>
-          </a:lnRef>
-          <a:fillRef idx="3">
-            <a:schemeClr val="accent1"/>
-          </a:fillRef>
-          <a:effectRef idx="2">
-            <a:schemeClr val="accent1"/>
-          </a:effectRef>
-          <a:fontRef idx="minor">
-            <a:schemeClr val="lt1"/>
-          </a:fontRef>
-        </p:style>
-        <p:txBody>
-          <a:bodyPr rtlCol="0" anchor="ctr"/>
-          <a:lstStyle/>
-          <a:p>
-            <a:pPr algn="ctr"/>
-            <a:r>
-              <a:rPr sz="3200" b="1">
-                <a:solidFill>
-                  <a:srgbClr val="22D3EE"/>
-                </a:solidFill>
-                <a:latin typeface="Consolas"/>
-              </a:rPr>
-              <a:t>123</a:t>
-            </a:r>
-          </a:p>
-          <a:p>
-            <a:pPr algn="ctr"/>
-            <a:r>
-              <a:rPr sz="1100" b="0">
-                <a:solidFill>
-                  <a:srgbClr val="6B7A90"/>
-                </a:solidFill>
-                <a:latin typeface="Consolas"/>
-              </a:rPr>
-              <a:t>TESTS</a:t>
-            </a:r>
-          </a:p>
-        </p:txBody>
-      </p:sp>
-      <p:sp>
-        <p:nvSpPr>
-          <p:cNvPr id="9" name="Rounded Rectangle 8"/>
-          <p:cNvSpPr/>
-          <p:nvPr/>
-        </p:nvSpPr>
-        <p:spPr>
-          <a:xfrm>
-            <a:off x="3426714" y="2395728"/>
-            <a:ext cx="2503170" cy="1143000"/>
-          </a:xfrm>
-          <a:prstGeom prst="roundRect">
-            <a:avLst/>
-          </a:prstGeom>
-          <a:noFill/>
-          <a:ln w="12700">
-            <a:solidFill>
-              <a:srgbClr val="22D3EE"/>
-            </a:solidFill>
-          </a:ln>
-        </p:spPr>
-        <p:style>
-          <a:lnRef idx="1">
-            <a:schemeClr val="accent1"/>
-          </a:lnRef>
-          <a:fillRef idx="3">
-            <a:schemeClr val="accent1"/>
-          </a:fillRef>
-          <a:effectRef idx="2">
-            <a:schemeClr val="accent1"/>
-          </a:effectRef>
-          <a:fontRef idx="minor">
-            <a:schemeClr val="lt1"/>
-          </a:fontRef>
-        </p:style>
-        <p:txBody>
-          <a:bodyPr rtlCol="0" anchor="ctr"/>
-          <a:lstStyle/>
-          <a:p>
-            <a:pPr algn="ctr"/>
-            <a:r>
-              <a:rPr sz="3200" b="1">
-                <a:solidFill>
-                  <a:srgbClr val="22D3EE"/>
-                </a:solidFill>
-                <a:latin typeface="Consolas"/>
-              </a:rPr>
-              <a:t>122</a:t>
-            </a:r>
-          </a:p>
-          <a:p>
-            <a:pPr algn="ctr"/>
-            <a:r>
-              <a:rPr sz="1100" b="0">
-                <a:solidFill>
-                  <a:srgbClr val="6B7A90"/>
-                </a:solidFill>
-                <a:latin typeface="Consolas"/>
-              </a:rPr>
-              <a:t>PASSING</a:t>
-            </a:r>
-          </a:p>
-        </p:txBody>
-      </p:sp>
-      <p:sp>
-        <p:nvSpPr>
-          <p:cNvPr id="10" name="Rounded Rectangle 9"/>
-          <p:cNvSpPr/>
-          <p:nvPr/>
-        </p:nvSpPr>
-        <p:spPr>
-          <a:xfrm>
-            <a:off x="6249924" y="2395728"/>
-            <a:ext cx="2503170" cy="1143000"/>
-          </a:xfrm>
-          <a:prstGeom prst="roundRect">
-            <a:avLst/>
-          </a:prstGeom>
-          <a:noFill/>
-          <a:ln w="12700">
-            <a:solidFill>
-              <a:srgbClr val="22D3EE"/>
-            </a:solidFill>
-          </a:ln>
-        </p:spPr>
-        <p:style>
-          <a:lnRef idx="1">
-            <a:schemeClr val="accent1"/>
-          </a:lnRef>
-          <a:fillRef idx="3">
-            <a:schemeClr val="accent1"/>
-          </a:fillRef>
-          <a:effectRef idx="2">
-            <a:schemeClr val="accent1"/>
-          </a:effectRef>
-          <a:fontRef idx="minor">
-            <a:schemeClr val="lt1"/>
-          </a:fontRef>
-        </p:style>
-        <p:txBody>
-          <a:bodyPr rtlCol="0" anchor="ctr"/>
-          <a:lstStyle/>
-          <a:p>
-            <a:pPr algn="ctr"/>
-            <a:r>
-              <a:rPr sz="3200" b="1">
-                <a:solidFill>
-                  <a:srgbClr val="22D3EE"/>
-                </a:solidFill>
-                <a:latin typeface="Consolas"/>
-              </a:rPr>
-              <a:t>5</a:t>
-            </a:r>
-          </a:p>
-          <a:p>
-            <a:pPr algn="ctr"/>
-            <a:r>
-              <a:rPr sz="1100" b="0">
-                <a:solidFill>
-                  <a:srgbClr val="6B7A90"/>
-                </a:solidFill>
-                <a:latin typeface="Consolas"/>
-              </a:rPr>
-              <a:t>VULN CLASSES</a:t>
-            </a:r>
-          </a:p>
-        </p:txBody>
-      </p:sp>
-      <p:sp>
-        <p:nvSpPr>
-          <p:cNvPr id="11" name="Rounded Rectangle 10"/>
-          <p:cNvSpPr/>
-          <p:nvPr/>
-        </p:nvSpPr>
-        <p:spPr>
-          <a:xfrm>
-            <a:off x="9073134" y="2395728"/>
-            <a:ext cx="2503170" cy="1143000"/>
-          </a:xfrm>
-          <a:prstGeom prst="roundRect">
-            <a:avLst/>
-          </a:prstGeom>
-          <a:noFill/>
-          <a:ln w="12700">
-            <a:solidFill>
-              <a:srgbClr val="22D3EE"/>
-            </a:solidFill>
-          </a:ln>
-        </p:spPr>
-        <p:style>
-          <a:lnRef idx="1">
-            <a:schemeClr val="accent1"/>
-          </a:lnRef>
-          <a:fillRef idx="3">
-            <a:schemeClr val="accent1"/>
-          </a:fillRef>
-          <a:effectRef idx="2">
-            <a:schemeClr val="accent1"/>
-          </a:effectRef>
-          <a:fontRef idx="minor">
-            <a:schemeClr val="lt1"/>
-          </a:fontRef>
-        </p:style>
-        <p:txBody>
-          <a:bodyPr rtlCol="0" anchor="ctr"/>
-          <a:lstStyle/>
-          <a:p>
-            <a:pPr algn="ctr"/>
-            <a:r>
-              <a:rPr sz="3200" b="1">
-                <a:solidFill>
-                  <a:srgbClr val="22D3EE"/>
-                </a:solidFill>
-                <a:latin typeface="Consolas"/>
-              </a:rPr>
-              <a:t>2</a:t>
-            </a:r>
-          </a:p>
-          <a:p>
-            <a:pPr algn="ctr"/>
-            <a:r>
-              <a:rPr sz="1100" b="0">
-                <a:solidFill>
-                  <a:srgbClr val="6B7A90"/>
-                </a:solidFill>
-                <a:latin typeface="Consolas"/>
-              </a:rPr>
-              <a:t>LIVE STACKS</a:t>
-            </a:r>
-          </a:p>
-        </p:txBody>
-      </p:sp>
-      <p:sp>
-        <p:nvSpPr>
-          <p:cNvPr id="12" name="TextBox 11"/>
+              <a:t>We prove the pieces; we don't fabricate the story</a:t>
+            </a:r>
+          </a:p>
+        </p:txBody>
+      </p:sp>
+      <p:sp>
+        <p:nvSpPr>
+          <p:cNvPr id="8" name="TextBox 7"/>
           <p:cNvSpPr txBox="1"/>
           <p:nvPr/>
         </p:nvSpPr>
         <p:spPr>
           <a:xfrm>
-            <a:off x="713232" y="3840480"/>
+            <a:off x="713232" y="2697480"/>
             <a:ext cx="10789920" cy="3840480"/>
           </a:xfrm>
           <a:prstGeom prst="rect">
@@ -12416,11 +12278,11 @@
           <a:p>
             <a:pPr>
               <a:spcAft>
-                <a:spcPts val="1000"/>
+                <a:spcPts val="1500"/>
               </a:spcAft>
             </a:pPr>
             <a:r>
-              <a:rPr sz="1700" b="1">
+              <a:rPr sz="1800" b="1">
                 <a:solidFill>
                   <a:srgbClr val="2DD48F"/>
                 </a:solidFill>
@@ -12429,23 +12291,23 @@
               <a:t>»  </a:t>
             </a:r>
             <a:r>
-              <a:rPr sz="1700" b="0">
+              <a:rPr sz="1800" b="0">
                 <a:solidFill>
                   <a:srgbClr val="EAF2FF"/>
                 </a:solidFill>
                 <a:latin typeface="Segoe UI"/>
               </a:rPr>
-              <a:t>122 passing, 1 skipped (the opt-in live-browser path)</a:t>
+              <a:t>Session captured (real cookies + bearer)</a:t>
             </a:r>
           </a:p>
           <a:p>
             <a:pPr>
               <a:spcAft>
-                <a:spcPts val="1000"/>
+                <a:spcPts val="1500"/>
               </a:spcAft>
             </a:pPr>
             <a:r>
-              <a:rPr sz="1700" b="1">
+              <a:rPr sz="1800" b="1">
                 <a:solidFill>
                   <a:srgbClr val="2DD48F"/>
                 </a:solidFill>
@@ -12454,23 +12316,23 @@
               <a:t>»  </a:t>
             </a:r>
             <a:r>
-              <a:rPr sz="1700" b="0">
+              <a:rPr sz="1800" b="0">
                 <a:solidFill>
                   <a:srgbClr val="EAF2FF"/>
                 </a:solidFill>
                 <a:latin typeface="Segoe UI"/>
               </a:rPr>
-              <a:t>Full offline suite is network-free and runs in seconds</a:t>
+              <a:t>Session cookie proven insecure (insecure_cookie CONFIRMED)</a:t>
             </a:r>
           </a:p>
           <a:p>
             <a:pPr>
               <a:spcAft>
-                <a:spcPts val="1000"/>
+                <a:spcPts val="1500"/>
               </a:spcAft>
             </a:pPr>
             <a:r>
-              <a:rPr sz="1700" b="1">
+              <a:rPr sz="1800" b="1">
                 <a:solidFill>
                   <a:srgbClr val="2DD48F"/>
                 </a:solidFill>
@@ -12479,70 +12341,70 @@
               <a:t>»  </a:t>
             </a:r>
             <a:r>
-              <a:rPr sz="1700" b="0">
+              <a:rPr sz="1800" b="0">
                 <a:solidFill>
                   <a:srgbClr val="EAF2FF"/>
                 </a:solidFill>
                 <a:latin typeface="Segoe UI"/>
               </a:rPr>
-              <a:t>Each class: parse → CONFIRM → PATCH → PROVE, plus isolation</a:t>
+              <a:t>Resource reachable as that principal (authz CONFIRMED)</a:t>
             </a:r>
           </a:p>
           <a:p>
             <a:pPr>
               <a:spcAft>
-                <a:spcPts val="1000"/>
+                <a:spcPts val="1500"/>
               </a:spcAft>
             </a:pPr>
             <a:r>
-              <a:rPr sz="1700" b="1">
-                <a:solidFill>
-                  <a:srgbClr val="2DD48F"/>
+              <a:rPr sz="1800" b="1">
+                <a:solidFill>
+                  <a:srgbClr val="E84BFF"/>
                 </a:solidFill>
                 <a:latin typeface="Segoe UI"/>
               </a:rPr>
               <a:t>»  </a:t>
             </a:r>
             <a:r>
-              <a:rPr sz="1700" b="0">
-                <a:solidFill>
-                  <a:srgbClr val="EAF2FF"/>
-                </a:solidFill>
-                <a:latin typeface="Segoe UI"/>
-              </a:rPr>
-              <a:t>Live E2E validated on Juice Shop and VAmPI over real sockets</a:t>
+              <a:rPr sz="1800" b="0">
+                <a:solidFill>
+                  <a:srgbClr val="C4D2E4"/>
+                </a:solidFill>
+                <a:latin typeface="Segoe UI"/>
+              </a:rPr>
+              <a:t>Presented as co-occurring evidence under one session</a:t>
             </a:r>
           </a:p>
           <a:p>
             <a:pPr>
               <a:spcAft>
-                <a:spcPts val="1000"/>
+                <a:spcPts val="1500"/>
               </a:spcAft>
             </a:pPr>
             <a:r>
-              <a:rPr sz="1700" b="1">
-                <a:solidFill>
-                  <a:srgbClr val="22D3EE"/>
+              <a:rPr sz="1800" b="1">
+                <a:solidFill>
+                  <a:srgbClr val="E84BFF"/>
                 </a:solidFill>
                 <a:latin typeface="Segoe UI"/>
               </a:rPr>
               <a:t>»  </a:t>
             </a:r>
             <a:r>
-              <a:rPr sz="1700" b="0">
+              <a:rPr sz="1800" b="0">
                 <a:solidFill>
                   <a:srgbClr val="C4D2E4"/>
                 </a:solidFill>
                 <a:latin typeface="Segoe UI"/>
               </a:rPr>
-              <a:t>Compliant-control tests assert the honest 'no finding' path</a:t>
-            </a:r>
-          </a:p>
-        </p:txBody>
-      </p:sp>
-      <p:sp>
-        <p:nvSpPr>
-          <p:cNvPr id="13" name="TextBox 12"/>
+              <a:t>Full causal chaining stays the honestly-labeled frontier</a:t>
+            </a:r>
+          </a:p>
+        </p:txBody>
+      </p:sp>
+      <p:sp>
+        <p:nvSpPr>
+          <p:cNvPr id="9" name="TextBox 8"/>
           <p:cNvSpPr txBox="1"/>
           <p:nvPr/>
         </p:nvSpPr>
@@ -12585,7 +12447,7 @@
       </p:sp>
       <p:sp>
         <p:nvSpPr>
-          <p:cNvPr id="14" name="TextBox 13"/>
+          <p:cNvPr id="10" name="TextBox 9"/>
           <p:cNvSpPr txBox="1"/>
           <p:nvPr/>
         </p:nvSpPr>
@@ -12613,7 +12475,7 @@
                 </a:solidFill>
                 <a:latin typeface="Consolas"/>
               </a:rPr>
-              <a:t>24 / 31</a:t>
+              <a:t>24 / 33</a:t>
             </a:r>
           </a:p>
         </p:txBody>
@@ -12765,7 +12627,7 @@
                 </a:solidFill>
                 <a:latin typeface="Consolas"/>
               </a:rPr>
-              <a:t>Lightweight &amp; Local</a:t>
+              <a:t>Target-Agnostic — Two Live Stacks</a:t>
             </a:r>
           </a:p>
         </p:txBody>
@@ -12823,21 +12685,45 @@
                 </a:solidFill>
                 <a:latin typeface="Consolas"/>
               </a:rPr>
-              <a:t>Runs on a laptop; nothing leaves the box</a:t>
-            </a:r>
-          </a:p>
-        </p:txBody>
-      </p:sp>
-      <p:sp>
-        <p:nvSpPr>
-          <p:cNvPr id="8" name="TextBox 7"/>
+              <a:t>Zero target-specific code</a:t>
+            </a:r>
+          </a:p>
+        </p:txBody>
+      </p:sp>
+      <p:pic>
+        <p:nvPicPr>
+          <p:cNvPr id="8" name="Picture 7" descr="shot_outcome.png"/>
+          <p:cNvPicPr>
+            <a:picLocks noChangeAspect="1"/>
+          </p:cNvPicPr>
+          <p:nvPr/>
+        </p:nvPicPr>
+        <p:blipFill>
+          <a:blip r:embed="rId5"/>
+          <a:stretch>
+            <a:fillRect/>
+          </a:stretch>
+        </p:blipFill>
+        <p:spPr>
+          <a:xfrm>
+            <a:off x="6400800" y="3317098"/>
+            <a:ext cx="5349240" cy="1824003"/>
+          </a:xfrm>
+          <a:prstGeom prst="rect">
+            <a:avLst/>
+          </a:prstGeom>
+        </p:spPr>
+      </p:pic>
+      <p:sp>
+        <p:nvSpPr>
+          <p:cNvPr id="9" name="TextBox 8"/>
           <p:cNvSpPr txBox="1"/>
           <p:nvPr/>
         </p:nvSpPr>
         <p:spPr>
           <a:xfrm>
-            <a:off x="713232" y="2697480"/>
-            <a:ext cx="10789920" cy="3840480"/>
+            <a:off x="713232" y="2487168"/>
+            <a:ext cx="5440680" cy="3840480"/>
           </a:xfrm>
           <a:prstGeom prst="rect">
             <a:avLst/>
@@ -12852,11 +12738,11 @@
           <a:p>
             <a:pPr>
               <a:spcAft>
-                <a:spcPts val="1500"/>
+                <a:spcPts val="1200"/>
               </a:spcAft>
             </a:pPr>
             <a:r>
-              <a:rPr sz="1800" b="1">
+              <a:rPr sz="1600" b="1">
                 <a:solidFill>
                   <a:srgbClr val="22D3EE"/>
                 </a:solidFill>
@@ -12865,23 +12751,23 @@
               <a:t>»  </a:t>
             </a:r>
             <a:r>
-              <a:rPr sz="1800" b="0">
+              <a:rPr sz="1600" b="0">
                 <a:solidFill>
                   <a:srgbClr val="C4D2E4"/>
                 </a:solidFill>
                 <a:latin typeface="Segoe UI"/>
               </a:rPr>
-              <a:t>Local model via Ollama (qwen3:4b) — no cloud dependency</a:t>
+              <a:t>Proven on OWASP Juice Shop and VAmPI</a:t>
             </a:r>
           </a:p>
           <a:p>
             <a:pPr>
               <a:spcAft>
-                <a:spcPts val="1500"/>
+                <a:spcPts val="1200"/>
               </a:spcAft>
             </a:pPr>
             <a:r>
-              <a:rPr sz="1800" b="1">
+              <a:rPr sz="1600" b="1">
                 <a:solidFill>
                   <a:srgbClr val="22D3EE"/>
                 </a:solidFill>
@@ -12890,23 +12776,23 @@
               <a:t>»  </a:t>
             </a:r>
             <a:r>
-              <a:rPr sz="1800" b="0">
+              <a:rPr sz="1600" b="0">
                 <a:solidFill>
                   <a:srgbClr val="C4D2E4"/>
                 </a:solidFill>
                 <a:latin typeface="Segoe UI"/>
               </a:rPr>
-              <a:t>Core install is lightweight; Playwright is an opt-in extra</a:t>
+              <a:t>Same engine, same judges, different oracles</a:t>
             </a:r>
           </a:p>
           <a:p>
             <a:pPr>
               <a:spcAft>
-                <a:spcPts val="1500"/>
+                <a:spcPts val="1200"/>
               </a:spcAft>
             </a:pPr>
             <a:r>
-              <a:rPr sz="1800" b="1">
+              <a:rPr sz="1600" b="1">
                 <a:solidFill>
                   <a:srgbClr val="22D3EE"/>
                 </a:solidFill>
@@ -12915,23 +12801,23 @@
               <a:t>»  </a:t>
             </a:r>
             <a:r>
-              <a:rPr sz="1800" b="0">
+              <a:rPr sz="1600" b="0">
                 <a:solidFill>
                   <a:srgbClr val="C4D2E4"/>
                 </a:solidFill>
                 <a:latin typeface="Segoe UI"/>
               </a:rPr>
-              <a:t>No customer data or target traffic egresses anywhere</a:t>
+              <a:t>Oracles are operator data, not engine logic</a:t>
             </a:r>
           </a:p>
           <a:p>
             <a:pPr>
               <a:spcAft>
-                <a:spcPts val="1500"/>
+                <a:spcPts val="1200"/>
               </a:spcAft>
             </a:pPr>
             <a:r>
-              <a:rPr sz="1800" b="1">
+              <a:rPr sz="1600" b="1">
                 <a:solidFill>
                   <a:srgbClr val="22D3EE"/>
                 </a:solidFill>
@@ -12940,23 +12826,23 @@
               <a:t>»  </a:t>
             </a:r>
             <a:r>
-              <a:rPr sz="1800" b="0">
+              <a:rPr sz="1600" b="0">
                 <a:solidFill>
                   <a:srgbClr val="C4D2E4"/>
                 </a:solidFill>
                 <a:latin typeface="Segoe UI"/>
               </a:rPr>
-              <a:t>Deterministic core runs even with the model offline</a:t>
+              <a:t>New target = new policy file, no code change</a:t>
             </a:r>
           </a:p>
           <a:p>
             <a:pPr>
               <a:spcAft>
-                <a:spcPts val="1500"/>
+                <a:spcPts val="1200"/>
               </a:spcAft>
             </a:pPr>
             <a:r>
-              <a:rPr sz="1800" b="1">
+              <a:rPr sz="1600" b="1">
                 <a:solidFill>
                   <a:srgbClr val="22D3EE"/>
                 </a:solidFill>
@@ -12965,20 +12851,20 @@
               <a:t>»  </a:t>
             </a:r>
             <a:r>
-              <a:rPr sz="1800" b="0">
+              <a:rPr sz="1600" b="0">
                 <a:solidFill>
                   <a:srgbClr val="C4D2E4"/>
                 </a:solidFill>
                 <a:latin typeface="Segoe UI"/>
               </a:rPr>
-              <a:t>Deploys air-gapped — ideal for regulated environments</a:t>
-            </a:r>
-          </a:p>
-        </p:txBody>
-      </p:sp>
-      <p:sp>
-        <p:nvSpPr>
-          <p:cNvPr id="9" name="TextBox 8"/>
+              <a:t>The research frontier is reported, never faked</a:t>
+            </a:r>
+          </a:p>
+        </p:txBody>
+      </p:sp>
+      <p:sp>
+        <p:nvSpPr>
+          <p:cNvPr id="10" name="TextBox 9"/>
           <p:cNvSpPr txBox="1"/>
           <p:nvPr/>
         </p:nvSpPr>
@@ -13021,7 +12907,7 @@
       </p:sp>
       <p:sp>
         <p:nvSpPr>
-          <p:cNvPr id="10" name="TextBox 9"/>
+          <p:cNvPr id="11" name="TextBox 10"/>
           <p:cNvSpPr txBox="1"/>
           <p:nvPr/>
         </p:nvSpPr>
@@ -13049,7 +12935,7 @@
                 </a:solidFill>
                 <a:latin typeface="Consolas"/>
               </a:rPr>
-              <a:t>25 / 31</a:t>
+              <a:t>25 / 33</a:t>
             </a:r>
           </a:p>
         </p:txBody>
@@ -13201,7 +13087,7 @@
                 </a:solidFill>
                 <a:latin typeface="Consolas"/>
               </a:rPr>
-              <a:t>Safety &amp; Bounded Autonomy</a:t>
+              <a:t>Test Results &amp; Validation</a:t>
             </a:r>
           </a:p>
         </p:txBody>
@@ -13259,20 +13145,276 @@
                 </a:solidFill>
                 <a:latin typeface="Consolas"/>
               </a:rPr>
-              <a:t>Safe by construction</a:t>
-            </a:r>
-          </a:p>
-        </p:txBody>
-      </p:sp>
-      <p:sp>
-        <p:nvSpPr>
-          <p:cNvPr id="8" name="TextBox 7"/>
+              <a:t>Green, deterministic, and honest about the one skip</a:t>
+            </a:r>
+          </a:p>
+        </p:txBody>
+      </p:sp>
+      <p:sp>
+        <p:nvSpPr>
+          <p:cNvPr id="8" name="Rounded Rectangle 7"/>
+          <p:cNvSpPr/>
+          <p:nvPr/>
+        </p:nvSpPr>
+        <p:spPr>
+          <a:xfrm>
+            <a:off x="603504" y="2395728"/>
+            <a:ext cx="2503170" cy="1143000"/>
+          </a:xfrm>
+          <a:prstGeom prst="roundRect">
+            <a:avLst/>
+          </a:prstGeom>
+          <a:noFill/>
+          <a:ln w="12700">
+            <a:solidFill>
+              <a:srgbClr val="22D3EE"/>
+            </a:solidFill>
+          </a:ln>
+        </p:spPr>
+        <p:style>
+          <a:lnRef idx="1">
+            <a:schemeClr val="accent1"/>
+          </a:lnRef>
+          <a:fillRef idx="3">
+            <a:schemeClr val="accent1"/>
+          </a:fillRef>
+          <a:effectRef idx="2">
+            <a:schemeClr val="accent1"/>
+          </a:effectRef>
+          <a:fontRef idx="minor">
+            <a:schemeClr val="lt1"/>
+          </a:fontRef>
+        </p:style>
+        <p:txBody>
+          <a:bodyPr rtlCol="0" anchor="ctr"/>
+          <a:lstStyle/>
+          <a:p>
+            <a:pPr algn="ctr"/>
+            <a:r>
+              <a:rPr sz="3200" b="1">
+                <a:solidFill>
+                  <a:srgbClr val="22D3EE"/>
+                </a:solidFill>
+                <a:latin typeface="Consolas"/>
+              </a:rPr>
+              <a:t>255</a:t>
+            </a:r>
+          </a:p>
+          <a:p>
+            <a:pPr algn="ctr"/>
+            <a:r>
+              <a:rPr sz="1100" b="0">
+                <a:solidFill>
+                  <a:srgbClr val="6B7A90"/>
+                </a:solidFill>
+                <a:latin typeface="Consolas"/>
+              </a:rPr>
+              <a:t>TESTS</a:t>
+            </a:r>
+          </a:p>
+        </p:txBody>
+      </p:sp>
+      <p:sp>
+        <p:nvSpPr>
+          <p:cNvPr id="9" name="Rounded Rectangle 8"/>
+          <p:cNvSpPr/>
+          <p:nvPr/>
+        </p:nvSpPr>
+        <p:spPr>
+          <a:xfrm>
+            <a:off x="3426714" y="2395728"/>
+            <a:ext cx="2503170" cy="1143000"/>
+          </a:xfrm>
+          <a:prstGeom prst="roundRect">
+            <a:avLst/>
+          </a:prstGeom>
+          <a:noFill/>
+          <a:ln w="12700">
+            <a:solidFill>
+              <a:srgbClr val="22D3EE"/>
+            </a:solidFill>
+          </a:ln>
+        </p:spPr>
+        <p:style>
+          <a:lnRef idx="1">
+            <a:schemeClr val="accent1"/>
+          </a:lnRef>
+          <a:fillRef idx="3">
+            <a:schemeClr val="accent1"/>
+          </a:fillRef>
+          <a:effectRef idx="2">
+            <a:schemeClr val="accent1"/>
+          </a:effectRef>
+          <a:fontRef idx="minor">
+            <a:schemeClr val="lt1"/>
+          </a:fontRef>
+        </p:style>
+        <p:txBody>
+          <a:bodyPr rtlCol="0" anchor="ctr"/>
+          <a:lstStyle/>
+          <a:p>
+            <a:pPr algn="ctr"/>
+            <a:r>
+              <a:rPr sz="3200" b="1">
+                <a:solidFill>
+                  <a:srgbClr val="22D3EE"/>
+                </a:solidFill>
+                <a:latin typeface="Consolas"/>
+              </a:rPr>
+              <a:t>254</a:t>
+            </a:r>
+          </a:p>
+          <a:p>
+            <a:pPr algn="ctr"/>
+            <a:r>
+              <a:rPr sz="1100" b="0">
+                <a:solidFill>
+                  <a:srgbClr val="6B7A90"/>
+                </a:solidFill>
+                <a:latin typeface="Consolas"/>
+              </a:rPr>
+              <a:t>PASSING</a:t>
+            </a:r>
+          </a:p>
+        </p:txBody>
+      </p:sp>
+      <p:sp>
+        <p:nvSpPr>
+          <p:cNvPr id="10" name="Rounded Rectangle 9"/>
+          <p:cNvSpPr/>
+          <p:nvPr/>
+        </p:nvSpPr>
+        <p:spPr>
+          <a:xfrm>
+            <a:off x="6249924" y="2395728"/>
+            <a:ext cx="2503170" cy="1143000"/>
+          </a:xfrm>
+          <a:prstGeom prst="roundRect">
+            <a:avLst/>
+          </a:prstGeom>
+          <a:noFill/>
+          <a:ln w="12700">
+            <a:solidFill>
+              <a:srgbClr val="22D3EE"/>
+            </a:solidFill>
+          </a:ln>
+        </p:spPr>
+        <p:style>
+          <a:lnRef idx="1">
+            <a:schemeClr val="accent1"/>
+          </a:lnRef>
+          <a:fillRef idx="3">
+            <a:schemeClr val="accent1"/>
+          </a:fillRef>
+          <a:effectRef idx="2">
+            <a:schemeClr val="accent1"/>
+          </a:effectRef>
+          <a:fontRef idx="minor">
+            <a:schemeClr val="lt1"/>
+          </a:fontRef>
+        </p:style>
+        <p:txBody>
+          <a:bodyPr rtlCol="0" anchor="ctr"/>
+          <a:lstStyle/>
+          <a:p>
+            <a:pPr algn="ctr"/>
+            <a:r>
+              <a:rPr sz="3200" b="1">
+                <a:solidFill>
+                  <a:srgbClr val="22D3EE"/>
+                </a:solidFill>
+                <a:latin typeface="Consolas"/>
+              </a:rPr>
+              <a:t>10</a:t>
+            </a:r>
+          </a:p>
+          <a:p>
+            <a:pPr algn="ctr"/>
+            <a:r>
+              <a:rPr sz="1100" b="0">
+                <a:solidFill>
+                  <a:srgbClr val="6B7A90"/>
+                </a:solidFill>
+                <a:latin typeface="Consolas"/>
+              </a:rPr>
+              <a:t>VULN CLASSES</a:t>
+            </a:r>
+          </a:p>
+        </p:txBody>
+      </p:sp>
+      <p:sp>
+        <p:nvSpPr>
+          <p:cNvPr id="11" name="Rounded Rectangle 10"/>
+          <p:cNvSpPr/>
+          <p:nvPr/>
+        </p:nvSpPr>
+        <p:spPr>
+          <a:xfrm>
+            <a:off x="9073134" y="2395728"/>
+            <a:ext cx="2503170" cy="1143000"/>
+          </a:xfrm>
+          <a:prstGeom prst="roundRect">
+            <a:avLst/>
+          </a:prstGeom>
+          <a:noFill/>
+          <a:ln w="12700">
+            <a:solidFill>
+              <a:srgbClr val="22D3EE"/>
+            </a:solidFill>
+          </a:ln>
+        </p:spPr>
+        <p:style>
+          <a:lnRef idx="1">
+            <a:schemeClr val="accent1"/>
+          </a:lnRef>
+          <a:fillRef idx="3">
+            <a:schemeClr val="accent1"/>
+          </a:fillRef>
+          <a:effectRef idx="2">
+            <a:schemeClr val="accent1"/>
+          </a:effectRef>
+          <a:fontRef idx="minor">
+            <a:schemeClr val="lt1"/>
+          </a:fontRef>
+        </p:style>
+        <p:txBody>
+          <a:bodyPr rtlCol="0" anchor="ctr"/>
+          <a:lstStyle/>
+          <a:p>
+            <a:pPr algn="ctr"/>
+            <a:r>
+              <a:rPr sz="3200" b="1">
+                <a:solidFill>
+                  <a:srgbClr val="22D3EE"/>
+                </a:solidFill>
+                <a:latin typeface="Consolas"/>
+              </a:rPr>
+              <a:t>2</a:t>
+            </a:r>
+          </a:p>
+          <a:p>
+            <a:pPr algn="ctr"/>
+            <a:r>
+              <a:rPr sz="1100" b="0">
+                <a:solidFill>
+                  <a:srgbClr val="6B7A90"/>
+                </a:solidFill>
+                <a:latin typeface="Consolas"/>
+              </a:rPr>
+              <a:t>LIVE STACKS</a:t>
+            </a:r>
+          </a:p>
+        </p:txBody>
+      </p:sp>
+      <p:sp>
+        <p:nvSpPr>
+          <p:cNvPr id="12" name="TextBox 11"/>
           <p:cNvSpPr txBox="1"/>
           <p:nvPr/>
         </p:nvSpPr>
         <p:spPr>
           <a:xfrm>
-            <a:off x="713232" y="2697480"/>
+            <a:off x="713232" y="3840480"/>
             <a:ext cx="10789920" cy="3840480"/>
           </a:xfrm>
           <a:prstGeom prst="rect">
@@ -13288,11 +13430,11 @@
           <a:p>
             <a:pPr>
               <a:spcAft>
-                <a:spcPts val="1500"/>
+                <a:spcPts val="1000"/>
               </a:spcAft>
             </a:pPr>
             <a:r>
-              <a:rPr sz="1800" b="1">
+              <a:rPr sz="1700" b="1">
                 <a:solidFill>
                   <a:srgbClr val="2DD48F"/>
                 </a:solidFill>
@@ -13301,23 +13443,23 @@
               <a:t>»  </a:t>
             </a:r>
             <a:r>
-              <a:rPr sz="1800" b="0">
+              <a:rPr sz="1700" b="0">
                 <a:solidFill>
                   <a:srgbClr val="EAF2FF"/>
                 </a:solidFill>
                 <a:latin typeface="Segoe UI"/>
               </a:rPr>
-              <a:t>Pre-connection scope guard — out-of-scope probes refused</a:t>
+              <a:t>254 passing, 1 skipped (the opt-in live-browser path)</a:t>
             </a:r>
           </a:p>
           <a:p>
             <a:pPr>
               <a:spcAft>
-                <a:spcPts val="1500"/>
+                <a:spcPts val="1000"/>
               </a:spcAft>
             </a:pPr>
             <a:r>
-              <a:rPr sz="1800" b="1">
+              <a:rPr sz="1700" b="1">
                 <a:solidFill>
                   <a:srgbClr val="2DD48F"/>
                 </a:solidFill>
@@ -13326,23 +13468,23 @@
               <a:t>»  </a:t>
             </a:r>
             <a:r>
-              <a:rPr sz="1800" b="0">
+              <a:rPr sz="1700" b="0">
                 <a:solidFill>
                   <a:srgbClr val="EAF2FF"/>
                 </a:solidFill>
                 <a:latin typeface="Segoe UI"/>
               </a:rPr>
-              <a:t>Probes are local, bounded, and non-destructive</a:t>
+              <a:t>Full offline suite is network-free and runs in seconds</a:t>
             </a:r>
           </a:p>
           <a:p>
             <a:pPr>
               <a:spcAft>
-                <a:spcPts val="1500"/>
+                <a:spcPts val="1000"/>
               </a:spcAft>
             </a:pPr>
             <a:r>
-              <a:rPr sz="1800" b="1">
+              <a:rPr sz="1700" b="1">
                 <a:solidFill>
                   <a:srgbClr val="2DD48F"/>
                 </a:solidFill>
@@ -13351,23 +13493,23 @@
               <a:t>»  </a:t>
             </a:r>
             <a:r>
-              <a:rPr sz="1800" b="0">
+              <a:rPr sz="1700" b="0">
                 <a:solidFill>
                   <a:srgbClr val="EAF2FF"/>
                 </a:solidFill>
                 <a:latin typeface="Segoe UI"/>
               </a:rPr>
-              <a:t>The enforcer shield is ephemeral and loopback-only (SSRF-safe)</a:t>
+              <a:t>Each class: parse → CONFIRM → PATCH → PROVE, plus isolation</a:t>
             </a:r>
           </a:p>
           <a:p>
             <a:pPr>
               <a:spcAft>
-                <a:spcPts val="1500"/>
+                <a:spcPts val="1000"/>
               </a:spcAft>
             </a:pPr>
             <a:r>
-              <a:rPr sz="1800" b="1">
+              <a:rPr sz="1700" b="1">
                 <a:solidFill>
                   <a:srgbClr val="2DD48F"/>
                 </a:solidFill>
@@ -13376,45 +13518,45 @@
               <a:t>»  </a:t>
             </a:r>
             <a:r>
-              <a:rPr sz="1800" b="0">
+              <a:rPr sz="1700" b="0">
                 <a:solidFill>
                   <a:srgbClr val="EAF2FF"/>
                 </a:solidFill>
                 <a:latin typeface="Segoe UI"/>
               </a:rPr>
-              <a:t>Nothing both acts and judges — stages are separated</a:t>
+              <a:t>Live E2E validated on Juice Shop and VAmPI over real sockets</a:t>
             </a:r>
           </a:p>
           <a:p>
             <a:pPr>
               <a:spcAft>
-                <a:spcPts val="1500"/>
+                <a:spcPts val="1000"/>
               </a:spcAft>
             </a:pPr>
             <a:r>
-              <a:rPr sz="1800" b="1">
-                <a:solidFill>
-                  <a:srgbClr val="E84BFF"/>
+              <a:rPr sz="1700" b="1">
+                <a:solidFill>
+                  <a:srgbClr val="22D3EE"/>
                 </a:solidFill>
                 <a:latin typeface="Segoe UI"/>
               </a:rPr>
               <a:t>»  </a:t>
             </a:r>
             <a:r>
-              <a:rPr sz="1800" b="0">
+              <a:rPr sz="1700" b="0">
                 <a:solidFill>
                   <a:srgbClr val="C4D2E4"/>
                 </a:solidFill>
                 <a:latin typeface="Segoe UI"/>
               </a:rPr>
-              <a:t>Credentials never persisted or logged; in-memory per run</a:t>
-            </a:r>
-          </a:p>
-        </p:txBody>
-      </p:sp>
-      <p:sp>
-        <p:nvSpPr>
-          <p:cNvPr id="9" name="TextBox 8"/>
+              <a:t>Compliant-control tests assert the honest 'no finding' path</a:t>
+            </a:r>
+          </a:p>
+        </p:txBody>
+      </p:sp>
+      <p:sp>
+        <p:nvSpPr>
+          <p:cNvPr id="13" name="TextBox 12"/>
           <p:cNvSpPr txBox="1"/>
           <p:nvPr/>
         </p:nvSpPr>
@@ -13457,7 +13599,7 @@
       </p:sp>
       <p:sp>
         <p:nvSpPr>
-          <p:cNvPr id="10" name="TextBox 9"/>
+          <p:cNvPr id="14" name="TextBox 13"/>
           <p:cNvSpPr txBox="1"/>
           <p:nvPr/>
         </p:nvSpPr>
@@ -13485,7 +13627,7 @@
                 </a:solidFill>
                 <a:latin typeface="Consolas"/>
               </a:rPr>
-              <a:t>26 / 31</a:t>
+              <a:t>26 / 33</a:t>
             </a:r>
           </a:p>
         </p:txBody>
@@ -13637,7 +13779,7 @@
                 </a:solidFill>
                 <a:latin typeface="Consolas"/>
               </a:rPr>
-              <a:t>Market Landscape</a:t>
+              <a:t>Lightweight &amp; Local</a:t>
             </a:r>
           </a:p>
         </p:txBody>
@@ -13695,7 +13837,7 @@
                 </a:solidFill>
                 <a:latin typeface="Consolas"/>
               </a:rPr>
-              <a:t>Where autonomous, provable reasoning fits</a:t>
+              <a:t>Runs on a laptop; nothing leaves the box</a:t>
             </a:r>
           </a:p>
         </p:txBody>
@@ -13708,1103 +13850,8 @@
         </p:nvSpPr>
         <p:spPr>
           <a:xfrm>
-            <a:off x="6537960" y="2395728"/>
-            <a:ext cx="1691640" cy="640080"/>
-          </a:xfrm>
-          <a:prstGeom prst="rect">
-            <a:avLst/>
-          </a:prstGeom>
-          <a:noFill/>
-        </p:spPr>
-        <p:txBody>
-          <a:bodyPr wrap="square" anchor="b" lIns="0" rIns="0" tIns="0" bIns="0">
-            <a:spAutoFit/>
-          </a:bodyPr>
-          <a:lstStyle/>
-          <a:p>
-            <a:pPr algn="ctr"/>
-            <a:r>
-              <a:rPr sz="1200" b="1">
-                <a:solidFill>
-                  <a:srgbClr val="EAF2FF"/>
-                </a:solidFill>
-                <a:latin typeface="Consolas"/>
-              </a:rPr>
-              <a:t>Signature</a:t>
-            </a:r>
-          </a:p>
-          <a:p>
-            <a:pPr algn="ctr"/>
-            <a:r>
-              <a:rPr sz="1200" b="1">
-                <a:solidFill>
-                  <a:srgbClr val="EAF2FF"/>
-                </a:solidFill>
-                <a:latin typeface="Consolas"/>
-              </a:rPr>
-              <a:t>scanners</a:t>
-            </a:r>
-          </a:p>
-        </p:txBody>
-      </p:sp>
-      <p:sp>
-        <p:nvSpPr>
-          <p:cNvPr id="9" name="TextBox 8"/>
-          <p:cNvSpPr txBox="1"/>
-          <p:nvPr/>
-        </p:nvSpPr>
-        <p:spPr>
-          <a:xfrm>
-            <a:off x="8229600" y="2395728"/>
-            <a:ext cx="1691640" cy="640080"/>
-          </a:xfrm>
-          <a:prstGeom prst="rect">
-            <a:avLst/>
-          </a:prstGeom>
-          <a:noFill/>
-        </p:spPr>
-        <p:txBody>
-          <a:bodyPr wrap="square" anchor="b" lIns="0" rIns="0" tIns="0" bIns="0">
-            <a:spAutoFit/>
-          </a:bodyPr>
-          <a:lstStyle/>
-          <a:p>
-            <a:pPr algn="ctr"/>
-            <a:r>
-              <a:rPr sz="1200" b="1">
-                <a:solidFill>
-                  <a:srgbClr val="EAF2FF"/>
-                </a:solidFill>
-                <a:latin typeface="Consolas"/>
-              </a:rPr>
-              <a:t>DAST /</a:t>
-            </a:r>
-          </a:p>
-          <a:p>
-            <a:pPr algn="ctr"/>
-            <a:r>
-              <a:rPr sz="1200" b="1">
-                <a:solidFill>
-                  <a:srgbClr val="EAF2FF"/>
-                </a:solidFill>
-                <a:latin typeface="Consolas"/>
-              </a:rPr>
-              <a:t>fuzzers</a:t>
-            </a:r>
-          </a:p>
-        </p:txBody>
-      </p:sp>
-      <p:sp>
-        <p:nvSpPr>
-          <p:cNvPr id="10" name="TextBox 9"/>
-          <p:cNvSpPr txBox="1"/>
-          <p:nvPr/>
-        </p:nvSpPr>
-        <p:spPr>
-          <a:xfrm>
-            <a:off x="9921240" y="2395728"/>
-            <a:ext cx="1691640" cy="640080"/>
-          </a:xfrm>
-          <a:prstGeom prst="rect">
-            <a:avLst/>
-          </a:prstGeom>
-          <a:noFill/>
-        </p:spPr>
-        <p:txBody>
-          <a:bodyPr wrap="square" anchor="b" lIns="0" rIns="0" tIns="0" bIns="0">
-            <a:spAutoFit/>
-          </a:bodyPr>
-          <a:lstStyle/>
-          <a:p>
-            <a:pPr algn="ctr"/>
-            <a:r>
-              <a:rPr sz="1200" b="1">
-                <a:solidFill>
-                  <a:srgbClr val="EAF2FF"/>
-                </a:solidFill>
-                <a:latin typeface="Consolas"/>
-              </a:rPr>
-              <a:t>Sentinel</a:t>
-            </a:r>
-          </a:p>
-        </p:txBody>
-      </p:sp>
-      <p:sp>
-        <p:nvSpPr>
-          <p:cNvPr id="11" name="Rectangle 10"/>
-          <p:cNvSpPr/>
-          <p:nvPr/>
-        </p:nvSpPr>
-        <p:spPr>
-          <a:xfrm>
-            <a:off x="548640" y="3108960"/>
-            <a:ext cx="11064240" cy="475488"/>
-          </a:xfrm>
-          <a:prstGeom prst="rect">
-            <a:avLst/>
-          </a:prstGeom>
-          <a:solidFill>
-            <a:srgbClr val="101724"/>
-          </a:solidFill>
-          <a:ln>
-            <a:noFill/>
-          </a:ln>
-          <a:effectLst/>
-        </p:spPr>
-        <p:style>
-          <a:lnRef idx="1">
-            <a:schemeClr val="accent1"/>
-          </a:lnRef>
-          <a:fillRef idx="3">
-            <a:schemeClr val="accent1"/>
-          </a:fillRef>
-          <a:effectRef idx="2">
-            <a:schemeClr val="accent1"/>
-          </a:effectRef>
-          <a:fontRef idx="minor">
-            <a:schemeClr val="lt1"/>
-          </a:fontRef>
-        </p:style>
-        <p:txBody>
-          <a:bodyPr rtlCol="0" anchor="ctr"/>
-          <a:lstStyle/>
-          <a:p>
-            <a:pPr algn="ctr"/>
-          </a:p>
-        </p:txBody>
-      </p:sp>
-      <p:sp>
-        <p:nvSpPr>
-          <p:cNvPr id="12" name="TextBox 11"/>
-          <p:cNvSpPr txBox="1"/>
-          <p:nvPr/>
-        </p:nvSpPr>
-        <p:spPr>
-          <a:xfrm>
-            <a:off x="658368" y="3108960"/>
-            <a:ext cx="5669280" cy="475488"/>
-          </a:xfrm>
-          <a:prstGeom prst="rect">
-            <a:avLst/>
-          </a:prstGeom>
-          <a:noFill/>
-        </p:spPr>
-        <p:txBody>
-          <a:bodyPr wrap="square" anchor="ctr" lIns="0" rIns="0" tIns="0" bIns="0">
-            <a:spAutoFit/>
-          </a:bodyPr>
-          <a:lstStyle/>
-          <a:p>
-            <a:r>
-              <a:rPr sz="1400" b="0">
-                <a:solidFill>
-                  <a:srgbClr val="C4D2E4"/>
-                </a:solidFill>
-                <a:latin typeface="Segoe UI"/>
-              </a:rPr>
-              <a:t>Finds authorization / BOLA flaws</a:t>
-            </a:r>
-          </a:p>
-        </p:txBody>
-      </p:sp>
-      <p:sp>
-        <p:nvSpPr>
-          <p:cNvPr id="13" name="TextBox 12"/>
-          <p:cNvSpPr txBox="1"/>
-          <p:nvPr/>
-        </p:nvSpPr>
-        <p:spPr>
-          <a:xfrm>
-            <a:off x="6537960" y="3108960"/>
-            <a:ext cx="1691640" cy="475488"/>
-          </a:xfrm>
-          <a:prstGeom prst="rect">
-            <a:avLst/>
-          </a:prstGeom>
-          <a:noFill/>
-        </p:spPr>
-        <p:txBody>
-          <a:bodyPr wrap="square" anchor="ctr" lIns="0" rIns="0" tIns="0" bIns="0">
-            <a:spAutoFit/>
-          </a:bodyPr>
-          <a:lstStyle/>
-          <a:p>
-            <a:pPr algn="ctr"/>
-            <a:r>
-              <a:rPr sz="1800" b="1">
-                <a:solidFill>
-                  <a:srgbClr val="FF5C6E"/>
-                </a:solidFill>
-                <a:latin typeface="Segoe UI Symbol"/>
-              </a:rPr>
-              <a:t>✗</a:t>
-            </a:r>
-          </a:p>
-        </p:txBody>
-      </p:sp>
-      <p:sp>
-        <p:nvSpPr>
-          <p:cNvPr id="14" name="TextBox 13"/>
-          <p:cNvSpPr txBox="1"/>
-          <p:nvPr/>
-        </p:nvSpPr>
-        <p:spPr>
-          <a:xfrm>
-            <a:off x="8229600" y="3108960"/>
-            <a:ext cx="1691640" cy="475488"/>
-          </a:xfrm>
-          <a:prstGeom prst="rect">
-            <a:avLst/>
-          </a:prstGeom>
-          <a:noFill/>
-        </p:spPr>
-        <p:txBody>
-          <a:bodyPr wrap="square" anchor="ctr" lIns="0" rIns="0" tIns="0" bIns="0">
-            <a:spAutoFit/>
-          </a:bodyPr>
-          <a:lstStyle/>
-          <a:p>
-            <a:pPr algn="ctr"/>
-            <a:r>
-              <a:rPr sz="1800" b="1">
-                <a:solidFill>
-                  <a:srgbClr val="F5B301"/>
-                </a:solidFill>
-                <a:latin typeface="Segoe UI Symbol"/>
-              </a:rPr>
-              <a:t>~</a:t>
-            </a:r>
-          </a:p>
-        </p:txBody>
-      </p:sp>
-      <p:sp>
-        <p:nvSpPr>
-          <p:cNvPr id="15" name="TextBox 14"/>
-          <p:cNvSpPr txBox="1"/>
-          <p:nvPr/>
-        </p:nvSpPr>
-        <p:spPr>
-          <a:xfrm>
-            <a:off x="9921240" y="3108960"/>
-            <a:ext cx="1691640" cy="475488"/>
-          </a:xfrm>
-          <a:prstGeom prst="rect">
-            <a:avLst/>
-          </a:prstGeom>
-          <a:noFill/>
-        </p:spPr>
-        <p:txBody>
-          <a:bodyPr wrap="square" anchor="ctr" lIns="0" rIns="0" tIns="0" bIns="0">
-            <a:spAutoFit/>
-          </a:bodyPr>
-          <a:lstStyle/>
-          <a:p>
-            <a:pPr algn="ctr"/>
-            <a:r>
-              <a:rPr sz="1800" b="1">
-                <a:solidFill>
-                  <a:srgbClr val="2DD48F"/>
-                </a:solidFill>
-                <a:latin typeface="Segoe UI Symbol"/>
-              </a:rPr>
-              <a:t>✓</a:t>
-            </a:r>
-          </a:p>
-        </p:txBody>
-      </p:sp>
-      <p:sp>
-        <p:nvSpPr>
-          <p:cNvPr id="16" name="TextBox 15"/>
-          <p:cNvSpPr txBox="1"/>
-          <p:nvPr/>
-        </p:nvSpPr>
-        <p:spPr>
-          <a:xfrm>
-            <a:off x="658368" y="3584448"/>
-            <a:ext cx="5669280" cy="475488"/>
-          </a:xfrm>
-          <a:prstGeom prst="rect">
-            <a:avLst/>
-          </a:prstGeom>
-          <a:noFill/>
-        </p:spPr>
-        <p:txBody>
-          <a:bodyPr wrap="square" anchor="ctr" lIns="0" rIns="0" tIns="0" bIns="0">
-            <a:spAutoFit/>
-          </a:bodyPr>
-          <a:lstStyle/>
-          <a:p>
-            <a:r>
-              <a:rPr sz="1400" b="0">
-                <a:solidFill>
-                  <a:srgbClr val="C4D2E4"/>
-                </a:solidFill>
-                <a:latin typeface="Segoe UI"/>
-              </a:rPr>
-              <a:t>Verdict is a reproduced contradiction</a:t>
-            </a:r>
-          </a:p>
-        </p:txBody>
-      </p:sp>
-      <p:sp>
-        <p:nvSpPr>
-          <p:cNvPr id="17" name="TextBox 16"/>
-          <p:cNvSpPr txBox="1"/>
-          <p:nvPr/>
-        </p:nvSpPr>
-        <p:spPr>
-          <a:xfrm>
-            <a:off x="6537960" y="3584448"/>
-            <a:ext cx="1691640" cy="475488"/>
-          </a:xfrm>
-          <a:prstGeom prst="rect">
-            <a:avLst/>
-          </a:prstGeom>
-          <a:noFill/>
-        </p:spPr>
-        <p:txBody>
-          <a:bodyPr wrap="square" anchor="ctr" lIns="0" rIns="0" tIns="0" bIns="0">
-            <a:spAutoFit/>
-          </a:bodyPr>
-          <a:lstStyle/>
-          <a:p>
-            <a:pPr algn="ctr"/>
-            <a:r>
-              <a:rPr sz="1800" b="1">
-                <a:solidFill>
-                  <a:srgbClr val="FF5C6E"/>
-                </a:solidFill>
-                <a:latin typeface="Segoe UI Symbol"/>
-              </a:rPr>
-              <a:t>✗</a:t>
-            </a:r>
-          </a:p>
-        </p:txBody>
-      </p:sp>
-      <p:sp>
-        <p:nvSpPr>
-          <p:cNvPr id="18" name="TextBox 17"/>
-          <p:cNvSpPr txBox="1"/>
-          <p:nvPr/>
-        </p:nvSpPr>
-        <p:spPr>
-          <a:xfrm>
-            <a:off x="8229600" y="3584448"/>
-            <a:ext cx="1691640" cy="475488"/>
-          </a:xfrm>
-          <a:prstGeom prst="rect">
-            <a:avLst/>
-          </a:prstGeom>
-          <a:noFill/>
-        </p:spPr>
-        <p:txBody>
-          <a:bodyPr wrap="square" anchor="ctr" lIns="0" rIns="0" tIns="0" bIns="0">
-            <a:spAutoFit/>
-          </a:bodyPr>
-          <a:lstStyle/>
-          <a:p>
-            <a:pPr algn="ctr"/>
-            <a:r>
-              <a:rPr sz="1800" b="1">
-                <a:solidFill>
-                  <a:srgbClr val="FF5C6E"/>
-                </a:solidFill>
-                <a:latin typeface="Segoe UI Symbol"/>
-              </a:rPr>
-              <a:t>✗</a:t>
-            </a:r>
-          </a:p>
-        </p:txBody>
-      </p:sp>
-      <p:sp>
-        <p:nvSpPr>
-          <p:cNvPr id="19" name="TextBox 18"/>
-          <p:cNvSpPr txBox="1"/>
-          <p:nvPr/>
-        </p:nvSpPr>
-        <p:spPr>
-          <a:xfrm>
-            <a:off x="9921240" y="3584448"/>
-            <a:ext cx="1691640" cy="475488"/>
-          </a:xfrm>
-          <a:prstGeom prst="rect">
-            <a:avLst/>
-          </a:prstGeom>
-          <a:noFill/>
-        </p:spPr>
-        <p:txBody>
-          <a:bodyPr wrap="square" anchor="ctr" lIns="0" rIns="0" tIns="0" bIns="0">
-            <a:spAutoFit/>
-          </a:bodyPr>
-          <a:lstStyle/>
-          <a:p>
-            <a:pPr algn="ctr"/>
-            <a:r>
-              <a:rPr sz="1800" b="1">
-                <a:solidFill>
-                  <a:srgbClr val="2DD48F"/>
-                </a:solidFill>
-                <a:latin typeface="Segoe UI Symbol"/>
-              </a:rPr>
-              <a:t>✓</a:t>
-            </a:r>
-          </a:p>
-        </p:txBody>
-      </p:sp>
-      <p:sp>
-        <p:nvSpPr>
-          <p:cNvPr id="20" name="Rectangle 19"/>
-          <p:cNvSpPr/>
-          <p:nvPr/>
-        </p:nvSpPr>
-        <p:spPr>
-          <a:xfrm>
-            <a:off x="548640" y="4059936"/>
-            <a:ext cx="11064240" cy="475488"/>
-          </a:xfrm>
-          <a:prstGeom prst="rect">
-            <a:avLst/>
-          </a:prstGeom>
-          <a:solidFill>
-            <a:srgbClr val="101724"/>
-          </a:solidFill>
-          <a:ln>
-            <a:noFill/>
-          </a:ln>
-          <a:effectLst/>
-        </p:spPr>
-        <p:style>
-          <a:lnRef idx="1">
-            <a:schemeClr val="accent1"/>
-          </a:lnRef>
-          <a:fillRef idx="3">
-            <a:schemeClr val="accent1"/>
-          </a:fillRef>
-          <a:effectRef idx="2">
-            <a:schemeClr val="accent1"/>
-          </a:effectRef>
-          <a:fontRef idx="minor">
-            <a:schemeClr val="lt1"/>
-          </a:fontRef>
-        </p:style>
-        <p:txBody>
-          <a:bodyPr rtlCol="0" anchor="ctr"/>
-          <a:lstStyle/>
-          <a:p>
-            <a:pPr algn="ctr"/>
-          </a:p>
-        </p:txBody>
-      </p:sp>
-      <p:sp>
-        <p:nvSpPr>
-          <p:cNvPr id="21" name="TextBox 20"/>
-          <p:cNvSpPr txBox="1"/>
-          <p:nvPr/>
-        </p:nvSpPr>
-        <p:spPr>
-          <a:xfrm>
-            <a:off x="658368" y="4059936"/>
-            <a:ext cx="5669280" cy="475488"/>
-          </a:xfrm>
-          <a:prstGeom prst="rect">
-            <a:avLst/>
-          </a:prstGeom>
-          <a:noFill/>
-        </p:spPr>
-        <p:txBody>
-          <a:bodyPr wrap="square" anchor="ctr" lIns="0" rIns="0" tIns="0" bIns="0">
-            <a:spAutoFit/>
-          </a:bodyPr>
-          <a:lstStyle/>
-          <a:p>
-            <a:r>
-              <a:rPr sz="1400" b="0">
-                <a:solidFill>
-                  <a:srgbClr val="C4D2E4"/>
-                </a:solidFill>
-                <a:latin typeface="Segoe UI"/>
-              </a:rPr>
-              <a:t>Proves the fix, live</a:t>
-            </a:r>
-          </a:p>
-        </p:txBody>
-      </p:sp>
-      <p:sp>
-        <p:nvSpPr>
-          <p:cNvPr id="22" name="TextBox 21"/>
-          <p:cNvSpPr txBox="1"/>
-          <p:nvPr/>
-        </p:nvSpPr>
-        <p:spPr>
-          <a:xfrm>
-            <a:off x="6537960" y="4059936"/>
-            <a:ext cx="1691640" cy="475488"/>
-          </a:xfrm>
-          <a:prstGeom prst="rect">
-            <a:avLst/>
-          </a:prstGeom>
-          <a:noFill/>
-        </p:spPr>
-        <p:txBody>
-          <a:bodyPr wrap="square" anchor="ctr" lIns="0" rIns="0" tIns="0" bIns="0">
-            <a:spAutoFit/>
-          </a:bodyPr>
-          <a:lstStyle/>
-          <a:p>
-            <a:pPr algn="ctr"/>
-            <a:r>
-              <a:rPr sz="1800" b="1">
-                <a:solidFill>
-                  <a:srgbClr val="FF5C6E"/>
-                </a:solidFill>
-                <a:latin typeface="Segoe UI Symbol"/>
-              </a:rPr>
-              <a:t>✗</a:t>
-            </a:r>
-          </a:p>
-        </p:txBody>
-      </p:sp>
-      <p:sp>
-        <p:nvSpPr>
-          <p:cNvPr id="23" name="TextBox 22"/>
-          <p:cNvSpPr txBox="1"/>
-          <p:nvPr/>
-        </p:nvSpPr>
-        <p:spPr>
-          <a:xfrm>
-            <a:off x="8229600" y="4059936"/>
-            <a:ext cx="1691640" cy="475488"/>
-          </a:xfrm>
-          <a:prstGeom prst="rect">
-            <a:avLst/>
-          </a:prstGeom>
-          <a:noFill/>
-        </p:spPr>
-        <p:txBody>
-          <a:bodyPr wrap="square" anchor="ctr" lIns="0" rIns="0" tIns="0" bIns="0">
-            <a:spAutoFit/>
-          </a:bodyPr>
-          <a:lstStyle/>
-          <a:p>
-            <a:pPr algn="ctr"/>
-            <a:r>
-              <a:rPr sz="1800" b="1">
-                <a:solidFill>
-                  <a:srgbClr val="FF5C6E"/>
-                </a:solidFill>
-                <a:latin typeface="Segoe UI Symbol"/>
-              </a:rPr>
-              <a:t>✗</a:t>
-            </a:r>
-          </a:p>
-        </p:txBody>
-      </p:sp>
-      <p:sp>
-        <p:nvSpPr>
-          <p:cNvPr id="24" name="TextBox 23"/>
-          <p:cNvSpPr txBox="1"/>
-          <p:nvPr/>
-        </p:nvSpPr>
-        <p:spPr>
-          <a:xfrm>
-            <a:off x="9921240" y="4059936"/>
-            <a:ext cx="1691640" cy="475488"/>
-          </a:xfrm>
-          <a:prstGeom prst="rect">
-            <a:avLst/>
-          </a:prstGeom>
-          <a:noFill/>
-        </p:spPr>
-        <p:txBody>
-          <a:bodyPr wrap="square" anchor="ctr" lIns="0" rIns="0" tIns="0" bIns="0">
-            <a:spAutoFit/>
-          </a:bodyPr>
-          <a:lstStyle/>
-          <a:p>
-            <a:pPr algn="ctr"/>
-            <a:r>
-              <a:rPr sz="1800" b="1">
-                <a:solidFill>
-                  <a:srgbClr val="2DD48F"/>
-                </a:solidFill>
-                <a:latin typeface="Segoe UI Symbol"/>
-              </a:rPr>
-              <a:t>✓</a:t>
-            </a:r>
-          </a:p>
-        </p:txBody>
-      </p:sp>
-      <p:sp>
-        <p:nvSpPr>
-          <p:cNvPr id="25" name="TextBox 24"/>
-          <p:cNvSpPr txBox="1"/>
-          <p:nvPr/>
-        </p:nvSpPr>
-        <p:spPr>
-          <a:xfrm>
-            <a:off x="658368" y="4535424"/>
-            <a:ext cx="5669280" cy="475488"/>
-          </a:xfrm>
-          <a:prstGeom prst="rect">
-            <a:avLst/>
-          </a:prstGeom>
-          <a:noFill/>
-        </p:spPr>
-        <p:txBody>
-          <a:bodyPr wrap="square" anchor="ctr" lIns="0" rIns="0" tIns="0" bIns="0">
-            <a:spAutoFit/>
-          </a:bodyPr>
-          <a:lstStyle/>
-          <a:p>
-            <a:r>
-              <a:rPr sz="1400" b="0">
-                <a:solidFill>
-                  <a:srgbClr val="C4D2E4"/>
-                </a:solidFill>
-                <a:latin typeface="Segoe UI"/>
-              </a:rPr>
-              <a:t>Autonomous, self-directed research</a:t>
-            </a:r>
-          </a:p>
-        </p:txBody>
-      </p:sp>
-      <p:sp>
-        <p:nvSpPr>
-          <p:cNvPr id="26" name="TextBox 25"/>
-          <p:cNvSpPr txBox="1"/>
-          <p:nvPr/>
-        </p:nvSpPr>
-        <p:spPr>
-          <a:xfrm>
-            <a:off x="6537960" y="4535424"/>
-            <a:ext cx="1691640" cy="475488"/>
-          </a:xfrm>
-          <a:prstGeom prst="rect">
-            <a:avLst/>
-          </a:prstGeom>
-          <a:noFill/>
-        </p:spPr>
-        <p:txBody>
-          <a:bodyPr wrap="square" anchor="ctr" lIns="0" rIns="0" tIns="0" bIns="0">
-            <a:spAutoFit/>
-          </a:bodyPr>
-          <a:lstStyle/>
-          <a:p>
-            <a:pPr algn="ctr"/>
-            <a:r>
-              <a:rPr sz="1800" b="1">
-                <a:solidFill>
-                  <a:srgbClr val="FF5C6E"/>
-                </a:solidFill>
-                <a:latin typeface="Segoe UI Symbol"/>
-              </a:rPr>
-              <a:t>✗</a:t>
-            </a:r>
-          </a:p>
-        </p:txBody>
-      </p:sp>
-      <p:sp>
-        <p:nvSpPr>
-          <p:cNvPr id="27" name="TextBox 26"/>
-          <p:cNvSpPr txBox="1"/>
-          <p:nvPr/>
-        </p:nvSpPr>
-        <p:spPr>
-          <a:xfrm>
-            <a:off x="8229600" y="4535424"/>
-            <a:ext cx="1691640" cy="475488"/>
-          </a:xfrm>
-          <a:prstGeom prst="rect">
-            <a:avLst/>
-          </a:prstGeom>
-          <a:noFill/>
-        </p:spPr>
-        <p:txBody>
-          <a:bodyPr wrap="square" anchor="ctr" lIns="0" rIns="0" tIns="0" bIns="0">
-            <a:spAutoFit/>
-          </a:bodyPr>
-          <a:lstStyle/>
-          <a:p>
-            <a:pPr algn="ctr"/>
-            <a:r>
-              <a:rPr sz="1800" b="1">
-                <a:solidFill>
-                  <a:srgbClr val="F5B301"/>
-                </a:solidFill>
-                <a:latin typeface="Segoe UI Symbol"/>
-              </a:rPr>
-              <a:t>~</a:t>
-            </a:r>
-          </a:p>
-        </p:txBody>
-      </p:sp>
-      <p:sp>
-        <p:nvSpPr>
-          <p:cNvPr id="28" name="TextBox 27"/>
-          <p:cNvSpPr txBox="1"/>
-          <p:nvPr/>
-        </p:nvSpPr>
-        <p:spPr>
-          <a:xfrm>
-            <a:off x="9921240" y="4535424"/>
-            <a:ext cx="1691640" cy="475488"/>
-          </a:xfrm>
-          <a:prstGeom prst="rect">
-            <a:avLst/>
-          </a:prstGeom>
-          <a:noFill/>
-        </p:spPr>
-        <p:txBody>
-          <a:bodyPr wrap="square" anchor="ctr" lIns="0" rIns="0" tIns="0" bIns="0">
-            <a:spAutoFit/>
-          </a:bodyPr>
-          <a:lstStyle/>
-          <a:p>
-            <a:pPr algn="ctr"/>
-            <a:r>
-              <a:rPr sz="1800" b="1">
-                <a:solidFill>
-                  <a:srgbClr val="2DD48F"/>
-                </a:solidFill>
-                <a:latin typeface="Segoe UI Symbol"/>
-              </a:rPr>
-              <a:t>✓</a:t>
-            </a:r>
-          </a:p>
-        </p:txBody>
-      </p:sp>
-      <p:sp>
-        <p:nvSpPr>
-          <p:cNvPr id="29" name="Rectangle 28"/>
-          <p:cNvSpPr/>
-          <p:nvPr/>
-        </p:nvSpPr>
-        <p:spPr>
-          <a:xfrm>
-            <a:off x="548640" y="5010912"/>
-            <a:ext cx="11064240" cy="475488"/>
-          </a:xfrm>
-          <a:prstGeom prst="rect">
-            <a:avLst/>
-          </a:prstGeom>
-          <a:solidFill>
-            <a:srgbClr val="101724"/>
-          </a:solidFill>
-          <a:ln>
-            <a:noFill/>
-          </a:ln>
-          <a:effectLst/>
-        </p:spPr>
-        <p:style>
-          <a:lnRef idx="1">
-            <a:schemeClr val="accent1"/>
-          </a:lnRef>
-          <a:fillRef idx="3">
-            <a:schemeClr val="accent1"/>
-          </a:fillRef>
-          <a:effectRef idx="2">
-            <a:schemeClr val="accent1"/>
-          </a:effectRef>
-          <a:fontRef idx="minor">
-            <a:schemeClr val="lt1"/>
-          </a:fontRef>
-        </p:style>
-        <p:txBody>
-          <a:bodyPr rtlCol="0" anchor="ctr"/>
-          <a:lstStyle/>
-          <a:p>
-            <a:pPr algn="ctr"/>
-          </a:p>
-        </p:txBody>
-      </p:sp>
-      <p:sp>
-        <p:nvSpPr>
-          <p:cNvPr id="30" name="TextBox 29"/>
-          <p:cNvSpPr txBox="1"/>
-          <p:nvPr/>
-        </p:nvSpPr>
-        <p:spPr>
-          <a:xfrm>
-            <a:off x="658368" y="5010912"/>
-            <a:ext cx="5669280" cy="475488"/>
-          </a:xfrm>
-          <a:prstGeom prst="rect">
-            <a:avLst/>
-          </a:prstGeom>
-          <a:noFill/>
-        </p:spPr>
-        <p:txBody>
-          <a:bodyPr wrap="square" anchor="ctr" lIns="0" rIns="0" tIns="0" bIns="0">
-            <a:spAutoFit/>
-          </a:bodyPr>
-          <a:lstStyle/>
-          <a:p>
-            <a:r>
-              <a:rPr sz="1400" b="0">
-                <a:solidFill>
-                  <a:srgbClr val="C4D2E4"/>
-                </a:solidFill>
-                <a:latin typeface="Segoe UI"/>
-              </a:rPr>
-              <a:t>Local-first, no data egress</a:t>
-            </a:r>
-          </a:p>
-        </p:txBody>
-      </p:sp>
-      <p:sp>
-        <p:nvSpPr>
-          <p:cNvPr id="31" name="TextBox 30"/>
-          <p:cNvSpPr txBox="1"/>
-          <p:nvPr/>
-        </p:nvSpPr>
-        <p:spPr>
-          <a:xfrm>
-            <a:off x="6537960" y="5010912"/>
-            <a:ext cx="1691640" cy="475488"/>
-          </a:xfrm>
-          <a:prstGeom prst="rect">
-            <a:avLst/>
-          </a:prstGeom>
-          <a:noFill/>
-        </p:spPr>
-        <p:txBody>
-          <a:bodyPr wrap="square" anchor="ctr" lIns="0" rIns="0" tIns="0" bIns="0">
-            <a:spAutoFit/>
-          </a:bodyPr>
-          <a:lstStyle/>
-          <a:p>
-            <a:pPr algn="ctr"/>
-            <a:r>
-              <a:rPr sz="1800" b="1">
-                <a:solidFill>
-                  <a:srgbClr val="F5B301"/>
-                </a:solidFill>
-                <a:latin typeface="Segoe UI Symbol"/>
-              </a:rPr>
-              <a:t>~</a:t>
-            </a:r>
-          </a:p>
-        </p:txBody>
-      </p:sp>
-      <p:sp>
-        <p:nvSpPr>
-          <p:cNvPr id="32" name="TextBox 31"/>
-          <p:cNvSpPr txBox="1"/>
-          <p:nvPr/>
-        </p:nvSpPr>
-        <p:spPr>
-          <a:xfrm>
-            <a:off x="8229600" y="5010912"/>
-            <a:ext cx="1691640" cy="475488"/>
-          </a:xfrm>
-          <a:prstGeom prst="rect">
-            <a:avLst/>
-          </a:prstGeom>
-          <a:noFill/>
-        </p:spPr>
-        <p:txBody>
-          <a:bodyPr wrap="square" anchor="ctr" lIns="0" rIns="0" tIns="0" bIns="0">
-            <a:spAutoFit/>
-          </a:bodyPr>
-          <a:lstStyle/>
-          <a:p>
-            <a:pPr algn="ctr"/>
-            <a:r>
-              <a:rPr sz="1800" b="1">
-                <a:solidFill>
-                  <a:srgbClr val="F5B301"/>
-                </a:solidFill>
-                <a:latin typeface="Segoe UI Symbol"/>
-              </a:rPr>
-              <a:t>~</a:t>
-            </a:r>
-          </a:p>
-        </p:txBody>
-      </p:sp>
-      <p:sp>
-        <p:nvSpPr>
-          <p:cNvPr id="33" name="TextBox 32"/>
-          <p:cNvSpPr txBox="1"/>
-          <p:nvPr/>
-        </p:nvSpPr>
-        <p:spPr>
-          <a:xfrm>
-            <a:off x="9921240" y="5010912"/>
-            <a:ext cx="1691640" cy="475488"/>
-          </a:xfrm>
-          <a:prstGeom prst="rect">
-            <a:avLst/>
-          </a:prstGeom>
-          <a:noFill/>
-        </p:spPr>
-        <p:txBody>
-          <a:bodyPr wrap="square" anchor="ctr" lIns="0" rIns="0" tIns="0" bIns="0">
-            <a:spAutoFit/>
-          </a:bodyPr>
-          <a:lstStyle/>
-          <a:p>
-            <a:pPr algn="ctr"/>
-            <a:r>
-              <a:rPr sz="1800" b="1">
-                <a:solidFill>
-                  <a:srgbClr val="2DD48F"/>
-                </a:solidFill>
-                <a:latin typeface="Segoe UI Symbol"/>
-              </a:rPr>
-              <a:t>✓</a:t>
-            </a:r>
-          </a:p>
-        </p:txBody>
-      </p:sp>
-      <p:sp>
-        <p:nvSpPr>
-          <p:cNvPr id="34" name="TextBox 33"/>
-          <p:cNvSpPr txBox="1"/>
-          <p:nvPr/>
-        </p:nvSpPr>
-        <p:spPr>
-          <a:xfrm>
-            <a:off x="658368" y="5486400"/>
-            <a:ext cx="5669280" cy="475488"/>
-          </a:xfrm>
-          <a:prstGeom prst="rect">
-            <a:avLst/>
-          </a:prstGeom>
-          <a:noFill/>
-        </p:spPr>
-        <p:txBody>
-          <a:bodyPr wrap="square" anchor="ctr" lIns="0" rIns="0" tIns="0" bIns="0">
-            <a:spAutoFit/>
-          </a:bodyPr>
-          <a:lstStyle/>
-          <a:p>
-            <a:r>
-              <a:rPr sz="1400" b="0">
-                <a:solidFill>
-                  <a:srgbClr val="C4D2E4"/>
-                </a:solidFill>
-                <a:latin typeface="Segoe UI"/>
-              </a:rPr>
-              <a:t>Every decision auditable</a:t>
-            </a:r>
-          </a:p>
-        </p:txBody>
-      </p:sp>
-      <p:sp>
-        <p:nvSpPr>
-          <p:cNvPr id="35" name="TextBox 34"/>
-          <p:cNvSpPr txBox="1"/>
-          <p:nvPr/>
-        </p:nvSpPr>
-        <p:spPr>
-          <a:xfrm>
-            <a:off x="6537960" y="5486400"/>
-            <a:ext cx="1691640" cy="475488"/>
-          </a:xfrm>
-          <a:prstGeom prst="rect">
-            <a:avLst/>
-          </a:prstGeom>
-          <a:noFill/>
-        </p:spPr>
-        <p:txBody>
-          <a:bodyPr wrap="square" anchor="ctr" lIns="0" rIns="0" tIns="0" bIns="0">
-            <a:spAutoFit/>
-          </a:bodyPr>
-          <a:lstStyle/>
-          <a:p>
-            <a:pPr algn="ctr"/>
-            <a:r>
-              <a:rPr sz="1800" b="1">
-                <a:solidFill>
-                  <a:srgbClr val="F5B301"/>
-                </a:solidFill>
-                <a:latin typeface="Segoe UI Symbol"/>
-              </a:rPr>
-              <a:t>~</a:t>
-            </a:r>
-          </a:p>
-        </p:txBody>
-      </p:sp>
-      <p:sp>
-        <p:nvSpPr>
-          <p:cNvPr id="36" name="TextBox 35"/>
-          <p:cNvSpPr txBox="1"/>
-          <p:nvPr/>
-        </p:nvSpPr>
-        <p:spPr>
-          <a:xfrm>
-            <a:off x="8229600" y="5486400"/>
-            <a:ext cx="1691640" cy="475488"/>
-          </a:xfrm>
-          <a:prstGeom prst="rect">
-            <a:avLst/>
-          </a:prstGeom>
-          <a:noFill/>
-        </p:spPr>
-        <p:txBody>
-          <a:bodyPr wrap="square" anchor="ctr" lIns="0" rIns="0" tIns="0" bIns="0">
-            <a:spAutoFit/>
-          </a:bodyPr>
-          <a:lstStyle/>
-          <a:p>
-            <a:pPr algn="ctr"/>
-            <a:r>
-              <a:rPr sz="1800" b="1">
-                <a:solidFill>
-                  <a:srgbClr val="FF5C6E"/>
-                </a:solidFill>
-                <a:latin typeface="Segoe UI Symbol"/>
-              </a:rPr>
-              <a:t>✗</a:t>
-            </a:r>
-          </a:p>
-        </p:txBody>
-      </p:sp>
-      <p:sp>
-        <p:nvSpPr>
-          <p:cNvPr id="37" name="TextBox 36"/>
-          <p:cNvSpPr txBox="1"/>
-          <p:nvPr/>
-        </p:nvSpPr>
-        <p:spPr>
-          <a:xfrm>
-            <a:off x="9921240" y="5486400"/>
-            <a:ext cx="1691640" cy="475488"/>
-          </a:xfrm>
-          <a:prstGeom prst="rect">
-            <a:avLst/>
-          </a:prstGeom>
-          <a:noFill/>
-        </p:spPr>
-        <p:txBody>
-          <a:bodyPr wrap="square" anchor="ctr" lIns="0" rIns="0" tIns="0" bIns="0">
-            <a:spAutoFit/>
-          </a:bodyPr>
-          <a:lstStyle/>
-          <a:p>
-            <a:pPr algn="ctr"/>
-            <a:r>
-              <a:rPr sz="1800" b="1">
-                <a:solidFill>
-                  <a:srgbClr val="2DD48F"/>
-                </a:solidFill>
-                <a:latin typeface="Segoe UI Symbol"/>
-              </a:rPr>
-              <a:t>✓</a:t>
-            </a:r>
-          </a:p>
-        </p:txBody>
-      </p:sp>
-      <p:sp>
-        <p:nvSpPr>
-          <p:cNvPr id="38" name="TextBox 37"/>
-          <p:cNvSpPr txBox="1"/>
-          <p:nvPr/>
-        </p:nvSpPr>
-        <p:spPr>
-          <a:xfrm>
-            <a:off x="566928" y="6382512"/>
-            <a:ext cx="8229600" cy="365760"/>
+            <a:off x="713232" y="2697480"/>
+            <a:ext cx="10789920" cy="3840480"/>
           </a:xfrm>
           <a:prstGeom prst="rect">
             <a:avLst/>
@@ -14817,37 +13864,142 @@
           </a:bodyPr>
           <a:lstStyle/>
           <a:p>
-            <a:r>
-              <a:rPr sz="1000" b="1">
+            <a:pPr>
+              <a:spcAft>
+                <a:spcPts val="1500"/>
+              </a:spcAft>
+            </a:pPr>
+            <a:r>
+              <a:rPr sz="1800" b="1">
                 <a:solidFill>
                   <a:srgbClr val="22D3EE"/>
                 </a:solidFill>
-                <a:latin typeface="Consolas"/>
-              </a:rPr>
-              <a:t>SENTINEL</a:t>
-            </a:r>
-            <a:r>
-              <a:rPr sz="1000" b="0">
-                <a:solidFill>
-                  <a:srgbClr val="6B7A90"/>
-                </a:solidFill>
-                <a:latin typeface="Consolas"/>
-              </a:rPr>
-              <a:t>   ·   find → reason → prove → patch → prove</a:t>
-            </a:r>
-          </a:p>
-        </p:txBody>
-      </p:sp>
-      <p:sp>
-        <p:nvSpPr>
-          <p:cNvPr id="39" name="TextBox 38"/>
+                <a:latin typeface="Segoe UI"/>
+              </a:rPr>
+              <a:t>»  </a:t>
+            </a:r>
+            <a:r>
+              <a:rPr sz="1800" b="0">
+                <a:solidFill>
+                  <a:srgbClr val="C4D2E4"/>
+                </a:solidFill>
+                <a:latin typeface="Segoe UI"/>
+              </a:rPr>
+              <a:t>Local model via Ollama (qwen3:4b) — no cloud dependency</a:t>
+            </a:r>
+          </a:p>
+          <a:p>
+            <a:pPr>
+              <a:spcAft>
+                <a:spcPts val="1500"/>
+              </a:spcAft>
+            </a:pPr>
+            <a:r>
+              <a:rPr sz="1800" b="1">
+                <a:solidFill>
+                  <a:srgbClr val="22D3EE"/>
+                </a:solidFill>
+                <a:latin typeface="Segoe UI"/>
+              </a:rPr>
+              <a:t>»  </a:t>
+            </a:r>
+            <a:r>
+              <a:rPr sz="1800" b="0">
+                <a:solidFill>
+                  <a:srgbClr val="C4D2E4"/>
+                </a:solidFill>
+                <a:latin typeface="Segoe UI"/>
+              </a:rPr>
+              <a:t>Core install is lightweight; Playwright is an opt-in extra</a:t>
+            </a:r>
+          </a:p>
+          <a:p>
+            <a:pPr>
+              <a:spcAft>
+                <a:spcPts val="1500"/>
+              </a:spcAft>
+            </a:pPr>
+            <a:r>
+              <a:rPr sz="1800" b="1">
+                <a:solidFill>
+                  <a:srgbClr val="22D3EE"/>
+                </a:solidFill>
+                <a:latin typeface="Segoe UI"/>
+              </a:rPr>
+              <a:t>»  </a:t>
+            </a:r>
+            <a:r>
+              <a:rPr sz="1800" b="0">
+                <a:solidFill>
+                  <a:srgbClr val="C4D2E4"/>
+                </a:solidFill>
+                <a:latin typeface="Segoe UI"/>
+              </a:rPr>
+              <a:t>No customer data or target traffic egresses anywhere</a:t>
+            </a:r>
+          </a:p>
+          <a:p>
+            <a:pPr>
+              <a:spcAft>
+                <a:spcPts val="1500"/>
+              </a:spcAft>
+            </a:pPr>
+            <a:r>
+              <a:rPr sz="1800" b="1">
+                <a:solidFill>
+                  <a:srgbClr val="22D3EE"/>
+                </a:solidFill>
+                <a:latin typeface="Segoe UI"/>
+              </a:rPr>
+              <a:t>»  </a:t>
+            </a:r>
+            <a:r>
+              <a:rPr sz="1800" b="0">
+                <a:solidFill>
+                  <a:srgbClr val="C4D2E4"/>
+                </a:solidFill>
+                <a:latin typeface="Segoe UI"/>
+              </a:rPr>
+              <a:t>Deterministic core runs even with the model offline</a:t>
+            </a:r>
+          </a:p>
+          <a:p>
+            <a:pPr>
+              <a:spcAft>
+                <a:spcPts val="1500"/>
+              </a:spcAft>
+            </a:pPr>
+            <a:r>
+              <a:rPr sz="1800" b="1">
+                <a:solidFill>
+                  <a:srgbClr val="22D3EE"/>
+                </a:solidFill>
+                <a:latin typeface="Segoe UI"/>
+              </a:rPr>
+              <a:t>»  </a:t>
+            </a:r>
+            <a:r>
+              <a:rPr sz="1800" b="0">
+                <a:solidFill>
+                  <a:srgbClr val="C4D2E4"/>
+                </a:solidFill>
+                <a:latin typeface="Segoe UI"/>
+              </a:rPr>
+              <a:t>Deploys air-gapped — ideal for regulated environments</a:t>
+            </a:r>
+          </a:p>
+        </p:txBody>
+      </p:sp>
+      <p:sp>
+        <p:nvSpPr>
+          <p:cNvPr id="9" name="TextBox 8"/>
           <p:cNvSpPr txBox="1"/>
           <p:nvPr/>
         </p:nvSpPr>
         <p:spPr>
           <a:xfrm>
-            <a:off x="10789920" y="6382512"/>
-            <a:ext cx="914400" cy="365760"/>
+            <a:off x="566928" y="6382512"/>
+            <a:ext cx="8229600" cy="365760"/>
           </a:xfrm>
           <a:prstGeom prst="rect">
             <a:avLst/>
@@ -14860,6 +14012,49 @@
           </a:bodyPr>
           <a:lstStyle/>
           <a:p>
+            <a:r>
+              <a:rPr sz="1000" b="1">
+                <a:solidFill>
+                  <a:srgbClr val="22D3EE"/>
+                </a:solidFill>
+                <a:latin typeface="Consolas"/>
+              </a:rPr>
+              <a:t>SENTINEL</a:t>
+            </a:r>
+            <a:r>
+              <a:rPr sz="1000" b="0">
+                <a:solidFill>
+                  <a:srgbClr val="6B7A90"/>
+                </a:solidFill>
+                <a:latin typeface="Consolas"/>
+              </a:rPr>
+              <a:t>   ·   find → reason → prove → patch → prove</a:t>
+            </a:r>
+          </a:p>
+        </p:txBody>
+      </p:sp>
+      <p:sp>
+        <p:nvSpPr>
+          <p:cNvPr id="10" name="TextBox 9"/>
+          <p:cNvSpPr txBox="1"/>
+          <p:nvPr/>
+        </p:nvSpPr>
+        <p:spPr>
+          <a:xfrm>
+            <a:off x="10789920" y="6382512"/>
+            <a:ext cx="914400" cy="365760"/>
+          </a:xfrm>
+          <a:prstGeom prst="rect">
+            <a:avLst/>
+          </a:prstGeom>
+          <a:noFill/>
+        </p:spPr>
+        <p:txBody>
+          <a:bodyPr wrap="square" anchor="t" lIns="0" rIns="0" tIns="0" bIns="0">
+            <a:spAutoFit/>
+          </a:bodyPr>
+          <a:lstStyle/>
+          <a:p>
             <a:pPr algn="r"/>
             <a:r>
               <a:rPr sz="1000" b="0">
@@ -14868,7 +14063,7 @@
                 </a:solidFill>
                 <a:latin typeface="Consolas"/>
               </a:rPr>
-              <a:t>27 / 31</a:t>
+              <a:t>27 / 33</a:t>
             </a:r>
           </a:p>
         </p:txBody>
@@ -15020,7 +14215,7 @@
                 </a:solidFill>
                 <a:latin typeface="Consolas"/>
               </a:rPr>
-              <a:t>Why Sentinel Wins</a:t>
+              <a:t>Safety &amp; Bounded Autonomy</a:t>
             </a:r>
           </a:p>
         </p:txBody>
@@ -15078,7 +14273,7 @@
                 </a:solidFill>
                 <a:latin typeface="Consolas"/>
               </a:rPr>
-              <a:t>The defensible core</a:t>
+              <a:t>Safe by construction</a:t>
             </a:r>
           </a:p>
         </p:txBody>
@@ -15113,7 +14308,7 @@
             <a:r>
               <a:rPr sz="1800" b="1">
                 <a:solidFill>
-                  <a:srgbClr val="22D3EE"/>
+                  <a:srgbClr val="2DD48F"/>
                 </a:solidFill>
                 <a:latin typeface="Segoe UI"/>
               </a:rPr>
@@ -15122,11 +14317,11 @@
             <a:r>
               <a:rPr sz="1800" b="0">
                 <a:solidFill>
-                  <a:srgbClr val="C4D2E4"/>
-                </a:solidFill>
-                <a:latin typeface="Segoe UI"/>
-              </a:rPr>
-              <a:t>Trust: a finding is a reproduced contradiction, provably</a:t>
+                  <a:srgbClr val="EAF2FF"/>
+                </a:solidFill>
+                <a:latin typeface="Segoe UI"/>
+              </a:rPr>
+              <a:t>Pre-connection scope guard — out-of-scope probes refused</a:t>
             </a:r>
           </a:p>
           <a:p>
@@ -15138,7 +14333,7 @@
             <a:r>
               <a:rPr sz="1800" b="1">
                 <a:solidFill>
-                  <a:srgbClr val="22D3EE"/>
+                  <a:srgbClr val="2DD48F"/>
                 </a:solidFill>
                 <a:latin typeface="Segoe UI"/>
               </a:rPr>
@@ -15147,11 +14342,11 @@
             <a:r>
               <a:rPr sz="1800" b="0">
                 <a:solidFill>
-                  <a:srgbClr val="C4D2E4"/>
-                </a:solidFill>
-                <a:latin typeface="Segoe UI"/>
-              </a:rPr>
-              <a:t>Closure: it doesn't just find — it patches and re-proves</a:t>
+                  <a:srgbClr val="EAF2FF"/>
+                </a:solidFill>
+                <a:latin typeface="Segoe UI"/>
+              </a:rPr>
+              <a:t>Probes are local, bounded, and non-destructive</a:t>
             </a:r>
           </a:p>
           <a:p>
@@ -15163,7 +14358,7 @@
             <a:r>
               <a:rPr sz="1800" b="1">
                 <a:solidFill>
-                  <a:srgbClr val="22D3EE"/>
+                  <a:srgbClr val="2DD48F"/>
                 </a:solidFill>
                 <a:latin typeface="Segoe UI"/>
               </a:rPr>
@@ -15172,11 +14367,11 @@
             <a:r>
               <a:rPr sz="1800" b="0">
                 <a:solidFill>
-                  <a:srgbClr val="C4D2E4"/>
-                </a:solidFill>
-                <a:latin typeface="Segoe UI"/>
-              </a:rPr>
-              <a:t>Reach: the classes signatures miss (authz, session)</a:t>
+                  <a:srgbClr val="EAF2FF"/>
+                </a:solidFill>
+                <a:latin typeface="Segoe UI"/>
+              </a:rPr>
+              <a:t>The enforcer shield is ephemeral and loopback-only (SSRF-safe)</a:t>
             </a:r>
           </a:p>
           <a:p>
@@ -15188,7 +14383,7 @@
             <a:r>
               <a:rPr sz="1800" b="1">
                 <a:solidFill>
-                  <a:srgbClr val="22D3EE"/>
+                  <a:srgbClr val="2DD48F"/>
                 </a:solidFill>
                 <a:latin typeface="Segoe UI"/>
               </a:rPr>
@@ -15197,11 +14392,11 @@
             <a:r>
               <a:rPr sz="1800" b="0">
                 <a:solidFill>
-                  <a:srgbClr val="C4D2E4"/>
-                </a:solidFill>
-                <a:latin typeface="Segoe UI"/>
-              </a:rPr>
-              <a:t>Honesty: compliant controls and frontiers labeled, not faked</a:t>
+                  <a:srgbClr val="EAF2FF"/>
+                </a:solidFill>
+                <a:latin typeface="Segoe UI"/>
+              </a:rPr>
+              <a:t>Nothing both acts and judges — stages are separated</a:t>
             </a:r>
           </a:p>
           <a:p>
@@ -15213,7 +14408,7 @@
             <a:r>
               <a:rPr sz="1800" b="1">
                 <a:solidFill>
-                  <a:srgbClr val="22D3EE"/>
+                  <a:srgbClr val="E84BFF"/>
                 </a:solidFill>
                 <a:latin typeface="Segoe UI"/>
               </a:rPr>
@@ -15226,7 +14421,7 @@
                 </a:solidFill>
                 <a:latin typeface="Segoe UI"/>
               </a:rPr>
-              <a:t>Deployability: local, auditable, air-gap-ready</a:t>
+              <a:t>Credentials never persisted or logged; in-memory per run</a:t>
             </a:r>
           </a:p>
         </p:txBody>
@@ -15304,7 +14499,7 @@
                 </a:solidFill>
                 <a:latin typeface="Consolas"/>
               </a:rPr>
-              <a:t>28 / 31</a:t>
+              <a:t>28 / 33</a:t>
             </a:r>
           </a:p>
         </p:txBody>
@@ -15456,7 +14651,7 @@
                 </a:solidFill>
                 <a:latin typeface="Consolas"/>
               </a:rPr>
-              <a:t>Status &amp; Roadmap</a:t>
+              <a:t>Market Landscape</a:t>
             </a:r>
           </a:p>
         </p:txBody>
@@ -15514,7 +14709,7 @@
                 </a:solidFill>
                 <a:latin typeface="Consolas"/>
               </a:rPr>
-              <a:t>Honest today; a clear path to more</a:t>
+              <a:t>Where autonomous, provable reasoning fits</a:t>
             </a:r>
           </a:p>
         </p:txBody>
@@ -15527,8 +14722,1103 @@
         </p:nvSpPr>
         <p:spPr>
           <a:xfrm>
-            <a:off x="713232" y="2697480"/>
-            <a:ext cx="10789920" cy="3840480"/>
+            <a:off x="6537960" y="2395728"/>
+            <a:ext cx="1691640" cy="640080"/>
+          </a:xfrm>
+          <a:prstGeom prst="rect">
+            <a:avLst/>
+          </a:prstGeom>
+          <a:noFill/>
+        </p:spPr>
+        <p:txBody>
+          <a:bodyPr wrap="square" anchor="b" lIns="0" rIns="0" tIns="0" bIns="0">
+            <a:spAutoFit/>
+          </a:bodyPr>
+          <a:lstStyle/>
+          <a:p>
+            <a:pPr algn="ctr"/>
+            <a:r>
+              <a:rPr sz="1200" b="1">
+                <a:solidFill>
+                  <a:srgbClr val="EAF2FF"/>
+                </a:solidFill>
+                <a:latin typeface="Consolas"/>
+              </a:rPr>
+              <a:t>Signature</a:t>
+            </a:r>
+          </a:p>
+          <a:p>
+            <a:pPr algn="ctr"/>
+            <a:r>
+              <a:rPr sz="1200" b="1">
+                <a:solidFill>
+                  <a:srgbClr val="EAF2FF"/>
+                </a:solidFill>
+                <a:latin typeface="Consolas"/>
+              </a:rPr>
+              <a:t>scanners</a:t>
+            </a:r>
+          </a:p>
+        </p:txBody>
+      </p:sp>
+      <p:sp>
+        <p:nvSpPr>
+          <p:cNvPr id="9" name="TextBox 8"/>
+          <p:cNvSpPr txBox="1"/>
+          <p:nvPr/>
+        </p:nvSpPr>
+        <p:spPr>
+          <a:xfrm>
+            <a:off x="8229600" y="2395728"/>
+            <a:ext cx="1691640" cy="640080"/>
+          </a:xfrm>
+          <a:prstGeom prst="rect">
+            <a:avLst/>
+          </a:prstGeom>
+          <a:noFill/>
+        </p:spPr>
+        <p:txBody>
+          <a:bodyPr wrap="square" anchor="b" lIns="0" rIns="0" tIns="0" bIns="0">
+            <a:spAutoFit/>
+          </a:bodyPr>
+          <a:lstStyle/>
+          <a:p>
+            <a:pPr algn="ctr"/>
+            <a:r>
+              <a:rPr sz="1200" b="1">
+                <a:solidFill>
+                  <a:srgbClr val="EAF2FF"/>
+                </a:solidFill>
+                <a:latin typeface="Consolas"/>
+              </a:rPr>
+              <a:t>DAST /</a:t>
+            </a:r>
+          </a:p>
+          <a:p>
+            <a:pPr algn="ctr"/>
+            <a:r>
+              <a:rPr sz="1200" b="1">
+                <a:solidFill>
+                  <a:srgbClr val="EAF2FF"/>
+                </a:solidFill>
+                <a:latin typeface="Consolas"/>
+              </a:rPr>
+              <a:t>fuzzers</a:t>
+            </a:r>
+          </a:p>
+        </p:txBody>
+      </p:sp>
+      <p:sp>
+        <p:nvSpPr>
+          <p:cNvPr id="10" name="TextBox 9"/>
+          <p:cNvSpPr txBox="1"/>
+          <p:nvPr/>
+        </p:nvSpPr>
+        <p:spPr>
+          <a:xfrm>
+            <a:off x="9921240" y="2395728"/>
+            <a:ext cx="1691640" cy="640080"/>
+          </a:xfrm>
+          <a:prstGeom prst="rect">
+            <a:avLst/>
+          </a:prstGeom>
+          <a:noFill/>
+        </p:spPr>
+        <p:txBody>
+          <a:bodyPr wrap="square" anchor="b" lIns="0" rIns="0" tIns="0" bIns="0">
+            <a:spAutoFit/>
+          </a:bodyPr>
+          <a:lstStyle/>
+          <a:p>
+            <a:pPr algn="ctr"/>
+            <a:r>
+              <a:rPr sz="1200" b="1">
+                <a:solidFill>
+                  <a:srgbClr val="EAF2FF"/>
+                </a:solidFill>
+                <a:latin typeface="Consolas"/>
+              </a:rPr>
+              <a:t>Sentinel</a:t>
+            </a:r>
+          </a:p>
+        </p:txBody>
+      </p:sp>
+      <p:sp>
+        <p:nvSpPr>
+          <p:cNvPr id="11" name="Rectangle 10"/>
+          <p:cNvSpPr/>
+          <p:nvPr/>
+        </p:nvSpPr>
+        <p:spPr>
+          <a:xfrm>
+            <a:off x="548640" y="3108960"/>
+            <a:ext cx="11064240" cy="475488"/>
+          </a:xfrm>
+          <a:prstGeom prst="rect">
+            <a:avLst/>
+          </a:prstGeom>
+          <a:solidFill>
+            <a:srgbClr val="101724"/>
+          </a:solidFill>
+          <a:ln>
+            <a:noFill/>
+          </a:ln>
+          <a:effectLst/>
+        </p:spPr>
+        <p:style>
+          <a:lnRef idx="1">
+            <a:schemeClr val="accent1"/>
+          </a:lnRef>
+          <a:fillRef idx="3">
+            <a:schemeClr val="accent1"/>
+          </a:fillRef>
+          <a:effectRef idx="2">
+            <a:schemeClr val="accent1"/>
+          </a:effectRef>
+          <a:fontRef idx="minor">
+            <a:schemeClr val="lt1"/>
+          </a:fontRef>
+        </p:style>
+        <p:txBody>
+          <a:bodyPr rtlCol="0" anchor="ctr"/>
+          <a:lstStyle/>
+          <a:p>
+            <a:pPr algn="ctr"/>
+          </a:p>
+        </p:txBody>
+      </p:sp>
+      <p:sp>
+        <p:nvSpPr>
+          <p:cNvPr id="12" name="TextBox 11"/>
+          <p:cNvSpPr txBox="1"/>
+          <p:nvPr/>
+        </p:nvSpPr>
+        <p:spPr>
+          <a:xfrm>
+            <a:off x="658368" y="3108960"/>
+            <a:ext cx="5669280" cy="475488"/>
+          </a:xfrm>
+          <a:prstGeom prst="rect">
+            <a:avLst/>
+          </a:prstGeom>
+          <a:noFill/>
+        </p:spPr>
+        <p:txBody>
+          <a:bodyPr wrap="square" anchor="ctr" lIns="0" rIns="0" tIns="0" bIns="0">
+            <a:spAutoFit/>
+          </a:bodyPr>
+          <a:lstStyle/>
+          <a:p>
+            <a:r>
+              <a:rPr sz="1400" b="0">
+                <a:solidFill>
+                  <a:srgbClr val="C4D2E4"/>
+                </a:solidFill>
+                <a:latin typeface="Segoe UI"/>
+              </a:rPr>
+              <a:t>Finds authorization / BOLA flaws</a:t>
+            </a:r>
+          </a:p>
+        </p:txBody>
+      </p:sp>
+      <p:sp>
+        <p:nvSpPr>
+          <p:cNvPr id="13" name="TextBox 12"/>
+          <p:cNvSpPr txBox="1"/>
+          <p:nvPr/>
+        </p:nvSpPr>
+        <p:spPr>
+          <a:xfrm>
+            <a:off x="6537960" y="3108960"/>
+            <a:ext cx="1691640" cy="475488"/>
+          </a:xfrm>
+          <a:prstGeom prst="rect">
+            <a:avLst/>
+          </a:prstGeom>
+          <a:noFill/>
+        </p:spPr>
+        <p:txBody>
+          <a:bodyPr wrap="square" anchor="ctr" lIns="0" rIns="0" tIns="0" bIns="0">
+            <a:spAutoFit/>
+          </a:bodyPr>
+          <a:lstStyle/>
+          <a:p>
+            <a:pPr algn="ctr"/>
+            <a:r>
+              <a:rPr sz="1800" b="1">
+                <a:solidFill>
+                  <a:srgbClr val="FF5C6E"/>
+                </a:solidFill>
+                <a:latin typeface="Segoe UI Symbol"/>
+              </a:rPr>
+              <a:t>✗</a:t>
+            </a:r>
+          </a:p>
+        </p:txBody>
+      </p:sp>
+      <p:sp>
+        <p:nvSpPr>
+          <p:cNvPr id="14" name="TextBox 13"/>
+          <p:cNvSpPr txBox="1"/>
+          <p:nvPr/>
+        </p:nvSpPr>
+        <p:spPr>
+          <a:xfrm>
+            <a:off x="8229600" y="3108960"/>
+            <a:ext cx="1691640" cy="475488"/>
+          </a:xfrm>
+          <a:prstGeom prst="rect">
+            <a:avLst/>
+          </a:prstGeom>
+          <a:noFill/>
+        </p:spPr>
+        <p:txBody>
+          <a:bodyPr wrap="square" anchor="ctr" lIns="0" rIns="0" tIns="0" bIns="0">
+            <a:spAutoFit/>
+          </a:bodyPr>
+          <a:lstStyle/>
+          <a:p>
+            <a:pPr algn="ctr"/>
+            <a:r>
+              <a:rPr sz="1800" b="1">
+                <a:solidFill>
+                  <a:srgbClr val="F5B301"/>
+                </a:solidFill>
+                <a:latin typeface="Segoe UI Symbol"/>
+              </a:rPr>
+              <a:t>~</a:t>
+            </a:r>
+          </a:p>
+        </p:txBody>
+      </p:sp>
+      <p:sp>
+        <p:nvSpPr>
+          <p:cNvPr id="15" name="TextBox 14"/>
+          <p:cNvSpPr txBox="1"/>
+          <p:nvPr/>
+        </p:nvSpPr>
+        <p:spPr>
+          <a:xfrm>
+            <a:off x="9921240" y="3108960"/>
+            <a:ext cx="1691640" cy="475488"/>
+          </a:xfrm>
+          <a:prstGeom prst="rect">
+            <a:avLst/>
+          </a:prstGeom>
+          <a:noFill/>
+        </p:spPr>
+        <p:txBody>
+          <a:bodyPr wrap="square" anchor="ctr" lIns="0" rIns="0" tIns="0" bIns="0">
+            <a:spAutoFit/>
+          </a:bodyPr>
+          <a:lstStyle/>
+          <a:p>
+            <a:pPr algn="ctr"/>
+            <a:r>
+              <a:rPr sz="1800" b="1">
+                <a:solidFill>
+                  <a:srgbClr val="2DD48F"/>
+                </a:solidFill>
+                <a:latin typeface="Segoe UI Symbol"/>
+              </a:rPr>
+              <a:t>✓</a:t>
+            </a:r>
+          </a:p>
+        </p:txBody>
+      </p:sp>
+      <p:sp>
+        <p:nvSpPr>
+          <p:cNvPr id="16" name="TextBox 15"/>
+          <p:cNvSpPr txBox="1"/>
+          <p:nvPr/>
+        </p:nvSpPr>
+        <p:spPr>
+          <a:xfrm>
+            <a:off x="658368" y="3584448"/>
+            <a:ext cx="5669280" cy="475488"/>
+          </a:xfrm>
+          <a:prstGeom prst="rect">
+            <a:avLst/>
+          </a:prstGeom>
+          <a:noFill/>
+        </p:spPr>
+        <p:txBody>
+          <a:bodyPr wrap="square" anchor="ctr" lIns="0" rIns="0" tIns="0" bIns="0">
+            <a:spAutoFit/>
+          </a:bodyPr>
+          <a:lstStyle/>
+          <a:p>
+            <a:r>
+              <a:rPr sz="1400" b="0">
+                <a:solidFill>
+                  <a:srgbClr val="C4D2E4"/>
+                </a:solidFill>
+                <a:latin typeface="Segoe UI"/>
+              </a:rPr>
+              <a:t>Verdict is a reproduced contradiction</a:t>
+            </a:r>
+          </a:p>
+        </p:txBody>
+      </p:sp>
+      <p:sp>
+        <p:nvSpPr>
+          <p:cNvPr id="17" name="TextBox 16"/>
+          <p:cNvSpPr txBox="1"/>
+          <p:nvPr/>
+        </p:nvSpPr>
+        <p:spPr>
+          <a:xfrm>
+            <a:off x="6537960" y="3584448"/>
+            <a:ext cx="1691640" cy="475488"/>
+          </a:xfrm>
+          <a:prstGeom prst="rect">
+            <a:avLst/>
+          </a:prstGeom>
+          <a:noFill/>
+        </p:spPr>
+        <p:txBody>
+          <a:bodyPr wrap="square" anchor="ctr" lIns="0" rIns="0" tIns="0" bIns="0">
+            <a:spAutoFit/>
+          </a:bodyPr>
+          <a:lstStyle/>
+          <a:p>
+            <a:pPr algn="ctr"/>
+            <a:r>
+              <a:rPr sz="1800" b="1">
+                <a:solidFill>
+                  <a:srgbClr val="FF5C6E"/>
+                </a:solidFill>
+                <a:latin typeface="Segoe UI Symbol"/>
+              </a:rPr>
+              <a:t>✗</a:t>
+            </a:r>
+          </a:p>
+        </p:txBody>
+      </p:sp>
+      <p:sp>
+        <p:nvSpPr>
+          <p:cNvPr id="18" name="TextBox 17"/>
+          <p:cNvSpPr txBox="1"/>
+          <p:nvPr/>
+        </p:nvSpPr>
+        <p:spPr>
+          <a:xfrm>
+            <a:off x="8229600" y="3584448"/>
+            <a:ext cx="1691640" cy="475488"/>
+          </a:xfrm>
+          <a:prstGeom prst="rect">
+            <a:avLst/>
+          </a:prstGeom>
+          <a:noFill/>
+        </p:spPr>
+        <p:txBody>
+          <a:bodyPr wrap="square" anchor="ctr" lIns="0" rIns="0" tIns="0" bIns="0">
+            <a:spAutoFit/>
+          </a:bodyPr>
+          <a:lstStyle/>
+          <a:p>
+            <a:pPr algn="ctr"/>
+            <a:r>
+              <a:rPr sz="1800" b="1">
+                <a:solidFill>
+                  <a:srgbClr val="FF5C6E"/>
+                </a:solidFill>
+                <a:latin typeface="Segoe UI Symbol"/>
+              </a:rPr>
+              <a:t>✗</a:t>
+            </a:r>
+          </a:p>
+        </p:txBody>
+      </p:sp>
+      <p:sp>
+        <p:nvSpPr>
+          <p:cNvPr id="19" name="TextBox 18"/>
+          <p:cNvSpPr txBox="1"/>
+          <p:nvPr/>
+        </p:nvSpPr>
+        <p:spPr>
+          <a:xfrm>
+            <a:off x="9921240" y="3584448"/>
+            <a:ext cx="1691640" cy="475488"/>
+          </a:xfrm>
+          <a:prstGeom prst="rect">
+            <a:avLst/>
+          </a:prstGeom>
+          <a:noFill/>
+        </p:spPr>
+        <p:txBody>
+          <a:bodyPr wrap="square" anchor="ctr" lIns="0" rIns="0" tIns="0" bIns="0">
+            <a:spAutoFit/>
+          </a:bodyPr>
+          <a:lstStyle/>
+          <a:p>
+            <a:pPr algn="ctr"/>
+            <a:r>
+              <a:rPr sz="1800" b="1">
+                <a:solidFill>
+                  <a:srgbClr val="2DD48F"/>
+                </a:solidFill>
+                <a:latin typeface="Segoe UI Symbol"/>
+              </a:rPr>
+              <a:t>✓</a:t>
+            </a:r>
+          </a:p>
+        </p:txBody>
+      </p:sp>
+      <p:sp>
+        <p:nvSpPr>
+          <p:cNvPr id="20" name="Rectangle 19"/>
+          <p:cNvSpPr/>
+          <p:nvPr/>
+        </p:nvSpPr>
+        <p:spPr>
+          <a:xfrm>
+            <a:off x="548640" y="4059936"/>
+            <a:ext cx="11064240" cy="475488"/>
+          </a:xfrm>
+          <a:prstGeom prst="rect">
+            <a:avLst/>
+          </a:prstGeom>
+          <a:solidFill>
+            <a:srgbClr val="101724"/>
+          </a:solidFill>
+          <a:ln>
+            <a:noFill/>
+          </a:ln>
+          <a:effectLst/>
+        </p:spPr>
+        <p:style>
+          <a:lnRef idx="1">
+            <a:schemeClr val="accent1"/>
+          </a:lnRef>
+          <a:fillRef idx="3">
+            <a:schemeClr val="accent1"/>
+          </a:fillRef>
+          <a:effectRef idx="2">
+            <a:schemeClr val="accent1"/>
+          </a:effectRef>
+          <a:fontRef idx="minor">
+            <a:schemeClr val="lt1"/>
+          </a:fontRef>
+        </p:style>
+        <p:txBody>
+          <a:bodyPr rtlCol="0" anchor="ctr"/>
+          <a:lstStyle/>
+          <a:p>
+            <a:pPr algn="ctr"/>
+          </a:p>
+        </p:txBody>
+      </p:sp>
+      <p:sp>
+        <p:nvSpPr>
+          <p:cNvPr id="21" name="TextBox 20"/>
+          <p:cNvSpPr txBox="1"/>
+          <p:nvPr/>
+        </p:nvSpPr>
+        <p:spPr>
+          <a:xfrm>
+            <a:off x="658368" y="4059936"/>
+            <a:ext cx="5669280" cy="475488"/>
+          </a:xfrm>
+          <a:prstGeom prst="rect">
+            <a:avLst/>
+          </a:prstGeom>
+          <a:noFill/>
+        </p:spPr>
+        <p:txBody>
+          <a:bodyPr wrap="square" anchor="ctr" lIns="0" rIns="0" tIns="0" bIns="0">
+            <a:spAutoFit/>
+          </a:bodyPr>
+          <a:lstStyle/>
+          <a:p>
+            <a:r>
+              <a:rPr sz="1400" b="0">
+                <a:solidFill>
+                  <a:srgbClr val="C4D2E4"/>
+                </a:solidFill>
+                <a:latin typeface="Segoe UI"/>
+              </a:rPr>
+              <a:t>Proves the fix, live</a:t>
+            </a:r>
+          </a:p>
+        </p:txBody>
+      </p:sp>
+      <p:sp>
+        <p:nvSpPr>
+          <p:cNvPr id="22" name="TextBox 21"/>
+          <p:cNvSpPr txBox="1"/>
+          <p:nvPr/>
+        </p:nvSpPr>
+        <p:spPr>
+          <a:xfrm>
+            <a:off x="6537960" y="4059936"/>
+            <a:ext cx="1691640" cy="475488"/>
+          </a:xfrm>
+          <a:prstGeom prst="rect">
+            <a:avLst/>
+          </a:prstGeom>
+          <a:noFill/>
+        </p:spPr>
+        <p:txBody>
+          <a:bodyPr wrap="square" anchor="ctr" lIns="0" rIns="0" tIns="0" bIns="0">
+            <a:spAutoFit/>
+          </a:bodyPr>
+          <a:lstStyle/>
+          <a:p>
+            <a:pPr algn="ctr"/>
+            <a:r>
+              <a:rPr sz="1800" b="1">
+                <a:solidFill>
+                  <a:srgbClr val="FF5C6E"/>
+                </a:solidFill>
+                <a:latin typeface="Segoe UI Symbol"/>
+              </a:rPr>
+              <a:t>✗</a:t>
+            </a:r>
+          </a:p>
+        </p:txBody>
+      </p:sp>
+      <p:sp>
+        <p:nvSpPr>
+          <p:cNvPr id="23" name="TextBox 22"/>
+          <p:cNvSpPr txBox="1"/>
+          <p:nvPr/>
+        </p:nvSpPr>
+        <p:spPr>
+          <a:xfrm>
+            <a:off x="8229600" y="4059936"/>
+            <a:ext cx="1691640" cy="475488"/>
+          </a:xfrm>
+          <a:prstGeom prst="rect">
+            <a:avLst/>
+          </a:prstGeom>
+          <a:noFill/>
+        </p:spPr>
+        <p:txBody>
+          <a:bodyPr wrap="square" anchor="ctr" lIns="0" rIns="0" tIns="0" bIns="0">
+            <a:spAutoFit/>
+          </a:bodyPr>
+          <a:lstStyle/>
+          <a:p>
+            <a:pPr algn="ctr"/>
+            <a:r>
+              <a:rPr sz="1800" b="1">
+                <a:solidFill>
+                  <a:srgbClr val="FF5C6E"/>
+                </a:solidFill>
+                <a:latin typeface="Segoe UI Symbol"/>
+              </a:rPr>
+              <a:t>✗</a:t>
+            </a:r>
+          </a:p>
+        </p:txBody>
+      </p:sp>
+      <p:sp>
+        <p:nvSpPr>
+          <p:cNvPr id="24" name="TextBox 23"/>
+          <p:cNvSpPr txBox="1"/>
+          <p:nvPr/>
+        </p:nvSpPr>
+        <p:spPr>
+          <a:xfrm>
+            <a:off x="9921240" y="4059936"/>
+            <a:ext cx="1691640" cy="475488"/>
+          </a:xfrm>
+          <a:prstGeom prst="rect">
+            <a:avLst/>
+          </a:prstGeom>
+          <a:noFill/>
+        </p:spPr>
+        <p:txBody>
+          <a:bodyPr wrap="square" anchor="ctr" lIns="0" rIns="0" tIns="0" bIns="0">
+            <a:spAutoFit/>
+          </a:bodyPr>
+          <a:lstStyle/>
+          <a:p>
+            <a:pPr algn="ctr"/>
+            <a:r>
+              <a:rPr sz="1800" b="1">
+                <a:solidFill>
+                  <a:srgbClr val="2DD48F"/>
+                </a:solidFill>
+                <a:latin typeface="Segoe UI Symbol"/>
+              </a:rPr>
+              <a:t>✓</a:t>
+            </a:r>
+          </a:p>
+        </p:txBody>
+      </p:sp>
+      <p:sp>
+        <p:nvSpPr>
+          <p:cNvPr id="25" name="TextBox 24"/>
+          <p:cNvSpPr txBox="1"/>
+          <p:nvPr/>
+        </p:nvSpPr>
+        <p:spPr>
+          <a:xfrm>
+            <a:off x="658368" y="4535424"/>
+            <a:ext cx="5669280" cy="475488"/>
+          </a:xfrm>
+          <a:prstGeom prst="rect">
+            <a:avLst/>
+          </a:prstGeom>
+          <a:noFill/>
+        </p:spPr>
+        <p:txBody>
+          <a:bodyPr wrap="square" anchor="ctr" lIns="0" rIns="0" tIns="0" bIns="0">
+            <a:spAutoFit/>
+          </a:bodyPr>
+          <a:lstStyle/>
+          <a:p>
+            <a:r>
+              <a:rPr sz="1400" b="0">
+                <a:solidFill>
+                  <a:srgbClr val="C4D2E4"/>
+                </a:solidFill>
+                <a:latin typeface="Segoe UI"/>
+              </a:rPr>
+              <a:t>Autonomous, self-directed research</a:t>
+            </a:r>
+          </a:p>
+        </p:txBody>
+      </p:sp>
+      <p:sp>
+        <p:nvSpPr>
+          <p:cNvPr id="26" name="TextBox 25"/>
+          <p:cNvSpPr txBox="1"/>
+          <p:nvPr/>
+        </p:nvSpPr>
+        <p:spPr>
+          <a:xfrm>
+            <a:off x="6537960" y="4535424"/>
+            <a:ext cx="1691640" cy="475488"/>
+          </a:xfrm>
+          <a:prstGeom prst="rect">
+            <a:avLst/>
+          </a:prstGeom>
+          <a:noFill/>
+        </p:spPr>
+        <p:txBody>
+          <a:bodyPr wrap="square" anchor="ctr" lIns="0" rIns="0" tIns="0" bIns="0">
+            <a:spAutoFit/>
+          </a:bodyPr>
+          <a:lstStyle/>
+          <a:p>
+            <a:pPr algn="ctr"/>
+            <a:r>
+              <a:rPr sz="1800" b="1">
+                <a:solidFill>
+                  <a:srgbClr val="FF5C6E"/>
+                </a:solidFill>
+                <a:latin typeface="Segoe UI Symbol"/>
+              </a:rPr>
+              <a:t>✗</a:t>
+            </a:r>
+          </a:p>
+        </p:txBody>
+      </p:sp>
+      <p:sp>
+        <p:nvSpPr>
+          <p:cNvPr id="27" name="TextBox 26"/>
+          <p:cNvSpPr txBox="1"/>
+          <p:nvPr/>
+        </p:nvSpPr>
+        <p:spPr>
+          <a:xfrm>
+            <a:off x="8229600" y="4535424"/>
+            <a:ext cx="1691640" cy="475488"/>
+          </a:xfrm>
+          <a:prstGeom prst="rect">
+            <a:avLst/>
+          </a:prstGeom>
+          <a:noFill/>
+        </p:spPr>
+        <p:txBody>
+          <a:bodyPr wrap="square" anchor="ctr" lIns="0" rIns="0" tIns="0" bIns="0">
+            <a:spAutoFit/>
+          </a:bodyPr>
+          <a:lstStyle/>
+          <a:p>
+            <a:pPr algn="ctr"/>
+            <a:r>
+              <a:rPr sz="1800" b="1">
+                <a:solidFill>
+                  <a:srgbClr val="F5B301"/>
+                </a:solidFill>
+                <a:latin typeface="Segoe UI Symbol"/>
+              </a:rPr>
+              <a:t>~</a:t>
+            </a:r>
+          </a:p>
+        </p:txBody>
+      </p:sp>
+      <p:sp>
+        <p:nvSpPr>
+          <p:cNvPr id="28" name="TextBox 27"/>
+          <p:cNvSpPr txBox="1"/>
+          <p:nvPr/>
+        </p:nvSpPr>
+        <p:spPr>
+          <a:xfrm>
+            <a:off x="9921240" y="4535424"/>
+            <a:ext cx="1691640" cy="475488"/>
+          </a:xfrm>
+          <a:prstGeom prst="rect">
+            <a:avLst/>
+          </a:prstGeom>
+          <a:noFill/>
+        </p:spPr>
+        <p:txBody>
+          <a:bodyPr wrap="square" anchor="ctr" lIns="0" rIns="0" tIns="0" bIns="0">
+            <a:spAutoFit/>
+          </a:bodyPr>
+          <a:lstStyle/>
+          <a:p>
+            <a:pPr algn="ctr"/>
+            <a:r>
+              <a:rPr sz="1800" b="1">
+                <a:solidFill>
+                  <a:srgbClr val="2DD48F"/>
+                </a:solidFill>
+                <a:latin typeface="Segoe UI Symbol"/>
+              </a:rPr>
+              <a:t>✓</a:t>
+            </a:r>
+          </a:p>
+        </p:txBody>
+      </p:sp>
+      <p:sp>
+        <p:nvSpPr>
+          <p:cNvPr id="29" name="Rectangle 28"/>
+          <p:cNvSpPr/>
+          <p:nvPr/>
+        </p:nvSpPr>
+        <p:spPr>
+          <a:xfrm>
+            <a:off x="548640" y="5010912"/>
+            <a:ext cx="11064240" cy="475488"/>
+          </a:xfrm>
+          <a:prstGeom prst="rect">
+            <a:avLst/>
+          </a:prstGeom>
+          <a:solidFill>
+            <a:srgbClr val="101724"/>
+          </a:solidFill>
+          <a:ln>
+            <a:noFill/>
+          </a:ln>
+          <a:effectLst/>
+        </p:spPr>
+        <p:style>
+          <a:lnRef idx="1">
+            <a:schemeClr val="accent1"/>
+          </a:lnRef>
+          <a:fillRef idx="3">
+            <a:schemeClr val="accent1"/>
+          </a:fillRef>
+          <a:effectRef idx="2">
+            <a:schemeClr val="accent1"/>
+          </a:effectRef>
+          <a:fontRef idx="minor">
+            <a:schemeClr val="lt1"/>
+          </a:fontRef>
+        </p:style>
+        <p:txBody>
+          <a:bodyPr rtlCol="0" anchor="ctr"/>
+          <a:lstStyle/>
+          <a:p>
+            <a:pPr algn="ctr"/>
+          </a:p>
+        </p:txBody>
+      </p:sp>
+      <p:sp>
+        <p:nvSpPr>
+          <p:cNvPr id="30" name="TextBox 29"/>
+          <p:cNvSpPr txBox="1"/>
+          <p:nvPr/>
+        </p:nvSpPr>
+        <p:spPr>
+          <a:xfrm>
+            <a:off x="658368" y="5010912"/>
+            <a:ext cx="5669280" cy="475488"/>
+          </a:xfrm>
+          <a:prstGeom prst="rect">
+            <a:avLst/>
+          </a:prstGeom>
+          <a:noFill/>
+        </p:spPr>
+        <p:txBody>
+          <a:bodyPr wrap="square" anchor="ctr" lIns="0" rIns="0" tIns="0" bIns="0">
+            <a:spAutoFit/>
+          </a:bodyPr>
+          <a:lstStyle/>
+          <a:p>
+            <a:r>
+              <a:rPr sz="1400" b="0">
+                <a:solidFill>
+                  <a:srgbClr val="C4D2E4"/>
+                </a:solidFill>
+                <a:latin typeface="Segoe UI"/>
+              </a:rPr>
+              <a:t>Local-first, no data egress</a:t>
+            </a:r>
+          </a:p>
+        </p:txBody>
+      </p:sp>
+      <p:sp>
+        <p:nvSpPr>
+          <p:cNvPr id="31" name="TextBox 30"/>
+          <p:cNvSpPr txBox="1"/>
+          <p:nvPr/>
+        </p:nvSpPr>
+        <p:spPr>
+          <a:xfrm>
+            <a:off x="6537960" y="5010912"/>
+            <a:ext cx="1691640" cy="475488"/>
+          </a:xfrm>
+          <a:prstGeom prst="rect">
+            <a:avLst/>
+          </a:prstGeom>
+          <a:noFill/>
+        </p:spPr>
+        <p:txBody>
+          <a:bodyPr wrap="square" anchor="ctr" lIns="0" rIns="0" tIns="0" bIns="0">
+            <a:spAutoFit/>
+          </a:bodyPr>
+          <a:lstStyle/>
+          <a:p>
+            <a:pPr algn="ctr"/>
+            <a:r>
+              <a:rPr sz="1800" b="1">
+                <a:solidFill>
+                  <a:srgbClr val="F5B301"/>
+                </a:solidFill>
+                <a:latin typeface="Segoe UI Symbol"/>
+              </a:rPr>
+              <a:t>~</a:t>
+            </a:r>
+          </a:p>
+        </p:txBody>
+      </p:sp>
+      <p:sp>
+        <p:nvSpPr>
+          <p:cNvPr id="32" name="TextBox 31"/>
+          <p:cNvSpPr txBox="1"/>
+          <p:nvPr/>
+        </p:nvSpPr>
+        <p:spPr>
+          <a:xfrm>
+            <a:off x="8229600" y="5010912"/>
+            <a:ext cx="1691640" cy="475488"/>
+          </a:xfrm>
+          <a:prstGeom prst="rect">
+            <a:avLst/>
+          </a:prstGeom>
+          <a:noFill/>
+        </p:spPr>
+        <p:txBody>
+          <a:bodyPr wrap="square" anchor="ctr" lIns="0" rIns="0" tIns="0" bIns="0">
+            <a:spAutoFit/>
+          </a:bodyPr>
+          <a:lstStyle/>
+          <a:p>
+            <a:pPr algn="ctr"/>
+            <a:r>
+              <a:rPr sz="1800" b="1">
+                <a:solidFill>
+                  <a:srgbClr val="F5B301"/>
+                </a:solidFill>
+                <a:latin typeface="Segoe UI Symbol"/>
+              </a:rPr>
+              <a:t>~</a:t>
+            </a:r>
+          </a:p>
+        </p:txBody>
+      </p:sp>
+      <p:sp>
+        <p:nvSpPr>
+          <p:cNvPr id="33" name="TextBox 32"/>
+          <p:cNvSpPr txBox="1"/>
+          <p:nvPr/>
+        </p:nvSpPr>
+        <p:spPr>
+          <a:xfrm>
+            <a:off x="9921240" y="5010912"/>
+            <a:ext cx="1691640" cy="475488"/>
+          </a:xfrm>
+          <a:prstGeom prst="rect">
+            <a:avLst/>
+          </a:prstGeom>
+          <a:noFill/>
+        </p:spPr>
+        <p:txBody>
+          <a:bodyPr wrap="square" anchor="ctr" lIns="0" rIns="0" tIns="0" bIns="0">
+            <a:spAutoFit/>
+          </a:bodyPr>
+          <a:lstStyle/>
+          <a:p>
+            <a:pPr algn="ctr"/>
+            <a:r>
+              <a:rPr sz="1800" b="1">
+                <a:solidFill>
+                  <a:srgbClr val="2DD48F"/>
+                </a:solidFill>
+                <a:latin typeface="Segoe UI Symbol"/>
+              </a:rPr>
+              <a:t>✓</a:t>
+            </a:r>
+          </a:p>
+        </p:txBody>
+      </p:sp>
+      <p:sp>
+        <p:nvSpPr>
+          <p:cNvPr id="34" name="TextBox 33"/>
+          <p:cNvSpPr txBox="1"/>
+          <p:nvPr/>
+        </p:nvSpPr>
+        <p:spPr>
+          <a:xfrm>
+            <a:off x="658368" y="5486400"/>
+            <a:ext cx="5669280" cy="475488"/>
+          </a:xfrm>
+          <a:prstGeom prst="rect">
+            <a:avLst/>
+          </a:prstGeom>
+          <a:noFill/>
+        </p:spPr>
+        <p:txBody>
+          <a:bodyPr wrap="square" anchor="ctr" lIns="0" rIns="0" tIns="0" bIns="0">
+            <a:spAutoFit/>
+          </a:bodyPr>
+          <a:lstStyle/>
+          <a:p>
+            <a:r>
+              <a:rPr sz="1400" b="0">
+                <a:solidFill>
+                  <a:srgbClr val="C4D2E4"/>
+                </a:solidFill>
+                <a:latin typeface="Segoe UI"/>
+              </a:rPr>
+              <a:t>Every decision auditable</a:t>
+            </a:r>
+          </a:p>
+        </p:txBody>
+      </p:sp>
+      <p:sp>
+        <p:nvSpPr>
+          <p:cNvPr id="35" name="TextBox 34"/>
+          <p:cNvSpPr txBox="1"/>
+          <p:nvPr/>
+        </p:nvSpPr>
+        <p:spPr>
+          <a:xfrm>
+            <a:off x="6537960" y="5486400"/>
+            <a:ext cx="1691640" cy="475488"/>
+          </a:xfrm>
+          <a:prstGeom prst="rect">
+            <a:avLst/>
+          </a:prstGeom>
+          <a:noFill/>
+        </p:spPr>
+        <p:txBody>
+          <a:bodyPr wrap="square" anchor="ctr" lIns="0" rIns="0" tIns="0" bIns="0">
+            <a:spAutoFit/>
+          </a:bodyPr>
+          <a:lstStyle/>
+          <a:p>
+            <a:pPr algn="ctr"/>
+            <a:r>
+              <a:rPr sz="1800" b="1">
+                <a:solidFill>
+                  <a:srgbClr val="F5B301"/>
+                </a:solidFill>
+                <a:latin typeface="Segoe UI Symbol"/>
+              </a:rPr>
+              <a:t>~</a:t>
+            </a:r>
+          </a:p>
+        </p:txBody>
+      </p:sp>
+      <p:sp>
+        <p:nvSpPr>
+          <p:cNvPr id="36" name="TextBox 35"/>
+          <p:cNvSpPr txBox="1"/>
+          <p:nvPr/>
+        </p:nvSpPr>
+        <p:spPr>
+          <a:xfrm>
+            <a:off x="8229600" y="5486400"/>
+            <a:ext cx="1691640" cy="475488"/>
+          </a:xfrm>
+          <a:prstGeom prst="rect">
+            <a:avLst/>
+          </a:prstGeom>
+          <a:noFill/>
+        </p:spPr>
+        <p:txBody>
+          <a:bodyPr wrap="square" anchor="ctr" lIns="0" rIns="0" tIns="0" bIns="0">
+            <a:spAutoFit/>
+          </a:bodyPr>
+          <a:lstStyle/>
+          <a:p>
+            <a:pPr algn="ctr"/>
+            <a:r>
+              <a:rPr sz="1800" b="1">
+                <a:solidFill>
+                  <a:srgbClr val="FF5C6E"/>
+                </a:solidFill>
+                <a:latin typeface="Segoe UI Symbol"/>
+              </a:rPr>
+              <a:t>✗</a:t>
+            </a:r>
+          </a:p>
+        </p:txBody>
+      </p:sp>
+      <p:sp>
+        <p:nvSpPr>
+          <p:cNvPr id="37" name="TextBox 36"/>
+          <p:cNvSpPr txBox="1"/>
+          <p:nvPr/>
+        </p:nvSpPr>
+        <p:spPr>
+          <a:xfrm>
+            <a:off x="9921240" y="5486400"/>
+            <a:ext cx="1691640" cy="475488"/>
+          </a:xfrm>
+          <a:prstGeom prst="rect">
+            <a:avLst/>
+          </a:prstGeom>
+          <a:noFill/>
+        </p:spPr>
+        <p:txBody>
+          <a:bodyPr wrap="square" anchor="ctr" lIns="0" rIns="0" tIns="0" bIns="0">
+            <a:spAutoFit/>
+          </a:bodyPr>
+          <a:lstStyle/>
+          <a:p>
+            <a:pPr algn="ctr"/>
+            <a:r>
+              <a:rPr sz="1800" b="1">
+                <a:solidFill>
+                  <a:srgbClr val="2DD48F"/>
+                </a:solidFill>
+                <a:latin typeface="Segoe UI Symbol"/>
+              </a:rPr>
+              <a:t>✓</a:t>
+            </a:r>
+          </a:p>
+        </p:txBody>
+      </p:sp>
+      <p:sp>
+        <p:nvSpPr>
+          <p:cNvPr id="38" name="TextBox 37"/>
+          <p:cNvSpPr txBox="1"/>
+          <p:nvPr/>
+        </p:nvSpPr>
+        <p:spPr>
+          <a:xfrm>
+            <a:off x="566928" y="6382512"/>
+            <a:ext cx="8229600" cy="365760"/>
           </a:xfrm>
           <a:prstGeom prst="rect">
             <a:avLst/>
@@ -15541,142 +15831,37 @@
           </a:bodyPr>
           <a:lstStyle/>
           <a:p>
-            <a:pPr>
-              <a:spcAft>
-                <a:spcPts val="1500"/>
-              </a:spcAft>
-            </a:pPr>
-            <a:r>
-              <a:rPr sz="1800" b="1">
-                <a:solidFill>
-                  <a:srgbClr val="2DD48F"/>
-                </a:solidFill>
-                <a:latin typeface="Segoe UI"/>
-              </a:rPr>
-              <a:t>»  </a:t>
-            </a:r>
-            <a:r>
-              <a:rPr sz="1800" b="0">
-                <a:solidFill>
-                  <a:srgbClr val="EAF2FF"/>
-                </a:solidFill>
-                <a:latin typeface="Segoe UI"/>
-              </a:rPr>
-              <a:t>Today: 5 classes live end-to-end on 2 stacks; 122 tests</a:t>
-            </a:r>
-          </a:p>
-          <a:p>
-            <a:pPr>
-              <a:spcAft>
-                <a:spcPts val="1500"/>
-              </a:spcAft>
-            </a:pPr>
-            <a:r>
-              <a:rPr sz="1800" b="1">
-                <a:solidFill>
-                  <a:srgbClr val="2DD48F"/>
-                </a:solidFill>
-                <a:latin typeface="Segoe UI"/>
-              </a:rPr>
-              <a:t>»  </a:t>
-            </a:r>
-            <a:r>
-              <a:rPr sz="1800" b="0">
-                <a:solidFill>
-                  <a:srgbClr val="EAF2FF"/>
-                </a:solidFill>
-                <a:latin typeface="Segoe UI"/>
-              </a:rPr>
-              <a:t>Today: Login Tester + authenticated reasoning + chaining ingredients</a:t>
-            </a:r>
-          </a:p>
-          <a:p>
-            <a:pPr>
-              <a:spcAft>
-                <a:spcPts val="1500"/>
-              </a:spcAft>
-            </a:pPr>
-            <a:r>
-              <a:rPr sz="1800" b="1">
-                <a:solidFill>
-                  <a:srgbClr val="F5B301"/>
-                </a:solidFill>
-                <a:latin typeface="Segoe UI"/>
-              </a:rPr>
-              <a:t>»  </a:t>
-            </a:r>
-            <a:r>
-              <a:rPr sz="1800" b="0">
-                <a:solidFill>
-                  <a:srgbClr val="EAF2FF"/>
-                </a:solidFill>
-                <a:latin typeface="Segoe UI"/>
-              </a:rPr>
-              <a:t>Next: full causal chaining (compose proven ingredients)</a:t>
-            </a:r>
-          </a:p>
-          <a:p>
-            <a:pPr>
-              <a:spcAft>
-                <a:spcPts val="1500"/>
-              </a:spcAft>
-            </a:pPr>
-            <a:r>
-              <a:rPr sz="1800" b="1">
-                <a:solidFill>
-                  <a:srgbClr val="F5B301"/>
-                </a:solidFill>
-                <a:latin typeface="Segoe UI"/>
-              </a:rPr>
-              <a:t>»  </a:t>
-            </a:r>
-            <a:r>
-              <a:rPr sz="1800" b="0">
-                <a:solidFill>
-                  <a:srgbClr val="EAF2FF"/>
-                </a:solidFill>
-                <a:latin typeface="Segoe UI"/>
-              </a:rPr>
-              <a:t>Next: more OWASP classes (SSRF, XSS, mass assignment)</a:t>
-            </a:r>
-          </a:p>
-          <a:p>
-            <a:pPr>
-              <a:spcAft>
-                <a:spcPts val="1500"/>
-              </a:spcAft>
-            </a:pPr>
-            <a:r>
-              <a:rPr sz="1800" b="1">
-                <a:solidFill>
-                  <a:srgbClr val="F5B301"/>
-                </a:solidFill>
-                <a:latin typeface="Segoe UI"/>
-              </a:rPr>
-              <a:t>»  </a:t>
-            </a:r>
-            <a:r>
-              <a:rPr sz="1800" b="0">
-                <a:solidFill>
-                  <a:srgbClr val="EAF2FF"/>
-                </a:solidFill>
-                <a:latin typeface="Segoe UI"/>
-              </a:rPr>
-              <a:t>Next: CI/CD gate + policy library for common stacks</a:t>
-            </a:r>
-          </a:p>
-        </p:txBody>
-      </p:sp>
-      <p:sp>
-        <p:nvSpPr>
-          <p:cNvPr id="9" name="TextBox 8"/>
+            <a:r>
+              <a:rPr sz="1000" b="1">
+                <a:solidFill>
+                  <a:srgbClr val="22D3EE"/>
+                </a:solidFill>
+                <a:latin typeface="Consolas"/>
+              </a:rPr>
+              <a:t>SENTINEL</a:t>
+            </a:r>
+            <a:r>
+              <a:rPr sz="1000" b="0">
+                <a:solidFill>
+                  <a:srgbClr val="6B7A90"/>
+                </a:solidFill>
+                <a:latin typeface="Consolas"/>
+              </a:rPr>
+              <a:t>   ·   find → reason → prove → patch → prove</a:t>
+            </a:r>
+          </a:p>
+        </p:txBody>
+      </p:sp>
+      <p:sp>
+        <p:nvSpPr>
+          <p:cNvPr id="39" name="TextBox 38"/>
           <p:cNvSpPr txBox="1"/>
           <p:nvPr/>
         </p:nvSpPr>
         <p:spPr>
           <a:xfrm>
-            <a:off x="566928" y="6382512"/>
-            <a:ext cx="8229600" cy="365760"/>
+            <a:off x="10789920" y="6382512"/>
+            <a:ext cx="914400" cy="365760"/>
           </a:xfrm>
           <a:prstGeom prst="rect">
             <a:avLst/>
@@ -15689,58 +15874,15 @@
           </a:bodyPr>
           <a:lstStyle/>
           <a:p>
-            <a:r>
-              <a:rPr sz="1000" b="1">
-                <a:solidFill>
-                  <a:srgbClr val="22D3EE"/>
+            <a:pPr algn="r"/>
+            <a:r>
+              <a:rPr sz="1000" b="0">
+                <a:solidFill>
+                  <a:srgbClr val="6B7A90"/>
                 </a:solidFill>
                 <a:latin typeface="Consolas"/>
               </a:rPr>
-              <a:t>SENTINEL</a:t>
-            </a:r>
-            <a:r>
-              <a:rPr sz="1000" b="0">
-                <a:solidFill>
-                  <a:srgbClr val="6B7A90"/>
-                </a:solidFill>
-                <a:latin typeface="Consolas"/>
-              </a:rPr>
-              <a:t>   ·   find → reason → prove → patch → prove</a:t>
-            </a:r>
-          </a:p>
-        </p:txBody>
-      </p:sp>
-      <p:sp>
-        <p:nvSpPr>
-          <p:cNvPr id="10" name="TextBox 9"/>
-          <p:cNvSpPr txBox="1"/>
-          <p:nvPr/>
-        </p:nvSpPr>
-        <p:spPr>
-          <a:xfrm>
-            <a:off x="10789920" y="6382512"/>
-            <a:ext cx="914400" cy="365760"/>
-          </a:xfrm>
-          <a:prstGeom prst="rect">
-            <a:avLst/>
-          </a:prstGeom>
-          <a:noFill/>
-        </p:spPr>
-        <p:txBody>
-          <a:bodyPr wrap="square" anchor="t" lIns="0" rIns="0" tIns="0" bIns="0">
-            <a:spAutoFit/>
-          </a:bodyPr>
-          <a:lstStyle/>
-          <a:p>
-            <a:pPr algn="r"/>
-            <a:r>
-              <a:rPr sz="1000" b="0">
-                <a:solidFill>
-                  <a:srgbClr val="6B7A90"/>
-                </a:solidFill>
-                <a:latin typeface="Consolas"/>
-              </a:rPr>
-              <a:t>29 / 31</a:t>
+              <a:t>29 / 33</a:t>
             </a:r>
           </a:p>
         </p:txBody>
@@ -16176,7 +16318,7 @@
                 </a:solidFill>
                 <a:latin typeface="Consolas"/>
               </a:rPr>
-              <a:t>03 / 31</a:t>
+              <a:t>03 / 33</a:t>
             </a:r>
           </a:p>
         </p:txBody>
@@ -16328,7 +16470,7 @@
                 </a:solidFill>
                 <a:latin typeface="Consolas"/>
               </a:rPr>
-              <a:t>The Ask</a:t>
+              <a:t>Why Sentinel Wins</a:t>
             </a:r>
           </a:p>
         </p:txBody>
@@ -16386,21 +16528,313 @@
                 </a:solidFill>
                 <a:latin typeface="Consolas"/>
               </a:rPr>
-              <a:t>$1M to turn a proven engine into a platform</a:t>
-            </a:r>
-          </a:p>
-        </p:txBody>
-      </p:sp>
-      <p:sp>
-        <p:nvSpPr>
-          <p:cNvPr id="8" name="Rounded Rectangle 7"/>
+              <a:t>The defensible core</a:t>
+            </a:r>
+          </a:p>
+        </p:txBody>
+      </p:sp>
+      <p:sp>
+        <p:nvSpPr>
+          <p:cNvPr id="8" name="TextBox 7"/>
+          <p:cNvSpPr txBox="1"/>
+          <p:nvPr/>
+        </p:nvSpPr>
+        <p:spPr>
+          <a:xfrm>
+            <a:off x="713232" y="2697480"/>
+            <a:ext cx="10789920" cy="3840480"/>
+          </a:xfrm>
+          <a:prstGeom prst="rect">
+            <a:avLst/>
+          </a:prstGeom>
+          <a:noFill/>
+        </p:spPr>
+        <p:txBody>
+          <a:bodyPr wrap="square" anchor="t" lIns="0" rIns="0" tIns="0" bIns="0">
+            <a:spAutoFit/>
+          </a:bodyPr>
+          <a:lstStyle/>
+          <a:p>
+            <a:pPr>
+              <a:spcAft>
+                <a:spcPts val="1500"/>
+              </a:spcAft>
+            </a:pPr>
+            <a:r>
+              <a:rPr sz="1800" b="1">
+                <a:solidFill>
+                  <a:srgbClr val="22D3EE"/>
+                </a:solidFill>
+                <a:latin typeface="Segoe UI"/>
+              </a:rPr>
+              <a:t>»  </a:t>
+            </a:r>
+            <a:r>
+              <a:rPr sz="1800" b="0">
+                <a:solidFill>
+                  <a:srgbClr val="C4D2E4"/>
+                </a:solidFill>
+                <a:latin typeface="Segoe UI"/>
+              </a:rPr>
+              <a:t>Trust: a finding is a reproduced contradiction, provably</a:t>
+            </a:r>
+          </a:p>
+          <a:p>
+            <a:pPr>
+              <a:spcAft>
+                <a:spcPts val="1500"/>
+              </a:spcAft>
+            </a:pPr>
+            <a:r>
+              <a:rPr sz="1800" b="1">
+                <a:solidFill>
+                  <a:srgbClr val="22D3EE"/>
+                </a:solidFill>
+                <a:latin typeface="Segoe UI"/>
+              </a:rPr>
+              <a:t>»  </a:t>
+            </a:r>
+            <a:r>
+              <a:rPr sz="1800" b="0">
+                <a:solidFill>
+                  <a:srgbClr val="C4D2E4"/>
+                </a:solidFill>
+                <a:latin typeface="Segoe UI"/>
+              </a:rPr>
+              <a:t>Closure: it doesn't just find — it patches and re-proves</a:t>
+            </a:r>
+          </a:p>
+          <a:p>
+            <a:pPr>
+              <a:spcAft>
+                <a:spcPts val="1500"/>
+              </a:spcAft>
+            </a:pPr>
+            <a:r>
+              <a:rPr sz="1800" b="1">
+                <a:solidFill>
+                  <a:srgbClr val="22D3EE"/>
+                </a:solidFill>
+                <a:latin typeface="Segoe UI"/>
+              </a:rPr>
+              <a:t>»  </a:t>
+            </a:r>
+            <a:r>
+              <a:rPr sz="1800" b="0">
+                <a:solidFill>
+                  <a:srgbClr val="C4D2E4"/>
+                </a:solidFill>
+                <a:latin typeface="Segoe UI"/>
+              </a:rPr>
+              <a:t>Reach: the classes signatures miss (authz, session)</a:t>
+            </a:r>
+          </a:p>
+          <a:p>
+            <a:pPr>
+              <a:spcAft>
+                <a:spcPts val="1500"/>
+              </a:spcAft>
+            </a:pPr>
+            <a:r>
+              <a:rPr sz="1800" b="1">
+                <a:solidFill>
+                  <a:srgbClr val="22D3EE"/>
+                </a:solidFill>
+                <a:latin typeface="Segoe UI"/>
+              </a:rPr>
+              <a:t>»  </a:t>
+            </a:r>
+            <a:r>
+              <a:rPr sz="1800" b="0">
+                <a:solidFill>
+                  <a:srgbClr val="C4D2E4"/>
+                </a:solidFill>
+                <a:latin typeface="Segoe UI"/>
+              </a:rPr>
+              <a:t>Honesty: compliant controls and frontiers labeled, not faked</a:t>
+            </a:r>
+          </a:p>
+          <a:p>
+            <a:pPr>
+              <a:spcAft>
+                <a:spcPts val="1500"/>
+              </a:spcAft>
+            </a:pPr>
+            <a:r>
+              <a:rPr sz="1800" b="1">
+                <a:solidFill>
+                  <a:srgbClr val="22D3EE"/>
+                </a:solidFill>
+                <a:latin typeface="Segoe UI"/>
+              </a:rPr>
+              <a:t>»  </a:t>
+            </a:r>
+            <a:r>
+              <a:rPr sz="1800" b="0">
+                <a:solidFill>
+                  <a:srgbClr val="C4D2E4"/>
+                </a:solidFill>
+                <a:latin typeface="Segoe UI"/>
+              </a:rPr>
+              <a:t>Deployability: local, auditable, air-gap-ready</a:t>
+            </a:r>
+          </a:p>
+        </p:txBody>
+      </p:sp>
+      <p:sp>
+        <p:nvSpPr>
+          <p:cNvPr id="9" name="TextBox 8"/>
+          <p:cNvSpPr txBox="1"/>
+          <p:nvPr/>
+        </p:nvSpPr>
+        <p:spPr>
+          <a:xfrm>
+            <a:off x="566928" y="6382512"/>
+            <a:ext cx="8229600" cy="365760"/>
+          </a:xfrm>
+          <a:prstGeom prst="rect">
+            <a:avLst/>
+          </a:prstGeom>
+          <a:noFill/>
+        </p:spPr>
+        <p:txBody>
+          <a:bodyPr wrap="square" anchor="t" lIns="0" rIns="0" tIns="0" bIns="0">
+            <a:spAutoFit/>
+          </a:bodyPr>
+          <a:lstStyle/>
+          <a:p>
+            <a:r>
+              <a:rPr sz="1000" b="1">
+                <a:solidFill>
+                  <a:srgbClr val="22D3EE"/>
+                </a:solidFill>
+                <a:latin typeface="Consolas"/>
+              </a:rPr>
+              <a:t>SENTINEL</a:t>
+            </a:r>
+            <a:r>
+              <a:rPr sz="1000" b="0">
+                <a:solidFill>
+                  <a:srgbClr val="6B7A90"/>
+                </a:solidFill>
+                <a:latin typeface="Consolas"/>
+              </a:rPr>
+              <a:t>   ·   find → reason → prove → patch → prove</a:t>
+            </a:r>
+          </a:p>
+        </p:txBody>
+      </p:sp>
+      <p:sp>
+        <p:nvSpPr>
+          <p:cNvPr id="10" name="TextBox 9"/>
+          <p:cNvSpPr txBox="1"/>
+          <p:nvPr/>
+        </p:nvSpPr>
+        <p:spPr>
+          <a:xfrm>
+            <a:off x="10789920" y="6382512"/>
+            <a:ext cx="914400" cy="365760"/>
+          </a:xfrm>
+          <a:prstGeom prst="rect">
+            <a:avLst/>
+          </a:prstGeom>
+          <a:noFill/>
+        </p:spPr>
+        <p:txBody>
+          <a:bodyPr wrap="square" anchor="t" lIns="0" rIns="0" tIns="0" bIns="0">
+            <a:spAutoFit/>
+          </a:bodyPr>
+          <a:lstStyle/>
+          <a:p>
+            <a:pPr algn="r"/>
+            <a:r>
+              <a:rPr sz="1000" b="0">
+                <a:solidFill>
+                  <a:srgbClr val="6B7A90"/>
+                </a:solidFill>
+                <a:latin typeface="Consolas"/>
+              </a:rPr>
+              <a:t>30 / 33</a:t>
+            </a:r>
+          </a:p>
+        </p:txBody>
+      </p:sp>
+    </p:spTree>
+  </p:cSld>
+  <p:clrMapOvr>
+    <a:masterClrMapping/>
+  </p:clrMapOvr>
+</p:sld>
+</file>
+
+<file path=ppt/slides/slide31.xml><?xml version="1.0" encoding="utf-8"?>
+<p:sld xmlns:a="http://schemas.openxmlformats.org/drawingml/2006/main" xmlns:p="http://schemas.openxmlformats.org/presentationml/2006/main" xmlns:r="http://schemas.openxmlformats.org/officeDocument/2006/relationships">
+  <p:cSld>
+    <p:spTree>
+      <p:nvGrpSpPr>
+        <p:cNvPr id="1" name=""/>
+        <p:cNvGrpSpPr/>
+        <p:nvPr/>
+      </p:nvGrpSpPr>
+      <p:grpSpPr/>
+      <p:pic>
+        <p:nvPicPr>
+          <p:cNvPr id="2" name="Picture 1" descr="deck_bg.png"/>
+          <p:cNvPicPr>
+            <a:picLocks noChangeAspect="1"/>
+          </p:cNvPicPr>
+          <p:nvPr/>
+        </p:nvPicPr>
+        <p:blipFill>
+          <a:blip r:embed="rId2"/>
+          <a:stretch>
+            <a:fillRect/>
+          </a:stretch>
+        </p:blipFill>
+        <p:spPr>
+          <a:xfrm>
+            <a:off x="0" y="0"/>
+            <a:ext cx="12191695" cy="6858000"/>
+          </a:xfrm>
+          <a:prstGeom prst="rect">
+            <a:avLst/>
+          </a:prstGeom>
+        </p:spPr>
+      </p:pic>
+      <p:pic>
+        <p:nvPicPr>
+          <p:cNvPr id="3" name="Picture 2" descr="sentinel_mark.png"/>
+          <p:cNvPicPr>
+            <a:picLocks noChangeAspect="1"/>
+          </p:cNvPicPr>
+          <p:nvPr/>
+        </p:nvPicPr>
+        <p:blipFill>
+          <a:blip r:embed="rId3"/>
+          <a:stretch>
+            <a:fillRect/>
+          </a:stretch>
+        </p:blipFill>
+        <p:spPr>
+          <a:xfrm>
+            <a:off x="566928" y="457200"/>
+            <a:ext cx="749808" cy="749808"/>
+          </a:xfrm>
+          <a:prstGeom prst="rect">
+            <a:avLst/>
+          </a:prstGeom>
+        </p:spPr>
+      </p:pic>
+      <p:sp>
+        <p:nvSpPr>
+          <p:cNvPr id="4" name="Rounded Rectangle 3"/>
           <p:cNvSpPr/>
           <p:nvPr/>
         </p:nvSpPr>
         <p:spPr>
           <a:xfrm>
-            <a:off x="603504" y="2395728"/>
-            <a:ext cx="3444240" cy="1143000"/>
+            <a:off x="10195560" y="457200"/>
+            <a:ext cx="1554480" cy="384048"/>
           </a:xfrm>
           <a:prstGeom prst="roundRect">
             <a:avLst/>
@@ -16427,44 +16861,416 @@
           </a:fontRef>
         </p:style>
         <p:txBody>
-          <a:bodyPr rtlCol="0" anchor="ctr"/>
+          <a:bodyPr rtlCol="0" anchor="ctr" tIns="0" bIns="0"/>
           <a:lstStyle/>
           <a:p>
             <a:pPr algn="ctr"/>
             <a:r>
-              <a:rPr sz="3200" b="1">
+              <a:rPr sz="1200" b="1">
                 <a:solidFill>
                   <a:srgbClr val="22D3EE"/>
                 </a:solidFill>
                 <a:latin typeface="Consolas"/>
               </a:rPr>
-              <a:t>$1M</a:t>
-            </a:r>
-          </a:p>
-          <a:p>
-            <a:pPr algn="ctr"/>
-            <a:r>
-              <a:rPr sz="1100" b="0">
+              <a:t>AI KAVACH</a:t>
+            </a:r>
+          </a:p>
+        </p:txBody>
+      </p:sp>
+      <p:sp>
+        <p:nvSpPr>
+          <p:cNvPr id="5" name="TextBox 4"/>
+          <p:cNvSpPr txBox="1"/>
+          <p:nvPr/>
+        </p:nvSpPr>
+        <p:spPr>
+          <a:xfrm>
+            <a:off x="1508760" y="475488"/>
+            <a:ext cx="8503920" cy="1051560"/>
+          </a:xfrm>
+          <a:prstGeom prst="rect">
+            <a:avLst/>
+          </a:prstGeom>
+          <a:noFill/>
+        </p:spPr>
+        <p:txBody>
+          <a:bodyPr wrap="square" anchor="ctr" lIns="0" rIns="0" tIns="0" bIns="0">
+            <a:spAutoFit/>
+          </a:bodyPr>
+          <a:lstStyle/>
+          <a:p>
+            <a:r>
+              <a:rPr sz="3100" b="1">
+                <a:solidFill>
+                  <a:srgbClr val="EAF2FF"/>
+                </a:solidFill>
+                <a:latin typeface="Consolas"/>
+              </a:rPr>
+              <a:t>Status &amp; Roadmap</a:t>
+            </a:r>
+          </a:p>
+        </p:txBody>
+      </p:sp>
+      <p:pic>
+        <p:nvPicPr>
+          <p:cNvPr id="6" name="Picture 5" descr="deck_rule.png"/>
+          <p:cNvPicPr>
+            <a:picLocks noChangeAspect="1"/>
+          </p:cNvPicPr>
+          <p:nvPr/>
+        </p:nvPicPr>
+        <p:blipFill>
+          <a:blip r:embed="rId4"/>
+          <a:stretch>
+            <a:fillRect/>
+          </a:stretch>
+        </p:blipFill>
+        <p:spPr>
+          <a:xfrm>
+            <a:off x="640080" y="1664208"/>
+            <a:ext cx="3108960" cy="56692"/>
+          </a:xfrm>
+          <a:prstGeom prst="rect">
+            <a:avLst/>
+          </a:prstGeom>
+        </p:spPr>
+      </p:pic>
+      <p:sp>
+        <p:nvSpPr>
+          <p:cNvPr id="7" name="TextBox 6"/>
+          <p:cNvSpPr txBox="1"/>
+          <p:nvPr/>
+        </p:nvSpPr>
+        <p:spPr>
+          <a:xfrm>
+            <a:off x="658368" y="1847088"/>
+            <a:ext cx="10881360" cy="548640"/>
+          </a:xfrm>
+          <a:prstGeom prst="rect">
+            <a:avLst/>
+          </a:prstGeom>
+          <a:noFill/>
+        </p:spPr>
+        <p:txBody>
+          <a:bodyPr wrap="square" anchor="t" lIns="0" rIns="0" tIns="0" bIns="0">
+            <a:spAutoFit/>
+          </a:bodyPr>
+          <a:lstStyle/>
+          <a:p>
+            <a:r>
+              <a:rPr sz="1600" b="0">
+                <a:solidFill>
+                  <a:srgbClr val="22D3EE"/>
+                </a:solidFill>
+                <a:latin typeface="Consolas"/>
+              </a:rPr>
+              <a:t>Honest today; a clear path to more</a:t>
+            </a:r>
+          </a:p>
+        </p:txBody>
+      </p:sp>
+      <p:sp>
+        <p:nvSpPr>
+          <p:cNvPr id="8" name="TextBox 7"/>
+          <p:cNvSpPr txBox="1"/>
+          <p:nvPr/>
+        </p:nvSpPr>
+        <p:spPr>
+          <a:xfrm>
+            <a:off x="713232" y="2697480"/>
+            <a:ext cx="10789920" cy="3840480"/>
+          </a:xfrm>
+          <a:prstGeom prst="rect">
+            <a:avLst/>
+          </a:prstGeom>
+          <a:noFill/>
+        </p:spPr>
+        <p:txBody>
+          <a:bodyPr wrap="square" anchor="t" lIns="0" rIns="0" tIns="0" bIns="0">
+            <a:spAutoFit/>
+          </a:bodyPr>
+          <a:lstStyle/>
+          <a:p>
+            <a:pPr>
+              <a:spcAft>
+                <a:spcPts val="1500"/>
+              </a:spcAft>
+            </a:pPr>
+            <a:r>
+              <a:rPr sz="1800" b="1">
+                <a:solidFill>
+                  <a:srgbClr val="2DD48F"/>
+                </a:solidFill>
+                <a:latin typeface="Segoe UI"/>
+              </a:rPr>
+              <a:t>»  </a:t>
+            </a:r>
+            <a:r>
+              <a:rPr sz="1800" b="0">
+                <a:solidFill>
+                  <a:srgbClr val="EAF2FF"/>
+                </a:solidFill>
+                <a:latin typeface="Segoe UI"/>
+              </a:rPr>
+              <a:t>Today: 10 classes live end-to-end on 2 stacks; 254 tests</a:t>
+            </a:r>
+          </a:p>
+          <a:p>
+            <a:pPr>
+              <a:spcAft>
+                <a:spcPts val="1500"/>
+              </a:spcAft>
+            </a:pPr>
+            <a:r>
+              <a:rPr sz="1800" b="1">
+                <a:solidFill>
+                  <a:srgbClr val="2DD48F"/>
+                </a:solidFill>
+                <a:latin typeface="Segoe UI"/>
+              </a:rPr>
+              <a:t>»  </a:t>
+            </a:r>
+            <a:r>
+              <a:rPr sz="1800" b="0">
+                <a:solidFill>
+                  <a:srgbClr val="EAF2FF"/>
+                </a:solidFill>
+                <a:latin typeface="Segoe UI"/>
+              </a:rPr>
+              <a:t>Today: Login Tester + authenticated reasoning + chaining ingredients</a:t>
+            </a:r>
+          </a:p>
+          <a:p>
+            <a:pPr>
+              <a:spcAft>
+                <a:spcPts val="1500"/>
+              </a:spcAft>
+            </a:pPr>
+            <a:r>
+              <a:rPr sz="1800" b="1">
+                <a:solidFill>
+                  <a:srgbClr val="F5B301"/>
+                </a:solidFill>
+                <a:latin typeface="Segoe UI"/>
+              </a:rPr>
+              <a:t>»  </a:t>
+            </a:r>
+            <a:r>
+              <a:rPr sz="1800" b="0">
+                <a:solidFill>
+                  <a:srgbClr val="EAF2FF"/>
+                </a:solidFill>
+                <a:latin typeface="Segoe UI"/>
+              </a:rPr>
+              <a:t>Next: provable 2-link chaining (SQLi ⇒ IDOR), decoy-gated</a:t>
+            </a:r>
+          </a:p>
+          <a:p>
+            <a:pPr>
+              <a:spcAft>
+                <a:spcPts val="1500"/>
+              </a:spcAft>
+            </a:pPr>
+            <a:r>
+              <a:rPr sz="1800" b="1">
+                <a:solidFill>
+                  <a:srgbClr val="F5B301"/>
+                </a:solidFill>
+                <a:latin typeface="Segoe UI"/>
+              </a:rPr>
+              <a:t>»  </a:t>
+            </a:r>
+            <a:r>
+              <a:rPr sz="1800" b="0">
+                <a:solidFill>
+                  <a:srgbClr val="EAF2FF"/>
+                </a:solidFill>
+                <a:latin typeface="Segoe UI"/>
+              </a:rPr>
+              <a:t>Next: the last two OWASP classes — reflected XSS + path traversal</a:t>
+            </a:r>
+          </a:p>
+          <a:p>
+            <a:pPr>
+              <a:spcAft>
+                <a:spcPts val="1500"/>
+              </a:spcAft>
+            </a:pPr>
+            <a:r>
+              <a:rPr sz="1800" b="1">
+                <a:solidFill>
+                  <a:srgbClr val="F5B301"/>
+                </a:solidFill>
+                <a:latin typeface="Segoe UI"/>
+              </a:rPr>
+              <a:t>»  </a:t>
+            </a:r>
+            <a:r>
+              <a:rPr sz="1800" b="0">
+                <a:solidFill>
+                  <a:srgbClr val="EAF2FF"/>
+                </a:solidFill>
+                <a:latin typeface="Segoe UI"/>
+              </a:rPr>
+              <a:t>Next: CI/CD gate + policy library for common stacks</a:t>
+            </a:r>
+          </a:p>
+        </p:txBody>
+      </p:sp>
+      <p:sp>
+        <p:nvSpPr>
+          <p:cNvPr id="9" name="TextBox 8"/>
+          <p:cNvSpPr txBox="1"/>
+          <p:nvPr/>
+        </p:nvSpPr>
+        <p:spPr>
+          <a:xfrm>
+            <a:off x="566928" y="6382512"/>
+            <a:ext cx="8229600" cy="365760"/>
+          </a:xfrm>
+          <a:prstGeom prst="rect">
+            <a:avLst/>
+          </a:prstGeom>
+          <a:noFill/>
+        </p:spPr>
+        <p:txBody>
+          <a:bodyPr wrap="square" anchor="t" lIns="0" rIns="0" tIns="0" bIns="0">
+            <a:spAutoFit/>
+          </a:bodyPr>
+          <a:lstStyle/>
+          <a:p>
+            <a:r>
+              <a:rPr sz="1000" b="1">
+                <a:solidFill>
+                  <a:srgbClr val="22D3EE"/>
+                </a:solidFill>
+                <a:latin typeface="Consolas"/>
+              </a:rPr>
+              <a:t>SENTINEL</a:t>
+            </a:r>
+            <a:r>
+              <a:rPr sz="1000" b="0">
                 <a:solidFill>
                   <a:srgbClr val="6B7A90"/>
                 </a:solidFill>
                 <a:latin typeface="Consolas"/>
               </a:rPr>
-              <a:t>SEED</a:t>
-            </a:r>
-          </a:p>
-        </p:txBody>
-      </p:sp>
-      <p:sp>
-        <p:nvSpPr>
-          <p:cNvPr id="9" name="Rounded Rectangle 8"/>
+              <a:t>   ·   find → reason → prove → patch → prove</a:t>
+            </a:r>
+          </a:p>
+        </p:txBody>
+      </p:sp>
+      <p:sp>
+        <p:nvSpPr>
+          <p:cNvPr id="10" name="TextBox 9"/>
+          <p:cNvSpPr txBox="1"/>
+          <p:nvPr/>
+        </p:nvSpPr>
+        <p:spPr>
+          <a:xfrm>
+            <a:off x="10789920" y="6382512"/>
+            <a:ext cx="914400" cy="365760"/>
+          </a:xfrm>
+          <a:prstGeom prst="rect">
+            <a:avLst/>
+          </a:prstGeom>
+          <a:noFill/>
+        </p:spPr>
+        <p:txBody>
+          <a:bodyPr wrap="square" anchor="t" lIns="0" rIns="0" tIns="0" bIns="0">
+            <a:spAutoFit/>
+          </a:bodyPr>
+          <a:lstStyle/>
+          <a:p>
+            <a:pPr algn="r"/>
+            <a:r>
+              <a:rPr sz="1000" b="0">
+                <a:solidFill>
+                  <a:srgbClr val="6B7A90"/>
+                </a:solidFill>
+                <a:latin typeface="Consolas"/>
+              </a:rPr>
+              <a:t>31 / 33</a:t>
+            </a:r>
+          </a:p>
+        </p:txBody>
+      </p:sp>
+    </p:spTree>
+  </p:cSld>
+  <p:clrMapOvr>
+    <a:masterClrMapping/>
+  </p:clrMapOvr>
+</p:sld>
+</file>
+
+<file path=ppt/slides/slide32.xml><?xml version="1.0" encoding="utf-8"?>
+<p:sld xmlns:a="http://schemas.openxmlformats.org/drawingml/2006/main" xmlns:p="http://schemas.openxmlformats.org/presentationml/2006/main" xmlns:r="http://schemas.openxmlformats.org/officeDocument/2006/relationships">
+  <p:cSld>
+    <p:spTree>
+      <p:nvGrpSpPr>
+        <p:cNvPr id="1" name=""/>
+        <p:cNvGrpSpPr/>
+        <p:nvPr/>
+      </p:nvGrpSpPr>
+      <p:grpSpPr/>
+      <p:pic>
+        <p:nvPicPr>
+          <p:cNvPr id="2" name="Picture 1" descr="deck_bg.png"/>
+          <p:cNvPicPr>
+            <a:picLocks noChangeAspect="1"/>
+          </p:cNvPicPr>
+          <p:nvPr/>
+        </p:nvPicPr>
+        <p:blipFill>
+          <a:blip r:embed="rId2"/>
+          <a:stretch>
+            <a:fillRect/>
+          </a:stretch>
+        </p:blipFill>
+        <p:spPr>
+          <a:xfrm>
+            <a:off x="0" y="0"/>
+            <a:ext cx="12191695" cy="6858000"/>
+          </a:xfrm>
+          <a:prstGeom prst="rect">
+            <a:avLst/>
+          </a:prstGeom>
+        </p:spPr>
+      </p:pic>
+      <p:pic>
+        <p:nvPicPr>
+          <p:cNvPr id="3" name="Picture 2" descr="sentinel_mark.png"/>
+          <p:cNvPicPr>
+            <a:picLocks noChangeAspect="1"/>
+          </p:cNvPicPr>
+          <p:nvPr/>
+        </p:nvPicPr>
+        <p:blipFill>
+          <a:blip r:embed="rId3"/>
+          <a:stretch>
+            <a:fillRect/>
+          </a:stretch>
+        </p:blipFill>
+        <p:spPr>
+          <a:xfrm>
+            <a:off x="566928" y="457200"/>
+            <a:ext cx="749808" cy="749808"/>
+          </a:xfrm>
+          <a:prstGeom prst="rect">
+            <a:avLst/>
+          </a:prstGeom>
+        </p:spPr>
+      </p:pic>
+      <p:sp>
+        <p:nvSpPr>
+          <p:cNvPr id="4" name="Rounded Rectangle 3"/>
           <p:cNvSpPr/>
           <p:nvPr/>
         </p:nvSpPr>
         <p:spPr>
           <a:xfrm>
-            <a:off x="4367784" y="2395728"/>
-            <a:ext cx="3444240" cy="1143000"/>
+            <a:off x="10195560" y="457200"/>
+            <a:ext cx="1554480" cy="384048"/>
           </a:xfrm>
           <a:prstGeom prst="roundRect">
             <a:avLst/>
@@ -16491,43 +17297,123 @@
           </a:fontRef>
         </p:style>
         <p:txBody>
-          <a:bodyPr rtlCol="0" anchor="ctr"/>
+          <a:bodyPr rtlCol="0" anchor="ctr" tIns="0" bIns="0"/>
           <a:lstStyle/>
           <a:p>
             <a:pPr algn="ctr"/>
             <a:r>
-              <a:rPr sz="3200" b="1">
+              <a:rPr sz="1200" b="1">
                 <a:solidFill>
                   <a:srgbClr val="22D3EE"/>
                 </a:solidFill>
                 <a:latin typeface="Consolas"/>
               </a:rPr>
-              <a:t>18</a:t>
-            </a:r>
-          </a:p>
-          <a:p>
-            <a:pPr algn="ctr"/>
-            <a:r>
-              <a:rPr sz="1100" b="0">
-                <a:solidFill>
-                  <a:srgbClr val="6B7A90"/>
+              <a:t>AI KAVACH</a:t>
+            </a:r>
+          </a:p>
+        </p:txBody>
+      </p:sp>
+      <p:sp>
+        <p:nvSpPr>
+          <p:cNvPr id="5" name="TextBox 4"/>
+          <p:cNvSpPr txBox="1"/>
+          <p:nvPr/>
+        </p:nvSpPr>
+        <p:spPr>
+          <a:xfrm>
+            <a:off x="1508760" y="475488"/>
+            <a:ext cx="8503920" cy="1051560"/>
+          </a:xfrm>
+          <a:prstGeom prst="rect">
+            <a:avLst/>
+          </a:prstGeom>
+          <a:noFill/>
+        </p:spPr>
+        <p:txBody>
+          <a:bodyPr wrap="square" anchor="ctr" lIns="0" rIns="0" tIns="0" bIns="0">
+            <a:spAutoFit/>
+          </a:bodyPr>
+          <a:lstStyle/>
+          <a:p>
+            <a:r>
+              <a:rPr sz="3100" b="1">
+                <a:solidFill>
+                  <a:srgbClr val="EAF2FF"/>
                 </a:solidFill>
                 <a:latin typeface="Consolas"/>
               </a:rPr>
-              <a:t>MONTHS RUNWAY</a:t>
-            </a:r>
-          </a:p>
-        </p:txBody>
-      </p:sp>
-      <p:sp>
-        <p:nvSpPr>
-          <p:cNvPr id="10" name="Rounded Rectangle 9"/>
+              <a:t>The Ask</a:t>
+            </a:r>
+          </a:p>
+        </p:txBody>
+      </p:sp>
+      <p:pic>
+        <p:nvPicPr>
+          <p:cNvPr id="6" name="Picture 5" descr="deck_rule.png"/>
+          <p:cNvPicPr>
+            <a:picLocks noChangeAspect="1"/>
+          </p:cNvPicPr>
+          <p:nvPr/>
+        </p:nvPicPr>
+        <p:blipFill>
+          <a:blip r:embed="rId4"/>
+          <a:stretch>
+            <a:fillRect/>
+          </a:stretch>
+        </p:blipFill>
+        <p:spPr>
+          <a:xfrm>
+            <a:off x="640080" y="1664208"/>
+            <a:ext cx="3108960" cy="56692"/>
+          </a:xfrm>
+          <a:prstGeom prst="rect">
+            <a:avLst/>
+          </a:prstGeom>
+        </p:spPr>
+      </p:pic>
+      <p:sp>
+        <p:nvSpPr>
+          <p:cNvPr id="7" name="TextBox 6"/>
+          <p:cNvSpPr txBox="1"/>
+          <p:nvPr/>
+        </p:nvSpPr>
+        <p:spPr>
+          <a:xfrm>
+            <a:off x="658368" y="1847088"/>
+            <a:ext cx="10881360" cy="548640"/>
+          </a:xfrm>
+          <a:prstGeom prst="rect">
+            <a:avLst/>
+          </a:prstGeom>
+          <a:noFill/>
+        </p:spPr>
+        <p:txBody>
+          <a:bodyPr wrap="square" anchor="t" lIns="0" rIns="0" tIns="0" bIns="0">
+            <a:spAutoFit/>
+          </a:bodyPr>
+          <a:lstStyle/>
+          <a:p>
+            <a:r>
+              <a:rPr sz="1600" b="0">
+                <a:solidFill>
+                  <a:srgbClr val="22D3EE"/>
+                </a:solidFill>
+                <a:latin typeface="Consolas"/>
+              </a:rPr>
+              <a:t>$1M to turn a proven engine into a platform</a:t>
+            </a:r>
+          </a:p>
+        </p:txBody>
+      </p:sp>
+      <p:sp>
+        <p:nvSpPr>
+          <p:cNvPr id="8" name="Rounded Rectangle 7"/>
           <p:cNvSpPr/>
           <p:nvPr/>
         </p:nvSpPr>
         <p:spPr>
           <a:xfrm>
-            <a:off x="8132064" y="2395728"/>
+            <a:off x="603504" y="2395728"/>
             <a:ext cx="3444240" cy="1143000"/>
           </a:xfrm>
           <a:prstGeom prst="roundRect">
@@ -16566,7 +17452,135 @@
                 </a:solidFill>
                 <a:latin typeface="Consolas"/>
               </a:rPr>
-              <a:t>5→8</a:t>
+              <a:t>$1M</a:t>
+            </a:r>
+          </a:p>
+          <a:p>
+            <a:pPr algn="ctr"/>
+            <a:r>
+              <a:rPr sz="1100" b="0">
+                <a:solidFill>
+                  <a:srgbClr val="6B7A90"/>
+                </a:solidFill>
+                <a:latin typeface="Consolas"/>
+              </a:rPr>
+              <a:t>SEED</a:t>
+            </a:r>
+          </a:p>
+        </p:txBody>
+      </p:sp>
+      <p:sp>
+        <p:nvSpPr>
+          <p:cNvPr id="9" name="Rounded Rectangle 8"/>
+          <p:cNvSpPr/>
+          <p:nvPr/>
+        </p:nvSpPr>
+        <p:spPr>
+          <a:xfrm>
+            <a:off x="4367784" y="2395728"/>
+            <a:ext cx="3444240" cy="1143000"/>
+          </a:xfrm>
+          <a:prstGeom prst="roundRect">
+            <a:avLst/>
+          </a:prstGeom>
+          <a:noFill/>
+          <a:ln w="12700">
+            <a:solidFill>
+              <a:srgbClr val="22D3EE"/>
+            </a:solidFill>
+          </a:ln>
+        </p:spPr>
+        <p:style>
+          <a:lnRef idx="1">
+            <a:schemeClr val="accent1"/>
+          </a:lnRef>
+          <a:fillRef idx="3">
+            <a:schemeClr val="accent1"/>
+          </a:fillRef>
+          <a:effectRef idx="2">
+            <a:schemeClr val="accent1"/>
+          </a:effectRef>
+          <a:fontRef idx="minor">
+            <a:schemeClr val="lt1"/>
+          </a:fontRef>
+        </p:style>
+        <p:txBody>
+          <a:bodyPr rtlCol="0" anchor="ctr"/>
+          <a:lstStyle/>
+          <a:p>
+            <a:pPr algn="ctr"/>
+            <a:r>
+              <a:rPr sz="3200" b="1">
+                <a:solidFill>
+                  <a:srgbClr val="22D3EE"/>
+                </a:solidFill>
+                <a:latin typeface="Consolas"/>
+              </a:rPr>
+              <a:t>18</a:t>
+            </a:r>
+          </a:p>
+          <a:p>
+            <a:pPr algn="ctr"/>
+            <a:r>
+              <a:rPr sz="1100" b="0">
+                <a:solidFill>
+                  <a:srgbClr val="6B7A90"/>
+                </a:solidFill>
+                <a:latin typeface="Consolas"/>
+              </a:rPr>
+              <a:t>MONTHS RUNWAY</a:t>
+            </a:r>
+          </a:p>
+        </p:txBody>
+      </p:sp>
+      <p:sp>
+        <p:nvSpPr>
+          <p:cNvPr id="10" name="Rounded Rectangle 9"/>
+          <p:cNvSpPr/>
+          <p:nvPr/>
+        </p:nvSpPr>
+        <p:spPr>
+          <a:xfrm>
+            <a:off x="8132064" y="2395728"/>
+            <a:ext cx="3444240" cy="1143000"/>
+          </a:xfrm>
+          <a:prstGeom prst="roundRect">
+            <a:avLst/>
+          </a:prstGeom>
+          <a:noFill/>
+          <a:ln w="12700">
+            <a:solidFill>
+              <a:srgbClr val="22D3EE"/>
+            </a:solidFill>
+          </a:ln>
+        </p:spPr>
+        <p:style>
+          <a:lnRef idx="1">
+            <a:schemeClr val="accent1"/>
+          </a:lnRef>
+          <a:fillRef idx="3">
+            <a:schemeClr val="accent1"/>
+          </a:fillRef>
+          <a:effectRef idx="2">
+            <a:schemeClr val="accent1"/>
+          </a:effectRef>
+          <a:fontRef idx="minor">
+            <a:schemeClr val="lt1"/>
+          </a:fontRef>
+        </p:style>
+        <p:txBody>
+          <a:bodyPr rtlCol="0" anchor="ctr"/>
+          <a:lstStyle/>
+          <a:p>
+            <a:pPr algn="ctr"/>
+            <a:r>
+              <a:rPr sz="3200" b="1">
+                <a:solidFill>
+                  <a:srgbClr val="22D3EE"/>
+                </a:solidFill>
+                <a:latin typeface="Consolas"/>
+              </a:rPr>
+              <a:t>10→12+</a:t>
             </a:r>
           </a:p>
           <a:p>
@@ -16626,7 +17640,7 @@
                 </a:solidFill>
                 <a:latin typeface="Segoe UI"/>
               </a:rPr>
-              <a:t>Engineering: full chaining + the next OWASP classes</a:t>
+              <a:t>Engineering: provable chaining + the last OWASP classes</a:t>
             </a:r>
           </a:p>
           <a:p>
@@ -16804,7 +17818,7 @@
                 </a:solidFill>
                 <a:latin typeface="Consolas"/>
               </a:rPr>
-              <a:t>30 / 31</a:t>
+              <a:t>32 / 33</a:t>
             </a:r>
           </a:p>
         </p:txBody>
@@ -16817,7 +17831,7 @@
 </p:sld>
 </file>
 
-<file path=ppt/slides/slide31.xml><?xml version="1.0" encoding="utf-8"?>
+<file path=ppt/slides/slide33.xml><?xml version="1.0" encoding="utf-8"?>
 <p:sld xmlns:a="http://schemas.openxmlformats.org/drawingml/2006/main" xmlns:p="http://schemas.openxmlformats.org/presentationml/2006/main" xmlns:r="http://schemas.openxmlformats.org/officeDocument/2006/relationships">
   <p:cSld>
     <p:spTree>
@@ -17376,7 +18390,7 @@
                 </a:solidFill>
                 <a:latin typeface="Consolas"/>
               </a:rPr>
-              <a:t>04 / 31</a:t>
+              <a:t>04 / 33</a:t>
             </a:r>
           </a:p>
         </p:txBody>
@@ -17812,7 +18826,7 @@
                 </a:solidFill>
                 <a:latin typeface="Consolas"/>
               </a:rPr>
-              <a:t>05 / 31</a:t>
+              <a:t>05 / 33</a:t>
             </a:r>
           </a:p>
         </p:txBody>
@@ -18384,7 +19398,7 @@
                 </a:solidFill>
                 <a:latin typeface="Consolas"/>
               </a:rPr>
-              <a:t>07 / 31</a:t>
+              <a:t>07 / 33</a:t>
             </a:r>
           </a:p>
         </p:txBody>
@@ -18820,7 +19834,7 @@
                 </a:solidFill>
                 <a:latin typeface="Consolas"/>
               </a:rPr>
-              <a:t>08 / 31</a:t>
+              <a:t>08 / 33</a:t>
             </a:r>
           </a:p>
         </p:txBody>
@@ -19128,7 +20142,7 @@
                 </a:solidFill>
                 <a:latin typeface="Segoe UI"/>
               </a:rPr>
-              <a:t>A pure judge per class: authz, posture, cookies, privesc, injection</a:t>
+              <a:t>Ten pure judges: authz · posture · cookies · privesc · SQLi · SSTI · redirect · CORS · SSRF · JWT</a:t>
             </a:r>
           </a:p>
           <a:p>
@@ -19256,7 +20270,7 @@
                 </a:solidFill>
                 <a:latin typeface="Consolas"/>
               </a:rPr>
-              <a:t>09 / 31</a:t>
+              <a:t>09 / 33</a:t>
             </a:r>
           </a:p>
         </p:txBody>

--- a/deck/Sentinel_AI_Kavach.pptx
+++ b/deck/Sentinel_AI_Kavach.pptx
@@ -954,7 +954,7 @@
           <a:lstStyle/>
           <a:p>
             <a:r>
-              <a:t>Sentinel is not a one-trick demo. Ten independent classes each run the entire loop end-to-end against live targets — every one gated by the same epistemic contract.</a:t>
+              <a:t>Sentinel is not a one-trick demo. Twelve independent classes each run the entire loop end-to-end against live targets — every one gated by the same epistemic contract.</a:t>
             </a:r>
           </a:p>
         </p:txBody>
@@ -1164,7 +1164,7 @@
           <a:lstStyle/>
           <a:p>
             <a:r>
-              <a:t>The newest class and a chaining enabler. Cookie oracles are grounded in the Set-Cookie the target actually sets, so a weak session cookie is confirmed honestly, then hardened on the shield and re-proven.</a:t>
+              <a:t>A key chaining enabler. Cookie oracles are grounded in the Set-Cookie the target actually sets, so a weak session cookie is confirmed honestly, then hardened on the shield and re-proven.</a:t>
             </a:r>
           </a:p>
         </p:txBody>
@@ -1444,7 +1444,7 @@
           <a:lstStyle/>
           <a:p>
             <a:r>
-              <a:t>Coverage doubled without loosening the bar. SSTI confirms only when injected arithmetic actually evaluates; open-redirect and CORS each ride a two-probe differential against an unroutable nonce that is observed or echoed but never contacted; SSRF proves the fetch by an out-of-band callback to Sentinel's own loopback beacon; broken-auth replays a genuine, a forged, and an absent token. Ten classes, one contract.</a:t>
+              <a:t>Coverage more than doubled without loosening the bar. SSTI confirms only when injected arithmetic actually evaluates; reflected XSS only when attacker markup survives VERBATIM un-escaped where a benign control is echoed safely; path traversal only when a directory-escape payload leaks an OS-file invariant absent from a benign, traversal-free control. Open-redirect and CORS each ride a two-probe differential against an unroutable nonce that is observed or echoed but never contacted; SSRF proves the fetch by an out-of-band callback to Sentinel's own loopback beacon; broken-auth replays a genuine, a forged, and an absent token. Twelve classes, one contract.</a:t>
             </a:r>
           </a:p>
         </p:txBody>
@@ -1654,7 +1654,7 @@
           <a:lstStyle/>
           <a:p>
             <a:r>
-              <a:t>Chaining is where scanners over-claim. Sentinel proves each ingredient of a session-theft→authenticated-access chain independently and presents them together — but it does not auto-compose a causal exploit narrative. Honesty is the moat.</a:t>
+              <a:t>Chaining is where scanners over-claim — so ours is provable, not narrated. Link 1 reads a real identifier out of a CONFIRMED SQL injection's TRUE-arm response body; link 2 substitutes that exact id into an IDOR/BOLA breach and re-runs the UNCHANGED privilege-escalation judge on a fresh scratch graph. The edge is proven only when the real leaked id VALIDATES while a same-shaped DECOY id does not — the decoy wall proves the link is load-bearing on that specific leaked value, not a route that answers for any id. No decoy failure, no chain.</a:t>
             </a:r>
           </a:p>
         </p:txBody>
@@ -2214,7 +2214,7 @@
           <a:lstStyle/>
           <a:p>
             <a:r>
-              <a:t>We're candid about the line between done and next. Ten classes, two targets, the Login Tester, and chaining ingredients ship today; provable 2-link chaining, the last two OWASP classes (reflected XSS + path traversal), and a CI gate are the roadmap.</a:t>
+              <a:t>We're candid about the line between done and next. Twelve classes, two targets, the Login Tester, authenticated reasoning, and a provable 2-link SQLi⇒IDOR chain ship today; multi-link chaining, a ready-made policy library, and a CI gate are the roadmap.</a:t>
             </a:r>
           </a:p>
         </p:txBody>
@@ -2284,7 +2284,7 @@
           <a:lstStyle/>
           <a:p>
             <a:r>
-              <a:t>We're raising $1M for ~18 months to expand the class coverage, ship full chaining, build a policy library and CI integrations, and land design partners in regulated environments where local-first is a hard requirement.</a:t>
+              <a:t>We're raising $1M for ~18 months to deepen exploit composition, expand the class coverage, build a policy library and CI integrations, and land design partners in regulated environments where local-first is a hard requirement.</a:t>
             </a:r>
           </a:p>
         </p:txBody>
@@ -5945,7 +5945,7 @@
                 </a:solidFill>
                 <a:latin typeface="Segoe UI"/>
               </a:rPr>
-              <a:t>Ten vulnerability classes, each closing the full loop live</a:t>
+              <a:t>Twelve vulnerability classes, each closing the full loop live</a:t>
             </a:r>
           </a:p>
           <a:p>
@@ -7936,7 +7936,7 @@
                 </a:solidFill>
                 <a:latin typeface="Consolas"/>
               </a:rPr>
-              <a:t>Ten Vulnerability Classes</a:t>
+              <a:t>Twelve Vulnerability Classes</a:t>
             </a:r>
           </a:p>
         </p:txBody>
@@ -10859,7 +10859,7 @@
                 </a:solidFill>
                 <a:latin typeface="Consolas"/>
               </a:rPr>
-              <a:t>Classes 6–10 — Five More, Same Contract</a:t>
+              <a:t>Classes 6–12 — Seven More, Same Contract</a:t>
             </a:r>
           </a:p>
         </p:txBody>
@@ -10966,6 +10966,56 @@
                 <a:latin typeface="Segoe UI"/>
               </a:rPr>
               <a:t>SSTI — {{7*7}} evaluates to 49 vs the literal; behaviour, not a regex</a:t>
+            </a:r>
+          </a:p>
+          <a:p>
+            <a:pPr>
+              <a:spcAft>
+                <a:spcPts val="1500"/>
+              </a:spcAft>
+            </a:pPr>
+            <a:r>
+              <a:rPr sz="1800" b="1">
+                <a:solidFill>
+                  <a:srgbClr val="22D3EE"/>
+                </a:solidFill>
+                <a:latin typeface="Segoe UI"/>
+              </a:rPr>
+              <a:t>»  </a:t>
+            </a:r>
+            <a:r>
+              <a:rPr sz="1800" b="0">
+                <a:solidFill>
+                  <a:srgbClr val="C4D2E4"/>
+                </a:solidFill>
+                <a:latin typeface="Segoe UI"/>
+              </a:rPr>
+              <a:t>Reflected XSS — active markup reflected VERBATIM un-escaped vs an escaped control</a:t>
+            </a:r>
+          </a:p>
+          <a:p>
+            <a:pPr>
+              <a:spcAft>
+                <a:spcPts val="1500"/>
+              </a:spcAft>
+            </a:pPr>
+            <a:r>
+              <a:rPr sz="1800" b="1">
+                <a:solidFill>
+                  <a:srgbClr val="22D3EE"/>
+                </a:solidFill>
+                <a:latin typeface="Segoe UI"/>
+              </a:rPr>
+              <a:t>»  </a:t>
+            </a:r>
+            <a:r>
+              <a:rPr sz="1800" b="0">
+                <a:solidFill>
+                  <a:srgbClr val="C4D2E4"/>
+                </a:solidFill>
+                <a:latin typeface="Segoe UI"/>
+              </a:rPr>
+              <a:t>Path traversal / LFI — escape payload leaks an OS invariant (root:x:0:0:) absent from control</a:t>
             </a:r>
           </a:p>
           <a:p>
@@ -12191,7 +12241,7 @@
                 </a:solidFill>
                 <a:latin typeface="Consolas"/>
               </a:rPr>
-              <a:t>Chaining — Ingredients, Honestly</a:t>
+              <a:t>Chaining — Provable, Now</a:t>
             </a:r>
           </a:p>
         </p:txBody>
@@ -12249,7 +12299,7 @@
                 </a:solidFill>
                 <a:latin typeface="Consolas"/>
               </a:rPr>
-              <a:t>We prove the pieces; we don't fabricate the story</a:t>
+              <a:t>A 2-link exploit: extract → consume → compose</a:t>
             </a:r>
           </a:p>
         </p:txBody>
@@ -12297,7 +12347,7 @@
                 </a:solidFill>
                 <a:latin typeface="Segoe UI"/>
               </a:rPr>
-              <a:t>Session captured (real cookies + bearer)</a:t>
+              <a:t>Link 1: a CONFIRMED SQLi's TRUE-arm body leaks a real object id</a:t>
             </a:r>
           </a:p>
           <a:p>
@@ -12322,7 +12372,7 @@
                 </a:solidFill>
                 <a:latin typeface="Segoe UI"/>
               </a:rPr>
-              <a:t>Session cookie proven insecure (insecure_cookie CONFIRMED)</a:t>
+              <a:t>Link 2: that exact id drives an IDOR/BOLA the principal shouldn't reach</a:t>
             </a:r>
           </a:p>
           <a:p>
@@ -12347,7 +12397,7 @@
                 </a:solidFill>
                 <a:latin typeface="Segoe UI"/>
               </a:rPr>
-              <a:t>Resource reachable as that principal (authz CONFIRMED)</a:t>
+              <a:t>The composer owns ZERO verdict logic — reuses each class's pure judge unchanged</a:t>
             </a:r>
           </a:p>
           <a:p>
@@ -12372,7 +12422,7 @@
                 </a:solidFill>
                 <a:latin typeface="Segoe UI"/>
               </a:rPr>
-              <a:t>Presented as co-occurring evidence under one session</a:t>
+              <a:t>Decoy wall: a same-shaped fake id must FAIL, or the edge is suppressed</a:t>
             </a:r>
           </a:p>
           <a:p>
@@ -12384,7 +12434,7 @@
             <a:r>
               <a:rPr sz="1800" b="1">
                 <a:solidFill>
-                  <a:srgbClr val="E84BFF"/>
+                  <a:srgbClr val="22D3EE"/>
                 </a:solidFill>
                 <a:latin typeface="Segoe UI"/>
               </a:rPr>
@@ -12397,7 +12447,7 @@
                 </a:solidFill>
                 <a:latin typeface="Segoe UI"/>
               </a:rPr>
-              <a:t>Full causal chaining stays the honestly-labeled frontier</a:t>
+              <a:t>Chain confirmed → severity escalates one rung (HIGH ∧ HIGH → CRITICAL)</a:t>
             </a:r>
           </a:p>
         </p:txBody>
@@ -13197,7 +13247,7 @@
                 </a:solidFill>
                 <a:latin typeface="Consolas"/>
               </a:rPr>
-              <a:t>255</a:t>
+              <a:t>311</a:t>
             </a:r>
           </a:p>
           <a:p>
@@ -13261,7 +13311,7 @@
                 </a:solidFill>
                 <a:latin typeface="Consolas"/>
               </a:rPr>
-              <a:t>254</a:t>
+              <a:t>310</a:t>
             </a:r>
           </a:p>
           <a:p>
@@ -13325,7 +13375,7 @@
                 </a:solidFill>
                 <a:latin typeface="Consolas"/>
               </a:rPr>
-              <a:t>10</a:t>
+              <a:t>12</a:t>
             </a:r>
           </a:p>
           <a:p>
@@ -13449,7 +13499,7 @@
                 </a:solidFill>
                 <a:latin typeface="Segoe UI"/>
               </a:rPr>
-              <a:t>254 passing, 1 skipped (the opt-in live-browser path)</a:t>
+              <a:t>310 passing, 1 skipped (the opt-in live-browser path)</a:t>
             </a:r>
           </a:p>
           <a:p>
@@ -17012,7 +17062,7 @@
                 </a:solidFill>
                 <a:latin typeface="Segoe UI"/>
               </a:rPr>
-              <a:t>Today: 10 classes live end-to-end on 2 stacks; 254 tests</a:t>
+              <a:t>Today: 12 classes live end-to-end on 2 stacks; 311 tests</a:t>
             </a:r>
           </a:p>
           <a:p>
@@ -17037,7 +17087,7 @@
                 </a:solidFill>
                 <a:latin typeface="Segoe UI"/>
               </a:rPr>
-              <a:t>Today: Login Tester + authenticated reasoning + chaining ingredients</a:t>
+              <a:t>Today: provable 2-link chaining (SQLi ⇒ IDOR), decoy-gated</a:t>
             </a:r>
           </a:p>
           <a:p>
@@ -17049,7 +17099,7 @@
             <a:r>
               <a:rPr sz="1800" b="1">
                 <a:solidFill>
-                  <a:srgbClr val="F5B301"/>
+                  <a:srgbClr val="2DD48F"/>
                 </a:solidFill>
                 <a:latin typeface="Segoe UI"/>
               </a:rPr>
@@ -17062,7 +17112,7 @@
                 </a:solidFill>
                 <a:latin typeface="Segoe UI"/>
               </a:rPr>
-              <a:t>Next: provable 2-link chaining (SQLi ⇒ IDOR), decoy-gated</a:t>
+              <a:t>Today: Login Tester + authenticated reasoning</a:t>
             </a:r>
           </a:p>
           <a:p>
@@ -17087,7 +17137,7 @@
                 </a:solidFill>
                 <a:latin typeface="Segoe UI"/>
               </a:rPr>
-              <a:t>Next: the last two OWASP classes — reflected XSS + path traversal</a:t>
+              <a:t>Next: multi-link chaining + deeper exploit composition</a:t>
             </a:r>
           </a:p>
           <a:p>
@@ -17112,7 +17162,7 @@
                 </a:solidFill>
                 <a:latin typeface="Segoe UI"/>
               </a:rPr>
-              <a:t>Next: CI/CD gate + policy library for common stacks</a:t>
+              <a:t>Next: a policy library for common stacks + a CI/CD gate</a:t>
             </a:r>
           </a:p>
         </p:txBody>
@@ -17580,7 +17630,7 @@
                 </a:solidFill>
                 <a:latin typeface="Consolas"/>
               </a:rPr>
-              <a:t>10→12+</a:t>
+              <a:t>12→18+</a:t>
             </a:r>
           </a:p>
           <a:p>
@@ -17640,7 +17690,7 @@
                 </a:solidFill>
                 <a:latin typeface="Segoe UI"/>
               </a:rPr>
-              <a:t>Engineering: provable chaining + the last OWASP classes</a:t>
+              <a:t>Engineering: multi-link chaining + deeper exploit composition</a:t>
             </a:r>
           </a:p>
           <a:p>
@@ -20142,7 +20192,7 @@
                 </a:solidFill>
                 <a:latin typeface="Segoe UI"/>
               </a:rPr>
-              <a:t>Ten pure judges: authz · posture · cookies · privesc · SQLi · SSTI · redirect · CORS · SSRF · JWT</a:t>
+              <a:t>Twelve pure judges: authz · posture · cookies · privesc · SQLi · SSTI · XSS · traversal · redirect · CORS · SSRF · JWT</a:t>
             </a:r>
           </a:p>
           <a:p>

--- a/deck/Sentinel_AI_Kavach.pptx
+++ b/deck/Sentinel_AI_Kavach.pptx
@@ -38,6 +38,11 @@
     <p:sldId id="286" r:id="rId38"/>
     <p:sldId id="287" r:id="rId39"/>
     <p:sldId id="288" r:id="rId40"/>
+    <p:sldId id="289" r:id="rId41"/>
+    <p:sldId id="290" r:id="rId42"/>
+    <p:sldId id="291" r:id="rId43"/>
+    <p:sldId id="292" r:id="rId44"/>
+    <p:sldId id="293" r:id="rId45"/>
   </p:sldIdLst>
   <p:sldSz cx="12191695" cy="6858000" type="screen4x3"/>
   <p:notesSz cx="6858000" cy="9144000"/>
@@ -1794,7 +1799,7 @@
           <a:lstStyle/>
           <a:p>
             <a:r>
-              <a:t>Validation is first-class. The offline suite is deterministic and network-free; the single skip is the browser test that only runs with the opt-in extra. Tests cover confirmation, remediation proof, isolation, and — crucially — that compliant controls produce no finding.</a:t>
+              <a:t>The 12 classes are the proof-carrying core. The next section is what they add up to: a dynamic, tool-wielding, LLM-driven agent that recons, adapts, proves, patches, and reports — with the same caged-AI contract.</a:t>
             </a:r>
           </a:p>
         </p:txBody>
@@ -1864,7 +1869,7 @@
           <a:lstStyle/>
           <a:p>
             <a:r>
-              <a:t>Local-first is a feature, not a limitation. The reasoning model runs on-box, the deterministic core works even if the model is down, and nothing egresses — which makes Sentinel deployable in air-gapped and regulated settings.</a:t>
+              <a:t>This is the headline of the current state. `autonomous &lt;url&gt;` fuses the whole pipeline into one self-directed loop: it reconnoiters live, generates KB-informed hypotheses, adjudicates them concurrently with the pure judges, and — on operator approval — patches and re-proves. Nothing target-specific is baked in.</a:t>
             </a:r>
           </a:p>
         </p:txBody>
@@ -1934,7 +1939,7 @@
           <a:lstStyle/>
           <a:p>
             <a:r>
-              <a:t>Autonomy is bounded by design: scope is enforced before a socket opens, probes are non-destructive, the shield is loopback-only, and the acting and judging stages are strictly separated. Credential handling is memory-only.</a:t>
+              <a:t>Breadth without compromising trust. A curated registry of real OSS tools widens what we test, but every tool 'proposes only' — even sqlmap and nuclei are demoted to nominators whose hits are re-proved by our judges. The model layer is pluggable: free local qwen for bulk and CI, a hosted Opus for showcase runs, keys never stored.</a:t>
             </a:r>
           </a:p>
         </p:txBody>
@@ -2004,7 +2009,7 @@
           <a:lstStyle/>
           <a:p>
             <a:r>
-              <a:t>Category-level, not a bake-off: signature scanners are fast but noisy and miss authorization; DAST and fuzzers explore but don't reason about intent or prove fixes. Sentinel's column is defined by reproduced verdicts, live fix-proofs, and full auditability.</a:t>
+              <a:t>The loop ends in a deliverable that carries its own proof. For every confirmed finding the report lifts the exact probes the judge ran, the differential and anchor, the judge's verbatim verdict and evidence ids, and the remediation's live flip. An optional LLM writes the executive summary — advisory only; it asserts no fact.</a:t>
             </a:r>
           </a:p>
         </p:txBody>
@@ -2144,7 +2149,7 @@
           <a:lstStyle/>
           <a:p>
             <a:r>
-              <a:t>The wedge is trust plus closure: verdicts you can believe and fixes you can prove, in the classes that matter most, deployable where the sensitive targets actually live. Honesty about limits is itself a differentiator.</a:t>
+              <a:t>We took a 200-item vulnerability wishlist and folded it honestly into four tiers: what ships today, the build queue, the frontier we surface only as labeled leads, and what is out of scope for a black-box web tool. Breadth is earned per differential judge — never declared per list entry. That discipline is the antidote to 'basic'.</a:t>
             </a:r>
           </a:p>
         </p:txBody>
@@ -2214,7 +2219,7 @@
           <a:lstStyle/>
           <a:p>
             <a:r>
-              <a:t>We're candid about the line between done and next. Twelve classes, two targets, the Login Tester, authenticated reasoning, and a provable 2-link SQLi⇒IDOR chain ship today; multi-link chaining, a ready-made policy library, and a CI gate are the roadmap.</a:t>
+              <a:t>Validation is first-class. The offline suite is deterministic and network-free; the single skip is the browser test that only runs with the opt-in extra. Tests cover confirmation, remediation proof, isolation, and — crucially — that compliant controls produce no finding.</a:t>
             </a:r>
           </a:p>
         </p:txBody>
@@ -2284,7 +2289,7 @@
           <a:lstStyle/>
           <a:p>
             <a:r>
-              <a:t>We're raising $1M for ~18 months to deepen exploit composition, expand the class coverage, build a policy library and CI integrations, and land design partners in regulated environments where local-first is a hard requirement.</a:t>
+              <a:t>Local-first is a feature, not a limitation. The reasoning model runs on-box, the deterministic core works even if the model is down, and nothing egresses — which makes Sentinel deployable in air-gapped and regulated settings.</a:t>
             </a:r>
           </a:p>
         </p:txBody>
@@ -2310,6 +2315,356 @@
 </file>
 
 <file path=ppt/notesSlides/notesSlide33.xml><?xml version="1.0" encoding="utf-8"?>
+<p:notes xmlns:a="http://schemas.openxmlformats.org/drawingml/2006/main" xmlns:p="http://schemas.openxmlformats.org/presentationml/2006/main" xmlns:r="http://schemas.openxmlformats.org/officeDocument/2006/relationships">
+  <p:cSld>
+    <p:spTree>
+      <p:nvGrpSpPr>
+        <p:cNvPr id="1" name=""/>
+        <p:cNvGrpSpPr/>
+        <p:nvPr/>
+      </p:nvGrpSpPr>
+      <p:grpSpPr>
+        <a:xfrm>
+          <a:off x="0" y="0"/>
+          <a:ext cx="0" cy="0"/>
+          <a:chOff x="0" y="0"/>
+          <a:chExt cx="0" cy="0"/>
+        </a:xfrm>
+      </p:grpSpPr>
+      <p:sp>
+        <p:nvSpPr>
+          <p:cNvPr id="2" name="Slide Image Placeholder 1"/>
+          <p:cNvSpPr>
+            <a:spLocks noGrp="1"/>
+          </p:cNvSpPr>
+          <p:nvPr>
+            <p:ph type="sldImg" idx="2"/>
+          </p:nvPr>
+        </p:nvSpPr>
+        <p:spPr/>
+      </p:sp>
+      <p:sp>
+        <p:nvSpPr>
+          <p:cNvPr id="3" name="Notes Placeholder 2"/>
+          <p:cNvSpPr>
+            <a:spLocks noGrp="1"/>
+          </p:cNvSpPr>
+          <p:nvPr>
+            <p:ph type="body" idx="3" sz="quarter"/>
+          </p:nvPr>
+        </p:nvSpPr>
+        <p:spPr/>
+        <p:txBody>
+          <a:bodyPr/>
+          <a:lstStyle/>
+          <a:p>
+            <a:r>
+              <a:t>Autonomy is bounded by design: scope is enforced before a socket opens, probes are non-destructive, the shield is loopback-only, and the acting and judging stages are strictly separated. Credential handling is memory-only.</a:t>
+            </a:r>
+          </a:p>
+        </p:txBody>
+      </p:sp>
+      <p:sp>
+        <p:nvSpPr>
+          <p:cNvPr id="4" name="Slide Number Placeholder 3"/>
+          <p:cNvSpPr>
+            <a:spLocks noGrp="1"/>
+          </p:cNvSpPr>
+          <p:nvPr>
+            <p:ph type="sldNum" idx="5" sz="quarter"/>
+          </p:nvPr>
+        </p:nvSpPr>
+        <p:spPr/>
+      </p:sp>
+    </p:spTree>
+  </p:cSld>
+  <p:clrMapOvr>
+    <a:masterClrMapping/>
+  </p:clrMapOvr>
+</p:notes>
+</file>
+
+<file path=ppt/notesSlides/notesSlide34.xml><?xml version="1.0" encoding="utf-8"?>
+<p:notes xmlns:a="http://schemas.openxmlformats.org/drawingml/2006/main" xmlns:p="http://schemas.openxmlformats.org/presentationml/2006/main" xmlns:r="http://schemas.openxmlformats.org/officeDocument/2006/relationships">
+  <p:cSld>
+    <p:spTree>
+      <p:nvGrpSpPr>
+        <p:cNvPr id="1" name=""/>
+        <p:cNvGrpSpPr/>
+        <p:nvPr/>
+      </p:nvGrpSpPr>
+      <p:grpSpPr>
+        <a:xfrm>
+          <a:off x="0" y="0"/>
+          <a:ext cx="0" cy="0"/>
+          <a:chOff x="0" y="0"/>
+          <a:chExt cx="0" cy="0"/>
+        </a:xfrm>
+      </p:grpSpPr>
+      <p:sp>
+        <p:nvSpPr>
+          <p:cNvPr id="2" name="Slide Image Placeholder 1"/>
+          <p:cNvSpPr>
+            <a:spLocks noGrp="1"/>
+          </p:cNvSpPr>
+          <p:nvPr>
+            <p:ph type="sldImg" idx="2"/>
+          </p:nvPr>
+        </p:nvSpPr>
+        <p:spPr/>
+      </p:sp>
+      <p:sp>
+        <p:nvSpPr>
+          <p:cNvPr id="3" name="Notes Placeholder 2"/>
+          <p:cNvSpPr>
+            <a:spLocks noGrp="1"/>
+          </p:cNvSpPr>
+          <p:nvPr>
+            <p:ph type="body" idx="3" sz="quarter"/>
+          </p:nvPr>
+        </p:nvSpPr>
+        <p:spPr/>
+        <p:txBody>
+          <a:bodyPr/>
+          <a:lstStyle/>
+          <a:p>
+            <a:r>
+              <a:t>Category-level, not a bake-off: signature scanners are fast but noisy and miss authorization; DAST and fuzzers explore but don't reason about intent or prove fixes. Sentinel's column is defined by reproduced verdicts, live fix-proofs, and full auditability.</a:t>
+            </a:r>
+          </a:p>
+        </p:txBody>
+      </p:sp>
+      <p:sp>
+        <p:nvSpPr>
+          <p:cNvPr id="4" name="Slide Number Placeholder 3"/>
+          <p:cNvSpPr>
+            <a:spLocks noGrp="1"/>
+          </p:cNvSpPr>
+          <p:nvPr>
+            <p:ph type="sldNum" idx="5" sz="quarter"/>
+          </p:nvPr>
+        </p:nvSpPr>
+        <p:spPr/>
+      </p:sp>
+    </p:spTree>
+  </p:cSld>
+  <p:clrMapOvr>
+    <a:masterClrMapping/>
+  </p:clrMapOvr>
+</p:notes>
+</file>
+
+<file path=ppt/notesSlides/notesSlide35.xml><?xml version="1.0" encoding="utf-8"?>
+<p:notes xmlns:a="http://schemas.openxmlformats.org/drawingml/2006/main" xmlns:p="http://schemas.openxmlformats.org/presentationml/2006/main" xmlns:r="http://schemas.openxmlformats.org/officeDocument/2006/relationships">
+  <p:cSld>
+    <p:spTree>
+      <p:nvGrpSpPr>
+        <p:cNvPr id="1" name=""/>
+        <p:cNvGrpSpPr/>
+        <p:nvPr/>
+      </p:nvGrpSpPr>
+      <p:grpSpPr>
+        <a:xfrm>
+          <a:off x="0" y="0"/>
+          <a:ext cx="0" cy="0"/>
+          <a:chOff x="0" y="0"/>
+          <a:chExt cx="0" cy="0"/>
+        </a:xfrm>
+      </p:grpSpPr>
+      <p:sp>
+        <p:nvSpPr>
+          <p:cNvPr id="2" name="Slide Image Placeholder 1"/>
+          <p:cNvSpPr>
+            <a:spLocks noGrp="1"/>
+          </p:cNvSpPr>
+          <p:nvPr>
+            <p:ph type="sldImg" idx="2"/>
+          </p:nvPr>
+        </p:nvSpPr>
+        <p:spPr/>
+      </p:sp>
+      <p:sp>
+        <p:nvSpPr>
+          <p:cNvPr id="3" name="Notes Placeholder 2"/>
+          <p:cNvSpPr>
+            <a:spLocks noGrp="1"/>
+          </p:cNvSpPr>
+          <p:nvPr>
+            <p:ph type="body" idx="3" sz="quarter"/>
+          </p:nvPr>
+        </p:nvSpPr>
+        <p:spPr/>
+        <p:txBody>
+          <a:bodyPr/>
+          <a:lstStyle/>
+          <a:p>
+            <a:r>
+              <a:t>The wedge is trust plus closure: verdicts you can believe and fixes you can prove, in the classes that matter most, deployable where the sensitive targets actually live. Honesty about limits is itself a differentiator.</a:t>
+            </a:r>
+          </a:p>
+        </p:txBody>
+      </p:sp>
+      <p:sp>
+        <p:nvSpPr>
+          <p:cNvPr id="4" name="Slide Number Placeholder 3"/>
+          <p:cNvSpPr>
+            <a:spLocks noGrp="1"/>
+          </p:cNvSpPr>
+          <p:nvPr>
+            <p:ph type="sldNum" idx="5" sz="quarter"/>
+          </p:nvPr>
+        </p:nvSpPr>
+        <p:spPr/>
+      </p:sp>
+    </p:spTree>
+  </p:cSld>
+  <p:clrMapOvr>
+    <a:masterClrMapping/>
+  </p:clrMapOvr>
+</p:notes>
+</file>
+
+<file path=ppt/notesSlides/notesSlide36.xml><?xml version="1.0" encoding="utf-8"?>
+<p:notes xmlns:a="http://schemas.openxmlformats.org/drawingml/2006/main" xmlns:p="http://schemas.openxmlformats.org/presentationml/2006/main" xmlns:r="http://schemas.openxmlformats.org/officeDocument/2006/relationships">
+  <p:cSld>
+    <p:spTree>
+      <p:nvGrpSpPr>
+        <p:cNvPr id="1" name=""/>
+        <p:cNvGrpSpPr/>
+        <p:nvPr/>
+      </p:nvGrpSpPr>
+      <p:grpSpPr>
+        <a:xfrm>
+          <a:off x="0" y="0"/>
+          <a:ext cx="0" cy="0"/>
+          <a:chOff x="0" y="0"/>
+          <a:chExt cx="0" cy="0"/>
+        </a:xfrm>
+      </p:grpSpPr>
+      <p:sp>
+        <p:nvSpPr>
+          <p:cNvPr id="2" name="Slide Image Placeholder 1"/>
+          <p:cNvSpPr>
+            <a:spLocks noGrp="1"/>
+          </p:cNvSpPr>
+          <p:nvPr>
+            <p:ph type="sldImg" idx="2"/>
+          </p:nvPr>
+        </p:nvSpPr>
+        <p:spPr/>
+      </p:sp>
+      <p:sp>
+        <p:nvSpPr>
+          <p:cNvPr id="3" name="Notes Placeholder 2"/>
+          <p:cNvSpPr>
+            <a:spLocks noGrp="1"/>
+          </p:cNvSpPr>
+          <p:nvPr>
+            <p:ph type="body" idx="3" sz="quarter"/>
+          </p:nvPr>
+        </p:nvSpPr>
+        <p:spPr/>
+        <p:txBody>
+          <a:bodyPr/>
+          <a:lstStyle/>
+          <a:p>
+            <a:r>
+              <a:t>We're candid about the line between done and next. Today: twelve classes and a provable 2-link chain live on two stacks, the autonomous fusion loop, a curated propose-only tool layer, pluggable LLM providers, and a proof-carrying report generator. Next: a smart failure-analysis/retry stage, the Tier-B classes, a deeper skills KB, and a CI/CD gate.</a:t>
+            </a:r>
+          </a:p>
+        </p:txBody>
+      </p:sp>
+      <p:sp>
+        <p:nvSpPr>
+          <p:cNvPr id="4" name="Slide Number Placeholder 3"/>
+          <p:cNvSpPr>
+            <a:spLocks noGrp="1"/>
+          </p:cNvSpPr>
+          <p:nvPr>
+            <p:ph type="sldNum" idx="5" sz="quarter"/>
+          </p:nvPr>
+        </p:nvSpPr>
+        <p:spPr/>
+      </p:sp>
+    </p:spTree>
+  </p:cSld>
+  <p:clrMapOvr>
+    <a:masterClrMapping/>
+  </p:clrMapOvr>
+</p:notes>
+</file>
+
+<file path=ppt/notesSlides/notesSlide37.xml><?xml version="1.0" encoding="utf-8"?>
+<p:notes xmlns:a="http://schemas.openxmlformats.org/drawingml/2006/main" xmlns:p="http://schemas.openxmlformats.org/presentationml/2006/main" xmlns:r="http://schemas.openxmlformats.org/officeDocument/2006/relationships">
+  <p:cSld>
+    <p:spTree>
+      <p:nvGrpSpPr>
+        <p:cNvPr id="1" name=""/>
+        <p:cNvGrpSpPr/>
+        <p:nvPr/>
+      </p:nvGrpSpPr>
+      <p:grpSpPr>
+        <a:xfrm>
+          <a:off x="0" y="0"/>
+          <a:ext cx="0" cy="0"/>
+          <a:chOff x="0" y="0"/>
+          <a:chExt cx="0" cy="0"/>
+        </a:xfrm>
+      </p:grpSpPr>
+      <p:sp>
+        <p:nvSpPr>
+          <p:cNvPr id="2" name="Slide Image Placeholder 1"/>
+          <p:cNvSpPr>
+            <a:spLocks noGrp="1"/>
+          </p:cNvSpPr>
+          <p:nvPr>
+            <p:ph type="sldImg" idx="2"/>
+          </p:nvPr>
+        </p:nvSpPr>
+        <p:spPr/>
+      </p:sp>
+      <p:sp>
+        <p:nvSpPr>
+          <p:cNvPr id="3" name="Notes Placeholder 2"/>
+          <p:cNvSpPr>
+            <a:spLocks noGrp="1"/>
+          </p:cNvSpPr>
+          <p:nvPr>
+            <p:ph type="body" idx="3" sz="quarter"/>
+          </p:nvPr>
+        </p:nvSpPr>
+        <p:spPr/>
+        <p:txBody>
+          <a:bodyPr/>
+          <a:lstStyle/>
+          <a:p>
+            <a:r>
+              <a:t>We're raising $1M for ~18 months to deepen exploit composition, expand the class coverage, build a policy library and CI integrations, and land design partners in regulated environments where local-first is a hard requirement.</a:t>
+            </a:r>
+          </a:p>
+        </p:txBody>
+      </p:sp>
+      <p:sp>
+        <p:nvSpPr>
+          <p:cNvPr id="4" name="Slide Number Placeholder 3"/>
+          <p:cNvSpPr>
+            <a:spLocks noGrp="1"/>
+          </p:cNvSpPr>
+          <p:nvPr>
+            <p:ph type="sldNum" idx="5" sz="quarter"/>
+          </p:nvPr>
+        </p:nvSpPr>
+        <p:spPr/>
+      </p:sp>
+    </p:spTree>
+  </p:cSld>
+  <p:clrMapOvr>
+    <a:masterClrMapping/>
+  </p:clrMapOvr>
+</p:notes>
+</file>
+
+<file path=ppt/notesSlides/notesSlide38.xml><?xml version="1.0" encoding="utf-8"?>
 <p:notes xmlns:a="http://schemas.openxmlformats.org/drawingml/2006/main" xmlns:p="http://schemas.openxmlformats.org/presentationml/2006/main" xmlns:r="http://schemas.openxmlformats.org/officeDocument/2006/relationships">
   <p:cSld>
     <p:spTree>
@@ -6479,7 +6834,7 @@
                 </a:solidFill>
                 <a:latin typeface="Consolas"/>
               </a:rPr>
-              <a:t>11 / 33</a:t>
+              <a:t>11 / 38</a:t>
             </a:r>
           </a:p>
         </p:txBody>
@@ -6939,7 +7294,7 @@
                 </a:solidFill>
                 <a:latin typeface="Consolas"/>
               </a:rPr>
-              <a:t>12 / 33</a:t>
+              <a:t>12 / 38</a:t>
             </a:r>
           </a:p>
         </p:txBody>
@@ -7399,7 +7754,7 @@
                 </a:solidFill>
                 <a:latin typeface="Consolas"/>
               </a:rPr>
-              <a:t>13 / 33</a:t>
+              <a:t>13 / 38</a:t>
             </a:r>
           </a:p>
         </p:txBody>
@@ -7859,7 +8214,7 @@
                 </a:solidFill>
                 <a:latin typeface="Consolas"/>
               </a:rPr>
-              <a:t>14 / 33</a:t>
+              <a:t>14 / 38</a:t>
             </a:r>
           </a:p>
         </p:txBody>
@@ -8431,7 +8786,7 @@
                 </a:solidFill>
                 <a:latin typeface="Consolas"/>
               </a:rPr>
-              <a:t>16 / 33</a:t>
+              <a:t>16 / 38</a:t>
             </a:r>
           </a:p>
         </p:txBody>
@@ -8891,7 +9246,7 @@
                 </a:solidFill>
                 <a:latin typeface="Consolas"/>
               </a:rPr>
-              <a:t>17 / 33</a:t>
+              <a:t>17 / 38</a:t>
             </a:r>
           </a:p>
         </p:txBody>
@@ -9351,7 +9706,7 @@
                 </a:solidFill>
                 <a:latin typeface="Consolas"/>
               </a:rPr>
-              <a:t>18 / 33</a:t>
+              <a:t>18 / 38</a:t>
             </a:r>
           </a:p>
         </p:txBody>
@@ -9811,7 +10166,7 @@
                 </a:solidFill>
                 <a:latin typeface="Consolas"/>
               </a:rPr>
-              <a:t>19 / 33</a:t>
+              <a:t>19 / 38</a:t>
             </a:r>
           </a:p>
         </p:txBody>
@@ -10247,7 +10602,7 @@
                 </a:solidFill>
                 <a:latin typeface="Consolas"/>
               </a:rPr>
-              <a:t>02 / 33</a:t>
+              <a:t>02 / 38</a:t>
             </a:r>
           </a:p>
         </p:txBody>
@@ -10707,7 +11062,7 @@
                 </a:solidFill>
                 <a:latin typeface="Consolas"/>
               </a:rPr>
-              <a:t>20 / 33</a:t>
+              <a:t>20 / 38</a:t>
             </a:r>
           </a:p>
         </p:txBody>
@@ -11193,7 +11548,7 @@
                 </a:solidFill>
                 <a:latin typeface="Consolas"/>
               </a:rPr>
-              <a:t>21 / 33</a:t>
+              <a:t>21 / 38</a:t>
             </a:r>
           </a:p>
         </p:txBody>
@@ -11629,7 +11984,7 @@
                 </a:solidFill>
                 <a:latin typeface="Consolas"/>
               </a:rPr>
-              <a:t>22 / 33</a:t>
+              <a:t>22 / 38</a:t>
             </a:r>
           </a:p>
         </p:txBody>
@@ -12089,7 +12444,7 @@
                 </a:solidFill>
                 <a:latin typeface="Consolas"/>
               </a:rPr>
-              <a:t>23 / 33</a:t>
+              <a:t>23 / 38</a:t>
             </a:r>
           </a:p>
         </p:txBody>
@@ -12525,7 +12880,7 @@
                 </a:solidFill>
                 <a:latin typeface="Consolas"/>
               </a:rPr>
-              <a:t>24 / 33</a:t>
+              <a:t>24 / 38</a:t>
             </a:r>
           </a:p>
         </p:txBody>
@@ -12985,7 +13340,7 @@
                 </a:solidFill>
                 <a:latin typeface="Consolas"/>
               </a:rPr>
-              <a:t>25 / 33</a:t>
+              <a:t>25 / 38</a:t>
             </a:r>
           </a:p>
         </p:txBody>
@@ -13010,7 +13365,7 @@
       <p:grpSpPr/>
       <p:pic>
         <p:nvPicPr>
-          <p:cNvPr id="2" name="Picture 1" descr="deck_bg.png"/>
+          <p:cNvPr id="2" name="Picture 1" descr="deck_bg_divider.png"/>
           <p:cNvPicPr>
             <a:picLocks noChangeAspect="1"/>
           </p:cNvPicPr>
@@ -13032,9 +13387,44 @@
           </a:prstGeom>
         </p:spPr>
       </p:pic>
+      <p:sp>
+        <p:nvSpPr>
+          <p:cNvPr id="3" name="TextBox 2"/>
+          <p:cNvSpPr txBox="1"/>
+          <p:nvPr/>
+        </p:nvSpPr>
+        <p:spPr>
+          <a:xfrm>
+            <a:off x="914400" y="2514600"/>
+            <a:ext cx="10362895" cy="1371600"/>
+          </a:xfrm>
+          <a:prstGeom prst="rect">
+            <a:avLst/>
+          </a:prstGeom>
+          <a:noFill/>
+        </p:spPr>
+        <p:txBody>
+          <a:bodyPr wrap="square" anchor="ctr" lIns="0" rIns="0" tIns="0" bIns="0">
+            <a:spAutoFit/>
+          </a:bodyPr>
+          <a:lstStyle/>
+          <a:p>
+            <a:pPr algn="ctr"/>
+            <a:r>
+              <a:rPr sz="4000" b="1">
+                <a:solidFill>
+                  <a:srgbClr val="EAF2FF"/>
+                </a:solidFill>
+                <a:latin typeface="Consolas"/>
+              </a:rPr>
+              <a:t>From 12 Classes to an Autonomous Pentester</a:t>
+            </a:r>
+          </a:p>
+        </p:txBody>
+      </p:sp>
       <p:pic>
         <p:nvPicPr>
-          <p:cNvPr id="3" name="Picture 2" descr="sentinel_mark.png"/>
+          <p:cNvPr id="4" name="Picture 3" descr="deck_rule.png"/>
           <p:cNvPicPr>
             <a:picLocks noChangeAspect="1"/>
           </p:cNvPicPr>
@@ -13048,66 +13438,14 @@
         </p:blipFill>
         <p:spPr>
           <a:xfrm>
-            <a:off x="566928" y="457200"/>
-            <a:ext cx="749808" cy="749808"/>
+            <a:off x="4541367" y="3977639"/>
+            <a:ext cx="3108960" cy="56692"/>
           </a:xfrm>
           <a:prstGeom prst="rect">
             <a:avLst/>
           </a:prstGeom>
         </p:spPr>
       </p:pic>
-      <p:sp>
-        <p:nvSpPr>
-          <p:cNvPr id="4" name="Rounded Rectangle 3"/>
-          <p:cNvSpPr/>
-          <p:nvPr/>
-        </p:nvSpPr>
-        <p:spPr>
-          <a:xfrm>
-            <a:off x="10195560" y="457200"/>
-            <a:ext cx="1554480" cy="384048"/>
-          </a:xfrm>
-          <a:prstGeom prst="roundRect">
-            <a:avLst/>
-          </a:prstGeom>
-          <a:noFill/>
-          <a:ln w="12700">
-            <a:solidFill>
-              <a:srgbClr val="22D3EE"/>
-            </a:solidFill>
-          </a:ln>
-        </p:spPr>
-        <p:style>
-          <a:lnRef idx="1">
-            <a:schemeClr val="accent1"/>
-          </a:lnRef>
-          <a:fillRef idx="3">
-            <a:schemeClr val="accent1"/>
-          </a:fillRef>
-          <a:effectRef idx="2">
-            <a:schemeClr val="accent1"/>
-          </a:effectRef>
-          <a:fontRef idx="minor">
-            <a:schemeClr val="lt1"/>
-          </a:fontRef>
-        </p:style>
-        <p:txBody>
-          <a:bodyPr rtlCol="0" anchor="ctr" tIns="0" bIns="0"/>
-          <a:lstStyle/>
-          <a:p>
-            <a:pPr algn="ctr"/>
-            <a:r>
-              <a:rPr sz="1200" b="1">
-                <a:solidFill>
-                  <a:srgbClr val="22D3EE"/>
-                </a:solidFill>
-                <a:latin typeface="Consolas"/>
-              </a:rPr>
-              <a:t>AI KAVACH</a:t>
-            </a:r>
-          </a:p>
-        </p:txBody>
-      </p:sp>
       <p:sp>
         <p:nvSpPr>
           <p:cNvPr id="5" name="TextBox 4"/>
@@ -13116,66 +13454,8 @@
         </p:nvSpPr>
         <p:spPr>
           <a:xfrm>
-            <a:off x="1508760" y="475488"/>
-            <a:ext cx="8503920" cy="1051560"/>
-          </a:xfrm>
-          <a:prstGeom prst="rect">
-            <a:avLst/>
-          </a:prstGeom>
-          <a:noFill/>
-        </p:spPr>
-        <p:txBody>
-          <a:bodyPr wrap="square" anchor="ctr" lIns="0" rIns="0" tIns="0" bIns="0">
-            <a:spAutoFit/>
-          </a:bodyPr>
-          <a:lstStyle/>
-          <a:p>
-            <a:r>
-              <a:rPr sz="3100" b="1">
-                <a:solidFill>
-                  <a:srgbClr val="EAF2FF"/>
-                </a:solidFill>
-                <a:latin typeface="Consolas"/>
-              </a:rPr>
-              <a:t>Test Results &amp; Validation</a:t>
-            </a:r>
-          </a:p>
-        </p:txBody>
-      </p:sp>
-      <p:pic>
-        <p:nvPicPr>
-          <p:cNvPr id="6" name="Picture 5" descr="deck_rule.png"/>
-          <p:cNvPicPr>
-            <a:picLocks noChangeAspect="1"/>
-          </p:cNvPicPr>
-          <p:nvPr/>
-        </p:nvPicPr>
-        <p:blipFill>
-          <a:blip r:embed="rId4"/>
-          <a:stretch>
-            <a:fillRect/>
-          </a:stretch>
-        </p:blipFill>
-        <p:spPr>
-          <a:xfrm>
-            <a:off x="640080" y="1664208"/>
-            <a:ext cx="3108960" cy="56692"/>
-          </a:xfrm>
-          <a:prstGeom prst="rect">
-            <a:avLst/>
-          </a:prstGeom>
-        </p:spPr>
-      </p:pic>
-      <p:sp>
-        <p:nvSpPr>
-          <p:cNvPr id="7" name="TextBox 6"/>
-          <p:cNvSpPr txBox="1"/>
-          <p:nvPr/>
-        </p:nvSpPr>
-        <p:spPr>
-          <a:xfrm>
-            <a:off x="658368" y="1847088"/>
-            <a:ext cx="10881360" cy="548640"/>
+            <a:off x="914400" y="4160520"/>
+            <a:ext cx="10362895" cy="731520"/>
           </a:xfrm>
           <a:prstGeom prst="rect">
             <a:avLst/>
@@ -13188,496 +13468,15 @@
           </a:bodyPr>
           <a:lstStyle/>
           <a:p>
-            <a:r>
-              <a:rPr sz="1600" b="0">
+            <a:pPr algn="ctr"/>
+            <a:r>
+              <a:rPr sz="1800" b="0">
                 <a:solidFill>
                   <a:srgbClr val="22D3EE"/>
                 </a:solidFill>
                 <a:latin typeface="Consolas"/>
               </a:rPr>
-              <a:t>Green, deterministic, and honest about the one skip</a:t>
-            </a:r>
-          </a:p>
-        </p:txBody>
-      </p:sp>
-      <p:sp>
-        <p:nvSpPr>
-          <p:cNvPr id="8" name="Rounded Rectangle 7"/>
-          <p:cNvSpPr/>
-          <p:nvPr/>
-        </p:nvSpPr>
-        <p:spPr>
-          <a:xfrm>
-            <a:off x="603504" y="2395728"/>
-            <a:ext cx="2503170" cy="1143000"/>
-          </a:xfrm>
-          <a:prstGeom prst="roundRect">
-            <a:avLst/>
-          </a:prstGeom>
-          <a:noFill/>
-          <a:ln w="12700">
-            <a:solidFill>
-              <a:srgbClr val="22D3EE"/>
-            </a:solidFill>
-          </a:ln>
-        </p:spPr>
-        <p:style>
-          <a:lnRef idx="1">
-            <a:schemeClr val="accent1"/>
-          </a:lnRef>
-          <a:fillRef idx="3">
-            <a:schemeClr val="accent1"/>
-          </a:fillRef>
-          <a:effectRef idx="2">
-            <a:schemeClr val="accent1"/>
-          </a:effectRef>
-          <a:fontRef idx="minor">
-            <a:schemeClr val="lt1"/>
-          </a:fontRef>
-        </p:style>
-        <p:txBody>
-          <a:bodyPr rtlCol="0" anchor="ctr"/>
-          <a:lstStyle/>
-          <a:p>
-            <a:pPr algn="ctr"/>
-            <a:r>
-              <a:rPr sz="3200" b="1">
-                <a:solidFill>
-                  <a:srgbClr val="22D3EE"/>
-                </a:solidFill>
-                <a:latin typeface="Consolas"/>
-              </a:rPr>
-              <a:t>311</a:t>
-            </a:r>
-          </a:p>
-          <a:p>
-            <a:pPr algn="ctr"/>
-            <a:r>
-              <a:rPr sz="1100" b="0">
-                <a:solidFill>
-                  <a:srgbClr val="6B7A90"/>
-                </a:solidFill>
-                <a:latin typeface="Consolas"/>
-              </a:rPr>
-              <a:t>TESTS</a:t>
-            </a:r>
-          </a:p>
-        </p:txBody>
-      </p:sp>
-      <p:sp>
-        <p:nvSpPr>
-          <p:cNvPr id="9" name="Rounded Rectangle 8"/>
-          <p:cNvSpPr/>
-          <p:nvPr/>
-        </p:nvSpPr>
-        <p:spPr>
-          <a:xfrm>
-            <a:off x="3426714" y="2395728"/>
-            <a:ext cx="2503170" cy="1143000"/>
-          </a:xfrm>
-          <a:prstGeom prst="roundRect">
-            <a:avLst/>
-          </a:prstGeom>
-          <a:noFill/>
-          <a:ln w="12700">
-            <a:solidFill>
-              <a:srgbClr val="22D3EE"/>
-            </a:solidFill>
-          </a:ln>
-        </p:spPr>
-        <p:style>
-          <a:lnRef idx="1">
-            <a:schemeClr val="accent1"/>
-          </a:lnRef>
-          <a:fillRef idx="3">
-            <a:schemeClr val="accent1"/>
-          </a:fillRef>
-          <a:effectRef idx="2">
-            <a:schemeClr val="accent1"/>
-          </a:effectRef>
-          <a:fontRef idx="minor">
-            <a:schemeClr val="lt1"/>
-          </a:fontRef>
-        </p:style>
-        <p:txBody>
-          <a:bodyPr rtlCol="0" anchor="ctr"/>
-          <a:lstStyle/>
-          <a:p>
-            <a:pPr algn="ctr"/>
-            <a:r>
-              <a:rPr sz="3200" b="1">
-                <a:solidFill>
-                  <a:srgbClr val="22D3EE"/>
-                </a:solidFill>
-                <a:latin typeface="Consolas"/>
-              </a:rPr>
-              <a:t>310</a:t>
-            </a:r>
-          </a:p>
-          <a:p>
-            <a:pPr algn="ctr"/>
-            <a:r>
-              <a:rPr sz="1100" b="0">
-                <a:solidFill>
-                  <a:srgbClr val="6B7A90"/>
-                </a:solidFill>
-                <a:latin typeface="Consolas"/>
-              </a:rPr>
-              <a:t>PASSING</a:t>
-            </a:r>
-          </a:p>
-        </p:txBody>
-      </p:sp>
-      <p:sp>
-        <p:nvSpPr>
-          <p:cNvPr id="10" name="Rounded Rectangle 9"/>
-          <p:cNvSpPr/>
-          <p:nvPr/>
-        </p:nvSpPr>
-        <p:spPr>
-          <a:xfrm>
-            <a:off x="6249924" y="2395728"/>
-            <a:ext cx="2503170" cy="1143000"/>
-          </a:xfrm>
-          <a:prstGeom prst="roundRect">
-            <a:avLst/>
-          </a:prstGeom>
-          <a:noFill/>
-          <a:ln w="12700">
-            <a:solidFill>
-              <a:srgbClr val="22D3EE"/>
-            </a:solidFill>
-          </a:ln>
-        </p:spPr>
-        <p:style>
-          <a:lnRef idx="1">
-            <a:schemeClr val="accent1"/>
-          </a:lnRef>
-          <a:fillRef idx="3">
-            <a:schemeClr val="accent1"/>
-          </a:fillRef>
-          <a:effectRef idx="2">
-            <a:schemeClr val="accent1"/>
-          </a:effectRef>
-          <a:fontRef idx="minor">
-            <a:schemeClr val="lt1"/>
-          </a:fontRef>
-        </p:style>
-        <p:txBody>
-          <a:bodyPr rtlCol="0" anchor="ctr"/>
-          <a:lstStyle/>
-          <a:p>
-            <a:pPr algn="ctr"/>
-            <a:r>
-              <a:rPr sz="3200" b="1">
-                <a:solidFill>
-                  <a:srgbClr val="22D3EE"/>
-                </a:solidFill>
-                <a:latin typeface="Consolas"/>
-              </a:rPr>
-              <a:t>12</a:t>
-            </a:r>
-          </a:p>
-          <a:p>
-            <a:pPr algn="ctr"/>
-            <a:r>
-              <a:rPr sz="1100" b="0">
-                <a:solidFill>
-                  <a:srgbClr val="6B7A90"/>
-                </a:solidFill>
-                <a:latin typeface="Consolas"/>
-              </a:rPr>
-              <a:t>VULN CLASSES</a:t>
-            </a:r>
-          </a:p>
-        </p:txBody>
-      </p:sp>
-      <p:sp>
-        <p:nvSpPr>
-          <p:cNvPr id="11" name="Rounded Rectangle 10"/>
-          <p:cNvSpPr/>
-          <p:nvPr/>
-        </p:nvSpPr>
-        <p:spPr>
-          <a:xfrm>
-            <a:off x="9073134" y="2395728"/>
-            <a:ext cx="2503170" cy="1143000"/>
-          </a:xfrm>
-          <a:prstGeom prst="roundRect">
-            <a:avLst/>
-          </a:prstGeom>
-          <a:noFill/>
-          <a:ln w="12700">
-            <a:solidFill>
-              <a:srgbClr val="22D3EE"/>
-            </a:solidFill>
-          </a:ln>
-        </p:spPr>
-        <p:style>
-          <a:lnRef idx="1">
-            <a:schemeClr val="accent1"/>
-          </a:lnRef>
-          <a:fillRef idx="3">
-            <a:schemeClr val="accent1"/>
-          </a:fillRef>
-          <a:effectRef idx="2">
-            <a:schemeClr val="accent1"/>
-          </a:effectRef>
-          <a:fontRef idx="minor">
-            <a:schemeClr val="lt1"/>
-          </a:fontRef>
-        </p:style>
-        <p:txBody>
-          <a:bodyPr rtlCol="0" anchor="ctr"/>
-          <a:lstStyle/>
-          <a:p>
-            <a:pPr algn="ctr"/>
-            <a:r>
-              <a:rPr sz="3200" b="1">
-                <a:solidFill>
-                  <a:srgbClr val="22D3EE"/>
-                </a:solidFill>
-                <a:latin typeface="Consolas"/>
-              </a:rPr>
-              <a:t>2</a:t>
-            </a:r>
-          </a:p>
-          <a:p>
-            <a:pPr algn="ctr"/>
-            <a:r>
-              <a:rPr sz="1100" b="0">
-                <a:solidFill>
-                  <a:srgbClr val="6B7A90"/>
-                </a:solidFill>
-                <a:latin typeface="Consolas"/>
-              </a:rPr>
-              <a:t>LIVE STACKS</a:t>
-            </a:r>
-          </a:p>
-        </p:txBody>
-      </p:sp>
-      <p:sp>
-        <p:nvSpPr>
-          <p:cNvPr id="12" name="TextBox 11"/>
-          <p:cNvSpPr txBox="1"/>
-          <p:nvPr/>
-        </p:nvSpPr>
-        <p:spPr>
-          <a:xfrm>
-            <a:off x="713232" y="3840480"/>
-            <a:ext cx="10789920" cy="3840480"/>
-          </a:xfrm>
-          <a:prstGeom prst="rect">
-            <a:avLst/>
-          </a:prstGeom>
-          <a:noFill/>
-        </p:spPr>
-        <p:txBody>
-          <a:bodyPr wrap="square" anchor="t" lIns="0" rIns="0" tIns="0" bIns="0">
-            <a:spAutoFit/>
-          </a:bodyPr>
-          <a:lstStyle/>
-          <a:p>
-            <a:pPr>
-              <a:spcAft>
-                <a:spcPts val="1000"/>
-              </a:spcAft>
-            </a:pPr>
-            <a:r>
-              <a:rPr sz="1700" b="1">
-                <a:solidFill>
-                  <a:srgbClr val="2DD48F"/>
-                </a:solidFill>
-                <a:latin typeface="Segoe UI"/>
-              </a:rPr>
-              <a:t>»  </a:t>
-            </a:r>
-            <a:r>
-              <a:rPr sz="1700" b="0">
-                <a:solidFill>
-                  <a:srgbClr val="EAF2FF"/>
-                </a:solidFill>
-                <a:latin typeface="Segoe UI"/>
-              </a:rPr>
-              <a:t>310 passing, 1 skipped (the opt-in live-browser path)</a:t>
-            </a:r>
-          </a:p>
-          <a:p>
-            <a:pPr>
-              <a:spcAft>
-                <a:spcPts val="1000"/>
-              </a:spcAft>
-            </a:pPr>
-            <a:r>
-              <a:rPr sz="1700" b="1">
-                <a:solidFill>
-                  <a:srgbClr val="2DD48F"/>
-                </a:solidFill>
-                <a:latin typeface="Segoe UI"/>
-              </a:rPr>
-              <a:t>»  </a:t>
-            </a:r>
-            <a:r>
-              <a:rPr sz="1700" b="0">
-                <a:solidFill>
-                  <a:srgbClr val="EAF2FF"/>
-                </a:solidFill>
-                <a:latin typeface="Segoe UI"/>
-              </a:rPr>
-              <a:t>Full offline suite is network-free and runs in seconds</a:t>
-            </a:r>
-          </a:p>
-          <a:p>
-            <a:pPr>
-              <a:spcAft>
-                <a:spcPts val="1000"/>
-              </a:spcAft>
-            </a:pPr>
-            <a:r>
-              <a:rPr sz="1700" b="1">
-                <a:solidFill>
-                  <a:srgbClr val="2DD48F"/>
-                </a:solidFill>
-                <a:latin typeface="Segoe UI"/>
-              </a:rPr>
-              <a:t>»  </a:t>
-            </a:r>
-            <a:r>
-              <a:rPr sz="1700" b="0">
-                <a:solidFill>
-                  <a:srgbClr val="EAF2FF"/>
-                </a:solidFill>
-                <a:latin typeface="Segoe UI"/>
-              </a:rPr>
-              <a:t>Each class: parse → CONFIRM → PATCH → PROVE, plus isolation</a:t>
-            </a:r>
-          </a:p>
-          <a:p>
-            <a:pPr>
-              <a:spcAft>
-                <a:spcPts val="1000"/>
-              </a:spcAft>
-            </a:pPr>
-            <a:r>
-              <a:rPr sz="1700" b="1">
-                <a:solidFill>
-                  <a:srgbClr val="2DD48F"/>
-                </a:solidFill>
-                <a:latin typeface="Segoe UI"/>
-              </a:rPr>
-              <a:t>»  </a:t>
-            </a:r>
-            <a:r>
-              <a:rPr sz="1700" b="0">
-                <a:solidFill>
-                  <a:srgbClr val="EAF2FF"/>
-                </a:solidFill>
-                <a:latin typeface="Segoe UI"/>
-              </a:rPr>
-              <a:t>Live E2E validated on Juice Shop and VAmPI over real sockets</a:t>
-            </a:r>
-          </a:p>
-          <a:p>
-            <a:pPr>
-              <a:spcAft>
-                <a:spcPts val="1000"/>
-              </a:spcAft>
-            </a:pPr>
-            <a:r>
-              <a:rPr sz="1700" b="1">
-                <a:solidFill>
-                  <a:srgbClr val="22D3EE"/>
-                </a:solidFill>
-                <a:latin typeface="Segoe UI"/>
-              </a:rPr>
-              <a:t>»  </a:t>
-            </a:r>
-            <a:r>
-              <a:rPr sz="1700" b="0">
-                <a:solidFill>
-                  <a:srgbClr val="C4D2E4"/>
-                </a:solidFill>
-                <a:latin typeface="Segoe UI"/>
-              </a:rPr>
-              <a:t>Compliant-control tests assert the honest 'no finding' path</a:t>
-            </a:r>
-          </a:p>
-        </p:txBody>
-      </p:sp>
-      <p:sp>
-        <p:nvSpPr>
-          <p:cNvPr id="13" name="TextBox 12"/>
-          <p:cNvSpPr txBox="1"/>
-          <p:nvPr/>
-        </p:nvSpPr>
-        <p:spPr>
-          <a:xfrm>
-            <a:off x="566928" y="6382512"/>
-            <a:ext cx="8229600" cy="365760"/>
-          </a:xfrm>
-          <a:prstGeom prst="rect">
-            <a:avLst/>
-          </a:prstGeom>
-          <a:noFill/>
-        </p:spPr>
-        <p:txBody>
-          <a:bodyPr wrap="square" anchor="t" lIns="0" rIns="0" tIns="0" bIns="0">
-            <a:spAutoFit/>
-          </a:bodyPr>
-          <a:lstStyle/>
-          <a:p>
-            <a:r>
-              <a:rPr sz="1000" b="1">
-                <a:solidFill>
-                  <a:srgbClr val="22D3EE"/>
-                </a:solidFill>
-                <a:latin typeface="Consolas"/>
-              </a:rPr>
-              <a:t>SENTINEL</a:t>
-            </a:r>
-            <a:r>
-              <a:rPr sz="1000" b="0">
-                <a:solidFill>
-                  <a:srgbClr val="6B7A90"/>
-                </a:solidFill>
-                <a:latin typeface="Consolas"/>
-              </a:rPr>
-              <a:t>   ·   find → reason → prove → patch → prove</a:t>
-            </a:r>
-          </a:p>
-        </p:txBody>
-      </p:sp>
-      <p:sp>
-        <p:nvSpPr>
-          <p:cNvPr id="14" name="TextBox 13"/>
-          <p:cNvSpPr txBox="1"/>
-          <p:nvPr/>
-        </p:nvSpPr>
-        <p:spPr>
-          <a:xfrm>
-            <a:off x="10789920" y="6382512"/>
-            <a:ext cx="914400" cy="365760"/>
-          </a:xfrm>
-          <a:prstGeom prst="rect">
-            <a:avLst/>
-          </a:prstGeom>
-          <a:noFill/>
-        </p:spPr>
-        <p:txBody>
-          <a:bodyPr wrap="square" anchor="t" lIns="0" rIns="0" tIns="0" bIns="0">
-            <a:spAutoFit/>
-          </a:bodyPr>
-          <a:lstStyle/>
-          <a:p>
-            <a:pPr algn="r"/>
-            <a:r>
-              <a:rPr sz="1000" b="0">
-                <a:solidFill>
-                  <a:srgbClr val="6B7A90"/>
-                </a:solidFill>
-                <a:latin typeface="Consolas"/>
-              </a:rPr>
-              <a:t>26 / 33</a:t>
+              <a:t>Point it at a URL — it runs the whole loop itself</a:t>
             </a:r>
           </a:p>
         </p:txBody>
@@ -13829,7 +13628,7 @@
                 </a:solidFill>
                 <a:latin typeface="Consolas"/>
               </a:rPr>
-              <a:t>Lightweight &amp; Local</a:t>
+              <a:t>The Autonomous Command</a:t>
             </a:r>
           </a:p>
         </p:txBody>
@@ -13887,7 +13686,7 @@
                 </a:solidFill>
                 <a:latin typeface="Consolas"/>
               </a:rPr>
-              <a:t>Runs on a laptop; nothing leaves the box</a:t>
+              <a:t>autonomous &lt;url&gt; — the fusion brain</a:t>
             </a:r>
           </a:p>
         </p:txBody>
@@ -13935,7 +13734,7 @@
                 </a:solidFill>
                 <a:latin typeface="Segoe UI"/>
               </a:rPr>
-              <a:t>Local model via Ollama (qwen3:4b) — no cloud dependency</a:t>
+              <a:t>One command: live recon → hypotheses → proof → gated patch</a:t>
             </a:r>
           </a:p>
           <a:p>
@@ -13960,7 +13759,7 @@
                 </a:solidFill>
                 <a:latin typeface="Segoe UI"/>
               </a:rPr>
-              <a:t>Core install is lightweight; Playwright is an opt-in extra</a:t>
+              <a:t>Adapts to the target's shape — no routes or payloads hard-coded</a:t>
             </a:r>
           </a:p>
           <a:p>
@@ -13985,7 +13784,7 @@
                 </a:solidFill>
                 <a:latin typeface="Segoe UI"/>
               </a:rPr>
-              <a:t>No customer data or target traffic egresses anywhere</a:t>
+              <a:t>Concurrent pure-judge adjudication; a tool hit is only a LEAD</a:t>
             </a:r>
           </a:p>
           <a:p>
@@ -14010,7 +13809,7 @@
                 </a:solidFill>
                 <a:latin typeface="Segoe UI"/>
               </a:rPr>
-              <a:t>Deterministic core runs even with the model offline</a:t>
+              <a:t>Same contract: the loop proposes, the deterministic judge disposes</a:t>
             </a:r>
           </a:p>
           <a:p>
@@ -14035,7 +13834,7 @@
                 </a:solidFill>
                 <a:latin typeface="Segoe UI"/>
               </a:rPr>
-              <a:t>Deploys air-gapped — ideal for regulated environments</a:t>
+              <a:t>Session-aware stage folds a captured login into the proof-chain</a:t>
             </a:r>
           </a:p>
         </p:txBody>
@@ -14113,7 +13912,7 @@
                 </a:solidFill>
                 <a:latin typeface="Consolas"/>
               </a:rPr>
-              <a:t>27 / 33</a:t>
+              <a:t>27 / 38</a:t>
             </a:r>
           </a:p>
         </p:txBody>
@@ -14265,7 +14064,7 @@
                 </a:solidFill>
                 <a:latin typeface="Consolas"/>
               </a:rPr>
-              <a:t>Safety &amp; Bounded Autonomy</a:t>
+              <a:t>Tools &amp; Models Propose; the Judge Disposes</a:t>
             </a:r>
           </a:p>
         </p:txBody>
@@ -14323,7 +14122,7 @@
                 </a:solidFill>
                 <a:latin typeface="Consolas"/>
               </a:rPr>
-              <a:t>Safe by construction</a:t>
+              <a:t>A curated real-tool layer + bring-your-own model</a:t>
             </a:r>
           </a:p>
         </p:txBody>
@@ -14358,7 +14157,7 @@
             <a:r>
               <a:rPr sz="1800" b="1">
                 <a:solidFill>
-                  <a:srgbClr val="2DD48F"/>
+                  <a:srgbClr val="22D3EE"/>
                 </a:solidFill>
                 <a:latin typeface="Segoe UI"/>
               </a:rPr>
@@ -14367,11 +14166,11 @@
             <a:r>
               <a:rPr sz="1800" b="0">
                 <a:solidFill>
-                  <a:srgbClr val="EAF2FF"/>
-                </a:solidFill>
-                <a:latin typeface="Segoe UI"/>
-              </a:rPr>
-              <a:t>Pre-connection scope guard — out-of-scope probes refused</a:t>
+                  <a:srgbClr val="C4D2E4"/>
+                </a:solidFill>
+                <a:latin typeface="Segoe UI"/>
+              </a:rPr>
+              <a:t>Curated OSS recon/discovery: httpx, katana, ffuf, arjun, gau…</a:t>
             </a:r>
           </a:p>
           <a:p>
@@ -14383,7 +14182,7 @@
             <a:r>
               <a:rPr sz="1800" b="1">
                 <a:solidFill>
-                  <a:srgbClr val="2DD48F"/>
+                  <a:srgbClr val="22D3EE"/>
                 </a:solidFill>
                 <a:latin typeface="Segoe UI"/>
               </a:rPr>
@@ -14392,11 +14191,11 @@
             <a:r>
               <a:rPr sz="1800" b="0">
                 <a:solidFill>
-                  <a:srgbClr val="EAF2FF"/>
-                </a:solidFill>
-                <a:latin typeface="Segoe UI"/>
-              </a:rPr>
-              <a:t>Probes are local, bounded, and non-destructive</a:t>
+                  <a:srgbClr val="C4D2E4"/>
+                </a:solidFill>
+                <a:latin typeface="Segoe UI"/>
+              </a:rPr>
+              <a:t>sqlmap / dalfox / nuclei DEMOTED to nominators — never a verdict</a:t>
             </a:r>
           </a:p>
           <a:p>
@@ -14408,7 +14207,7 @@
             <a:r>
               <a:rPr sz="1800" b="1">
                 <a:solidFill>
-                  <a:srgbClr val="2DD48F"/>
+                  <a:srgbClr val="E84BFF"/>
                 </a:solidFill>
                 <a:latin typeface="Segoe UI"/>
               </a:rPr>
@@ -14417,11 +14216,11 @@
             <a:r>
               <a:rPr sz="1800" b="0">
                 <a:solidFill>
-                  <a:srgbClr val="EAF2FF"/>
-                </a:solidFill>
-                <a:latin typeface="Segoe UI"/>
-              </a:rPr>
-              <a:t>The enforcer shield is ephemeral and loopback-only (SSRF-safe)</a:t>
+                  <a:srgbClr val="C4D2E4"/>
+                </a:solidFill>
+                <a:latin typeface="Segoe UI"/>
+              </a:rPr>
+              <a:t>Approval-gated execution; no silent installs, scope-guarded</a:t>
             </a:r>
           </a:p>
           <a:p>
@@ -14446,7 +14245,7 @@
                 </a:solidFill>
                 <a:latin typeface="Segoe UI"/>
               </a:rPr>
-              <a:t>Nothing both acts and judges — stages are separated</a:t>
+              <a:t>Pluggable LLM: local qwen by default, Opus for showcase runs</a:t>
             </a:r>
           </a:p>
           <a:p>
@@ -14458,7 +14257,7 @@
             <a:r>
               <a:rPr sz="1800" b="1">
                 <a:solidFill>
-                  <a:srgbClr val="E84BFF"/>
+                  <a:srgbClr val="2DD48F"/>
                 </a:solidFill>
                 <a:latin typeface="Segoe UI"/>
               </a:rPr>
@@ -14467,11 +14266,11 @@
             <a:r>
               <a:rPr sz="1800" b="0">
                 <a:solidFill>
-                  <a:srgbClr val="C4D2E4"/>
-                </a:solidFill>
-                <a:latin typeface="Segoe UI"/>
-              </a:rPr>
-              <a:t>Credentials never persisted or logged; in-memory per run</a:t>
+                  <a:srgbClr val="EAF2FF"/>
+                </a:solidFill>
+                <a:latin typeface="Segoe UI"/>
+              </a:rPr>
+              <a:t>Keys via env / getpass — in-memory, never logged, never committed</a:t>
             </a:r>
           </a:p>
         </p:txBody>
@@ -14549,7 +14348,7 @@
                 </a:solidFill>
                 <a:latin typeface="Consolas"/>
               </a:rPr>
-              <a:t>28 / 33</a:t>
+              <a:t>28 / 38</a:t>
             </a:r>
           </a:p>
         </p:txBody>
@@ -14701,7 +14500,7 @@
                 </a:solidFill>
                 <a:latin typeface="Consolas"/>
               </a:rPr>
-              <a:t>Market Landscape</a:t>
+              <a:t>The Proof-Carrying Report</a:t>
             </a:r>
           </a:p>
         </p:txBody>
@@ -14759,7 +14558,7 @@
                 </a:solidFill>
                 <a:latin typeface="Consolas"/>
               </a:rPr>
-              <a:t>Where autonomous, provable reasoning fits</a:t>
+              <a:t>The deliverable: reproduce, prove, remediate</a:t>
             </a:r>
           </a:p>
         </p:txBody>
@@ -14772,1103 +14571,8 @@
         </p:nvSpPr>
         <p:spPr>
           <a:xfrm>
-            <a:off x="6537960" y="2395728"/>
-            <a:ext cx="1691640" cy="640080"/>
-          </a:xfrm>
-          <a:prstGeom prst="rect">
-            <a:avLst/>
-          </a:prstGeom>
-          <a:noFill/>
-        </p:spPr>
-        <p:txBody>
-          <a:bodyPr wrap="square" anchor="b" lIns="0" rIns="0" tIns="0" bIns="0">
-            <a:spAutoFit/>
-          </a:bodyPr>
-          <a:lstStyle/>
-          <a:p>
-            <a:pPr algn="ctr"/>
-            <a:r>
-              <a:rPr sz="1200" b="1">
-                <a:solidFill>
-                  <a:srgbClr val="EAF2FF"/>
-                </a:solidFill>
-                <a:latin typeface="Consolas"/>
-              </a:rPr>
-              <a:t>Signature</a:t>
-            </a:r>
-          </a:p>
-          <a:p>
-            <a:pPr algn="ctr"/>
-            <a:r>
-              <a:rPr sz="1200" b="1">
-                <a:solidFill>
-                  <a:srgbClr val="EAF2FF"/>
-                </a:solidFill>
-                <a:latin typeface="Consolas"/>
-              </a:rPr>
-              <a:t>scanners</a:t>
-            </a:r>
-          </a:p>
-        </p:txBody>
-      </p:sp>
-      <p:sp>
-        <p:nvSpPr>
-          <p:cNvPr id="9" name="TextBox 8"/>
-          <p:cNvSpPr txBox="1"/>
-          <p:nvPr/>
-        </p:nvSpPr>
-        <p:spPr>
-          <a:xfrm>
-            <a:off x="8229600" y="2395728"/>
-            <a:ext cx="1691640" cy="640080"/>
-          </a:xfrm>
-          <a:prstGeom prst="rect">
-            <a:avLst/>
-          </a:prstGeom>
-          <a:noFill/>
-        </p:spPr>
-        <p:txBody>
-          <a:bodyPr wrap="square" anchor="b" lIns="0" rIns="0" tIns="0" bIns="0">
-            <a:spAutoFit/>
-          </a:bodyPr>
-          <a:lstStyle/>
-          <a:p>
-            <a:pPr algn="ctr"/>
-            <a:r>
-              <a:rPr sz="1200" b="1">
-                <a:solidFill>
-                  <a:srgbClr val="EAF2FF"/>
-                </a:solidFill>
-                <a:latin typeface="Consolas"/>
-              </a:rPr>
-              <a:t>DAST /</a:t>
-            </a:r>
-          </a:p>
-          <a:p>
-            <a:pPr algn="ctr"/>
-            <a:r>
-              <a:rPr sz="1200" b="1">
-                <a:solidFill>
-                  <a:srgbClr val="EAF2FF"/>
-                </a:solidFill>
-                <a:latin typeface="Consolas"/>
-              </a:rPr>
-              <a:t>fuzzers</a:t>
-            </a:r>
-          </a:p>
-        </p:txBody>
-      </p:sp>
-      <p:sp>
-        <p:nvSpPr>
-          <p:cNvPr id="10" name="TextBox 9"/>
-          <p:cNvSpPr txBox="1"/>
-          <p:nvPr/>
-        </p:nvSpPr>
-        <p:spPr>
-          <a:xfrm>
-            <a:off x="9921240" y="2395728"/>
-            <a:ext cx="1691640" cy="640080"/>
-          </a:xfrm>
-          <a:prstGeom prst="rect">
-            <a:avLst/>
-          </a:prstGeom>
-          <a:noFill/>
-        </p:spPr>
-        <p:txBody>
-          <a:bodyPr wrap="square" anchor="b" lIns="0" rIns="0" tIns="0" bIns="0">
-            <a:spAutoFit/>
-          </a:bodyPr>
-          <a:lstStyle/>
-          <a:p>
-            <a:pPr algn="ctr"/>
-            <a:r>
-              <a:rPr sz="1200" b="1">
-                <a:solidFill>
-                  <a:srgbClr val="EAF2FF"/>
-                </a:solidFill>
-                <a:latin typeface="Consolas"/>
-              </a:rPr>
-              <a:t>Sentinel</a:t>
-            </a:r>
-          </a:p>
-        </p:txBody>
-      </p:sp>
-      <p:sp>
-        <p:nvSpPr>
-          <p:cNvPr id="11" name="Rectangle 10"/>
-          <p:cNvSpPr/>
-          <p:nvPr/>
-        </p:nvSpPr>
-        <p:spPr>
-          <a:xfrm>
-            <a:off x="548640" y="3108960"/>
-            <a:ext cx="11064240" cy="475488"/>
-          </a:xfrm>
-          <a:prstGeom prst="rect">
-            <a:avLst/>
-          </a:prstGeom>
-          <a:solidFill>
-            <a:srgbClr val="101724"/>
-          </a:solidFill>
-          <a:ln>
-            <a:noFill/>
-          </a:ln>
-          <a:effectLst/>
-        </p:spPr>
-        <p:style>
-          <a:lnRef idx="1">
-            <a:schemeClr val="accent1"/>
-          </a:lnRef>
-          <a:fillRef idx="3">
-            <a:schemeClr val="accent1"/>
-          </a:fillRef>
-          <a:effectRef idx="2">
-            <a:schemeClr val="accent1"/>
-          </a:effectRef>
-          <a:fontRef idx="minor">
-            <a:schemeClr val="lt1"/>
-          </a:fontRef>
-        </p:style>
-        <p:txBody>
-          <a:bodyPr rtlCol="0" anchor="ctr"/>
-          <a:lstStyle/>
-          <a:p>
-            <a:pPr algn="ctr"/>
-          </a:p>
-        </p:txBody>
-      </p:sp>
-      <p:sp>
-        <p:nvSpPr>
-          <p:cNvPr id="12" name="TextBox 11"/>
-          <p:cNvSpPr txBox="1"/>
-          <p:nvPr/>
-        </p:nvSpPr>
-        <p:spPr>
-          <a:xfrm>
-            <a:off x="658368" y="3108960"/>
-            <a:ext cx="5669280" cy="475488"/>
-          </a:xfrm>
-          <a:prstGeom prst="rect">
-            <a:avLst/>
-          </a:prstGeom>
-          <a:noFill/>
-        </p:spPr>
-        <p:txBody>
-          <a:bodyPr wrap="square" anchor="ctr" lIns="0" rIns="0" tIns="0" bIns="0">
-            <a:spAutoFit/>
-          </a:bodyPr>
-          <a:lstStyle/>
-          <a:p>
-            <a:r>
-              <a:rPr sz="1400" b="0">
-                <a:solidFill>
-                  <a:srgbClr val="C4D2E4"/>
-                </a:solidFill>
-                <a:latin typeface="Segoe UI"/>
-              </a:rPr>
-              <a:t>Finds authorization / BOLA flaws</a:t>
-            </a:r>
-          </a:p>
-        </p:txBody>
-      </p:sp>
-      <p:sp>
-        <p:nvSpPr>
-          <p:cNvPr id="13" name="TextBox 12"/>
-          <p:cNvSpPr txBox="1"/>
-          <p:nvPr/>
-        </p:nvSpPr>
-        <p:spPr>
-          <a:xfrm>
-            <a:off x="6537960" y="3108960"/>
-            <a:ext cx="1691640" cy="475488"/>
-          </a:xfrm>
-          <a:prstGeom prst="rect">
-            <a:avLst/>
-          </a:prstGeom>
-          <a:noFill/>
-        </p:spPr>
-        <p:txBody>
-          <a:bodyPr wrap="square" anchor="ctr" lIns="0" rIns="0" tIns="0" bIns="0">
-            <a:spAutoFit/>
-          </a:bodyPr>
-          <a:lstStyle/>
-          <a:p>
-            <a:pPr algn="ctr"/>
-            <a:r>
-              <a:rPr sz="1800" b="1">
-                <a:solidFill>
-                  <a:srgbClr val="FF5C6E"/>
-                </a:solidFill>
-                <a:latin typeface="Segoe UI Symbol"/>
-              </a:rPr>
-              <a:t>✗</a:t>
-            </a:r>
-          </a:p>
-        </p:txBody>
-      </p:sp>
-      <p:sp>
-        <p:nvSpPr>
-          <p:cNvPr id="14" name="TextBox 13"/>
-          <p:cNvSpPr txBox="1"/>
-          <p:nvPr/>
-        </p:nvSpPr>
-        <p:spPr>
-          <a:xfrm>
-            <a:off x="8229600" y="3108960"/>
-            <a:ext cx="1691640" cy="475488"/>
-          </a:xfrm>
-          <a:prstGeom prst="rect">
-            <a:avLst/>
-          </a:prstGeom>
-          <a:noFill/>
-        </p:spPr>
-        <p:txBody>
-          <a:bodyPr wrap="square" anchor="ctr" lIns="0" rIns="0" tIns="0" bIns="0">
-            <a:spAutoFit/>
-          </a:bodyPr>
-          <a:lstStyle/>
-          <a:p>
-            <a:pPr algn="ctr"/>
-            <a:r>
-              <a:rPr sz="1800" b="1">
-                <a:solidFill>
-                  <a:srgbClr val="F5B301"/>
-                </a:solidFill>
-                <a:latin typeface="Segoe UI Symbol"/>
-              </a:rPr>
-              <a:t>~</a:t>
-            </a:r>
-          </a:p>
-        </p:txBody>
-      </p:sp>
-      <p:sp>
-        <p:nvSpPr>
-          <p:cNvPr id="15" name="TextBox 14"/>
-          <p:cNvSpPr txBox="1"/>
-          <p:nvPr/>
-        </p:nvSpPr>
-        <p:spPr>
-          <a:xfrm>
-            <a:off x="9921240" y="3108960"/>
-            <a:ext cx="1691640" cy="475488"/>
-          </a:xfrm>
-          <a:prstGeom prst="rect">
-            <a:avLst/>
-          </a:prstGeom>
-          <a:noFill/>
-        </p:spPr>
-        <p:txBody>
-          <a:bodyPr wrap="square" anchor="ctr" lIns="0" rIns="0" tIns="0" bIns="0">
-            <a:spAutoFit/>
-          </a:bodyPr>
-          <a:lstStyle/>
-          <a:p>
-            <a:pPr algn="ctr"/>
-            <a:r>
-              <a:rPr sz="1800" b="1">
-                <a:solidFill>
-                  <a:srgbClr val="2DD48F"/>
-                </a:solidFill>
-                <a:latin typeface="Segoe UI Symbol"/>
-              </a:rPr>
-              <a:t>✓</a:t>
-            </a:r>
-          </a:p>
-        </p:txBody>
-      </p:sp>
-      <p:sp>
-        <p:nvSpPr>
-          <p:cNvPr id="16" name="TextBox 15"/>
-          <p:cNvSpPr txBox="1"/>
-          <p:nvPr/>
-        </p:nvSpPr>
-        <p:spPr>
-          <a:xfrm>
-            <a:off x="658368" y="3584448"/>
-            <a:ext cx="5669280" cy="475488"/>
-          </a:xfrm>
-          <a:prstGeom prst="rect">
-            <a:avLst/>
-          </a:prstGeom>
-          <a:noFill/>
-        </p:spPr>
-        <p:txBody>
-          <a:bodyPr wrap="square" anchor="ctr" lIns="0" rIns="0" tIns="0" bIns="0">
-            <a:spAutoFit/>
-          </a:bodyPr>
-          <a:lstStyle/>
-          <a:p>
-            <a:r>
-              <a:rPr sz="1400" b="0">
-                <a:solidFill>
-                  <a:srgbClr val="C4D2E4"/>
-                </a:solidFill>
-                <a:latin typeface="Segoe UI"/>
-              </a:rPr>
-              <a:t>Verdict is a reproduced contradiction</a:t>
-            </a:r>
-          </a:p>
-        </p:txBody>
-      </p:sp>
-      <p:sp>
-        <p:nvSpPr>
-          <p:cNvPr id="17" name="TextBox 16"/>
-          <p:cNvSpPr txBox="1"/>
-          <p:nvPr/>
-        </p:nvSpPr>
-        <p:spPr>
-          <a:xfrm>
-            <a:off x="6537960" y="3584448"/>
-            <a:ext cx="1691640" cy="475488"/>
-          </a:xfrm>
-          <a:prstGeom prst="rect">
-            <a:avLst/>
-          </a:prstGeom>
-          <a:noFill/>
-        </p:spPr>
-        <p:txBody>
-          <a:bodyPr wrap="square" anchor="ctr" lIns="0" rIns="0" tIns="0" bIns="0">
-            <a:spAutoFit/>
-          </a:bodyPr>
-          <a:lstStyle/>
-          <a:p>
-            <a:pPr algn="ctr"/>
-            <a:r>
-              <a:rPr sz="1800" b="1">
-                <a:solidFill>
-                  <a:srgbClr val="FF5C6E"/>
-                </a:solidFill>
-                <a:latin typeface="Segoe UI Symbol"/>
-              </a:rPr>
-              <a:t>✗</a:t>
-            </a:r>
-          </a:p>
-        </p:txBody>
-      </p:sp>
-      <p:sp>
-        <p:nvSpPr>
-          <p:cNvPr id="18" name="TextBox 17"/>
-          <p:cNvSpPr txBox="1"/>
-          <p:nvPr/>
-        </p:nvSpPr>
-        <p:spPr>
-          <a:xfrm>
-            <a:off x="8229600" y="3584448"/>
-            <a:ext cx="1691640" cy="475488"/>
-          </a:xfrm>
-          <a:prstGeom prst="rect">
-            <a:avLst/>
-          </a:prstGeom>
-          <a:noFill/>
-        </p:spPr>
-        <p:txBody>
-          <a:bodyPr wrap="square" anchor="ctr" lIns="0" rIns="0" tIns="0" bIns="0">
-            <a:spAutoFit/>
-          </a:bodyPr>
-          <a:lstStyle/>
-          <a:p>
-            <a:pPr algn="ctr"/>
-            <a:r>
-              <a:rPr sz="1800" b="1">
-                <a:solidFill>
-                  <a:srgbClr val="FF5C6E"/>
-                </a:solidFill>
-                <a:latin typeface="Segoe UI Symbol"/>
-              </a:rPr>
-              <a:t>✗</a:t>
-            </a:r>
-          </a:p>
-        </p:txBody>
-      </p:sp>
-      <p:sp>
-        <p:nvSpPr>
-          <p:cNvPr id="19" name="TextBox 18"/>
-          <p:cNvSpPr txBox="1"/>
-          <p:nvPr/>
-        </p:nvSpPr>
-        <p:spPr>
-          <a:xfrm>
-            <a:off x="9921240" y="3584448"/>
-            <a:ext cx="1691640" cy="475488"/>
-          </a:xfrm>
-          <a:prstGeom prst="rect">
-            <a:avLst/>
-          </a:prstGeom>
-          <a:noFill/>
-        </p:spPr>
-        <p:txBody>
-          <a:bodyPr wrap="square" anchor="ctr" lIns="0" rIns="0" tIns="0" bIns="0">
-            <a:spAutoFit/>
-          </a:bodyPr>
-          <a:lstStyle/>
-          <a:p>
-            <a:pPr algn="ctr"/>
-            <a:r>
-              <a:rPr sz="1800" b="1">
-                <a:solidFill>
-                  <a:srgbClr val="2DD48F"/>
-                </a:solidFill>
-                <a:latin typeface="Segoe UI Symbol"/>
-              </a:rPr>
-              <a:t>✓</a:t>
-            </a:r>
-          </a:p>
-        </p:txBody>
-      </p:sp>
-      <p:sp>
-        <p:nvSpPr>
-          <p:cNvPr id="20" name="Rectangle 19"/>
-          <p:cNvSpPr/>
-          <p:nvPr/>
-        </p:nvSpPr>
-        <p:spPr>
-          <a:xfrm>
-            <a:off x="548640" y="4059936"/>
-            <a:ext cx="11064240" cy="475488"/>
-          </a:xfrm>
-          <a:prstGeom prst="rect">
-            <a:avLst/>
-          </a:prstGeom>
-          <a:solidFill>
-            <a:srgbClr val="101724"/>
-          </a:solidFill>
-          <a:ln>
-            <a:noFill/>
-          </a:ln>
-          <a:effectLst/>
-        </p:spPr>
-        <p:style>
-          <a:lnRef idx="1">
-            <a:schemeClr val="accent1"/>
-          </a:lnRef>
-          <a:fillRef idx="3">
-            <a:schemeClr val="accent1"/>
-          </a:fillRef>
-          <a:effectRef idx="2">
-            <a:schemeClr val="accent1"/>
-          </a:effectRef>
-          <a:fontRef idx="minor">
-            <a:schemeClr val="lt1"/>
-          </a:fontRef>
-        </p:style>
-        <p:txBody>
-          <a:bodyPr rtlCol="0" anchor="ctr"/>
-          <a:lstStyle/>
-          <a:p>
-            <a:pPr algn="ctr"/>
-          </a:p>
-        </p:txBody>
-      </p:sp>
-      <p:sp>
-        <p:nvSpPr>
-          <p:cNvPr id="21" name="TextBox 20"/>
-          <p:cNvSpPr txBox="1"/>
-          <p:nvPr/>
-        </p:nvSpPr>
-        <p:spPr>
-          <a:xfrm>
-            <a:off x="658368" y="4059936"/>
-            <a:ext cx="5669280" cy="475488"/>
-          </a:xfrm>
-          <a:prstGeom prst="rect">
-            <a:avLst/>
-          </a:prstGeom>
-          <a:noFill/>
-        </p:spPr>
-        <p:txBody>
-          <a:bodyPr wrap="square" anchor="ctr" lIns="0" rIns="0" tIns="0" bIns="0">
-            <a:spAutoFit/>
-          </a:bodyPr>
-          <a:lstStyle/>
-          <a:p>
-            <a:r>
-              <a:rPr sz="1400" b="0">
-                <a:solidFill>
-                  <a:srgbClr val="C4D2E4"/>
-                </a:solidFill>
-                <a:latin typeface="Segoe UI"/>
-              </a:rPr>
-              <a:t>Proves the fix, live</a:t>
-            </a:r>
-          </a:p>
-        </p:txBody>
-      </p:sp>
-      <p:sp>
-        <p:nvSpPr>
-          <p:cNvPr id="22" name="TextBox 21"/>
-          <p:cNvSpPr txBox="1"/>
-          <p:nvPr/>
-        </p:nvSpPr>
-        <p:spPr>
-          <a:xfrm>
-            <a:off x="6537960" y="4059936"/>
-            <a:ext cx="1691640" cy="475488"/>
-          </a:xfrm>
-          <a:prstGeom prst="rect">
-            <a:avLst/>
-          </a:prstGeom>
-          <a:noFill/>
-        </p:spPr>
-        <p:txBody>
-          <a:bodyPr wrap="square" anchor="ctr" lIns="0" rIns="0" tIns="0" bIns="0">
-            <a:spAutoFit/>
-          </a:bodyPr>
-          <a:lstStyle/>
-          <a:p>
-            <a:pPr algn="ctr"/>
-            <a:r>
-              <a:rPr sz="1800" b="1">
-                <a:solidFill>
-                  <a:srgbClr val="FF5C6E"/>
-                </a:solidFill>
-                <a:latin typeface="Segoe UI Symbol"/>
-              </a:rPr>
-              <a:t>✗</a:t>
-            </a:r>
-          </a:p>
-        </p:txBody>
-      </p:sp>
-      <p:sp>
-        <p:nvSpPr>
-          <p:cNvPr id="23" name="TextBox 22"/>
-          <p:cNvSpPr txBox="1"/>
-          <p:nvPr/>
-        </p:nvSpPr>
-        <p:spPr>
-          <a:xfrm>
-            <a:off x="8229600" y="4059936"/>
-            <a:ext cx="1691640" cy="475488"/>
-          </a:xfrm>
-          <a:prstGeom prst="rect">
-            <a:avLst/>
-          </a:prstGeom>
-          <a:noFill/>
-        </p:spPr>
-        <p:txBody>
-          <a:bodyPr wrap="square" anchor="ctr" lIns="0" rIns="0" tIns="0" bIns="0">
-            <a:spAutoFit/>
-          </a:bodyPr>
-          <a:lstStyle/>
-          <a:p>
-            <a:pPr algn="ctr"/>
-            <a:r>
-              <a:rPr sz="1800" b="1">
-                <a:solidFill>
-                  <a:srgbClr val="FF5C6E"/>
-                </a:solidFill>
-                <a:latin typeface="Segoe UI Symbol"/>
-              </a:rPr>
-              <a:t>✗</a:t>
-            </a:r>
-          </a:p>
-        </p:txBody>
-      </p:sp>
-      <p:sp>
-        <p:nvSpPr>
-          <p:cNvPr id="24" name="TextBox 23"/>
-          <p:cNvSpPr txBox="1"/>
-          <p:nvPr/>
-        </p:nvSpPr>
-        <p:spPr>
-          <a:xfrm>
-            <a:off x="9921240" y="4059936"/>
-            <a:ext cx="1691640" cy="475488"/>
-          </a:xfrm>
-          <a:prstGeom prst="rect">
-            <a:avLst/>
-          </a:prstGeom>
-          <a:noFill/>
-        </p:spPr>
-        <p:txBody>
-          <a:bodyPr wrap="square" anchor="ctr" lIns="0" rIns="0" tIns="0" bIns="0">
-            <a:spAutoFit/>
-          </a:bodyPr>
-          <a:lstStyle/>
-          <a:p>
-            <a:pPr algn="ctr"/>
-            <a:r>
-              <a:rPr sz="1800" b="1">
-                <a:solidFill>
-                  <a:srgbClr val="2DD48F"/>
-                </a:solidFill>
-                <a:latin typeface="Segoe UI Symbol"/>
-              </a:rPr>
-              <a:t>✓</a:t>
-            </a:r>
-          </a:p>
-        </p:txBody>
-      </p:sp>
-      <p:sp>
-        <p:nvSpPr>
-          <p:cNvPr id="25" name="TextBox 24"/>
-          <p:cNvSpPr txBox="1"/>
-          <p:nvPr/>
-        </p:nvSpPr>
-        <p:spPr>
-          <a:xfrm>
-            <a:off x="658368" y="4535424"/>
-            <a:ext cx="5669280" cy="475488"/>
-          </a:xfrm>
-          <a:prstGeom prst="rect">
-            <a:avLst/>
-          </a:prstGeom>
-          <a:noFill/>
-        </p:spPr>
-        <p:txBody>
-          <a:bodyPr wrap="square" anchor="ctr" lIns="0" rIns="0" tIns="0" bIns="0">
-            <a:spAutoFit/>
-          </a:bodyPr>
-          <a:lstStyle/>
-          <a:p>
-            <a:r>
-              <a:rPr sz="1400" b="0">
-                <a:solidFill>
-                  <a:srgbClr val="C4D2E4"/>
-                </a:solidFill>
-                <a:latin typeface="Segoe UI"/>
-              </a:rPr>
-              <a:t>Autonomous, self-directed research</a:t>
-            </a:r>
-          </a:p>
-        </p:txBody>
-      </p:sp>
-      <p:sp>
-        <p:nvSpPr>
-          <p:cNvPr id="26" name="TextBox 25"/>
-          <p:cNvSpPr txBox="1"/>
-          <p:nvPr/>
-        </p:nvSpPr>
-        <p:spPr>
-          <a:xfrm>
-            <a:off x="6537960" y="4535424"/>
-            <a:ext cx="1691640" cy="475488"/>
-          </a:xfrm>
-          <a:prstGeom prst="rect">
-            <a:avLst/>
-          </a:prstGeom>
-          <a:noFill/>
-        </p:spPr>
-        <p:txBody>
-          <a:bodyPr wrap="square" anchor="ctr" lIns="0" rIns="0" tIns="0" bIns="0">
-            <a:spAutoFit/>
-          </a:bodyPr>
-          <a:lstStyle/>
-          <a:p>
-            <a:pPr algn="ctr"/>
-            <a:r>
-              <a:rPr sz="1800" b="1">
-                <a:solidFill>
-                  <a:srgbClr val="FF5C6E"/>
-                </a:solidFill>
-                <a:latin typeface="Segoe UI Symbol"/>
-              </a:rPr>
-              <a:t>✗</a:t>
-            </a:r>
-          </a:p>
-        </p:txBody>
-      </p:sp>
-      <p:sp>
-        <p:nvSpPr>
-          <p:cNvPr id="27" name="TextBox 26"/>
-          <p:cNvSpPr txBox="1"/>
-          <p:nvPr/>
-        </p:nvSpPr>
-        <p:spPr>
-          <a:xfrm>
-            <a:off x="8229600" y="4535424"/>
-            <a:ext cx="1691640" cy="475488"/>
-          </a:xfrm>
-          <a:prstGeom prst="rect">
-            <a:avLst/>
-          </a:prstGeom>
-          <a:noFill/>
-        </p:spPr>
-        <p:txBody>
-          <a:bodyPr wrap="square" anchor="ctr" lIns="0" rIns="0" tIns="0" bIns="0">
-            <a:spAutoFit/>
-          </a:bodyPr>
-          <a:lstStyle/>
-          <a:p>
-            <a:pPr algn="ctr"/>
-            <a:r>
-              <a:rPr sz="1800" b="1">
-                <a:solidFill>
-                  <a:srgbClr val="F5B301"/>
-                </a:solidFill>
-                <a:latin typeface="Segoe UI Symbol"/>
-              </a:rPr>
-              <a:t>~</a:t>
-            </a:r>
-          </a:p>
-        </p:txBody>
-      </p:sp>
-      <p:sp>
-        <p:nvSpPr>
-          <p:cNvPr id="28" name="TextBox 27"/>
-          <p:cNvSpPr txBox="1"/>
-          <p:nvPr/>
-        </p:nvSpPr>
-        <p:spPr>
-          <a:xfrm>
-            <a:off x="9921240" y="4535424"/>
-            <a:ext cx="1691640" cy="475488"/>
-          </a:xfrm>
-          <a:prstGeom prst="rect">
-            <a:avLst/>
-          </a:prstGeom>
-          <a:noFill/>
-        </p:spPr>
-        <p:txBody>
-          <a:bodyPr wrap="square" anchor="ctr" lIns="0" rIns="0" tIns="0" bIns="0">
-            <a:spAutoFit/>
-          </a:bodyPr>
-          <a:lstStyle/>
-          <a:p>
-            <a:pPr algn="ctr"/>
-            <a:r>
-              <a:rPr sz="1800" b="1">
-                <a:solidFill>
-                  <a:srgbClr val="2DD48F"/>
-                </a:solidFill>
-                <a:latin typeface="Segoe UI Symbol"/>
-              </a:rPr>
-              <a:t>✓</a:t>
-            </a:r>
-          </a:p>
-        </p:txBody>
-      </p:sp>
-      <p:sp>
-        <p:nvSpPr>
-          <p:cNvPr id="29" name="Rectangle 28"/>
-          <p:cNvSpPr/>
-          <p:nvPr/>
-        </p:nvSpPr>
-        <p:spPr>
-          <a:xfrm>
-            <a:off x="548640" y="5010912"/>
-            <a:ext cx="11064240" cy="475488"/>
-          </a:xfrm>
-          <a:prstGeom prst="rect">
-            <a:avLst/>
-          </a:prstGeom>
-          <a:solidFill>
-            <a:srgbClr val="101724"/>
-          </a:solidFill>
-          <a:ln>
-            <a:noFill/>
-          </a:ln>
-          <a:effectLst/>
-        </p:spPr>
-        <p:style>
-          <a:lnRef idx="1">
-            <a:schemeClr val="accent1"/>
-          </a:lnRef>
-          <a:fillRef idx="3">
-            <a:schemeClr val="accent1"/>
-          </a:fillRef>
-          <a:effectRef idx="2">
-            <a:schemeClr val="accent1"/>
-          </a:effectRef>
-          <a:fontRef idx="minor">
-            <a:schemeClr val="lt1"/>
-          </a:fontRef>
-        </p:style>
-        <p:txBody>
-          <a:bodyPr rtlCol="0" anchor="ctr"/>
-          <a:lstStyle/>
-          <a:p>
-            <a:pPr algn="ctr"/>
-          </a:p>
-        </p:txBody>
-      </p:sp>
-      <p:sp>
-        <p:nvSpPr>
-          <p:cNvPr id="30" name="TextBox 29"/>
-          <p:cNvSpPr txBox="1"/>
-          <p:nvPr/>
-        </p:nvSpPr>
-        <p:spPr>
-          <a:xfrm>
-            <a:off x="658368" y="5010912"/>
-            <a:ext cx="5669280" cy="475488"/>
-          </a:xfrm>
-          <a:prstGeom prst="rect">
-            <a:avLst/>
-          </a:prstGeom>
-          <a:noFill/>
-        </p:spPr>
-        <p:txBody>
-          <a:bodyPr wrap="square" anchor="ctr" lIns="0" rIns="0" tIns="0" bIns="0">
-            <a:spAutoFit/>
-          </a:bodyPr>
-          <a:lstStyle/>
-          <a:p>
-            <a:r>
-              <a:rPr sz="1400" b="0">
-                <a:solidFill>
-                  <a:srgbClr val="C4D2E4"/>
-                </a:solidFill>
-                <a:latin typeface="Segoe UI"/>
-              </a:rPr>
-              <a:t>Local-first, no data egress</a:t>
-            </a:r>
-          </a:p>
-        </p:txBody>
-      </p:sp>
-      <p:sp>
-        <p:nvSpPr>
-          <p:cNvPr id="31" name="TextBox 30"/>
-          <p:cNvSpPr txBox="1"/>
-          <p:nvPr/>
-        </p:nvSpPr>
-        <p:spPr>
-          <a:xfrm>
-            <a:off x="6537960" y="5010912"/>
-            <a:ext cx="1691640" cy="475488"/>
-          </a:xfrm>
-          <a:prstGeom prst="rect">
-            <a:avLst/>
-          </a:prstGeom>
-          <a:noFill/>
-        </p:spPr>
-        <p:txBody>
-          <a:bodyPr wrap="square" anchor="ctr" lIns="0" rIns="0" tIns="0" bIns="0">
-            <a:spAutoFit/>
-          </a:bodyPr>
-          <a:lstStyle/>
-          <a:p>
-            <a:pPr algn="ctr"/>
-            <a:r>
-              <a:rPr sz="1800" b="1">
-                <a:solidFill>
-                  <a:srgbClr val="F5B301"/>
-                </a:solidFill>
-                <a:latin typeface="Segoe UI Symbol"/>
-              </a:rPr>
-              <a:t>~</a:t>
-            </a:r>
-          </a:p>
-        </p:txBody>
-      </p:sp>
-      <p:sp>
-        <p:nvSpPr>
-          <p:cNvPr id="32" name="TextBox 31"/>
-          <p:cNvSpPr txBox="1"/>
-          <p:nvPr/>
-        </p:nvSpPr>
-        <p:spPr>
-          <a:xfrm>
-            <a:off x="8229600" y="5010912"/>
-            <a:ext cx="1691640" cy="475488"/>
-          </a:xfrm>
-          <a:prstGeom prst="rect">
-            <a:avLst/>
-          </a:prstGeom>
-          <a:noFill/>
-        </p:spPr>
-        <p:txBody>
-          <a:bodyPr wrap="square" anchor="ctr" lIns="0" rIns="0" tIns="0" bIns="0">
-            <a:spAutoFit/>
-          </a:bodyPr>
-          <a:lstStyle/>
-          <a:p>
-            <a:pPr algn="ctr"/>
-            <a:r>
-              <a:rPr sz="1800" b="1">
-                <a:solidFill>
-                  <a:srgbClr val="F5B301"/>
-                </a:solidFill>
-                <a:latin typeface="Segoe UI Symbol"/>
-              </a:rPr>
-              <a:t>~</a:t>
-            </a:r>
-          </a:p>
-        </p:txBody>
-      </p:sp>
-      <p:sp>
-        <p:nvSpPr>
-          <p:cNvPr id="33" name="TextBox 32"/>
-          <p:cNvSpPr txBox="1"/>
-          <p:nvPr/>
-        </p:nvSpPr>
-        <p:spPr>
-          <a:xfrm>
-            <a:off x="9921240" y="5010912"/>
-            <a:ext cx="1691640" cy="475488"/>
-          </a:xfrm>
-          <a:prstGeom prst="rect">
-            <a:avLst/>
-          </a:prstGeom>
-          <a:noFill/>
-        </p:spPr>
-        <p:txBody>
-          <a:bodyPr wrap="square" anchor="ctr" lIns="0" rIns="0" tIns="0" bIns="0">
-            <a:spAutoFit/>
-          </a:bodyPr>
-          <a:lstStyle/>
-          <a:p>
-            <a:pPr algn="ctr"/>
-            <a:r>
-              <a:rPr sz="1800" b="1">
-                <a:solidFill>
-                  <a:srgbClr val="2DD48F"/>
-                </a:solidFill>
-                <a:latin typeface="Segoe UI Symbol"/>
-              </a:rPr>
-              <a:t>✓</a:t>
-            </a:r>
-          </a:p>
-        </p:txBody>
-      </p:sp>
-      <p:sp>
-        <p:nvSpPr>
-          <p:cNvPr id="34" name="TextBox 33"/>
-          <p:cNvSpPr txBox="1"/>
-          <p:nvPr/>
-        </p:nvSpPr>
-        <p:spPr>
-          <a:xfrm>
-            <a:off x="658368" y="5486400"/>
-            <a:ext cx="5669280" cy="475488"/>
-          </a:xfrm>
-          <a:prstGeom prst="rect">
-            <a:avLst/>
-          </a:prstGeom>
-          <a:noFill/>
-        </p:spPr>
-        <p:txBody>
-          <a:bodyPr wrap="square" anchor="ctr" lIns="0" rIns="0" tIns="0" bIns="0">
-            <a:spAutoFit/>
-          </a:bodyPr>
-          <a:lstStyle/>
-          <a:p>
-            <a:r>
-              <a:rPr sz="1400" b="0">
-                <a:solidFill>
-                  <a:srgbClr val="C4D2E4"/>
-                </a:solidFill>
-                <a:latin typeface="Segoe UI"/>
-              </a:rPr>
-              <a:t>Every decision auditable</a:t>
-            </a:r>
-          </a:p>
-        </p:txBody>
-      </p:sp>
-      <p:sp>
-        <p:nvSpPr>
-          <p:cNvPr id="35" name="TextBox 34"/>
-          <p:cNvSpPr txBox="1"/>
-          <p:nvPr/>
-        </p:nvSpPr>
-        <p:spPr>
-          <a:xfrm>
-            <a:off x="6537960" y="5486400"/>
-            <a:ext cx="1691640" cy="475488"/>
-          </a:xfrm>
-          <a:prstGeom prst="rect">
-            <a:avLst/>
-          </a:prstGeom>
-          <a:noFill/>
-        </p:spPr>
-        <p:txBody>
-          <a:bodyPr wrap="square" anchor="ctr" lIns="0" rIns="0" tIns="0" bIns="0">
-            <a:spAutoFit/>
-          </a:bodyPr>
-          <a:lstStyle/>
-          <a:p>
-            <a:pPr algn="ctr"/>
-            <a:r>
-              <a:rPr sz="1800" b="1">
-                <a:solidFill>
-                  <a:srgbClr val="F5B301"/>
-                </a:solidFill>
-                <a:latin typeface="Segoe UI Symbol"/>
-              </a:rPr>
-              <a:t>~</a:t>
-            </a:r>
-          </a:p>
-        </p:txBody>
-      </p:sp>
-      <p:sp>
-        <p:nvSpPr>
-          <p:cNvPr id="36" name="TextBox 35"/>
-          <p:cNvSpPr txBox="1"/>
-          <p:nvPr/>
-        </p:nvSpPr>
-        <p:spPr>
-          <a:xfrm>
-            <a:off x="8229600" y="5486400"/>
-            <a:ext cx="1691640" cy="475488"/>
-          </a:xfrm>
-          <a:prstGeom prst="rect">
-            <a:avLst/>
-          </a:prstGeom>
-          <a:noFill/>
-        </p:spPr>
-        <p:txBody>
-          <a:bodyPr wrap="square" anchor="ctr" lIns="0" rIns="0" tIns="0" bIns="0">
-            <a:spAutoFit/>
-          </a:bodyPr>
-          <a:lstStyle/>
-          <a:p>
-            <a:pPr algn="ctr"/>
-            <a:r>
-              <a:rPr sz="1800" b="1">
-                <a:solidFill>
-                  <a:srgbClr val="FF5C6E"/>
-                </a:solidFill>
-                <a:latin typeface="Segoe UI Symbol"/>
-              </a:rPr>
-              <a:t>✗</a:t>
-            </a:r>
-          </a:p>
-        </p:txBody>
-      </p:sp>
-      <p:sp>
-        <p:nvSpPr>
-          <p:cNvPr id="37" name="TextBox 36"/>
-          <p:cNvSpPr txBox="1"/>
-          <p:nvPr/>
-        </p:nvSpPr>
-        <p:spPr>
-          <a:xfrm>
-            <a:off x="9921240" y="5486400"/>
-            <a:ext cx="1691640" cy="475488"/>
-          </a:xfrm>
-          <a:prstGeom prst="rect">
-            <a:avLst/>
-          </a:prstGeom>
-          <a:noFill/>
-        </p:spPr>
-        <p:txBody>
-          <a:bodyPr wrap="square" anchor="ctr" lIns="0" rIns="0" tIns="0" bIns="0">
-            <a:spAutoFit/>
-          </a:bodyPr>
-          <a:lstStyle/>
-          <a:p>
-            <a:pPr algn="ctr"/>
-            <a:r>
-              <a:rPr sz="1800" b="1">
-                <a:solidFill>
-                  <a:srgbClr val="2DD48F"/>
-                </a:solidFill>
-                <a:latin typeface="Segoe UI Symbol"/>
-              </a:rPr>
-              <a:t>✓</a:t>
-            </a:r>
-          </a:p>
-        </p:txBody>
-      </p:sp>
-      <p:sp>
-        <p:nvSpPr>
-          <p:cNvPr id="38" name="TextBox 37"/>
-          <p:cNvSpPr txBox="1"/>
-          <p:nvPr/>
-        </p:nvSpPr>
-        <p:spPr>
-          <a:xfrm>
-            <a:off x="566928" y="6382512"/>
-            <a:ext cx="8229600" cy="365760"/>
+            <a:off x="713232" y="2697480"/>
+            <a:ext cx="10789920" cy="3840480"/>
           </a:xfrm>
           <a:prstGeom prst="rect">
             <a:avLst/>
@@ -15881,37 +14585,142 @@
           </a:bodyPr>
           <a:lstStyle/>
           <a:p>
-            <a:r>
-              <a:rPr sz="1000" b="1">
+            <a:pPr>
+              <a:spcAft>
+                <a:spcPts val="1500"/>
+              </a:spcAft>
+            </a:pPr>
+            <a:r>
+              <a:rPr sz="1800" b="1">
+                <a:solidFill>
+                  <a:srgbClr val="2DD48F"/>
+                </a:solidFill>
+                <a:latin typeface="Segoe UI"/>
+              </a:rPr>
+              <a:t>»  </a:t>
+            </a:r>
+            <a:r>
+              <a:rPr sz="1800" b="0">
+                <a:solidFill>
+                  <a:srgbClr val="EAF2FF"/>
+                </a:solidFill>
+                <a:latin typeface="Segoe UI"/>
+              </a:rPr>
+              <a:t>Per finding: the literal probes the judge issued (steps-to-reproduce)</a:t>
+            </a:r>
+          </a:p>
+          <a:p>
+            <a:pPr>
+              <a:spcAft>
+                <a:spcPts val="1500"/>
+              </a:spcAft>
+            </a:pPr>
+            <a:r>
+              <a:rPr sz="1800" b="1">
+                <a:solidFill>
+                  <a:srgbClr val="2DD48F"/>
+                </a:solidFill>
+                <a:latin typeface="Segoe UI"/>
+              </a:rPr>
+              <a:t>»  </a:t>
+            </a:r>
+            <a:r>
+              <a:rPr sz="1800" b="0">
+                <a:solidFill>
+                  <a:srgbClr val="EAF2FF"/>
+                </a:solidFill>
+                <a:latin typeface="Segoe UI"/>
+              </a:rPr>
+              <a:t>Proof = the differential + anchor + the judge's own verdict + evidence</a:t>
+            </a:r>
+          </a:p>
+          <a:p>
+            <a:pPr>
+              <a:spcAft>
+                <a:spcPts val="1500"/>
+              </a:spcAft>
+            </a:pPr>
+            <a:r>
+              <a:rPr sz="1800" b="1">
+                <a:solidFill>
+                  <a:srgbClr val="2DD48F"/>
+                </a:solidFill>
+                <a:latin typeface="Segoe UI"/>
+              </a:rPr>
+              <a:t>»  </a:t>
+            </a:r>
+            <a:r>
+              <a:rPr sz="1800" b="0">
+                <a:solidFill>
+                  <a:srgbClr val="EAF2FF"/>
+                </a:solidFill>
+                <a:latin typeface="Segoe UI"/>
+              </a:rPr>
+              <a:t>Remediation = the patch and its live VALIDATED→DISPROVED flip</a:t>
+            </a:r>
+          </a:p>
+          <a:p>
+            <a:pPr>
+              <a:spcAft>
+                <a:spcPts val="1500"/>
+              </a:spcAft>
+            </a:pPr>
+            <a:r>
+              <a:rPr sz="1800" b="1">
                 <a:solidFill>
                   <a:srgbClr val="22D3EE"/>
                 </a:solidFill>
-                <a:latin typeface="Consolas"/>
-              </a:rPr>
-              <a:t>SENTINEL</a:t>
-            </a:r>
-            <a:r>
-              <a:rPr sz="1000" b="0">
-                <a:solidFill>
-                  <a:srgbClr val="6B7A90"/>
-                </a:solidFill>
-                <a:latin typeface="Consolas"/>
-              </a:rPr>
-              <a:t>   ·   find → reason → prove → patch → prove</a:t>
-            </a:r>
-          </a:p>
-        </p:txBody>
-      </p:sp>
-      <p:sp>
-        <p:nvSpPr>
-          <p:cNvPr id="39" name="TextBox 38"/>
+                <a:latin typeface="Segoe UI"/>
+              </a:rPr>
+              <a:t>»  </a:t>
+            </a:r>
+            <a:r>
+              <a:rPr sz="1800" b="0">
+                <a:solidFill>
+                  <a:srgbClr val="C4D2E4"/>
+                </a:solidFill>
+                <a:latin typeface="Segoe UI"/>
+              </a:rPr>
+              <a:t>Markdown for humans + JSON for machines; leads shown, unpromoted</a:t>
+            </a:r>
+          </a:p>
+          <a:p>
+            <a:pPr>
+              <a:spcAft>
+                <a:spcPts val="1500"/>
+              </a:spcAft>
+            </a:pPr>
+            <a:r>
+              <a:rPr sz="1800" b="1">
+                <a:solidFill>
+                  <a:srgbClr val="E84BFF"/>
+                </a:solidFill>
+                <a:latin typeface="Segoe UI"/>
+              </a:rPr>
+              <a:t>»  </a:t>
+            </a:r>
+            <a:r>
+              <a:rPr sz="1800" b="0">
+                <a:solidFill>
+                  <a:srgbClr val="C4D2E4"/>
+                </a:solidFill>
+                <a:latin typeface="Segoe UI"/>
+              </a:rPr>
+              <a:t>The LLM may narrate — but every claim is graph-backed or omitted</a:t>
+            </a:r>
+          </a:p>
+        </p:txBody>
+      </p:sp>
+      <p:sp>
+        <p:nvSpPr>
+          <p:cNvPr id="9" name="TextBox 8"/>
           <p:cNvSpPr txBox="1"/>
           <p:nvPr/>
         </p:nvSpPr>
         <p:spPr>
           <a:xfrm>
-            <a:off x="10789920" y="6382512"/>
-            <a:ext cx="914400" cy="365760"/>
+            <a:off x="566928" y="6382512"/>
+            <a:ext cx="8229600" cy="365760"/>
           </a:xfrm>
           <a:prstGeom prst="rect">
             <a:avLst/>
@@ -15924,6 +14733,49 @@
           </a:bodyPr>
           <a:lstStyle/>
           <a:p>
+            <a:r>
+              <a:rPr sz="1000" b="1">
+                <a:solidFill>
+                  <a:srgbClr val="22D3EE"/>
+                </a:solidFill>
+                <a:latin typeface="Consolas"/>
+              </a:rPr>
+              <a:t>SENTINEL</a:t>
+            </a:r>
+            <a:r>
+              <a:rPr sz="1000" b="0">
+                <a:solidFill>
+                  <a:srgbClr val="6B7A90"/>
+                </a:solidFill>
+                <a:latin typeface="Consolas"/>
+              </a:rPr>
+              <a:t>   ·   find → reason → prove → patch → prove</a:t>
+            </a:r>
+          </a:p>
+        </p:txBody>
+      </p:sp>
+      <p:sp>
+        <p:nvSpPr>
+          <p:cNvPr id="10" name="TextBox 9"/>
+          <p:cNvSpPr txBox="1"/>
+          <p:nvPr/>
+        </p:nvSpPr>
+        <p:spPr>
+          <a:xfrm>
+            <a:off x="10789920" y="6382512"/>
+            <a:ext cx="914400" cy="365760"/>
+          </a:xfrm>
+          <a:prstGeom prst="rect">
+            <a:avLst/>
+          </a:prstGeom>
+          <a:noFill/>
+        </p:spPr>
+        <p:txBody>
+          <a:bodyPr wrap="square" anchor="t" lIns="0" rIns="0" tIns="0" bIns="0">
+            <a:spAutoFit/>
+          </a:bodyPr>
+          <a:lstStyle/>
+          <a:p>
             <a:pPr algn="r"/>
             <a:r>
               <a:rPr sz="1000" b="0">
@@ -15932,7 +14784,7 @@
                 </a:solidFill>
                 <a:latin typeface="Consolas"/>
               </a:rPr>
-              <a:t>29 / 33</a:t>
+              <a:t>29 / 38</a:t>
             </a:r>
           </a:p>
         </p:txBody>
@@ -16368,7 +15220,7 @@
                 </a:solidFill>
                 <a:latin typeface="Consolas"/>
               </a:rPr>
-              <a:t>03 / 33</a:t>
+              <a:t>03 / 38</a:t>
             </a:r>
           </a:p>
         </p:txBody>
@@ -16520,7 +15372,7 @@
                 </a:solidFill>
                 <a:latin typeface="Consolas"/>
               </a:rPr>
-              <a:t>Why Sentinel Wins</a:t>
+              <a:t>Breadth, Earned Per Proof</a:t>
             </a:r>
           </a:p>
         </p:txBody>
@@ -16578,7 +15430,7 @@
                 </a:solidFill>
                 <a:latin typeface="Consolas"/>
               </a:rPr>
-              <a:t>The defensible core</a:t>
+              <a:t>A 200-item wishlist, folded into four honest tiers</a:t>
             </a:r>
           </a:p>
         </p:txBody>
@@ -16613,7 +15465,7 @@
             <a:r>
               <a:rPr sz="1800" b="1">
                 <a:solidFill>
-                  <a:srgbClr val="22D3EE"/>
+                  <a:srgbClr val="2DD48F"/>
                 </a:solidFill>
                 <a:latin typeface="Segoe UI"/>
               </a:rPr>
@@ -16622,11 +15474,11 @@
             <a:r>
               <a:rPr sz="1800" b="0">
                 <a:solidFill>
-                  <a:srgbClr val="C4D2E4"/>
-                </a:solidFill>
-                <a:latin typeface="Segoe UI"/>
-              </a:rPr>
-              <a:t>Trust: a finding is a reproduced contradiction, provably</a:t>
+                  <a:srgbClr val="EAF2FF"/>
+                </a:solidFill>
+                <a:latin typeface="Segoe UI"/>
+              </a:rPr>
+              <a:t>Tier A — SHIPPED: 12 classes + chaining cover the real web families</a:t>
             </a:r>
           </a:p>
           <a:p>
@@ -16651,7 +15503,7 @@
                 </a:solidFill>
                 <a:latin typeface="Segoe UI"/>
               </a:rPr>
-              <a:t>Closure: it doesn't just find — it patches and re-proves</a:t>
+              <a:t>Tier B — NEXT: cmd-injection, XXE, NoSQLi, CSRF… each needs a judge</a:t>
             </a:r>
           </a:p>
           <a:p>
@@ -16663,7 +15515,7 @@
             <a:r>
               <a:rPr sz="1800" b="1">
                 <a:solidFill>
-                  <a:srgbClr val="22D3EE"/>
+                  <a:srgbClr val="F5B301"/>
                 </a:solidFill>
                 <a:latin typeface="Segoe UI"/>
               </a:rPr>
@@ -16672,11 +15524,11 @@
             <a:r>
               <a:rPr sz="1800" b="0">
                 <a:solidFill>
-                  <a:srgbClr val="C4D2E4"/>
-                </a:solidFill>
-                <a:latin typeface="Segoe UI"/>
-              </a:rPr>
-              <a:t>Reach: the classes signatures miss (authz, session)</a:t>
+                  <a:srgbClr val="EAF2FF"/>
+                </a:solidFill>
+                <a:latin typeface="Segoe UI"/>
+              </a:rPr>
+              <a:t>Tier C — FRONTIER: labeled leads only (logic, race, ATO, OAuth)</a:t>
             </a:r>
           </a:p>
           <a:p>
@@ -16688,7 +15540,7 @@
             <a:r>
               <a:rPr sz="1800" b="1">
                 <a:solidFill>
-                  <a:srgbClr val="22D3EE"/>
+                  <a:srgbClr val="E84BFF"/>
                 </a:solidFill>
                 <a:latin typeface="Segoe UI"/>
               </a:rPr>
@@ -16701,7 +15553,7 @@
                 </a:solidFill>
                 <a:latin typeface="Segoe UI"/>
               </a:rPr>
-              <a:t>Honesty: compliant controls and frontiers labeled, not faked</a:t>
+              <a:t>Tier D — OUT: cloud config-audit &amp; DoS — a different tool, not faked</a:t>
             </a:r>
           </a:p>
           <a:p>
@@ -16726,7 +15578,7 @@
                 </a:solidFill>
                 <a:latin typeface="Segoe UI"/>
               </a:rPr>
-              <a:t>Deployability: local, auditable, air-gap-ready</a:t>
+              <a:t>Rule: a family graduates only with a pure differential + anchor</a:t>
             </a:r>
           </a:p>
         </p:txBody>
@@ -16804,7 +15656,7 @@
                 </a:solidFill>
                 <a:latin typeface="Consolas"/>
               </a:rPr>
-              <a:t>30 / 33</a:t>
+              <a:t>30 / 38</a:t>
             </a:r>
           </a:p>
         </p:txBody>
@@ -16956,7 +15808,7 @@
                 </a:solidFill>
                 <a:latin typeface="Consolas"/>
               </a:rPr>
-              <a:t>Status &amp; Roadmap</a:t>
+              <a:t>Test Results &amp; Validation</a:t>
             </a:r>
           </a:p>
         </p:txBody>
@@ -17014,20 +15866,276 @@
                 </a:solidFill>
                 <a:latin typeface="Consolas"/>
               </a:rPr>
-              <a:t>Honest today; a clear path to more</a:t>
-            </a:r>
-          </a:p>
-        </p:txBody>
-      </p:sp>
-      <p:sp>
-        <p:nvSpPr>
-          <p:cNvPr id="8" name="TextBox 7"/>
+              <a:t>Green, deterministic, and honest about the one skip</a:t>
+            </a:r>
+          </a:p>
+        </p:txBody>
+      </p:sp>
+      <p:sp>
+        <p:nvSpPr>
+          <p:cNvPr id="8" name="Rounded Rectangle 7"/>
+          <p:cNvSpPr/>
+          <p:nvPr/>
+        </p:nvSpPr>
+        <p:spPr>
+          <a:xfrm>
+            <a:off x="603504" y="2395728"/>
+            <a:ext cx="2503170" cy="1143000"/>
+          </a:xfrm>
+          <a:prstGeom prst="roundRect">
+            <a:avLst/>
+          </a:prstGeom>
+          <a:noFill/>
+          <a:ln w="12700">
+            <a:solidFill>
+              <a:srgbClr val="22D3EE"/>
+            </a:solidFill>
+          </a:ln>
+        </p:spPr>
+        <p:style>
+          <a:lnRef idx="1">
+            <a:schemeClr val="accent1"/>
+          </a:lnRef>
+          <a:fillRef idx="3">
+            <a:schemeClr val="accent1"/>
+          </a:fillRef>
+          <a:effectRef idx="2">
+            <a:schemeClr val="accent1"/>
+          </a:effectRef>
+          <a:fontRef idx="minor">
+            <a:schemeClr val="lt1"/>
+          </a:fontRef>
+        </p:style>
+        <p:txBody>
+          <a:bodyPr rtlCol="0" anchor="ctr"/>
+          <a:lstStyle/>
+          <a:p>
+            <a:pPr algn="ctr"/>
+            <a:r>
+              <a:rPr sz="3200" b="1">
+                <a:solidFill>
+                  <a:srgbClr val="22D3EE"/>
+                </a:solidFill>
+                <a:latin typeface="Consolas"/>
+              </a:rPr>
+              <a:t>454</a:t>
+            </a:r>
+          </a:p>
+          <a:p>
+            <a:pPr algn="ctr"/>
+            <a:r>
+              <a:rPr sz="1100" b="0">
+                <a:solidFill>
+                  <a:srgbClr val="6B7A90"/>
+                </a:solidFill>
+                <a:latin typeface="Consolas"/>
+              </a:rPr>
+              <a:t>TESTS</a:t>
+            </a:r>
+          </a:p>
+        </p:txBody>
+      </p:sp>
+      <p:sp>
+        <p:nvSpPr>
+          <p:cNvPr id="9" name="Rounded Rectangle 8"/>
+          <p:cNvSpPr/>
+          <p:nvPr/>
+        </p:nvSpPr>
+        <p:spPr>
+          <a:xfrm>
+            <a:off x="3426714" y="2395728"/>
+            <a:ext cx="2503170" cy="1143000"/>
+          </a:xfrm>
+          <a:prstGeom prst="roundRect">
+            <a:avLst/>
+          </a:prstGeom>
+          <a:noFill/>
+          <a:ln w="12700">
+            <a:solidFill>
+              <a:srgbClr val="22D3EE"/>
+            </a:solidFill>
+          </a:ln>
+        </p:spPr>
+        <p:style>
+          <a:lnRef idx="1">
+            <a:schemeClr val="accent1"/>
+          </a:lnRef>
+          <a:fillRef idx="3">
+            <a:schemeClr val="accent1"/>
+          </a:fillRef>
+          <a:effectRef idx="2">
+            <a:schemeClr val="accent1"/>
+          </a:effectRef>
+          <a:fontRef idx="minor">
+            <a:schemeClr val="lt1"/>
+          </a:fontRef>
+        </p:style>
+        <p:txBody>
+          <a:bodyPr rtlCol="0" anchor="ctr"/>
+          <a:lstStyle/>
+          <a:p>
+            <a:pPr algn="ctr"/>
+            <a:r>
+              <a:rPr sz="3200" b="1">
+                <a:solidFill>
+                  <a:srgbClr val="22D3EE"/>
+                </a:solidFill>
+                <a:latin typeface="Consolas"/>
+              </a:rPr>
+              <a:t>453</a:t>
+            </a:r>
+          </a:p>
+          <a:p>
+            <a:pPr algn="ctr"/>
+            <a:r>
+              <a:rPr sz="1100" b="0">
+                <a:solidFill>
+                  <a:srgbClr val="6B7A90"/>
+                </a:solidFill>
+                <a:latin typeface="Consolas"/>
+              </a:rPr>
+              <a:t>PASSING</a:t>
+            </a:r>
+          </a:p>
+        </p:txBody>
+      </p:sp>
+      <p:sp>
+        <p:nvSpPr>
+          <p:cNvPr id="10" name="Rounded Rectangle 9"/>
+          <p:cNvSpPr/>
+          <p:nvPr/>
+        </p:nvSpPr>
+        <p:spPr>
+          <a:xfrm>
+            <a:off x="6249924" y="2395728"/>
+            <a:ext cx="2503170" cy="1143000"/>
+          </a:xfrm>
+          <a:prstGeom prst="roundRect">
+            <a:avLst/>
+          </a:prstGeom>
+          <a:noFill/>
+          <a:ln w="12700">
+            <a:solidFill>
+              <a:srgbClr val="22D3EE"/>
+            </a:solidFill>
+          </a:ln>
+        </p:spPr>
+        <p:style>
+          <a:lnRef idx="1">
+            <a:schemeClr val="accent1"/>
+          </a:lnRef>
+          <a:fillRef idx="3">
+            <a:schemeClr val="accent1"/>
+          </a:fillRef>
+          <a:effectRef idx="2">
+            <a:schemeClr val="accent1"/>
+          </a:effectRef>
+          <a:fontRef idx="minor">
+            <a:schemeClr val="lt1"/>
+          </a:fontRef>
+        </p:style>
+        <p:txBody>
+          <a:bodyPr rtlCol="0" anchor="ctr"/>
+          <a:lstStyle/>
+          <a:p>
+            <a:pPr algn="ctr"/>
+            <a:r>
+              <a:rPr sz="3200" b="1">
+                <a:solidFill>
+                  <a:srgbClr val="22D3EE"/>
+                </a:solidFill>
+                <a:latin typeface="Consolas"/>
+              </a:rPr>
+              <a:t>12</a:t>
+            </a:r>
+          </a:p>
+          <a:p>
+            <a:pPr algn="ctr"/>
+            <a:r>
+              <a:rPr sz="1100" b="0">
+                <a:solidFill>
+                  <a:srgbClr val="6B7A90"/>
+                </a:solidFill>
+                <a:latin typeface="Consolas"/>
+              </a:rPr>
+              <a:t>VULN CLASSES</a:t>
+            </a:r>
+          </a:p>
+        </p:txBody>
+      </p:sp>
+      <p:sp>
+        <p:nvSpPr>
+          <p:cNvPr id="11" name="Rounded Rectangle 10"/>
+          <p:cNvSpPr/>
+          <p:nvPr/>
+        </p:nvSpPr>
+        <p:spPr>
+          <a:xfrm>
+            <a:off x="9073134" y="2395728"/>
+            <a:ext cx="2503170" cy="1143000"/>
+          </a:xfrm>
+          <a:prstGeom prst="roundRect">
+            <a:avLst/>
+          </a:prstGeom>
+          <a:noFill/>
+          <a:ln w="12700">
+            <a:solidFill>
+              <a:srgbClr val="22D3EE"/>
+            </a:solidFill>
+          </a:ln>
+        </p:spPr>
+        <p:style>
+          <a:lnRef idx="1">
+            <a:schemeClr val="accent1"/>
+          </a:lnRef>
+          <a:fillRef idx="3">
+            <a:schemeClr val="accent1"/>
+          </a:fillRef>
+          <a:effectRef idx="2">
+            <a:schemeClr val="accent1"/>
+          </a:effectRef>
+          <a:fontRef idx="minor">
+            <a:schemeClr val="lt1"/>
+          </a:fontRef>
+        </p:style>
+        <p:txBody>
+          <a:bodyPr rtlCol="0" anchor="ctr"/>
+          <a:lstStyle/>
+          <a:p>
+            <a:pPr algn="ctr"/>
+            <a:r>
+              <a:rPr sz="3200" b="1">
+                <a:solidFill>
+                  <a:srgbClr val="22D3EE"/>
+                </a:solidFill>
+                <a:latin typeface="Consolas"/>
+              </a:rPr>
+              <a:t>2</a:t>
+            </a:r>
+          </a:p>
+          <a:p>
+            <a:pPr algn="ctr"/>
+            <a:r>
+              <a:rPr sz="1100" b="0">
+                <a:solidFill>
+                  <a:srgbClr val="6B7A90"/>
+                </a:solidFill>
+                <a:latin typeface="Consolas"/>
+              </a:rPr>
+              <a:t>LIVE STACKS</a:t>
+            </a:r>
+          </a:p>
+        </p:txBody>
+      </p:sp>
+      <p:sp>
+        <p:nvSpPr>
+          <p:cNvPr id="12" name="TextBox 11"/>
           <p:cNvSpPr txBox="1"/>
           <p:nvPr/>
         </p:nvSpPr>
         <p:spPr>
           <a:xfrm>
-            <a:off x="713232" y="2697480"/>
+            <a:off x="713232" y="3840480"/>
             <a:ext cx="10789920" cy="3840480"/>
           </a:xfrm>
           <a:prstGeom prst="rect">
@@ -17043,11 +16151,11 @@
           <a:p>
             <a:pPr>
               <a:spcAft>
-                <a:spcPts val="1500"/>
+                <a:spcPts val="1000"/>
               </a:spcAft>
             </a:pPr>
             <a:r>
-              <a:rPr sz="1800" b="1">
+              <a:rPr sz="1700" b="1">
                 <a:solidFill>
                   <a:srgbClr val="2DD48F"/>
                 </a:solidFill>
@@ -17056,23 +16164,23 @@
               <a:t>»  </a:t>
             </a:r>
             <a:r>
-              <a:rPr sz="1800" b="0">
+              <a:rPr sz="1700" b="0">
                 <a:solidFill>
                   <a:srgbClr val="EAF2FF"/>
                 </a:solidFill>
                 <a:latin typeface="Segoe UI"/>
               </a:rPr>
-              <a:t>Today: 12 classes live end-to-end on 2 stacks; 311 tests</a:t>
+              <a:t>453 passing, 1 skipped (the opt-in live-browser path)</a:t>
             </a:r>
           </a:p>
           <a:p>
             <a:pPr>
               <a:spcAft>
-                <a:spcPts val="1500"/>
+                <a:spcPts val="1000"/>
               </a:spcAft>
             </a:pPr>
             <a:r>
-              <a:rPr sz="1800" b="1">
+              <a:rPr sz="1700" b="1">
                 <a:solidFill>
                   <a:srgbClr val="2DD48F"/>
                 </a:solidFill>
@@ -17081,23 +16189,23 @@
               <a:t>»  </a:t>
             </a:r>
             <a:r>
-              <a:rPr sz="1800" b="0">
+              <a:rPr sz="1700" b="0">
                 <a:solidFill>
                   <a:srgbClr val="EAF2FF"/>
                 </a:solidFill>
                 <a:latin typeface="Segoe UI"/>
               </a:rPr>
-              <a:t>Today: provable 2-link chaining (SQLi ⇒ IDOR), decoy-gated</a:t>
+              <a:t>Full offline suite is network-free and runs in seconds</a:t>
             </a:r>
           </a:p>
           <a:p>
             <a:pPr>
               <a:spcAft>
-                <a:spcPts val="1500"/>
+                <a:spcPts val="1000"/>
               </a:spcAft>
             </a:pPr>
             <a:r>
-              <a:rPr sz="1800" b="1">
+              <a:rPr sz="1700" b="1">
                 <a:solidFill>
                   <a:srgbClr val="2DD48F"/>
                 </a:solidFill>
@@ -17106,70 +16214,70 @@
               <a:t>»  </a:t>
             </a:r>
             <a:r>
-              <a:rPr sz="1800" b="0">
+              <a:rPr sz="1700" b="0">
                 <a:solidFill>
                   <a:srgbClr val="EAF2FF"/>
                 </a:solidFill>
                 <a:latin typeface="Segoe UI"/>
               </a:rPr>
-              <a:t>Today: Login Tester + authenticated reasoning</a:t>
+              <a:t>Each class: parse → CONFIRM → PATCH → PROVE, plus isolation</a:t>
             </a:r>
           </a:p>
           <a:p>
             <a:pPr>
               <a:spcAft>
-                <a:spcPts val="1500"/>
+                <a:spcPts val="1000"/>
               </a:spcAft>
             </a:pPr>
             <a:r>
-              <a:rPr sz="1800" b="1">
-                <a:solidFill>
-                  <a:srgbClr val="F5B301"/>
+              <a:rPr sz="1700" b="1">
+                <a:solidFill>
+                  <a:srgbClr val="2DD48F"/>
                 </a:solidFill>
                 <a:latin typeface="Segoe UI"/>
               </a:rPr>
               <a:t>»  </a:t>
             </a:r>
             <a:r>
-              <a:rPr sz="1800" b="0">
+              <a:rPr sz="1700" b="0">
                 <a:solidFill>
                   <a:srgbClr val="EAF2FF"/>
                 </a:solidFill>
                 <a:latin typeface="Segoe UI"/>
               </a:rPr>
-              <a:t>Next: multi-link chaining + deeper exploit composition</a:t>
+              <a:t>Live E2E validated on Juice Shop and VAmPI over real sockets</a:t>
             </a:r>
           </a:p>
           <a:p>
             <a:pPr>
               <a:spcAft>
-                <a:spcPts val="1500"/>
+                <a:spcPts val="1000"/>
               </a:spcAft>
             </a:pPr>
             <a:r>
-              <a:rPr sz="1800" b="1">
-                <a:solidFill>
-                  <a:srgbClr val="F5B301"/>
+              <a:rPr sz="1700" b="1">
+                <a:solidFill>
+                  <a:srgbClr val="22D3EE"/>
                 </a:solidFill>
                 <a:latin typeface="Segoe UI"/>
               </a:rPr>
               <a:t>»  </a:t>
             </a:r>
             <a:r>
-              <a:rPr sz="1800" b="0">
-                <a:solidFill>
-                  <a:srgbClr val="EAF2FF"/>
-                </a:solidFill>
-                <a:latin typeface="Segoe UI"/>
-              </a:rPr>
-              <a:t>Next: a policy library for common stacks + a CI/CD gate</a:t>
-            </a:r>
-          </a:p>
-        </p:txBody>
-      </p:sp>
-      <p:sp>
-        <p:nvSpPr>
-          <p:cNvPr id="9" name="TextBox 8"/>
+              <a:rPr sz="1700" b="0">
+                <a:solidFill>
+                  <a:srgbClr val="C4D2E4"/>
+                </a:solidFill>
+                <a:latin typeface="Segoe UI"/>
+              </a:rPr>
+              <a:t>Compliant-control tests assert the honest 'no finding' path</a:t>
+            </a:r>
+          </a:p>
+        </p:txBody>
+      </p:sp>
+      <p:sp>
+        <p:nvSpPr>
+          <p:cNvPr id="13" name="TextBox 12"/>
           <p:cNvSpPr txBox="1"/>
           <p:nvPr/>
         </p:nvSpPr>
@@ -17212,7 +16320,7 @@
       </p:sp>
       <p:sp>
         <p:nvSpPr>
-          <p:cNvPr id="10" name="TextBox 9"/>
+          <p:cNvPr id="14" name="TextBox 13"/>
           <p:cNvSpPr txBox="1"/>
           <p:nvPr/>
         </p:nvSpPr>
@@ -17240,7 +16348,7 @@
                 </a:solidFill>
                 <a:latin typeface="Consolas"/>
               </a:rPr>
-              <a:t>31 / 33</a:t>
+              <a:t>31 / 38</a:t>
             </a:r>
           </a:p>
         </p:txBody>
@@ -17392,7 +16500,7 @@
                 </a:solidFill>
                 <a:latin typeface="Consolas"/>
               </a:rPr>
-              <a:t>The Ask</a:t>
+              <a:t>Lightweight &amp; Local</a:t>
             </a:r>
           </a:p>
         </p:txBody>
@@ -17450,21 +16558,313 @@
                 </a:solidFill>
                 <a:latin typeface="Consolas"/>
               </a:rPr>
-              <a:t>$1M to turn a proven engine into a platform</a:t>
-            </a:r>
-          </a:p>
-        </p:txBody>
-      </p:sp>
-      <p:sp>
-        <p:nvSpPr>
-          <p:cNvPr id="8" name="Rounded Rectangle 7"/>
+              <a:t>Runs on a laptop; nothing leaves the box</a:t>
+            </a:r>
+          </a:p>
+        </p:txBody>
+      </p:sp>
+      <p:sp>
+        <p:nvSpPr>
+          <p:cNvPr id="8" name="TextBox 7"/>
+          <p:cNvSpPr txBox="1"/>
+          <p:nvPr/>
+        </p:nvSpPr>
+        <p:spPr>
+          <a:xfrm>
+            <a:off x="713232" y="2697480"/>
+            <a:ext cx="10789920" cy="3840480"/>
+          </a:xfrm>
+          <a:prstGeom prst="rect">
+            <a:avLst/>
+          </a:prstGeom>
+          <a:noFill/>
+        </p:spPr>
+        <p:txBody>
+          <a:bodyPr wrap="square" anchor="t" lIns="0" rIns="0" tIns="0" bIns="0">
+            <a:spAutoFit/>
+          </a:bodyPr>
+          <a:lstStyle/>
+          <a:p>
+            <a:pPr>
+              <a:spcAft>
+                <a:spcPts val="1500"/>
+              </a:spcAft>
+            </a:pPr>
+            <a:r>
+              <a:rPr sz="1800" b="1">
+                <a:solidFill>
+                  <a:srgbClr val="22D3EE"/>
+                </a:solidFill>
+                <a:latin typeface="Segoe UI"/>
+              </a:rPr>
+              <a:t>»  </a:t>
+            </a:r>
+            <a:r>
+              <a:rPr sz="1800" b="0">
+                <a:solidFill>
+                  <a:srgbClr val="C4D2E4"/>
+                </a:solidFill>
+                <a:latin typeface="Segoe UI"/>
+              </a:rPr>
+              <a:t>Local model via Ollama (qwen3:4b) — no cloud dependency</a:t>
+            </a:r>
+          </a:p>
+          <a:p>
+            <a:pPr>
+              <a:spcAft>
+                <a:spcPts val="1500"/>
+              </a:spcAft>
+            </a:pPr>
+            <a:r>
+              <a:rPr sz="1800" b="1">
+                <a:solidFill>
+                  <a:srgbClr val="22D3EE"/>
+                </a:solidFill>
+                <a:latin typeface="Segoe UI"/>
+              </a:rPr>
+              <a:t>»  </a:t>
+            </a:r>
+            <a:r>
+              <a:rPr sz="1800" b="0">
+                <a:solidFill>
+                  <a:srgbClr val="C4D2E4"/>
+                </a:solidFill>
+                <a:latin typeface="Segoe UI"/>
+              </a:rPr>
+              <a:t>Core install is lightweight; Playwright is an opt-in extra</a:t>
+            </a:r>
+          </a:p>
+          <a:p>
+            <a:pPr>
+              <a:spcAft>
+                <a:spcPts val="1500"/>
+              </a:spcAft>
+            </a:pPr>
+            <a:r>
+              <a:rPr sz="1800" b="1">
+                <a:solidFill>
+                  <a:srgbClr val="22D3EE"/>
+                </a:solidFill>
+                <a:latin typeface="Segoe UI"/>
+              </a:rPr>
+              <a:t>»  </a:t>
+            </a:r>
+            <a:r>
+              <a:rPr sz="1800" b="0">
+                <a:solidFill>
+                  <a:srgbClr val="C4D2E4"/>
+                </a:solidFill>
+                <a:latin typeface="Segoe UI"/>
+              </a:rPr>
+              <a:t>No customer data or target traffic egresses anywhere</a:t>
+            </a:r>
+          </a:p>
+          <a:p>
+            <a:pPr>
+              <a:spcAft>
+                <a:spcPts val="1500"/>
+              </a:spcAft>
+            </a:pPr>
+            <a:r>
+              <a:rPr sz="1800" b="1">
+                <a:solidFill>
+                  <a:srgbClr val="22D3EE"/>
+                </a:solidFill>
+                <a:latin typeface="Segoe UI"/>
+              </a:rPr>
+              <a:t>»  </a:t>
+            </a:r>
+            <a:r>
+              <a:rPr sz="1800" b="0">
+                <a:solidFill>
+                  <a:srgbClr val="C4D2E4"/>
+                </a:solidFill>
+                <a:latin typeface="Segoe UI"/>
+              </a:rPr>
+              <a:t>Deterministic core runs even with the model offline</a:t>
+            </a:r>
+          </a:p>
+          <a:p>
+            <a:pPr>
+              <a:spcAft>
+                <a:spcPts val="1500"/>
+              </a:spcAft>
+            </a:pPr>
+            <a:r>
+              <a:rPr sz="1800" b="1">
+                <a:solidFill>
+                  <a:srgbClr val="22D3EE"/>
+                </a:solidFill>
+                <a:latin typeface="Segoe UI"/>
+              </a:rPr>
+              <a:t>»  </a:t>
+            </a:r>
+            <a:r>
+              <a:rPr sz="1800" b="0">
+                <a:solidFill>
+                  <a:srgbClr val="C4D2E4"/>
+                </a:solidFill>
+                <a:latin typeface="Segoe UI"/>
+              </a:rPr>
+              <a:t>Deploys air-gapped — ideal for regulated environments</a:t>
+            </a:r>
+          </a:p>
+        </p:txBody>
+      </p:sp>
+      <p:sp>
+        <p:nvSpPr>
+          <p:cNvPr id="9" name="TextBox 8"/>
+          <p:cNvSpPr txBox="1"/>
+          <p:nvPr/>
+        </p:nvSpPr>
+        <p:spPr>
+          <a:xfrm>
+            <a:off x="566928" y="6382512"/>
+            <a:ext cx="8229600" cy="365760"/>
+          </a:xfrm>
+          <a:prstGeom prst="rect">
+            <a:avLst/>
+          </a:prstGeom>
+          <a:noFill/>
+        </p:spPr>
+        <p:txBody>
+          <a:bodyPr wrap="square" anchor="t" lIns="0" rIns="0" tIns="0" bIns="0">
+            <a:spAutoFit/>
+          </a:bodyPr>
+          <a:lstStyle/>
+          <a:p>
+            <a:r>
+              <a:rPr sz="1000" b="1">
+                <a:solidFill>
+                  <a:srgbClr val="22D3EE"/>
+                </a:solidFill>
+                <a:latin typeface="Consolas"/>
+              </a:rPr>
+              <a:t>SENTINEL</a:t>
+            </a:r>
+            <a:r>
+              <a:rPr sz="1000" b="0">
+                <a:solidFill>
+                  <a:srgbClr val="6B7A90"/>
+                </a:solidFill>
+                <a:latin typeface="Consolas"/>
+              </a:rPr>
+              <a:t>   ·   find → reason → prove → patch → prove</a:t>
+            </a:r>
+          </a:p>
+        </p:txBody>
+      </p:sp>
+      <p:sp>
+        <p:nvSpPr>
+          <p:cNvPr id="10" name="TextBox 9"/>
+          <p:cNvSpPr txBox="1"/>
+          <p:nvPr/>
+        </p:nvSpPr>
+        <p:spPr>
+          <a:xfrm>
+            <a:off x="10789920" y="6382512"/>
+            <a:ext cx="914400" cy="365760"/>
+          </a:xfrm>
+          <a:prstGeom prst="rect">
+            <a:avLst/>
+          </a:prstGeom>
+          <a:noFill/>
+        </p:spPr>
+        <p:txBody>
+          <a:bodyPr wrap="square" anchor="t" lIns="0" rIns="0" tIns="0" bIns="0">
+            <a:spAutoFit/>
+          </a:bodyPr>
+          <a:lstStyle/>
+          <a:p>
+            <a:pPr algn="r"/>
+            <a:r>
+              <a:rPr sz="1000" b="0">
+                <a:solidFill>
+                  <a:srgbClr val="6B7A90"/>
+                </a:solidFill>
+                <a:latin typeface="Consolas"/>
+              </a:rPr>
+              <a:t>32 / 38</a:t>
+            </a:r>
+          </a:p>
+        </p:txBody>
+      </p:sp>
+    </p:spTree>
+  </p:cSld>
+  <p:clrMapOvr>
+    <a:masterClrMapping/>
+  </p:clrMapOvr>
+</p:sld>
+</file>
+
+<file path=ppt/slides/slide33.xml><?xml version="1.0" encoding="utf-8"?>
+<p:sld xmlns:a="http://schemas.openxmlformats.org/drawingml/2006/main" xmlns:p="http://schemas.openxmlformats.org/presentationml/2006/main" xmlns:r="http://schemas.openxmlformats.org/officeDocument/2006/relationships">
+  <p:cSld>
+    <p:spTree>
+      <p:nvGrpSpPr>
+        <p:cNvPr id="1" name=""/>
+        <p:cNvGrpSpPr/>
+        <p:nvPr/>
+      </p:nvGrpSpPr>
+      <p:grpSpPr/>
+      <p:pic>
+        <p:nvPicPr>
+          <p:cNvPr id="2" name="Picture 1" descr="deck_bg.png"/>
+          <p:cNvPicPr>
+            <a:picLocks noChangeAspect="1"/>
+          </p:cNvPicPr>
+          <p:nvPr/>
+        </p:nvPicPr>
+        <p:blipFill>
+          <a:blip r:embed="rId2"/>
+          <a:stretch>
+            <a:fillRect/>
+          </a:stretch>
+        </p:blipFill>
+        <p:spPr>
+          <a:xfrm>
+            <a:off x="0" y="0"/>
+            <a:ext cx="12191695" cy="6858000"/>
+          </a:xfrm>
+          <a:prstGeom prst="rect">
+            <a:avLst/>
+          </a:prstGeom>
+        </p:spPr>
+      </p:pic>
+      <p:pic>
+        <p:nvPicPr>
+          <p:cNvPr id="3" name="Picture 2" descr="sentinel_mark.png"/>
+          <p:cNvPicPr>
+            <a:picLocks noChangeAspect="1"/>
+          </p:cNvPicPr>
+          <p:nvPr/>
+        </p:nvPicPr>
+        <p:blipFill>
+          <a:blip r:embed="rId3"/>
+          <a:stretch>
+            <a:fillRect/>
+          </a:stretch>
+        </p:blipFill>
+        <p:spPr>
+          <a:xfrm>
+            <a:off x="566928" y="457200"/>
+            <a:ext cx="749808" cy="749808"/>
+          </a:xfrm>
+          <a:prstGeom prst="rect">
+            <a:avLst/>
+          </a:prstGeom>
+        </p:spPr>
+      </p:pic>
+      <p:sp>
+        <p:nvSpPr>
+          <p:cNvPr id="4" name="Rounded Rectangle 3"/>
           <p:cNvSpPr/>
           <p:nvPr/>
         </p:nvSpPr>
         <p:spPr>
           <a:xfrm>
-            <a:off x="603504" y="2395728"/>
-            <a:ext cx="3444240" cy="1143000"/>
+            <a:off x="10195560" y="457200"/>
+            <a:ext cx="1554480" cy="384048"/>
           </a:xfrm>
           <a:prstGeom prst="roundRect">
             <a:avLst/>
@@ -17491,44 +16891,416 @@
           </a:fontRef>
         </p:style>
         <p:txBody>
-          <a:bodyPr rtlCol="0" anchor="ctr"/>
+          <a:bodyPr rtlCol="0" anchor="ctr" tIns="0" bIns="0"/>
           <a:lstStyle/>
           <a:p>
             <a:pPr algn="ctr"/>
             <a:r>
-              <a:rPr sz="3200" b="1">
+              <a:rPr sz="1200" b="1">
                 <a:solidFill>
                   <a:srgbClr val="22D3EE"/>
                 </a:solidFill>
                 <a:latin typeface="Consolas"/>
               </a:rPr>
-              <a:t>$1M</a:t>
-            </a:r>
-          </a:p>
-          <a:p>
-            <a:pPr algn="ctr"/>
-            <a:r>
-              <a:rPr sz="1100" b="0">
+              <a:t>AI KAVACH</a:t>
+            </a:r>
+          </a:p>
+        </p:txBody>
+      </p:sp>
+      <p:sp>
+        <p:nvSpPr>
+          <p:cNvPr id="5" name="TextBox 4"/>
+          <p:cNvSpPr txBox="1"/>
+          <p:nvPr/>
+        </p:nvSpPr>
+        <p:spPr>
+          <a:xfrm>
+            <a:off x="1508760" y="475488"/>
+            <a:ext cx="8503920" cy="1051560"/>
+          </a:xfrm>
+          <a:prstGeom prst="rect">
+            <a:avLst/>
+          </a:prstGeom>
+          <a:noFill/>
+        </p:spPr>
+        <p:txBody>
+          <a:bodyPr wrap="square" anchor="ctr" lIns="0" rIns="0" tIns="0" bIns="0">
+            <a:spAutoFit/>
+          </a:bodyPr>
+          <a:lstStyle/>
+          <a:p>
+            <a:r>
+              <a:rPr sz="3100" b="1">
+                <a:solidFill>
+                  <a:srgbClr val="EAF2FF"/>
+                </a:solidFill>
+                <a:latin typeface="Consolas"/>
+              </a:rPr>
+              <a:t>Safety &amp; Bounded Autonomy</a:t>
+            </a:r>
+          </a:p>
+        </p:txBody>
+      </p:sp>
+      <p:pic>
+        <p:nvPicPr>
+          <p:cNvPr id="6" name="Picture 5" descr="deck_rule.png"/>
+          <p:cNvPicPr>
+            <a:picLocks noChangeAspect="1"/>
+          </p:cNvPicPr>
+          <p:nvPr/>
+        </p:nvPicPr>
+        <p:blipFill>
+          <a:blip r:embed="rId4"/>
+          <a:stretch>
+            <a:fillRect/>
+          </a:stretch>
+        </p:blipFill>
+        <p:spPr>
+          <a:xfrm>
+            <a:off x="640080" y="1664208"/>
+            <a:ext cx="3108960" cy="56692"/>
+          </a:xfrm>
+          <a:prstGeom prst="rect">
+            <a:avLst/>
+          </a:prstGeom>
+        </p:spPr>
+      </p:pic>
+      <p:sp>
+        <p:nvSpPr>
+          <p:cNvPr id="7" name="TextBox 6"/>
+          <p:cNvSpPr txBox="1"/>
+          <p:nvPr/>
+        </p:nvSpPr>
+        <p:spPr>
+          <a:xfrm>
+            <a:off x="658368" y="1847088"/>
+            <a:ext cx="10881360" cy="548640"/>
+          </a:xfrm>
+          <a:prstGeom prst="rect">
+            <a:avLst/>
+          </a:prstGeom>
+          <a:noFill/>
+        </p:spPr>
+        <p:txBody>
+          <a:bodyPr wrap="square" anchor="t" lIns="0" rIns="0" tIns="0" bIns="0">
+            <a:spAutoFit/>
+          </a:bodyPr>
+          <a:lstStyle/>
+          <a:p>
+            <a:r>
+              <a:rPr sz="1600" b="0">
+                <a:solidFill>
+                  <a:srgbClr val="22D3EE"/>
+                </a:solidFill>
+                <a:latin typeface="Consolas"/>
+              </a:rPr>
+              <a:t>Safe by construction</a:t>
+            </a:r>
+          </a:p>
+        </p:txBody>
+      </p:sp>
+      <p:sp>
+        <p:nvSpPr>
+          <p:cNvPr id="8" name="TextBox 7"/>
+          <p:cNvSpPr txBox="1"/>
+          <p:nvPr/>
+        </p:nvSpPr>
+        <p:spPr>
+          <a:xfrm>
+            <a:off x="713232" y="2697480"/>
+            <a:ext cx="10789920" cy="3840480"/>
+          </a:xfrm>
+          <a:prstGeom prst="rect">
+            <a:avLst/>
+          </a:prstGeom>
+          <a:noFill/>
+        </p:spPr>
+        <p:txBody>
+          <a:bodyPr wrap="square" anchor="t" lIns="0" rIns="0" tIns="0" bIns="0">
+            <a:spAutoFit/>
+          </a:bodyPr>
+          <a:lstStyle/>
+          <a:p>
+            <a:pPr>
+              <a:spcAft>
+                <a:spcPts val="1500"/>
+              </a:spcAft>
+            </a:pPr>
+            <a:r>
+              <a:rPr sz="1800" b="1">
+                <a:solidFill>
+                  <a:srgbClr val="2DD48F"/>
+                </a:solidFill>
+                <a:latin typeface="Segoe UI"/>
+              </a:rPr>
+              <a:t>»  </a:t>
+            </a:r>
+            <a:r>
+              <a:rPr sz="1800" b="0">
+                <a:solidFill>
+                  <a:srgbClr val="EAF2FF"/>
+                </a:solidFill>
+                <a:latin typeface="Segoe UI"/>
+              </a:rPr>
+              <a:t>Pre-connection scope guard — out-of-scope probes refused</a:t>
+            </a:r>
+          </a:p>
+          <a:p>
+            <a:pPr>
+              <a:spcAft>
+                <a:spcPts val="1500"/>
+              </a:spcAft>
+            </a:pPr>
+            <a:r>
+              <a:rPr sz="1800" b="1">
+                <a:solidFill>
+                  <a:srgbClr val="2DD48F"/>
+                </a:solidFill>
+                <a:latin typeface="Segoe UI"/>
+              </a:rPr>
+              <a:t>»  </a:t>
+            </a:r>
+            <a:r>
+              <a:rPr sz="1800" b="0">
+                <a:solidFill>
+                  <a:srgbClr val="EAF2FF"/>
+                </a:solidFill>
+                <a:latin typeface="Segoe UI"/>
+              </a:rPr>
+              <a:t>Probes are local, bounded, and non-destructive</a:t>
+            </a:r>
+          </a:p>
+          <a:p>
+            <a:pPr>
+              <a:spcAft>
+                <a:spcPts val="1500"/>
+              </a:spcAft>
+            </a:pPr>
+            <a:r>
+              <a:rPr sz="1800" b="1">
+                <a:solidFill>
+                  <a:srgbClr val="2DD48F"/>
+                </a:solidFill>
+                <a:latin typeface="Segoe UI"/>
+              </a:rPr>
+              <a:t>»  </a:t>
+            </a:r>
+            <a:r>
+              <a:rPr sz="1800" b="0">
+                <a:solidFill>
+                  <a:srgbClr val="EAF2FF"/>
+                </a:solidFill>
+                <a:latin typeface="Segoe UI"/>
+              </a:rPr>
+              <a:t>The enforcer shield is ephemeral and loopback-only (SSRF-safe)</a:t>
+            </a:r>
+          </a:p>
+          <a:p>
+            <a:pPr>
+              <a:spcAft>
+                <a:spcPts val="1500"/>
+              </a:spcAft>
+            </a:pPr>
+            <a:r>
+              <a:rPr sz="1800" b="1">
+                <a:solidFill>
+                  <a:srgbClr val="2DD48F"/>
+                </a:solidFill>
+                <a:latin typeface="Segoe UI"/>
+              </a:rPr>
+              <a:t>»  </a:t>
+            </a:r>
+            <a:r>
+              <a:rPr sz="1800" b="0">
+                <a:solidFill>
+                  <a:srgbClr val="EAF2FF"/>
+                </a:solidFill>
+                <a:latin typeface="Segoe UI"/>
+              </a:rPr>
+              <a:t>Nothing both acts and judges — stages are separated</a:t>
+            </a:r>
+          </a:p>
+          <a:p>
+            <a:pPr>
+              <a:spcAft>
+                <a:spcPts val="1500"/>
+              </a:spcAft>
+            </a:pPr>
+            <a:r>
+              <a:rPr sz="1800" b="1">
+                <a:solidFill>
+                  <a:srgbClr val="E84BFF"/>
+                </a:solidFill>
+                <a:latin typeface="Segoe UI"/>
+              </a:rPr>
+              <a:t>»  </a:t>
+            </a:r>
+            <a:r>
+              <a:rPr sz="1800" b="0">
+                <a:solidFill>
+                  <a:srgbClr val="C4D2E4"/>
+                </a:solidFill>
+                <a:latin typeface="Segoe UI"/>
+              </a:rPr>
+              <a:t>Credentials never persisted or logged; in-memory per run</a:t>
+            </a:r>
+          </a:p>
+        </p:txBody>
+      </p:sp>
+      <p:sp>
+        <p:nvSpPr>
+          <p:cNvPr id="9" name="TextBox 8"/>
+          <p:cNvSpPr txBox="1"/>
+          <p:nvPr/>
+        </p:nvSpPr>
+        <p:spPr>
+          <a:xfrm>
+            <a:off x="566928" y="6382512"/>
+            <a:ext cx="8229600" cy="365760"/>
+          </a:xfrm>
+          <a:prstGeom prst="rect">
+            <a:avLst/>
+          </a:prstGeom>
+          <a:noFill/>
+        </p:spPr>
+        <p:txBody>
+          <a:bodyPr wrap="square" anchor="t" lIns="0" rIns="0" tIns="0" bIns="0">
+            <a:spAutoFit/>
+          </a:bodyPr>
+          <a:lstStyle/>
+          <a:p>
+            <a:r>
+              <a:rPr sz="1000" b="1">
+                <a:solidFill>
+                  <a:srgbClr val="22D3EE"/>
+                </a:solidFill>
+                <a:latin typeface="Consolas"/>
+              </a:rPr>
+              <a:t>SENTINEL</a:t>
+            </a:r>
+            <a:r>
+              <a:rPr sz="1000" b="0">
                 <a:solidFill>
                   <a:srgbClr val="6B7A90"/>
                 </a:solidFill>
                 <a:latin typeface="Consolas"/>
               </a:rPr>
-              <a:t>SEED</a:t>
-            </a:r>
-          </a:p>
-        </p:txBody>
-      </p:sp>
-      <p:sp>
-        <p:nvSpPr>
-          <p:cNvPr id="9" name="Rounded Rectangle 8"/>
+              <a:t>   ·   find → reason → prove → patch → prove</a:t>
+            </a:r>
+          </a:p>
+        </p:txBody>
+      </p:sp>
+      <p:sp>
+        <p:nvSpPr>
+          <p:cNvPr id="10" name="TextBox 9"/>
+          <p:cNvSpPr txBox="1"/>
+          <p:nvPr/>
+        </p:nvSpPr>
+        <p:spPr>
+          <a:xfrm>
+            <a:off x="10789920" y="6382512"/>
+            <a:ext cx="914400" cy="365760"/>
+          </a:xfrm>
+          <a:prstGeom prst="rect">
+            <a:avLst/>
+          </a:prstGeom>
+          <a:noFill/>
+        </p:spPr>
+        <p:txBody>
+          <a:bodyPr wrap="square" anchor="t" lIns="0" rIns="0" tIns="0" bIns="0">
+            <a:spAutoFit/>
+          </a:bodyPr>
+          <a:lstStyle/>
+          <a:p>
+            <a:pPr algn="r"/>
+            <a:r>
+              <a:rPr sz="1000" b="0">
+                <a:solidFill>
+                  <a:srgbClr val="6B7A90"/>
+                </a:solidFill>
+                <a:latin typeface="Consolas"/>
+              </a:rPr>
+              <a:t>33 / 38</a:t>
+            </a:r>
+          </a:p>
+        </p:txBody>
+      </p:sp>
+    </p:spTree>
+  </p:cSld>
+  <p:clrMapOvr>
+    <a:masterClrMapping/>
+  </p:clrMapOvr>
+</p:sld>
+</file>
+
+<file path=ppt/slides/slide34.xml><?xml version="1.0" encoding="utf-8"?>
+<p:sld xmlns:a="http://schemas.openxmlformats.org/drawingml/2006/main" xmlns:p="http://schemas.openxmlformats.org/presentationml/2006/main" xmlns:r="http://schemas.openxmlformats.org/officeDocument/2006/relationships">
+  <p:cSld>
+    <p:spTree>
+      <p:nvGrpSpPr>
+        <p:cNvPr id="1" name=""/>
+        <p:cNvGrpSpPr/>
+        <p:nvPr/>
+      </p:nvGrpSpPr>
+      <p:grpSpPr/>
+      <p:pic>
+        <p:nvPicPr>
+          <p:cNvPr id="2" name="Picture 1" descr="deck_bg.png"/>
+          <p:cNvPicPr>
+            <a:picLocks noChangeAspect="1"/>
+          </p:cNvPicPr>
+          <p:nvPr/>
+        </p:nvPicPr>
+        <p:blipFill>
+          <a:blip r:embed="rId2"/>
+          <a:stretch>
+            <a:fillRect/>
+          </a:stretch>
+        </p:blipFill>
+        <p:spPr>
+          <a:xfrm>
+            <a:off x="0" y="0"/>
+            <a:ext cx="12191695" cy="6858000"/>
+          </a:xfrm>
+          <a:prstGeom prst="rect">
+            <a:avLst/>
+          </a:prstGeom>
+        </p:spPr>
+      </p:pic>
+      <p:pic>
+        <p:nvPicPr>
+          <p:cNvPr id="3" name="Picture 2" descr="sentinel_mark.png"/>
+          <p:cNvPicPr>
+            <a:picLocks noChangeAspect="1"/>
+          </p:cNvPicPr>
+          <p:nvPr/>
+        </p:nvPicPr>
+        <p:blipFill>
+          <a:blip r:embed="rId3"/>
+          <a:stretch>
+            <a:fillRect/>
+          </a:stretch>
+        </p:blipFill>
+        <p:spPr>
+          <a:xfrm>
+            <a:off x="566928" y="457200"/>
+            <a:ext cx="749808" cy="749808"/>
+          </a:xfrm>
+          <a:prstGeom prst="rect">
+            <a:avLst/>
+          </a:prstGeom>
+        </p:spPr>
+      </p:pic>
+      <p:sp>
+        <p:nvSpPr>
+          <p:cNvPr id="4" name="Rounded Rectangle 3"/>
           <p:cNvSpPr/>
           <p:nvPr/>
         </p:nvSpPr>
         <p:spPr>
           <a:xfrm>
-            <a:off x="4367784" y="2395728"/>
-            <a:ext cx="3444240" cy="1143000"/>
+            <a:off x="10195560" y="457200"/>
+            <a:ext cx="1554480" cy="384048"/>
           </a:xfrm>
           <a:prstGeom prst="roundRect">
             <a:avLst/>
@@ -17555,54 +17327,264 @@
           </a:fontRef>
         </p:style>
         <p:txBody>
-          <a:bodyPr rtlCol="0" anchor="ctr"/>
+          <a:bodyPr rtlCol="0" anchor="ctr" tIns="0" bIns="0"/>
           <a:lstStyle/>
           <a:p>
             <a:pPr algn="ctr"/>
             <a:r>
-              <a:rPr sz="3200" b="1">
+              <a:rPr sz="1200" b="1">
                 <a:solidFill>
                   <a:srgbClr val="22D3EE"/>
                 </a:solidFill>
                 <a:latin typeface="Consolas"/>
               </a:rPr>
-              <a:t>18</a:t>
-            </a:r>
-          </a:p>
+              <a:t>AI KAVACH</a:t>
+            </a:r>
+          </a:p>
+        </p:txBody>
+      </p:sp>
+      <p:sp>
+        <p:nvSpPr>
+          <p:cNvPr id="5" name="TextBox 4"/>
+          <p:cNvSpPr txBox="1"/>
+          <p:nvPr/>
+        </p:nvSpPr>
+        <p:spPr>
+          <a:xfrm>
+            <a:off x="1508760" y="475488"/>
+            <a:ext cx="8503920" cy="1051560"/>
+          </a:xfrm>
+          <a:prstGeom prst="rect">
+            <a:avLst/>
+          </a:prstGeom>
+          <a:noFill/>
+        </p:spPr>
+        <p:txBody>
+          <a:bodyPr wrap="square" anchor="ctr" lIns="0" rIns="0" tIns="0" bIns="0">
+            <a:spAutoFit/>
+          </a:bodyPr>
+          <a:lstStyle/>
+          <a:p>
+            <a:r>
+              <a:rPr sz="3100" b="1">
+                <a:solidFill>
+                  <a:srgbClr val="EAF2FF"/>
+                </a:solidFill>
+                <a:latin typeface="Consolas"/>
+              </a:rPr>
+              <a:t>Market Landscape</a:t>
+            </a:r>
+          </a:p>
+        </p:txBody>
+      </p:sp>
+      <p:pic>
+        <p:nvPicPr>
+          <p:cNvPr id="6" name="Picture 5" descr="deck_rule.png"/>
+          <p:cNvPicPr>
+            <a:picLocks noChangeAspect="1"/>
+          </p:cNvPicPr>
+          <p:nvPr/>
+        </p:nvPicPr>
+        <p:blipFill>
+          <a:blip r:embed="rId4"/>
+          <a:stretch>
+            <a:fillRect/>
+          </a:stretch>
+        </p:blipFill>
+        <p:spPr>
+          <a:xfrm>
+            <a:off x="640080" y="1664208"/>
+            <a:ext cx="3108960" cy="56692"/>
+          </a:xfrm>
+          <a:prstGeom prst="rect">
+            <a:avLst/>
+          </a:prstGeom>
+        </p:spPr>
+      </p:pic>
+      <p:sp>
+        <p:nvSpPr>
+          <p:cNvPr id="7" name="TextBox 6"/>
+          <p:cNvSpPr txBox="1"/>
+          <p:nvPr/>
+        </p:nvSpPr>
+        <p:spPr>
+          <a:xfrm>
+            <a:off x="658368" y="1847088"/>
+            <a:ext cx="10881360" cy="548640"/>
+          </a:xfrm>
+          <a:prstGeom prst="rect">
+            <a:avLst/>
+          </a:prstGeom>
+          <a:noFill/>
+        </p:spPr>
+        <p:txBody>
+          <a:bodyPr wrap="square" anchor="t" lIns="0" rIns="0" tIns="0" bIns="0">
+            <a:spAutoFit/>
+          </a:bodyPr>
+          <a:lstStyle/>
+          <a:p>
+            <a:r>
+              <a:rPr sz="1600" b="0">
+                <a:solidFill>
+                  <a:srgbClr val="22D3EE"/>
+                </a:solidFill>
+                <a:latin typeface="Consolas"/>
+              </a:rPr>
+              <a:t>Where autonomous, provable reasoning fits</a:t>
+            </a:r>
+          </a:p>
+        </p:txBody>
+      </p:sp>
+      <p:sp>
+        <p:nvSpPr>
+          <p:cNvPr id="8" name="TextBox 7"/>
+          <p:cNvSpPr txBox="1"/>
+          <p:nvPr/>
+        </p:nvSpPr>
+        <p:spPr>
+          <a:xfrm>
+            <a:off x="6537960" y="2395728"/>
+            <a:ext cx="1691640" cy="640080"/>
+          </a:xfrm>
+          <a:prstGeom prst="rect">
+            <a:avLst/>
+          </a:prstGeom>
+          <a:noFill/>
+        </p:spPr>
+        <p:txBody>
+          <a:bodyPr wrap="square" anchor="b" lIns="0" rIns="0" tIns="0" bIns="0">
+            <a:spAutoFit/>
+          </a:bodyPr>
+          <a:lstStyle/>
           <a:p>
             <a:pPr algn="ctr"/>
             <a:r>
-              <a:rPr sz="1100" b="0">
-                <a:solidFill>
-                  <a:srgbClr val="6B7A90"/>
+              <a:rPr sz="1200" b="1">
+                <a:solidFill>
+                  <a:srgbClr val="EAF2FF"/>
                 </a:solidFill>
                 <a:latin typeface="Consolas"/>
               </a:rPr>
-              <a:t>MONTHS RUNWAY</a:t>
-            </a:r>
-          </a:p>
-        </p:txBody>
-      </p:sp>
-      <p:sp>
-        <p:nvSpPr>
-          <p:cNvPr id="10" name="Rounded Rectangle 9"/>
+              <a:t>Signature</a:t>
+            </a:r>
+          </a:p>
+          <a:p>
+            <a:pPr algn="ctr"/>
+            <a:r>
+              <a:rPr sz="1200" b="1">
+                <a:solidFill>
+                  <a:srgbClr val="EAF2FF"/>
+                </a:solidFill>
+                <a:latin typeface="Consolas"/>
+              </a:rPr>
+              <a:t>scanners</a:t>
+            </a:r>
+          </a:p>
+        </p:txBody>
+      </p:sp>
+      <p:sp>
+        <p:nvSpPr>
+          <p:cNvPr id="9" name="TextBox 8"/>
+          <p:cNvSpPr txBox="1"/>
+          <p:nvPr/>
+        </p:nvSpPr>
+        <p:spPr>
+          <a:xfrm>
+            <a:off x="8229600" y="2395728"/>
+            <a:ext cx="1691640" cy="640080"/>
+          </a:xfrm>
+          <a:prstGeom prst="rect">
+            <a:avLst/>
+          </a:prstGeom>
+          <a:noFill/>
+        </p:spPr>
+        <p:txBody>
+          <a:bodyPr wrap="square" anchor="b" lIns="0" rIns="0" tIns="0" bIns="0">
+            <a:spAutoFit/>
+          </a:bodyPr>
+          <a:lstStyle/>
+          <a:p>
+            <a:pPr algn="ctr"/>
+            <a:r>
+              <a:rPr sz="1200" b="1">
+                <a:solidFill>
+                  <a:srgbClr val="EAF2FF"/>
+                </a:solidFill>
+                <a:latin typeface="Consolas"/>
+              </a:rPr>
+              <a:t>DAST /</a:t>
+            </a:r>
+          </a:p>
+          <a:p>
+            <a:pPr algn="ctr"/>
+            <a:r>
+              <a:rPr sz="1200" b="1">
+                <a:solidFill>
+                  <a:srgbClr val="EAF2FF"/>
+                </a:solidFill>
+                <a:latin typeface="Consolas"/>
+              </a:rPr>
+              <a:t>fuzzers</a:t>
+            </a:r>
+          </a:p>
+        </p:txBody>
+      </p:sp>
+      <p:sp>
+        <p:nvSpPr>
+          <p:cNvPr id="10" name="TextBox 9"/>
+          <p:cNvSpPr txBox="1"/>
+          <p:nvPr/>
+        </p:nvSpPr>
+        <p:spPr>
+          <a:xfrm>
+            <a:off x="9921240" y="2395728"/>
+            <a:ext cx="1691640" cy="640080"/>
+          </a:xfrm>
+          <a:prstGeom prst="rect">
+            <a:avLst/>
+          </a:prstGeom>
+          <a:noFill/>
+        </p:spPr>
+        <p:txBody>
+          <a:bodyPr wrap="square" anchor="b" lIns="0" rIns="0" tIns="0" bIns="0">
+            <a:spAutoFit/>
+          </a:bodyPr>
+          <a:lstStyle/>
+          <a:p>
+            <a:pPr algn="ctr"/>
+            <a:r>
+              <a:rPr sz="1200" b="1">
+                <a:solidFill>
+                  <a:srgbClr val="EAF2FF"/>
+                </a:solidFill>
+                <a:latin typeface="Consolas"/>
+              </a:rPr>
+              <a:t>Sentinel</a:t>
+            </a:r>
+          </a:p>
+        </p:txBody>
+      </p:sp>
+      <p:sp>
+        <p:nvSpPr>
+          <p:cNvPr id="11" name="Rectangle 10"/>
           <p:cNvSpPr/>
           <p:nvPr/>
         </p:nvSpPr>
         <p:spPr>
           <a:xfrm>
-            <a:off x="8132064" y="2395728"/>
-            <a:ext cx="3444240" cy="1143000"/>
-          </a:xfrm>
-          <a:prstGeom prst="roundRect">
-            <a:avLst/>
-          </a:prstGeom>
-          <a:noFill/>
-          <a:ln w="12700">
-            <a:solidFill>
-              <a:srgbClr val="22D3EE"/>
-            </a:solidFill>
+            <a:off x="548640" y="3108960"/>
+            <a:ext cx="11064240" cy="475488"/>
+          </a:xfrm>
+          <a:prstGeom prst="rect">
+            <a:avLst/>
+          </a:prstGeom>
+          <a:solidFill>
+            <a:srgbClr val="101724"/>
+          </a:solidFill>
+          <a:ln>
+            <a:noFill/>
           </a:ln>
+          <a:effectLst/>
         </p:spPr>
         <p:style>
           <a:lnRef idx="1">
@@ -17623,40 +17605,941 @@
           <a:lstStyle/>
           <a:p>
             <a:pPr algn="ctr"/>
-            <a:r>
-              <a:rPr sz="3200" b="1">
-                <a:solidFill>
-                  <a:srgbClr val="22D3EE"/>
-                </a:solidFill>
-                <a:latin typeface="Consolas"/>
-              </a:rPr>
-              <a:t>12→18+</a:t>
-            </a:r>
-          </a:p>
+          </a:p>
+        </p:txBody>
+      </p:sp>
+      <p:sp>
+        <p:nvSpPr>
+          <p:cNvPr id="12" name="TextBox 11"/>
+          <p:cNvSpPr txBox="1"/>
+          <p:nvPr/>
+        </p:nvSpPr>
+        <p:spPr>
+          <a:xfrm>
+            <a:off x="658368" y="3108960"/>
+            <a:ext cx="5669280" cy="475488"/>
+          </a:xfrm>
+          <a:prstGeom prst="rect">
+            <a:avLst/>
+          </a:prstGeom>
+          <a:noFill/>
+        </p:spPr>
+        <p:txBody>
+          <a:bodyPr wrap="square" anchor="ctr" lIns="0" rIns="0" tIns="0" bIns="0">
+            <a:spAutoFit/>
+          </a:bodyPr>
+          <a:lstStyle/>
+          <a:p>
+            <a:r>
+              <a:rPr sz="1400" b="0">
+                <a:solidFill>
+                  <a:srgbClr val="C4D2E4"/>
+                </a:solidFill>
+                <a:latin typeface="Segoe UI"/>
+              </a:rPr>
+              <a:t>Finds authorization / BOLA flaws</a:t>
+            </a:r>
+          </a:p>
+        </p:txBody>
+      </p:sp>
+      <p:sp>
+        <p:nvSpPr>
+          <p:cNvPr id="13" name="TextBox 12"/>
+          <p:cNvSpPr txBox="1"/>
+          <p:nvPr/>
+        </p:nvSpPr>
+        <p:spPr>
+          <a:xfrm>
+            <a:off x="6537960" y="3108960"/>
+            <a:ext cx="1691640" cy="475488"/>
+          </a:xfrm>
+          <a:prstGeom prst="rect">
+            <a:avLst/>
+          </a:prstGeom>
+          <a:noFill/>
+        </p:spPr>
+        <p:txBody>
+          <a:bodyPr wrap="square" anchor="ctr" lIns="0" rIns="0" tIns="0" bIns="0">
+            <a:spAutoFit/>
+          </a:bodyPr>
+          <a:lstStyle/>
           <a:p>
             <a:pPr algn="ctr"/>
             <a:r>
-              <a:rPr sz="1100" b="0">
-                <a:solidFill>
-                  <a:srgbClr val="6B7A90"/>
-                </a:solidFill>
-                <a:latin typeface="Consolas"/>
-              </a:rPr>
-              <a:t>VULN CLASSES</a:t>
-            </a:r>
-          </a:p>
-        </p:txBody>
-      </p:sp>
-      <p:sp>
-        <p:nvSpPr>
-          <p:cNvPr id="11" name="TextBox 10"/>
+              <a:rPr sz="1800" b="1">
+                <a:solidFill>
+                  <a:srgbClr val="FF5C6E"/>
+                </a:solidFill>
+                <a:latin typeface="Segoe UI Symbol"/>
+              </a:rPr>
+              <a:t>✗</a:t>
+            </a:r>
+          </a:p>
+        </p:txBody>
+      </p:sp>
+      <p:sp>
+        <p:nvSpPr>
+          <p:cNvPr id="14" name="TextBox 13"/>
           <p:cNvSpPr txBox="1"/>
           <p:nvPr/>
         </p:nvSpPr>
         <p:spPr>
           <a:xfrm>
-            <a:off x="713232" y="3840480"/>
-            <a:ext cx="10789920" cy="3840480"/>
+            <a:off x="8229600" y="3108960"/>
+            <a:ext cx="1691640" cy="475488"/>
+          </a:xfrm>
+          <a:prstGeom prst="rect">
+            <a:avLst/>
+          </a:prstGeom>
+          <a:noFill/>
+        </p:spPr>
+        <p:txBody>
+          <a:bodyPr wrap="square" anchor="ctr" lIns="0" rIns="0" tIns="0" bIns="0">
+            <a:spAutoFit/>
+          </a:bodyPr>
+          <a:lstStyle/>
+          <a:p>
+            <a:pPr algn="ctr"/>
+            <a:r>
+              <a:rPr sz="1800" b="1">
+                <a:solidFill>
+                  <a:srgbClr val="F5B301"/>
+                </a:solidFill>
+                <a:latin typeface="Segoe UI Symbol"/>
+              </a:rPr>
+              <a:t>~</a:t>
+            </a:r>
+          </a:p>
+        </p:txBody>
+      </p:sp>
+      <p:sp>
+        <p:nvSpPr>
+          <p:cNvPr id="15" name="TextBox 14"/>
+          <p:cNvSpPr txBox="1"/>
+          <p:nvPr/>
+        </p:nvSpPr>
+        <p:spPr>
+          <a:xfrm>
+            <a:off x="9921240" y="3108960"/>
+            <a:ext cx="1691640" cy="475488"/>
+          </a:xfrm>
+          <a:prstGeom prst="rect">
+            <a:avLst/>
+          </a:prstGeom>
+          <a:noFill/>
+        </p:spPr>
+        <p:txBody>
+          <a:bodyPr wrap="square" anchor="ctr" lIns="0" rIns="0" tIns="0" bIns="0">
+            <a:spAutoFit/>
+          </a:bodyPr>
+          <a:lstStyle/>
+          <a:p>
+            <a:pPr algn="ctr"/>
+            <a:r>
+              <a:rPr sz="1800" b="1">
+                <a:solidFill>
+                  <a:srgbClr val="2DD48F"/>
+                </a:solidFill>
+                <a:latin typeface="Segoe UI Symbol"/>
+              </a:rPr>
+              <a:t>✓</a:t>
+            </a:r>
+          </a:p>
+        </p:txBody>
+      </p:sp>
+      <p:sp>
+        <p:nvSpPr>
+          <p:cNvPr id="16" name="TextBox 15"/>
+          <p:cNvSpPr txBox="1"/>
+          <p:nvPr/>
+        </p:nvSpPr>
+        <p:spPr>
+          <a:xfrm>
+            <a:off x="658368" y="3584448"/>
+            <a:ext cx="5669280" cy="475488"/>
+          </a:xfrm>
+          <a:prstGeom prst="rect">
+            <a:avLst/>
+          </a:prstGeom>
+          <a:noFill/>
+        </p:spPr>
+        <p:txBody>
+          <a:bodyPr wrap="square" anchor="ctr" lIns="0" rIns="0" tIns="0" bIns="0">
+            <a:spAutoFit/>
+          </a:bodyPr>
+          <a:lstStyle/>
+          <a:p>
+            <a:r>
+              <a:rPr sz="1400" b="0">
+                <a:solidFill>
+                  <a:srgbClr val="C4D2E4"/>
+                </a:solidFill>
+                <a:latin typeface="Segoe UI"/>
+              </a:rPr>
+              <a:t>Verdict is a reproduced contradiction</a:t>
+            </a:r>
+          </a:p>
+        </p:txBody>
+      </p:sp>
+      <p:sp>
+        <p:nvSpPr>
+          <p:cNvPr id="17" name="TextBox 16"/>
+          <p:cNvSpPr txBox="1"/>
+          <p:nvPr/>
+        </p:nvSpPr>
+        <p:spPr>
+          <a:xfrm>
+            <a:off x="6537960" y="3584448"/>
+            <a:ext cx="1691640" cy="475488"/>
+          </a:xfrm>
+          <a:prstGeom prst="rect">
+            <a:avLst/>
+          </a:prstGeom>
+          <a:noFill/>
+        </p:spPr>
+        <p:txBody>
+          <a:bodyPr wrap="square" anchor="ctr" lIns="0" rIns="0" tIns="0" bIns="0">
+            <a:spAutoFit/>
+          </a:bodyPr>
+          <a:lstStyle/>
+          <a:p>
+            <a:pPr algn="ctr"/>
+            <a:r>
+              <a:rPr sz="1800" b="1">
+                <a:solidFill>
+                  <a:srgbClr val="FF5C6E"/>
+                </a:solidFill>
+                <a:latin typeface="Segoe UI Symbol"/>
+              </a:rPr>
+              <a:t>✗</a:t>
+            </a:r>
+          </a:p>
+        </p:txBody>
+      </p:sp>
+      <p:sp>
+        <p:nvSpPr>
+          <p:cNvPr id="18" name="TextBox 17"/>
+          <p:cNvSpPr txBox="1"/>
+          <p:nvPr/>
+        </p:nvSpPr>
+        <p:spPr>
+          <a:xfrm>
+            <a:off x="8229600" y="3584448"/>
+            <a:ext cx="1691640" cy="475488"/>
+          </a:xfrm>
+          <a:prstGeom prst="rect">
+            <a:avLst/>
+          </a:prstGeom>
+          <a:noFill/>
+        </p:spPr>
+        <p:txBody>
+          <a:bodyPr wrap="square" anchor="ctr" lIns="0" rIns="0" tIns="0" bIns="0">
+            <a:spAutoFit/>
+          </a:bodyPr>
+          <a:lstStyle/>
+          <a:p>
+            <a:pPr algn="ctr"/>
+            <a:r>
+              <a:rPr sz="1800" b="1">
+                <a:solidFill>
+                  <a:srgbClr val="FF5C6E"/>
+                </a:solidFill>
+                <a:latin typeface="Segoe UI Symbol"/>
+              </a:rPr>
+              <a:t>✗</a:t>
+            </a:r>
+          </a:p>
+        </p:txBody>
+      </p:sp>
+      <p:sp>
+        <p:nvSpPr>
+          <p:cNvPr id="19" name="TextBox 18"/>
+          <p:cNvSpPr txBox="1"/>
+          <p:nvPr/>
+        </p:nvSpPr>
+        <p:spPr>
+          <a:xfrm>
+            <a:off x="9921240" y="3584448"/>
+            <a:ext cx="1691640" cy="475488"/>
+          </a:xfrm>
+          <a:prstGeom prst="rect">
+            <a:avLst/>
+          </a:prstGeom>
+          <a:noFill/>
+        </p:spPr>
+        <p:txBody>
+          <a:bodyPr wrap="square" anchor="ctr" lIns="0" rIns="0" tIns="0" bIns="0">
+            <a:spAutoFit/>
+          </a:bodyPr>
+          <a:lstStyle/>
+          <a:p>
+            <a:pPr algn="ctr"/>
+            <a:r>
+              <a:rPr sz="1800" b="1">
+                <a:solidFill>
+                  <a:srgbClr val="2DD48F"/>
+                </a:solidFill>
+                <a:latin typeface="Segoe UI Symbol"/>
+              </a:rPr>
+              <a:t>✓</a:t>
+            </a:r>
+          </a:p>
+        </p:txBody>
+      </p:sp>
+      <p:sp>
+        <p:nvSpPr>
+          <p:cNvPr id="20" name="Rectangle 19"/>
+          <p:cNvSpPr/>
+          <p:nvPr/>
+        </p:nvSpPr>
+        <p:spPr>
+          <a:xfrm>
+            <a:off x="548640" y="4059936"/>
+            <a:ext cx="11064240" cy="475488"/>
+          </a:xfrm>
+          <a:prstGeom prst="rect">
+            <a:avLst/>
+          </a:prstGeom>
+          <a:solidFill>
+            <a:srgbClr val="101724"/>
+          </a:solidFill>
+          <a:ln>
+            <a:noFill/>
+          </a:ln>
+          <a:effectLst/>
+        </p:spPr>
+        <p:style>
+          <a:lnRef idx="1">
+            <a:schemeClr val="accent1"/>
+          </a:lnRef>
+          <a:fillRef idx="3">
+            <a:schemeClr val="accent1"/>
+          </a:fillRef>
+          <a:effectRef idx="2">
+            <a:schemeClr val="accent1"/>
+          </a:effectRef>
+          <a:fontRef idx="minor">
+            <a:schemeClr val="lt1"/>
+          </a:fontRef>
+        </p:style>
+        <p:txBody>
+          <a:bodyPr rtlCol="0" anchor="ctr"/>
+          <a:lstStyle/>
+          <a:p>
+            <a:pPr algn="ctr"/>
+          </a:p>
+        </p:txBody>
+      </p:sp>
+      <p:sp>
+        <p:nvSpPr>
+          <p:cNvPr id="21" name="TextBox 20"/>
+          <p:cNvSpPr txBox="1"/>
+          <p:nvPr/>
+        </p:nvSpPr>
+        <p:spPr>
+          <a:xfrm>
+            <a:off x="658368" y="4059936"/>
+            <a:ext cx="5669280" cy="475488"/>
+          </a:xfrm>
+          <a:prstGeom prst="rect">
+            <a:avLst/>
+          </a:prstGeom>
+          <a:noFill/>
+        </p:spPr>
+        <p:txBody>
+          <a:bodyPr wrap="square" anchor="ctr" lIns="0" rIns="0" tIns="0" bIns="0">
+            <a:spAutoFit/>
+          </a:bodyPr>
+          <a:lstStyle/>
+          <a:p>
+            <a:r>
+              <a:rPr sz="1400" b="0">
+                <a:solidFill>
+                  <a:srgbClr val="C4D2E4"/>
+                </a:solidFill>
+                <a:latin typeface="Segoe UI"/>
+              </a:rPr>
+              <a:t>Proves the fix, live</a:t>
+            </a:r>
+          </a:p>
+        </p:txBody>
+      </p:sp>
+      <p:sp>
+        <p:nvSpPr>
+          <p:cNvPr id="22" name="TextBox 21"/>
+          <p:cNvSpPr txBox="1"/>
+          <p:nvPr/>
+        </p:nvSpPr>
+        <p:spPr>
+          <a:xfrm>
+            <a:off x="6537960" y="4059936"/>
+            <a:ext cx="1691640" cy="475488"/>
+          </a:xfrm>
+          <a:prstGeom prst="rect">
+            <a:avLst/>
+          </a:prstGeom>
+          <a:noFill/>
+        </p:spPr>
+        <p:txBody>
+          <a:bodyPr wrap="square" anchor="ctr" lIns="0" rIns="0" tIns="0" bIns="0">
+            <a:spAutoFit/>
+          </a:bodyPr>
+          <a:lstStyle/>
+          <a:p>
+            <a:pPr algn="ctr"/>
+            <a:r>
+              <a:rPr sz="1800" b="1">
+                <a:solidFill>
+                  <a:srgbClr val="FF5C6E"/>
+                </a:solidFill>
+                <a:latin typeface="Segoe UI Symbol"/>
+              </a:rPr>
+              <a:t>✗</a:t>
+            </a:r>
+          </a:p>
+        </p:txBody>
+      </p:sp>
+      <p:sp>
+        <p:nvSpPr>
+          <p:cNvPr id="23" name="TextBox 22"/>
+          <p:cNvSpPr txBox="1"/>
+          <p:nvPr/>
+        </p:nvSpPr>
+        <p:spPr>
+          <a:xfrm>
+            <a:off x="8229600" y="4059936"/>
+            <a:ext cx="1691640" cy="475488"/>
+          </a:xfrm>
+          <a:prstGeom prst="rect">
+            <a:avLst/>
+          </a:prstGeom>
+          <a:noFill/>
+        </p:spPr>
+        <p:txBody>
+          <a:bodyPr wrap="square" anchor="ctr" lIns="0" rIns="0" tIns="0" bIns="0">
+            <a:spAutoFit/>
+          </a:bodyPr>
+          <a:lstStyle/>
+          <a:p>
+            <a:pPr algn="ctr"/>
+            <a:r>
+              <a:rPr sz="1800" b="1">
+                <a:solidFill>
+                  <a:srgbClr val="FF5C6E"/>
+                </a:solidFill>
+                <a:latin typeface="Segoe UI Symbol"/>
+              </a:rPr>
+              <a:t>✗</a:t>
+            </a:r>
+          </a:p>
+        </p:txBody>
+      </p:sp>
+      <p:sp>
+        <p:nvSpPr>
+          <p:cNvPr id="24" name="TextBox 23"/>
+          <p:cNvSpPr txBox="1"/>
+          <p:nvPr/>
+        </p:nvSpPr>
+        <p:spPr>
+          <a:xfrm>
+            <a:off x="9921240" y="4059936"/>
+            <a:ext cx="1691640" cy="475488"/>
+          </a:xfrm>
+          <a:prstGeom prst="rect">
+            <a:avLst/>
+          </a:prstGeom>
+          <a:noFill/>
+        </p:spPr>
+        <p:txBody>
+          <a:bodyPr wrap="square" anchor="ctr" lIns="0" rIns="0" tIns="0" bIns="0">
+            <a:spAutoFit/>
+          </a:bodyPr>
+          <a:lstStyle/>
+          <a:p>
+            <a:pPr algn="ctr"/>
+            <a:r>
+              <a:rPr sz="1800" b="1">
+                <a:solidFill>
+                  <a:srgbClr val="2DD48F"/>
+                </a:solidFill>
+                <a:latin typeface="Segoe UI Symbol"/>
+              </a:rPr>
+              <a:t>✓</a:t>
+            </a:r>
+          </a:p>
+        </p:txBody>
+      </p:sp>
+      <p:sp>
+        <p:nvSpPr>
+          <p:cNvPr id="25" name="TextBox 24"/>
+          <p:cNvSpPr txBox="1"/>
+          <p:nvPr/>
+        </p:nvSpPr>
+        <p:spPr>
+          <a:xfrm>
+            <a:off x="658368" y="4535424"/>
+            <a:ext cx="5669280" cy="475488"/>
+          </a:xfrm>
+          <a:prstGeom prst="rect">
+            <a:avLst/>
+          </a:prstGeom>
+          <a:noFill/>
+        </p:spPr>
+        <p:txBody>
+          <a:bodyPr wrap="square" anchor="ctr" lIns="0" rIns="0" tIns="0" bIns="0">
+            <a:spAutoFit/>
+          </a:bodyPr>
+          <a:lstStyle/>
+          <a:p>
+            <a:r>
+              <a:rPr sz="1400" b="0">
+                <a:solidFill>
+                  <a:srgbClr val="C4D2E4"/>
+                </a:solidFill>
+                <a:latin typeface="Segoe UI"/>
+              </a:rPr>
+              <a:t>Autonomous, self-directed research</a:t>
+            </a:r>
+          </a:p>
+        </p:txBody>
+      </p:sp>
+      <p:sp>
+        <p:nvSpPr>
+          <p:cNvPr id="26" name="TextBox 25"/>
+          <p:cNvSpPr txBox="1"/>
+          <p:nvPr/>
+        </p:nvSpPr>
+        <p:spPr>
+          <a:xfrm>
+            <a:off x="6537960" y="4535424"/>
+            <a:ext cx="1691640" cy="475488"/>
+          </a:xfrm>
+          <a:prstGeom prst="rect">
+            <a:avLst/>
+          </a:prstGeom>
+          <a:noFill/>
+        </p:spPr>
+        <p:txBody>
+          <a:bodyPr wrap="square" anchor="ctr" lIns="0" rIns="0" tIns="0" bIns="0">
+            <a:spAutoFit/>
+          </a:bodyPr>
+          <a:lstStyle/>
+          <a:p>
+            <a:pPr algn="ctr"/>
+            <a:r>
+              <a:rPr sz="1800" b="1">
+                <a:solidFill>
+                  <a:srgbClr val="FF5C6E"/>
+                </a:solidFill>
+                <a:latin typeface="Segoe UI Symbol"/>
+              </a:rPr>
+              <a:t>✗</a:t>
+            </a:r>
+          </a:p>
+        </p:txBody>
+      </p:sp>
+      <p:sp>
+        <p:nvSpPr>
+          <p:cNvPr id="27" name="TextBox 26"/>
+          <p:cNvSpPr txBox="1"/>
+          <p:nvPr/>
+        </p:nvSpPr>
+        <p:spPr>
+          <a:xfrm>
+            <a:off x="8229600" y="4535424"/>
+            <a:ext cx="1691640" cy="475488"/>
+          </a:xfrm>
+          <a:prstGeom prst="rect">
+            <a:avLst/>
+          </a:prstGeom>
+          <a:noFill/>
+        </p:spPr>
+        <p:txBody>
+          <a:bodyPr wrap="square" anchor="ctr" lIns="0" rIns="0" tIns="0" bIns="0">
+            <a:spAutoFit/>
+          </a:bodyPr>
+          <a:lstStyle/>
+          <a:p>
+            <a:pPr algn="ctr"/>
+            <a:r>
+              <a:rPr sz="1800" b="1">
+                <a:solidFill>
+                  <a:srgbClr val="F5B301"/>
+                </a:solidFill>
+                <a:latin typeface="Segoe UI Symbol"/>
+              </a:rPr>
+              <a:t>~</a:t>
+            </a:r>
+          </a:p>
+        </p:txBody>
+      </p:sp>
+      <p:sp>
+        <p:nvSpPr>
+          <p:cNvPr id="28" name="TextBox 27"/>
+          <p:cNvSpPr txBox="1"/>
+          <p:nvPr/>
+        </p:nvSpPr>
+        <p:spPr>
+          <a:xfrm>
+            <a:off x="9921240" y="4535424"/>
+            <a:ext cx="1691640" cy="475488"/>
+          </a:xfrm>
+          <a:prstGeom prst="rect">
+            <a:avLst/>
+          </a:prstGeom>
+          <a:noFill/>
+        </p:spPr>
+        <p:txBody>
+          <a:bodyPr wrap="square" anchor="ctr" lIns="0" rIns="0" tIns="0" bIns="0">
+            <a:spAutoFit/>
+          </a:bodyPr>
+          <a:lstStyle/>
+          <a:p>
+            <a:pPr algn="ctr"/>
+            <a:r>
+              <a:rPr sz="1800" b="1">
+                <a:solidFill>
+                  <a:srgbClr val="2DD48F"/>
+                </a:solidFill>
+                <a:latin typeface="Segoe UI Symbol"/>
+              </a:rPr>
+              <a:t>✓</a:t>
+            </a:r>
+          </a:p>
+        </p:txBody>
+      </p:sp>
+      <p:sp>
+        <p:nvSpPr>
+          <p:cNvPr id="29" name="Rectangle 28"/>
+          <p:cNvSpPr/>
+          <p:nvPr/>
+        </p:nvSpPr>
+        <p:spPr>
+          <a:xfrm>
+            <a:off x="548640" y="5010912"/>
+            <a:ext cx="11064240" cy="475488"/>
+          </a:xfrm>
+          <a:prstGeom prst="rect">
+            <a:avLst/>
+          </a:prstGeom>
+          <a:solidFill>
+            <a:srgbClr val="101724"/>
+          </a:solidFill>
+          <a:ln>
+            <a:noFill/>
+          </a:ln>
+          <a:effectLst/>
+        </p:spPr>
+        <p:style>
+          <a:lnRef idx="1">
+            <a:schemeClr val="accent1"/>
+          </a:lnRef>
+          <a:fillRef idx="3">
+            <a:schemeClr val="accent1"/>
+          </a:fillRef>
+          <a:effectRef idx="2">
+            <a:schemeClr val="accent1"/>
+          </a:effectRef>
+          <a:fontRef idx="minor">
+            <a:schemeClr val="lt1"/>
+          </a:fontRef>
+        </p:style>
+        <p:txBody>
+          <a:bodyPr rtlCol="0" anchor="ctr"/>
+          <a:lstStyle/>
+          <a:p>
+            <a:pPr algn="ctr"/>
+          </a:p>
+        </p:txBody>
+      </p:sp>
+      <p:sp>
+        <p:nvSpPr>
+          <p:cNvPr id="30" name="TextBox 29"/>
+          <p:cNvSpPr txBox="1"/>
+          <p:nvPr/>
+        </p:nvSpPr>
+        <p:spPr>
+          <a:xfrm>
+            <a:off x="658368" y="5010912"/>
+            <a:ext cx="5669280" cy="475488"/>
+          </a:xfrm>
+          <a:prstGeom prst="rect">
+            <a:avLst/>
+          </a:prstGeom>
+          <a:noFill/>
+        </p:spPr>
+        <p:txBody>
+          <a:bodyPr wrap="square" anchor="ctr" lIns="0" rIns="0" tIns="0" bIns="0">
+            <a:spAutoFit/>
+          </a:bodyPr>
+          <a:lstStyle/>
+          <a:p>
+            <a:r>
+              <a:rPr sz="1400" b="0">
+                <a:solidFill>
+                  <a:srgbClr val="C4D2E4"/>
+                </a:solidFill>
+                <a:latin typeface="Segoe UI"/>
+              </a:rPr>
+              <a:t>Local-first, no data egress</a:t>
+            </a:r>
+          </a:p>
+        </p:txBody>
+      </p:sp>
+      <p:sp>
+        <p:nvSpPr>
+          <p:cNvPr id="31" name="TextBox 30"/>
+          <p:cNvSpPr txBox="1"/>
+          <p:nvPr/>
+        </p:nvSpPr>
+        <p:spPr>
+          <a:xfrm>
+            <a:off x="6537960" y="5010912"/>
+            <a:ext cx="1691640" cy="475488"/>
+          </a:xfrm>
+          <a:prstGeom prst="rect">
+            <a:avLst/>
+          </a:prstGeom>
+          <a:noFill/>
+        </p:spPr>
+        <p:txBody>
+          <a:bodyPr wrap="square" anchor="ctr" lIns="0" rIns="0" tIns="0" bIns="0">
+            <a:spAutoFit/>
+          </a:bodyPr>
+          <a:lstStyle/>
+          <a:p>
+            <a:pPr algn="ctr"/>
+            <a:r>
+              <a:rPr sz="1800" b="1">
+                <a:solidFill>
+                  <a:srgbClr val="F5B301"/>
+                </a:solidFill>
+                <a:latin typeface="Segoe UI Symbol"/>
+              </a:rPr>
+              <a:t>~</a:t>
+            </a:r>
+          </a:p>
+        </p:txBody>
+      </p:sp>
+      <p:sp>
+        <p:nvSpPr>
+          <p:cNvPr id="32" name="TextBox 31"/>
+          <p:cNvSpPr txBox="1"/>
+          <p:nvPr/>
+        </p:nvSpPr>
+        <p:spPr>
+          <a:xfrm>
+            <a:off x="8229600" y="5010912"/>
+            <a:ext cx="1691640" cy="475488"/>
+          </a:xfrm>
+          <a:prstGeom prst="rect">
+            <a:avLst/>
+          </a:prstGeom>
+          <a:noFill/>
+        </p:spPr>
+        <p:txBody>
+          <a:bodyPr wrap="square" anchor="ctr" lIns="0" rIns="0" tIns="0" bIns="0">
+            <a:spAutoFit/>
+          </a:bodyPr>
+          <a:lstStyle/>
+          <a:p>
+            <a:pPr algn="ctr"/>
+            <a:r>
+              <a:rPr sz="1800" b="1">
+                <a:solidFill>
+                  <a:srgbClr val="F5B301"/>
+                </a:solidFill>
+                <a:latin typeface="Segoe UI Symbol"/>
+              </a:rPr>
+              <a:t>~</a:t>
+            </a:r>
+          </a:p>
+        </p:txBody>
+      </p:sp>
+      <p:sp>
+        <p:nvSpPr>
+          <p:cNvPr id="33" name="TextBox 32"/>
+          <p:cNvSpPr txBox="1"/>
+          <p:nvPr/>
+        </p:nvSpPr>
+        <p:spPr>
+          <a:xfrm>
+            <a:off x="9921240" y="5010912"/>
+            <a:ext cx="1691640" cy="475488"/>
+          </a:xfrm>
+          <a:prstGeom prst="rect">
+            <a:avLst/>
+          </a:prstGeom>
+          <a:noFill/>
+        </p:spPr>
+        <p:txBody>
+          <a:bodyPr wrap="square" anchor="ctr" lIns="0" rIns="0" tIns="0" bIns="0">
+            <a:spAutoFit/>
+          </a:bodyPr>
+          <a:lstStyle/>
+          <a:p>
+            <a:pPr algn="ctr"/>
+            <a:r>
+              <a:rPr sz="1800" b="1">
+                <a:solidFill>
+                  <a:srgbClr val="2DD48F"/>
+                </a:solidFill>
+                <a:latin typeface="Segoe UI Symbol"/>
+              </a:rPr>
+              <a:t>✓</a:t>
+            </a:r>
+          </a:p>
+        </p:txBody>
+      </p:sp>
+      <p:sp>
+        <p:nvSpPr>
+          <p:cNvPr id="34" name="TextBox 33"/>
+          <p:cNvSpPr txBox="1"/>
+          <p:nvPr/>
+        </p:nvSpPr>
+        <p:spPr>
+          <a:xfrm>
+            <a:off x="658368" y="5486400"/>
+            <a:ext cx="5669280" cy="475488"/>
+          </a:xfrm>
+          <a:prstGeom prst="rect">
+            <a:avLst/>
+          </a:prstGeom>
+          <a:noFill/>
+        </p:spPr>
+        <p:txBody>
+          <a:bodyPr wrap="square" anchor="ctr" lIns="0" rIns="0" tIns="0" bIns="0">
+            <a:spAutoFit/>
+          </a:bodyPr>
+          <a:lstStyle/>
+          <a:p>
+            <a:r>
+              <a:rPr sz="1400" b="0">
+                <a:solidFill>
+                  <a:srgbClr val="C4D2E4"/>
+                </a:solidFill>
+                <a:latin typeface="Segoe UI"/>
+              </a:rPr>
+              <a:t>Every decision auditable</a:t>
+            </a:r>
+          </a:p>
+        </p:txBody>
+      </p:sp>
+      <p:sp>
+        <p:nvSpPr>
+          <p:cNvPr id="35" name="TextBox 34"/>
+          <p:cNvSpPr txBox="1"/>
+          <p:nvPr/>
+        </p:nvSpPr>
+        <p:spPr>
+          <a:xfrm>
+            <a:off x="6537960" y="5486400"/>
+            <a:ext cx="1691640" cy="475488"/>
+          </a:xfrm>
+          <a:prstGeom prst="rect">
+            <a:avLst/>
+          </a:prstGeom>
+          <a:noFill/>
+        </p:spPr>
+        <p:txBody>
+          <a:bodyPr wrap="square" anchor="ctr" lIns="0" rIns="0" tIns="0" bIns="0">
+            <a:spAutoFit/>
+          </a:bodyPr>
+          <a:lstStyle/>
+          <a:p>
+            <a:pPr algn="ctr"/>
+            <a:r>
+              <a:rPr sz="1800" b="1">
+                <a:solidFill>
+                  <a:srgbClr val="F5B301"/>
+                </a:solidFill>
+                <a:latin typeface="Segoe UI Symbol"/>
+              </a:rPr>
+              <a:t>~</a:t>
+            </a:r>
+          </a:p>
+        </p:txBody>
+      </p:sp>
+      <p:sp>
+        <p:nvSpPr>
+          <p:cNvPr id="36" name="TextBox 35"/>
+          <p:cNvSpPr txBox="1"/>
+          <p:nvPr/>
+        </p:nvSpPr>
+        <p:spPr>
+          <a:xfrm>
+            <a:off x="8229600" y="5486400"/>
+            <a:ext cx="1691640" cy="475488"/>
+          </a:xfrm>
+          <a:prstGeom prst="rect">
+            <a:avLst/>
+          </a:prstGeom>
+          <a:noFill/>
+        </p:spPr>
+        <p:txBody>
+          <a:bodyPr wrap="square" anchor="ctr" lIns="0" rIns="0" tIns="0" bIns="0">
+            <a:spAutoFit/>
+          </a:bodyPr>
+          <a:lstStyle/>
+          <a:p>
+            <a:pPr algn="ctr"/>
+            <a:r>
+              <a:rPr sz="1800" b="1">
+                <a:solidFill>
+                  <a:srgbClr val="FF5C6E"/>
+                </a:solidFill>
+                <a:latin typeface="Segoe UI Symbol"/>
+              </a:rPr>
+              <a:t>✗</a:t>
+            </a:r>
+          </a:p>
+        </p:txBody>
+      </p:sp>
+      <p:sp>
+        <p:nvSpPr>
+          <p:cNvPr id="37" name="TextBox 36"/>
+          <p:cNvSpPr txBox="1"/>
+          <p:nvPr/>
+        </p:nvSpPr>
+        <p:spPr>
+          <a:xfrm>
+            <a:off x="9921240" y="5486400"/>
+            <a:ext cx="1691640" cy="475488"/>
+          </a:xfrm>
+          <a:prstGeom prst="rect">
+            <a:avLst/>
+          </a:prstGeom>
+          <a:noFill/>
+        </p:spPr>
+        <p:txBody>
+          <a:bodyPr wrap="square" anchor="ctr" lIns="0" rIns="0" tIns="0" bIns="0">
+            <a:spAutoFit/>
+          </a:bodyPr>
+          <a:lstStyle/>
+          <a:p>
+            <a:pPr algn="ctr"/>
+            <a:r>
+              <a:rPr sz="1800" b="1">
+                <a:solidFill>
+                  <a:srgbClr val="2DD48F"/>
+                </a:solidFill>
+                <a:latin typeface="Segoe UI Symbol"/>
+              </a:rPr>
+              <a:t>✓</a:t>
+            </a:r>
+          </a:p>
+        </p:txBody>
+      </p:sp>
+      <p:sp>
+        <p:nvSpPr>
+          <p:cNvPr id="38" name="TextBox 37"/>
+          <p:cNvSpPr txBox="1"/>
+          <p:nvPr/>
+        </p:nvSpPr>
+        <p:spPr>
+          <a:xfrm>
+            <a:off x="566928" y="6382512"/>
+            <a:ext cx="8229600" cy="365760"/>
           </a:xfrm>
           <a:prstGeom prst="rect">
             <a:avLst/>
@@ -17669,142 +18552,37 @@
           </a:bodyPr>
           <a:lstStyle/>
           <a:p>
-            <a:pPr>
-              <a:spcAft>
-                <a:spcPts val="1000"/>
-              </a:spcAft>
-            </a:pPr>
-            <a:r>
-              <a:rPr sz="1700" b="1">
+            <a:r>
+              <a:rPr sz="1000" b="1">
                 <a:solidFill>
                   <a:srgbClr val="22D3EE"/>
                 </a:solidFill>
-                <a:latin typeface="Segoe UI"/>
-              </a:rPr>
-              <a:t>»  </a:t>
-            </a:r>
-            <a:r>
-              <a:rPr sz="1700" b="0">
-                <a:solidFill>
-                  <a:srgbClr val="C4D2E4"/>
-                </a:solidFill>
-                <a:latin typeface="Segoe UI"/>
-              </a:rPr>
-              <a:t>Engineering: multi-link chaining + deeper exploit composition</a:t>
-            </a:r>
-          </a:p>
-          <a:p>
-            <a:pPr>
-              <a:spcAft>
-                <a:spcPts val="1000"/>
-              </a:spcAft>
-            </a:pPr>
-            <a:r>
-              <a:rPr sz="1700" b="1">
-                <a:solidFill>
-                  <a:srgbClr val="22D3EE"/>
-                </a:solidFill>
-                <a:latin typeface="Segoe UI"/>
-              </a:rPr>
-              <a:t>»  </a:t>
-            </a:r>
-            <a:r>
-              <a:rPr sz="1700" b="0">
-                <a:solidFill>
-                  <a:srgbClr val="C4D2E4"/>
-                </a:solidFill>
-                <a:latin typeface="Segoe UI"/>
-              </a:rPr>
-              <a:t>Policy library: ready-made oracles for common stacks</a:t>
-            </a:r>
-          </a:p>
-          <a:p>
-            <a:pPr>
-              <a:spcAft>
-                <a:spcPts val="1000"/>
-              </a:spcAft>
-            </a:pPr>
-            <a:r>
-              <a:rPr sz="1700" b="1">
-                <a:solidFill>
-                  <a:srgbClr val="22D3EE"/>
-                </a:solidFill>
-                <a:latin typeface="Segoe UI"/>
-              </a:rPr>
-              <a:t>»  </a:t>
-            </a:r>
-            <a:r>
-              <a:rPr sz="1700" b="0">
-                <a:solidFill>
-                  <a:srgbClr val="C4D2E4"/>
-                </a:solidFill>
-                <a:latin typeface="Segoe UI"/>
-              </a:rPr>
-              <a:t>Integrations: CI/CD gate, ticketing, SIEM export</a:t>
-            </a:r>
-          </a:p>
-          <a:p>
-            <a:pPr>
-              <a:spcAft>
-                <a:spcPts val="1000"/>
-              </a:spcAft>
-            </a:pPr>
-            <a:r>
-              <a:rPr sz="1700" b="1">
-                <a:solidFill>
-                  <a:srgbClr val="22D3EE"/>
-                </a:solidFill>
-                <a:latin typeface="Segoe UI"/>
-              </a:rPr>
-              <a:t>»  </a:t>
-            </a:r>
-            <a:r>
-              <a:rPr sz="1700" b="0">
-                <a:solidFill>
-                  <a:srgbClr val="C4D2E4"/>
-                </a:solidFill>
-                <a:latin typeface="Segoe UI"/>
-              </a:rPr>
-              <a:t>Design partners: regulated, air-gap-first customers</a:t>
-            </a:r>
-          </a:p>
-          <a:p>
-            <a:pPr>
-              <a:spcAft>
-                <a:spcPts val="1000"/>
-              </a:spcAft>
-            </a:pPr>
-            <a:r>
-              <a:rPr sz="1700" b="1">
-                <a:solidFill>
-                  <a:srgbClr val="22D3EE"/>
-                </a:solidFill>
-                <a:latin typeface="Segoe UI"/>
-              </a:rPr>
-              <a:t>»  </a:t>
-            </a:r>
-            <a:r>
-              <a:rPr sz="1700" b="0">
-                <a:solidFill>
-                  <a:srgbClr val="C4D2E4"/>
-                </a:solidFill>
-                <a:latin typeface="Segoe UI"/>
-              </a:rPr>
-              <a:t>Outcome: from autonomous finder to autonomous fixer</a:t>
-            </a:r>
-          </a:p>
-        </p:txBody>
-      </p:sp>
-      <p:sp>
-        <p:nvSpPr>
-          <p:cNvPr id="12" name="TextBox 11"/>
+                <a:latin typeface="Consolas"/>
+              </a:rPr>
+              <a:t>SENTINEL</a:t>
+            </a:r>
+            <a:r>
+              <a:rPr sz="1000" b="0">
+                <a:solidFill>
+                  <a:srgbClr val="6B7A90"/>
+                </a:solidFill>
+                <a:latin typeface="Consolas"/>
+              </a:rPr>
+              <a:t>   ·   find → reason → prove → patch → prove</a:t>
+            </a:r>
+          </a:p>
+        </p:txBody>
+      </p:sp>
+      <p:sp>
+        <p:nvSpPr>
+          <p:cNvPr id="39" name="TextBox 38"/>
           <p:cNvSpPr txBox="1"/>
           <p:nvPr/>
         </p:nvSpPr>
         <p:spPr>
           <a:xfrm>
-            <a:off x="566928" y="6382512"/>
-            <a:ext cx="8229600" cy="365760"/>
+            <a:off x="10789920" y="6382512"/>
+            <a:ext cx="914400" cy="365760"/>
           </a:xfrm>
           <a:prstGeom prst="rect">
             <a:avLst/>
@@ -17817,58 +18595,15 @@
           </a:bodyPr>
           <a:lstStyle/>
           <a:p>
-            <a:r>
-              <a:rPr sz="1000" b="1">
-                <a:solidFill>
-                  <a:srgbClr val="22D3EE"/>
+            <a:pPr algn="r"/>
+            <a:r>
+              <a:rPr sz="1000" b="0">
+                <a:solidFill>
+                  <a:srgbClr val="6B7A90"/>
                 </a:solidFill>
                 <a:latin typeface="Consolas"/>
               </a:rPr>
-              <a:t>SENTINEL</a:t>
-            </a:r>
-            <a:r>
-              <a:rPr sz="1000" b="0">
-                <a:solidFill>
-                  <a:srgbClr val="6B7A90"/>
-                </a:solidFill>
-                <a:latin typeface="Consolas"/>
-              </a:rPr>
-              <a:t>   ·   find → reason → prove → patch → prove</a:t>
-            </a:r>
-          </a:p>
-        </p:txBody>
-      </p:sp>
-      <p:sp>
-        <p:nvSpPr>
-          <p:cNvPr id="13" name="TextBox 12"/>
-          <p:cNvSpPr txBox="1"/>
-          <p:nvPr/>
-        </p:nvSpPr>
-        <p:spPr>
-          <a:xfrm>
-            <a:off x="10789920" y="6382512"/>
-            <a:ext cx="914400" cy="365760"/>
-          </a:xfrm>
-          <a:prstGeom prst="rect">
-            <a:avLst/>
-          </a:prstGeom>
-          <a:noFill/>
-        </p:spPr>
-        <p:txBody>
-          <a:bodyPr wrap="square" anchor="t" lIns="0" rIns="0" tIns="0" bIns="0">
-            <a:spAutoFit/>
-          </a:bodyPr>
-          <a:lstStyle/>
-          <a:p>
-            <a:pPr algn="r"/>
-            <a:r>
-              <a:rPr sz="1000" b="0">
-                <a:solidFill>
-                  <a:srgbClr val="6B7A90"/>
-                </a:solidFill>
-                <a:latin typeface="Consolas"/>
-              </a:rPr>
-              <a:t>32 / 33</a:t>
+              <a:t>34 / 38</a:t>
             </a:r>
           </a:p>
         </p:txBody>
@@ -17881,7 +18616,1507 @@
 </p:sld>
 </file>
 
-<file path=ppt/slides/slide33.xml><?xml version="1.0" encoding="utf-8"?>
+<file path=ppt/slides/slide35.xml><?xml version="1.0" encoding="utf-8"?>
+<p:sld xmlns:a="http://schemas.openxmlformats.org/drawingml/2006/main" xmlns:p="http://schemas.openxmlformats.org/presentationml/2006/main" xmlns:r="http://schemas.openxmlformats.org/officeDocument/2006/relationships">
+  <p:cSld>
+    <p:spTree>
+      <p:nvGrpSpPr>
+        <p:cNvPr id="1" name=""/>
+        <p:cNvGrpSpPr/>
+        <p:nvPr/>
+      </p:nvGrpSpPr>
+      <p:grpSpPr/>
+      <p:pic>
+        <p:nvPicPr>
+          <p:cNvPr id="2" name="Picture 1" descr="deck_bg.png"/>
+          <p:cNvPicPr>
+            <a:picLocks noChangeAspect="1"/>
+          </p:cNvPicPr>
+          <p:nvPr/>
+        </p:nvPicPr>
+        <p:blipFill>
+          <a:blip r:embed="rId2"/>
+          <a:stretch>
+            <a:fillRect/>
+          </a:stretch>
+        </p:blipFill>
+        <p:spPr>
+          <a:xfrm>
+            <a:off x="0" y="0"/>
+            <a:ext cx="12191695" cy="6858000"/>
+          </a:xfrm>
+          <a:prstGeom prst="rect">
+            <a:avLst/>
+          </a:prstGeom>
+        </p:spPr>
+      </p:pic>
+      <p:pic>
+        <p:nvPicPr>
+          <p:cNvPr id="3" name="Picture 2" descr="sentinel_mark.png"/>
+          <p:cNvPicPr>
+            <a:picLocks noChangeAspect="1"/>
+          </p:cNvPicPr>
+          <p:nvPr/>
+        </p:nvPicPr>
+        <p:blipFill>
+          <a:blip r:embed="rId3"/>
+          <a:stretch>
+            <a:fillRect/>
+          </a:stretch>
+        </p:blipFill>
+        <p:spPr>
+          <a:xfrm>
+            <a:off x="566928" y="457200"/>
+            <a:ext cx="749808" cy="749808"/>
+          </a:xfrm>
+          <a:prstGeom prst="rect">
+            <a:avLst/>
+          </a:prstGeom>
+        </p:spPr>
+      </p:pic>
+      <p:sp>
+        <p:nvSpPr>
+          <p:cNvPr id="4" name="Rounded Rectangle 3"/>
+          <p:cNvSpPr/>
+          <p:nvPr/>
+        </p:nvSpPr>
+        <p:spPr>
+          <a:xfrm>
+            <a:off x="10195560" y="457200"/>
+            <a:ext cx="1554480" cy="384048"/>
+          </a:xfrm>
+          <a:prstGeom prst="roundRect">
+            <a:avLst/>
+          </a:prstGeom>
+          <a:noFill/>
+          <a:ln w="12700">
+            <a:solidFill>
+              <a:srgbClr val="22D3EE"/>
+            </a:solidFill>
+          </a:ln>
+        </p:spPr>
+        <p:style>
+          <a:lnRef idx="1">
+            <a:schemeClr val="accent1"/>
+          </a:lnRef>
+          <a:fillRef idx="3">
+            <a:schemeClr val="accent1"/>
+          </a:fillRef>
+          <a:effectRef idx="2">
+            <a:schemeClr val="accent1"/>
+          </a:effectRef>
+          <a:fontRef idx="minor">
+            <a:schemeClr val="lt1"/>
+          </a:fontRef>
+        </p:style>
+        <p:txBody>
+          <a:bodyPr rtlCol="0" anchor="ctr" tIns="0" bIns="0"/>
+          <a:lstStyle/>
+          <a:p>
+            <a:pPr algn="ctr"/>
+            <a:r>
+              <a:rPr sz="1200" b="1">
+                <a:solidFill>
+                  <a:srgbClr val="22D3EE"/>
+                </a:solidFill>
+                <a:latin typeface="Consolas"/>
+              </a:rPr>
+              <a:t>AI KAVACH</a:t>
+            </a:r>
+          </a:p>
+        </p:txBody>
+      </p:sp>
+      <p:sp>
+        <p:nvSpPr>
+          <p:cNvPr id="5" name="TextBox 4"/>
+          <p:cNvSpPr txBox="1"/>
+          <p:nvPr/>
+        </p:nvSpPr>
+        <p:spPr>
+          <a:xfrm>
+            <a:off x="1508760" y="475488"/>
+            <a:ext cx="8503920" cy="1051560"/>
+          </a:xfrm>
+          <a:prstGeom prst="rect">
+            <a:avLst/>
+          </a:prstGeom>
+          <a:noFill/>
+        </p:spPr>
+        <p:txBody>
+          <a:bodyPr wrap="square" anchor="ctr" lIns="0" rIns="0" tIns="0" bIns="0">
+            <a:spAutoFit/>
+          </a:bodyPr>
+          <a:lstStyle/>
+          <a:p>
+            <a:r>
+              <a:rPr sz="3100" b="1">
+                <a:solidFill>
+                  <a:srgbClr val="EAF2FF"/>
+                </a:solidFill>
+                <a:latin typeface="Consolas"/>
+              </a:rPr>
+              <a:t>Why Sentinel Wins</a:t>
+            </a:r>
+          </a:p>
+        </p:txBody>
+      </p:sp>
+      <p:pic>
+        <p:nvPicPr>
+          <p:cNvPr id="6" name="Picture 5" descr="deck_rule.png"/>
+          <p:cNvPicPr>
+            <a:picLocks noChangeAspect="1"/>
+          </p:cNvPicPr>
+          <p:nvPr/>
+        </p:nvPicPr>
+        <p:blipFill>
+          <a:blip r:embed="rId4"/>
+          <a:stretch>
+            <a:fillRect/>
+          </a:stretch>
+        </p:blipFill>
+        <p:spPr>
+          <a:xfrm>
+            <a:off x="640080" y="1664208"/>
+            <a:ext cx="3108960" cy="56692"/>
+          </a:xfrm>
+          <a:prstGeom prst="rect">
+            <a:avLst/>
+          </a:prstGeom>
+        </p:spPr>
+      </p:pic>
+      <p:sp>
+        <p:nvSpPr>
+          <p:cNvPr id="7" name="TextBox 6"/>
+          <p:cNvSpPr txBox="1"/>
+          <p:nvPr/>
+        </p:nvSpPr>
+        <p:spPr>
+          <a:xfrm>
+            <a:off x="658368" y="1847088"/>
+            <a:ext cx="10881360" cy="548640"/>
+          </a:xfrm>
+          <a:prstGeom prst="rect">
+            <a:avLst/>
+          </a:prstGeom>
+          <a:noFill/>
+        </p:spPr>
+        <p:txBody>
+          <a:bodyPr wrap="square" anchor="t" lIns="0" rIns="0" tIns="0" bIns="0">
+            <a:spAutoFit/>
+          </a:bodyPr>
+          <a:lstStyle/>
+          <a:p>
+            <a:r>
+              <a:rPr sz="1600" b="0">
+                <a:solidFill>
+                  <a:srgbClr val="22D3EE"/>
+                </a:solidFill>
+                <a:latin typeface="Consolas"/>
+              </a:rPr>
+              <a:t>The defensible core</a:t>
+            </a:r>
+          </a:p>
+        </p:txBody>
+      </p:sp>
+      <p:sp>
+        <p:nvSpPr>
+          <p:cNvPr id="8" name="TextBox 7"/>
+          <p:cNvSpPr txBox="1"/>
+          <p:nvPr/>
+        </p:nvSpPr>
+        <p:spPr>
+          <a:xfrm>
+            <a:off x="713232" y="2697480"/>
+            <a:ext cx="10789920" cy="3840480"/>
+          </a:xfrm>
+          <a:prstGeom prst="rect">
+            <a:avLst/>
+          </a:prstGeom>
+          <a:noFill/>
+        </p:spPr>
+        <p:txBody>
+          <a:bodyPr wrap="square" anchor="t" lIns="0" rIns="0" tIns="0" bIns="0">
+            <a:spAutoFit/>
+          </a:bodyPr>
+          <a:lstStyle/>
+          <a:p>
+            <a:pPr>
+              <a:spcAft>
+                <a:spcPts val="1500"/>
+              </a:spcAft>
+            </a:pPr>
+            <a:r>
+              <a:rPr sz="1800" b="1">
+                <a:solidFill>
+                  <a:srgbClr val="22D3EE"/>
+                </a:solidFill>
+                <a:latin typeface="Segoe UI"/>
+              </a:rPr>
+              <a:t>»  </a:t>
+            </a:r>
+            <a:r>
+              <a:rPr sz="1800" b="0">
+                <a:solidFill>
+                  <a:srgbClr val="C4D2E4"/>
+                </a:solidFill>
+                <a:latin typeface="Segoe UI"/>
+              </a:rPr>
+              <a:t>Trust: a finding is a reproduced contradiction, provably</a:t>
+            </a:r>
+          </a:p>
+          <a:p>
+            <a:pPr>
+              <a:spcAft>
+                <a:spcPts val="1500"/>
+              </a:spcAft>
+            </a:pPr>
+            <a:r>
+              <a:rPr sz="1800" b="1">
+                <a:solidFill>
+                  <a:srgbClr val="22D3EE"/>
+                </a:solidFill>
+                <a:latin typeface="Segoe UI"/>
+              </a:rPr>
+              <a:t>»  </a:t>
+            </a:r>
+            <a:r>
+              <a:rPr sz="1800" b="0">
+                <a:solidFill>
+                  <a:srgbClr val="C4D2E4"/>
+                </a:solidFill>
+                <a:latin typeface="Segoe UI"/>
+              </a:rPr>
+              <a:t>Closure: it doesn't just find — it patches and re-proves</a:t>
+            </a:r>
+          </a:p>
+          <a:p>
+            <a:pPr>
+              <a:spcAft>
+                <a:spcPts val="1500"/>
+              </a:spcAft>
+            </a:pPr>
+            <a:r>
+              <a:rPr sz="1800" b="1">
+                <a:solidFill>
+                  <a:srgbClr val="22D3EE"/>
+                </a:solidFill>
+                <a:latin typeface="Segoe UI"/>
+              </a:rPr>
+              <a:t>»  </a:t>
+            </a:r>
+            <a:r>
+              <a:rPr sz="1800" b="0">
+                <a:solidFill>
+                  <a:srgbClr val="C4D2E4"/>
+                </a:solidFill>
+                <a:latin typeface="Segoe UI"/>
+              </a:rPr>
+              <a:t>Reach: the classes signatures miss (authz, session)</a:t>
+            </a:r>
+          </a:p>
+          <a:p>
+            <a:pPr>
+              <a:spcAft>
+                <a:spcPts val="1500"/>
+              </a:spcAft>
+            </a:pPr>
+            <a:r>
+              <a:rPr sz="1800" b="1">
+                <a:solidFill>
+                  <a:srgbClr val="22D3EE"/>
+                </a:solidFill>
+                <a:latin typeface="Segoe UI"/>
+              </a:rPr>
+              <a:t>»  </a:t>
+            </a:r>
+            <a:r>
+              <a:rPr sz="1800" b="0">
+                <a:solidFill>
+                  <a:srgbClr val="C4D2E4"/>
+                </a:solidFill>
+                <a:latin typeface="Segoe UI"/>
+              </a:rPr>
+              <a:t>Honesty: compliant controls and frontiers labeled, not faked</a:t>
+            </a:r>
+          </a:p>
+          <a:p>
+            <a:pPr>
+              <a:spcAft>
+                <a:spcPts val="1500"/>
+              </a:spcAft>
+            </a:pPr>
+            <a:r>
+              <a:rPr sz="1800" b="1">
+                <a:solidFill>
+                  <a:srgbClr val="22D3EE"/>
+                </a:solidFill>
+                <a:latin typeface="Segoe UI"/>
+              </a:rPr>
+              <a:t>»  </a:t>
+            </a:r>
+            <a:r>
+              <a:rPr sz="1800" b="0">
+                <a:solidFill>
+                  <a:srgbClr val="C4D2E4"/>
+                </a:solidFill>
+                <a:latin typeface="Segoe UI"/>
+              </a:rPr>
+              <a:t>Deployability: local, auditable, air-gap-ready</a:t>
+            </a:r>
+          </a:p>
+        </p:txBody>
+      </p:sp>
+      <p:sp>
+        <p:nvSpPr>
+          <p:cNvPr id="9" name="TextBox 8"/>
+          <p:cNvSpPr txBox="1"/>
+          <p:nvPr/>
+        </p:nvSpPr>
+        <p:spPr>
+          <a:xfrm>
+            <a:off x="566928" y="6382512"/>
+            <a:ext cx="8229600" cy="365760"/>
+          </a:xfrm>
+          <a:prstGeom prst="rect">
+            <a:avLst/>
+          </a:prstGeom>
+          <a:noFill/>
+        </p:spPr>
+        <p:txBody>
+          <a:bodyPr wrap="square" anchor="t" lIns="0" rIns="0" tIns="0" bIns="0">
+            <a:spAutoFit/>
+          </a:bodyPr>
+          <a:lstStyle/>
+          <a:p>
+            <a:r>
+              <a:rPr sz="1000" b="1">
+                <a:solidFill>
+                  <a:srgbClr val="22D3EE"/>
+                </a:solidFill>
+                <a:latin typeface="Consolas"/>
+              </a:rPr>
+              <a:t>SENTINEL</a:t>
+            </a:r>
+            <a:r>
+              <a:rPr sz="1000" b="0">
+                <a:solidFill>
+                  <a:srgbClr val="6B7A90"/>
+                </a:solidFill>
+                <a:latin typeface="Consolas"/>
+              </a:rPr>
+              <a:t>   ·   find → reason → prove → patch → prove</a:t>
+            </a:r>
+          </a:p>
+        </p:txBody>
+      </p:sp>
+      <p:sp>
+        <p:nvSpPr>
+          <p:cNvPr id="10" name="TextBox 9"/>
+          <p:cNvSpPr txBox="1"/>
+          <p:nvPr/>
+        </p:nvSpPr>
+        <p:spPr>
+          <a:xfrm>
+            <a:off x="10789920" y="6382512"/>
+            <a:ext cx="914400" cy="365760"/>
+          </a:xfrm>
+          <a:prstGeom prst="rect">
+            <a:avLst/>
+          </a:prstGeom>
+          <a:noFill/>
+        </p:spPr>
+        <p:txBody>
+          <a:bodyPr wrap="square" anchor="t" lIns="0" rIns="0" tIns="0" bIns="0">
+            <a:spAutoFit/>
+          </a:bodyPr>
+          <a:lstStyle/>
+          <a:p>
+            <a:pPr algn="r"/>
+            <a:r>
+              <a:rPr sz="1000" b="0">
+                <a:solidFill>
+                  <a:srgbClr val="6B7A90"/>
+                </a:solidFill>
+                <a:latin typeface="Consolas"/>
+              </a:rPr>
+              <a:t>35 / 38</a:t>
+            </a:r>
+          </a:p>
+        </p:txBody>
+      </p:sp>
+    </p:spTree>
+  </p:cSld>
+  <p:clrMapOvr>
+    <a:masterClrMapping/>
+  </p:clrMapOvr>
+</p:sld>
+</file>
+
+<file path=ppt/slides/slide36.xml><?xml version="1.0" encoding="utf-8"?>
+<p:sld xmlns:a="http://schemas.openxmlformats.org/drawingml/2006/main" xmlns:p="http://schemas.openxmlformats.org/presentationml/2006/main" xmlns:r="http://schemas.openxmlformats.org/officeDocument/2006/relationships">
+  <p:cSld>
+    <p:spTree>
+      <p:nvGrpSpPr>
+        <p:cNvPr id="1" name=""/>
+        <p:cNvGrpSpPr/>
+        <p:nvPr/>
+      </p:nvGrpSpPr>
+      <p:grpSpPr/>
+      <p:pic>
+        <p:nvPicPr>
+          <p:cNvPr id="2" name="Picture 1" descr="deck_bg.png"/>
+          <p:cNvPicPr>
+            <a:picLocks noChangeAspect="1"/>
+          </p:cNvPicPr>
+          <p:nvPr/>
+        </p:nvPicPr>
+        <p:blipFill>
+          <a:blip r:embed="rId2"/>
+          <a:stretch>
+            <a:fillRect/>
+          </a:stretch>
+        </p:blipFill>
+        <p:spPr>
+          <a:xfrm>
+            <a:off x="0" y="0"/>
+            <a:ext cx="12191695" cy="6858000"/>
+          </a:xfrm>
+          <a:prstGeom prst="rect">
+            <a:avLst/>
+          </a:prstGeom>
+        </p:spPr>
+      </p:pic>
+      <p:pic>
+        <p:nvPicPr>
+          <p:cNvPr id="3" name="Picture 2" descr="sentinel_mark.png"/>
+          <p:cNvPicPr>
+            <a:picLocks noChangeAspect="1"/>
+          </p:cNvPicPr>
+          <p:nvPr/>
+        </p:nvPicPr>
+        <p:blipFill>
+          <a:blip r:embed="rId3"/>
+          <a:stretch>
+            <a:fillRect/>
+          </a:stretch>
+        </p:blipFill>
+        <p:spPr>
+          <a:xfrm>
+            <a:off x="566928" y="457200"/>
+            <a:ext cx="749808" cy="749808"/>
+          </a:xfrm>
+          <a:prstGeom prst="rect">
+            <a:avLst/>
+          </a:prstGeom>
+        </p:spPr>
+      </p:pic>
+      <p:sp>
+        <p:nvSpPr>
+          <p:cNvPr id="4" name="Rounded Rectangle 3"/>
+          <p:cNvSpPr/>
+          <p:nvPr/>
+        </p:nvSpPr>
+        <p:spPr>
+          <a:xfrm>
+            <a:off x="10195560" y="457200"/>
+            <a:ext cx="1554480" cy="384048"/>
+          </a:xfrm>
+          <a:prstGeom prst="roundRect">
+            <a:avLst/>
+          </a:prstGeom>
+          <a:noFill/>
+          <a:ln w="12700">
+            <a:solidFill>
+              <a:srgbClr val="22D3EE"/>
+            </a:solidFill>
+          </a:ln>
+        </p:spPr>
+        <p:style>
+          <a:lnRef idx="1">
+            <a:schemeClr val="accent1"/>
+          </a:lnRef>
+          <a:fillRef idx="3">
+            <a:schemeClr val="accent1"/>
+          </a:fillRef>
+          <a:effectRef idx="2">
+            <a:schemeClr val="accent1"/>
+          </a:effectRef>
+          <a:fontRef idx="minor">
+            <a:schemeClr val="lt1"/>
+          </a:fontRef>
+        </p:style>
+        <p:txBody>
+          <a:bodyPr rtlCol="0" anchor="ctr" tIns="0" bIns="0"/>
+          <a:lstStyle/>
+          <a:p>
+            <a:pPr algn="ctr"/>
+            <a:r>
+              <a:rPr sz="1200" b="1">
+                <a:solidFill>
+                  <a:srgbClr val="22D3EE"/>
+                </a:solidFill>
+                <a:latin typeface="Consolas"/>
+              </a:rPr>
+              <a:t>AI KAVACH</a:t>
+            </a:r>
+          </a:p>
+        </p:txBody>
+      </p:sp>
+      <p:sp>
+        <p:nvSpPr>
+          <p:cNvPr id="5" name="TextBox 4"/>
+          <p:cNvSpPr txBox="1"/>
+          <p:nvPr/>
+        </p:nvSpPr>
+        <p:spPr>
+          <a:xfrm>
+            <a:off x="1508760" y="475488"/>
+            <a:ext cx="8503920" cy="1051560"/>
+          </a:xfrm>
+          <a:prstGeom prst="rect">
+            <a:avLst/>
+          </a:prstGeom>
+          <a:noFill/>
+        </p:spPr>
+        <p:txBody>
+          <a:bodyPr wrap="square" anchor="ctr" lIns="0" rIns="0" tIns="0" bIns="0">
+            <a:spAutoFit/>
+          </a:bodyPr>
+          <a:lstStyle/>
+          <a:p>
+            <a:r>
+              <a:rPr sz="3100" b="1">
+                <a:solidFill>
+                  <a:srgbClr val="EAF2FF"/>
+                </a:solidFill>
+                <a:latin typeface="Consolas"/>
+              </a:rPr>
+              <a:t>Status &amp; Roadmap</a:t>
+            </a:r>
+          </a:p>
+        </p:txBody>
+      </p:sp>
+      <p:pic>
+        <p:nvPicPr>
+          <p:cNvPr id="6" name="Picture 5" descr="deck_rule.png"/>
+          <p:cNvPicPr>
+            <a:picLocks noChangeAspect="1"/>
+          </p:cNvPicPr>
+          <p:nvPr/>
+        </p:nvPicPr>
+        <p:blipFill>
+          <a:blip r:embed="rId4"/>
+          <a:stretch>
+            <a:fillRect/>
+          </a:stretch>
+        </p:blipFill>
+        <p:spPr>
+          <a:xfrm>
+            <a:off x="640080" y="1664208"/>
+            <a:ext cx="3108960" cy="56692"/>
+          </a:xfrm>
+          <a:prstGeom prst="rect">
+            <a:avLst/>
+          </a:prstGeom>
+        </p:spPr>
+      </p:pic>
+      <p:sp>
+        <p:nvSpPr>
+          <p:cNvPr id="7" name="TextBox 6"/>
+          <p:cNvSpPr txBox="1"/>
+          <p:nvPr/>
+        </p:nvSpPr>
+        <p:spPr>
+          <a:xfrm>
+            <a:off x="658368" y="1847088"/>
+            <a:ext cx="10881360" cy="548640"/>
+          </a:xfrm>
+          <a:prstGeom prst="rect">
+            <a:avLst/>
+          </a:prstGeom>
+          <a:noFill/>
+        </p:spPr>
+        <p:txBody>
+          <a:bodyPr wrap="square" anchor="t" lIns="0" rIns="0" tIns="0" bIns="0">
+            <a:spAutoFit/>
+          </a:bodyPr>
+          <a:lstStyle/>
+          <a:p>
+            <a:r>
+              <a:rPr sz="1600" b="0">
+                <a:solidFill>
+                  <a:srgbClr val="22D3EE"/>
+                </a:solidFill>
+                <a:latin typeface="Consolas"/>
+              </a:rPr>
+              <a:t>Honest today; a clear path to more</a:t>
+            </a:r>
+          </a:p>
+        </p:txBody>
+      </p:sp>
+      <p:sp>
+        <p:nvSpPr>
+          <p:cNvPr id="8" name="TextBox 7"/>
+          <p:cNvSpPr txBox="1"/>
+          <p:nvPr/>
+        </p:nvSpPr>
+        <p:spPr>
+          <a:xfrm>
+            <a:off x="713232" y="2697480"/>
+            <a:ext cx="10789920" cy="3840480"/>
+          </a:xfrm>
+          <a:prstGeom prst="rect">
+            <a:avLst/>
+          </a:prstGeom>
+          <a:noFill/>
+        </p:spPr>
+        <p:txBody>
+          <a:bodyPr wrap="square" anchor="t" lIns="0" rIns="0" tIns="0" bIns="0">
+            <a:spAutoFit/>
+          </a:bodyPr>
+          <a:lstStyle/>
+          <a:p>
+            <a:pPr>
+              <a:spcAft>
+                <a:spcPts val="1500"/>
+              </a:spcAft>
+            </a:pPr>
+            <a:r>
+              <a:rPr sz="1800" b="1">
+                <a:solidFill>
+                  <a:srgbClr val="2DD48F"/>
+                </a:solidFill>
+                <a:latin typeface="Segoe UI"/>
+              </a:rPr>
+              <a:t>»  </a:t>
+            </a:r>
+            <a:r>
+              <a:rPr sz="1800" b="0">
+                <a:solidFill>
+                  <a:srgbClr val="EAF2FF"/>
+                </a:solidFill>
+                <a:latin typeface="Segoe UI"/>
+              </a:rPr>
+              <a:t>Today: 12 classes + provable chaining, live on 2 stacks; 454 tests</a:t>
+            </a:r>
+          </a:p>
+          <a:p>
+            <a:pPr>
+              <a:spcAft>
+                <a:spcPts val="1500"/>
+              </a:spcAft>
+            </a:pPr>
+            <a:r>
+              <a:rPr sz="1800" b="1">
+                <a:solidFill>
+                  <a:srgbClr val="2DD48F"/>
+                </a:solidFill>
+                <a:latin typeface="Segoe UI"/>
+              </a:rPr>
+              <a:t>»  </a:t>
+            </a:r>
+            <a:r>
+              <a:rPr sz="1800" b="0">
+                <a:solidFill>
+                  <a:srgbClr val="EAF2FF"/>
+                </a:solidFill>
+                <a:latin typeface="Segoe UI"/>
+              </a:rPr>
+              <a:t>Today: autonomous &lt;url&gt; fusion loop + curated tool selector</a:t>
+            </a:r>
+          </a:p>
+          <a:p>
+            <a:pPr>
+              <a:spcAft>
+                <a:spcPts val="1500"/>
+              </a:spcAft>
+            </a:pPr>
+            <a:r>
+              <a:rPr sz="1800" b="1">
+                <a:solidFill>
+                  <a:srgbClr val="2DD48F"/>
+                </a:solidFill>
+                <a:latin typeface="Segoe UI"/>
+              </a:rPr>
+              <a:t>»  </a:t>
+            </a:r>
+            <a:r>
+              <a:rPr sz="1800" b="0">
+                <a:solidFill>
+                  <a:srgbClr val="EAF2FF"/>
+                </a:solidFill>
+                <a:latin typeface="Segoe UI"/>
+              </a:rPr>
+              <a:t>Today: pluggable LLM providers + proof-carrying report generator</a:t>
+            </a:r>
+          </a:p>
+          <a:p>
+            <a:pPr>
+              <a:spcAft>
+                <a:spcPts val="1500"/>
+              </a:spcAft>
+            </a:pPr>
+            <a:r>
+              <a:rPr sz="1800" b="1">
+                <a:solidFill>
+                  <a:srgbClr val="F5B301"/>
+                </a:solidFill>
+                <a:latin typeface="Segoe UI"/>
+              </a:rPr>
+              <a:t>»  </a:t>
+            </a:r>
+            <a:r>
+              <a:rPr sz="1800" b="0">
+                <a:solidFill>
+                  <a:srgbClr val="EAF2FF"/>
+                </a:solidFill>
+                <a:latin typeface="Segoe UI"/>
+              </a:rPr>
+              <a:t>Next: failure-cause analysis + bounded retry — smarter probing</a:t>
+            </a:r>
+          </a:p>
+          <a:p>
+            <a:pPr>
+              <a:spcAft>
+                <a:spcPts val="1500"/>
+              </a:spcAft>
+            </a:pPr>
+            <a:r>
+              <a:rPr sz="1800" b="1">
+                <a:solidFill>
+                  <a:srgbClr val="F5B301"/>
+                </a:solidFill>
+                <a:latin typeface="Segoe UI"/>
+              </a:rPr>
+              <a:t>»  </a:t>
+            </a:r>
+            <a:r>
+              <a:rPr sz="1800" b="0">
+                <a:solidFill>
+                  <a:srgbClr val="EAF2FF"/>
+                </a:solidFill>
+                <a:latin typeface="Segoe UI"/>
+              </a:rPr>
+              <a:t>Next: Tier-B classes (cmd-injection, XXE…), deeper KB, CI gate</a:t>
+            </a:r>
+          </a:p>
+        </p:txBody>
+      </p:sp>
+      <p:sp>
+        <p:nvSpPr>
+          <p:cNvPr id="9" name="TextBox 8"/>
+          <p:cNvSpPr txBox="1"/>
+          <p:nvPr/>
+        </p:nvSpPr>
+        <p:spPr>
+          <a:xfrm>
+            <a:off x="566928" y="6382512"/>
+            <a:ext cx="8229600" cy="365760"/>
+          </a:xfrm>
+          <a:prstGeom prst="rect">
+            <a:avLst/>
+          </a:prstGeom>
+          <a:noFill/>
+        </p:spPr>
+        <p:txBody>
+          <a:bodyPr wrap="square" anchor="t" lIns="0" rIns="0" tIns="0" bIns="0">
+            <a:spAutoFit/>
+          </a:bodyPr>
+          <a:lstStyle/>
+          <a:p>
+            <a:r>
+              <a:rPr sz="1000" b="1">
+                <a:solidFill>
+                  <a:srgbClr val="22D3EE"/>
+                </a:solidFill>
+                <a:latin typeface="Consolas"/>
+              </a:rPr>
+              <a:t>SENTINEL</a:t>
+            </a:r>
+            <a:r>
+              <a:rPr sz="1000" b="0">
+                <a:solidFill>
+                  <a:srgbClr val="6B7A90"/>
+                </a:solidFill>
+                <a:latin typeface="Consolas"/>
+              </a:rPr>
+              <a:t>   ·   find → reason → prove → patch → prove</a:t>
+            </a:r>
+          </a:p>
+        </p:txBody>
+      </p:sp>
+      <p:sp>
+        <p:nvSpPr>
+          <p:cNvPr id="10" name="TextBox 9"/>
+          <p:cNvSpPr txBox="1"/>
+          <p:nvPr/>
+        </p:nvSpPr>
+        <p:spPr>
+          <a:xfrm>
+            <a:off x="10789920" y="6382512"/>
+            <a:ext cx="914400" cy="365760"/>
+          </a:xfrm>
+          <a:prstGeom prst="rect">
+            <a:avLst/>
+          </a:prstGeom>
+          <a:noFill/>
+        </p:spPr>
+        <p:txBody>
+          <a:bodyPr wrap="square" anchor="t" lIns="0" rIns="0" tIns="0" bIns="0">
+            <a:spAutoFit/>
+          </a:bodyPr>
+          <a:lstStyle/>
+          <a:p>
+            <a:pPr algn="r"/>
+            <a:r>
+              <a:rPr sz="1000" b="0">
+                <a:solidFill>
+                  <a:srgbClr val="6B7A90"/>
+                </a:solidFill>
+                <a:latin typeface="Consolas"/>
+              </a:rPr>
+              <a:t>36 / 38</a:t>
+            </a:r>
+          </a:p>
+        </p:txBody>
+      </p:sp>
+    </p:spTree>
+  </p:cSld>
+  <p:clrMapOvr>
+    <a:masterClrMapping/>
+  </p:clrMapOvr>
+</p:sld>
+</file>
+
+<file path=ppt/slides/slide37.xml><?xml version="1.0" encoding="utf-8"?>
+<p:sld xmlns:a="http://schemas.openxmlformats.org/drawingml/2006/main" xmlns:p="http://schemas.openxmlformats.org/presentationml/2006/main" xmlns:r="http://schemas.openxmlformats.org/officeDocument/2006/relationships">
+  <p:cSld>
+    <p:spTree>
+      <p:nvGrpSpPr>
+        <p:cNvPr id="1" name=""/>
+        <p:cNvGrpSpPr/>
+        <p:nvPr/>
+      </p:nvGrpSpPr>
+      <p:grpSpPr/>
+      <p:pic>
+        <p:nvPicPr>
+          <p:cNvPr id="2" name="Picture 1" descr="deck_bg.png"/>
+          <p:cNvPicPr>
+            <a:picLocks noChangeAspect="1"/>
+          </p:cNvPicPr>
+          <p:nvPr/>
+        </p:nvPicPr>
+        <p:blipFill>
+          <a:blip r:embed="rId2"/>
+          <a:stretch>
+            <a:fillRect/>
+          </a:stretch>
+        </p:blipFill>
+        <p:spPr>
+          <a:xfrm>
+            <a:off x="0" y="0"/>
+            <a:ext cx="12191695" cy="6858000"/>
+          </a:xfrm>
+          <a:prstGeom prst="rect">
+            <a:avLst/>
+          </a:prstGeom>
+        </p:spPr>
+      </p:pic>
+      <p:pic>
+        <p:nvPicPr>
+          <p:cNvPr id="3" name="Picture 2" descr="sentinel_mark.png"/>
+          <p:cNvPicPr>
+            <a:picLocks noChangeAspect="1"/>
+          </p:cNvPicPr>
+          <p:nvPr/>
+        </p:nvPicPr>
+        <p:blipFill>
+          <a:blip r:embed="rId3"/>
+          <a:stretch>
+            <a:fillRect/>
+          </a:stretch>
+        </p:blipFill>
+        <p:spPr>
+          <a:xfrm>
+            <a:off x="566928" y="457200"/>
+            <a:ext cx="749808" cy="749808"/>
+          </a:xfrm>
+          <a:prstGeom prst="rect">
+            <a:avLst/>
+          </a:prstGeom>
+        </p:spPr>
+      </p:pic>
+      <p:sp>
+        <p:nvSpPr>
+          <p:cNvPr id="4" name="Rounded Rectangle 3"/>
+          <p:cNvSpPr/>
+          <p:nvPr/>
+        </p:nvSpPr>
+        <p:spPr>
+          <a:xfrm>
+            <a:off x="10195560" y="457200"/>
+            <a:ext cx="1554480" cy="384048"/>
+          </a:xfrm>
+          <a:prstGeom prst="roundRect">
+            <a:avLst/>
+          </a:prstGeom>
+          <a:noFill/>
+          <a:ln w="12700">
+            <a:solidFill>
+              <a:srgbClr val="22D3EE"/>
+            </a:solidFill>
+          </a:ln>
+        </p:spPr>
+        <p:style>
+          <a:lnRef idx="1">
+            <a:schemeClr val="accent1"/>
+          </a:lnRef>
+          <a:fillRef idx="3">
+            <a:schemeClr val="accent1"/>
+          </a:fillRef>
+          <a:effectRef idx="2">
+            <a:schemeClr val="accent1"/>
+          </a:effectRef>
+          <a:fontRef idx="minor">
+            <a:schemeClr val="lt1"/>
+          </a:fontRef>
+        </p:style>
+        <p:txBody>
+          <a:bodyPr rtlCol="0" anchor="ctr" tIns="0" bIns="0"/>
+          <a:lstStyle/>
+          <a:p>
+            <a:pPr algn="ctr"/>
+            <a:r>
+              <a:rPr sz="1200" b="1">
+                <a:solidFill>
+                  <a:srgbClr val="22D3EE"/>
+                </a:solidFill>
+                <a:latin typeface="Consolas"/>
+              </a:rPr>
+              <a:t>AI KAVACH</a:t>
+            </a:r>
+          </a:p>
+        </p:txBody>
+      </p:sp>
+      <p:sp>
+        <p:nvSpPr>
+          <p:cNvPr id="5" name="TextBox 4"/>
+          <p:cNvSpPr txBox="1"/>
+          <p:nvPr/>
+        </p:nvSpPr>
+        <p:spPr>
+          <a:xfrm>
+            <a:off x="1508760" y="475488"/>
+            <a:ext cx="8503920" cy="1051560"/>
+          </a:xfrm>
+          <a:prstGeom prst="rect">
+            <a:avLst/>
+          </a:prstGeom>
+          <a:noFill/>
+        </p:spPr>
+        <p:txBody>
+          <a:bodyPr wrap="square" anchor="ctr" lIns="0" rIns="0" tIns="0" bIns="0">
+            <a:spAutoFit/>
+          </a:bodyPr>
+          <a:lstStyle/>
+          <a:p>
+            <a:r>
+              <a:rPr sz="3100" b="1">
+                <a:solidFill>
+                  <a:srgbClr val="EAF2FF"/>
+                </a:solidFill>
+                <a:latin typeface="Consolas"/>
+              </a:rPr>
+              <a:t>The Ask</a:t>
+            </a:r>
+          </a:p>
+        </p:txBody>
+      </p:sp>
+      <p:pic>
+        <p:nvPicPr>
+          <p:cNvPr id="6" name="Picture 5" descr="deck_rule.png"/>
+          <p:cNvPicPr>
+            <a:picLocks noChangeAspect="1"/>
+          </p:cNvPicPr>
+          <p:nvPr/>
+        </p:nvPicPr>
+        <p:blipFill>
+          <a:blip r:embed="rId4"/>
+          <a:stretch>
+            <a:fillRect/>
+          </a:stretch>
+        </p:blipFill>
+        <p:spPr>
+          <a:xfrm>
+            <a:off x="640080" y="1664208"/>
+            <a:ext cx="3108960" cy="56692"/>
+          </a:xfrm>
+          <a:prstGeom prst="rect">
+            <a:avLst/>
+          </a:prstGeom>
+        </p:spPr>
+      </p:pic>
+      <p:sp>
+        <p:nvSpPr>
+          <p:cNvPr id="7" name="TextBox 6"/>
+          <p:cNvSpPr txBox="1"/>
+          <p:nvPr/>
+        </p:nvSpPr>
+        <p:spPr>
+          <a:xfrm>
+            <a:off x="658368" y="1847088"/>
+            <a:ext cx="10881360" cy="548640"/>
+          </a:xfrm>
+          <a:prstGeom prst="rect">
+            <a:avLst/>
+          </a:prstGeom>
+          <a:noFill/>
+        </p:spPr>
+        <p:txBody>
+          <a:bodyPr wrap="square" anchor="t" lIns="0" rIns="0" tIns="0" bIns="0">
+            <a:spAutoFit/>
+          </a:bodyPr>
+          <a:lstStyle/>
+          <a:p>
+            <a:r>
+              <a:rPr sz="1600" b="0">
+                <a:solidFill>
+                  <a:srgbClr val="22D3EE"/>
+                </a:solidFill>
+                <a:latin typeface="Consolas"/>
+              </a:rPr>
+              <a:t>$1M to turn a proven engine into a platform</a:t>
+            </a:r>
+          </a:p>
+        </p:txBody>
+      </p:sp>
+      <p:sp>
+        <p:nvSpPr>
+          <p:cNvPr id="8" name="Rounded Rectangle 7"/>
+          <p:cNvSpPr/>
+          <p:nvPr/>
+        </p:nvSpPr>
+        <p:spPr>
+          <a:xfrm>
+            <a:off x="603504" y="2395728"/>
+            <a:ext cx="3444240" cy="1143000"/>
+          </a:xfrm>
+          <a:prstGeom prst="roundRect">
+            <a:avLst/>
+          </a:prstGeom>
+          <a:noFill/>
+          <a:ln w="12700">
+            <a:solidFill>
+              <a:srgbClr val="22D3EE"/>
+            </a:solidFill>
+          </a:ln>
+        </p:spPr>
+        <p:style>
+          <a:lnRef idx="1">
+            <a:schemeClr val="accent1"/>
+          </a:lnRef>
+          <a:fillRef idx="3">
+            <a:schemeClr val="accent1"/>
+          </a:fillRef>
+          <a:effectRef idx="2">
+            <a:schemeClr val="accent1"/>
+          </a:effectRef>
+          <a:fontRef idx="minor">
+            <a:schemeClr val="lt1"/>
+          </a:fontRef>
+        </p:style>
+        <p:txBody>
+          <a:bodyPr rtlCol="0" anchor="ctr"/>
+          <a:lstStyle/>
+          <a:p>
+            <a:pPr algn="ctr"/>
+            <a:r>
+              <a:rPr sz="3200" b="1">
+                <a:solidFill>
+                  <a:srgbClr val="22D3EE"/>
+                </a:solidFill>
+                <a:latin typeface="Consolas"/>
+              </a:rPr>
+              <a:t>$1M</a:t>
+            </a:r>
+          </a:p>
+          <a:p>
+            <a:pPr algn="ctr"/>
+            <a:r>
+              <a:rPr sz="1100" b="0">
+                <a:solidFill>
+                  <a:srgbClr val="6B7A90"/>
+                </a:solidFill>
+                <a:latin typeface="Consolas"/>
+              </a:rPr>
+              <a:t>SEED</a:t>
+            </a:r>
+          </a:p>
+        </p:txBody>
+      </p:sp>
+      <p:sp>
+        <p:nvSpPr>
+          <p:cNvPr id="9" name="Rounded Rectangle 8"/>
+          <p:cNvSpPr/>
+          <p:nvPr/>
+        </p:nvSpPr>
+        <p:spPr>
+          <a:xfrm>
+            <a:off x="4367784" y="2395728"/>
+            <a:ext cx="3444240" cy="1143000"/>
+          </a:xfrm>
+          <a:prstGeom prst="roundRect">
+            <a:avLst/>
+          </a:prstGeom>
+          <a:noFill/>
+          <a:ln w="12700">
+            <a:solidFill>
+              <a:srgbClr val="22D3EE"/>
+            </a:solidFill>
+          </a:ln>
+        </p:spPr>
+        <p:style>
+          <a:lnRef idx="1">
+            <a:schemeClr val="accent1"/>
+          </a:lnRef>
+          <a:fillRef idx="3">
+            <a:schemeClr val="accent1"/>
+          </a:fillRef>
+          <a:effectRef idx="2">
+            <a:schemeClr val="accent1"/>
+          </a:effectRef>
+          <a:fontRef idx="minor">
+            <a:schemeClr val="lt1"/>
+          </a:fontRef>
+        </p:style>
+        <p:txBody>
+          <a:bodyPr rtlCol="0" anchor="ctr"/>
+          <a:lstStyle/>
+          <a:p>
+            <a:pPr algn="ctr"/>
+            <a:r>
+              <a:rPr sz="3200" b="1">
+                <a:solidFill>
+                  <a:srgbClr val="22D3EE"/>
+                </a:solidFill>
+                <a:latin typeface="Consolas"/>
+              </a:rPr>
+              <a:t>18</a:t>
+            </a:r>
+          </a:p>
+          <a:p>
+            <a:pPr algn="ctr"/>
+            <a:r>
+              <a:rPr sz="1100" b="0">
+                <a:solidFill>
+                  <a:srgbClr val="6B7A90"/>
+                </a:solidFill>
+                <a:latin typeface="Consolas"/>
+              </a:rPr>
+              <a:t>MONTHS RUNWAY</a:t>
+            </a:r>
+          </a:p>
+        </p:txBody>
+      </p:sp>
+      <p:sp>
+        <p:nvSpPr>
+          <p:cNvPr id="10" name="Rounded Rectangle 9"/>
+          <p:cNvSpPr/>
+          <p:nvPr/>
+        </p:nvSpPr>
+        <p:spPr>
+          <a:xfrm>
+            <a:off x="8132064" y="2395728"/>
+            <a:ext cx="3444240" cy="1143000"/>
+          </a:xfrm>
+          <a:prstGeom prst="roundRect">
+            <a:avLst/>
+          </a:prstGeom>
+          <a:noFill/>
+          <a:ln w="12700">
+            <a:solidFill>
+              <a:srgbClr val="22D3EE"/>
+            </a:solidFill>
+          </a:ln>
+        </p:spPr>
+        <p:style>
+          <a:lnRef idx="1">
+            <a:schemeClr val="accent1"/>
+          </a:lnRef>
+          <a:fillRef idx="3">
+            <a:schemeClr val="accent1"/>
+          </a:fillRef>
+          <a:effectRef idx="2">
+            <a:schemeClr val="accent1"/>
+          </a:effectRef>
+          <a:fontRef idx="minor">
+            <a:schemeClr val="lt1"/>
+          </a:fontRef>
+        </p:style>
+        <p:txBody>
+          <a:bodyPr rtlCol="0" anchor="ctr"/>
+          <a:lstStyle/>
+          <a:p>
+            <a:pPr algn="ctr"/>
+            <a:r>
+              <a:rPr sz="3200" b="1">
+                <a:solidFill>
+                  <a:srgbClr val="22D3EE"/>
+                </a:solidFill>
+                <a:latin typeface="Consolas"/>
+              </a:rPr>
+              <a:t>12→18+</a:t>
+            </a:r>
+          </a:p>
+          <a:p>
+            <a:pPr algn="ctr"/>
+            <a:r>
+              <a:rPr sz="1100" b="0">
+                <a:solidFill>
+                  <a:srgbClr val="6B7A90"/>
+                </a:solidFill>
+                <a:latin typeface="Consolas"/>
+              </a:rPr>
+              <a:t>VULN CLASSES</a:t>
+            </a:r>
+          </a:p>
+        </p:txBody>
+      </p:sp>
+      <p:sp>
+        <p:nvSpPr>
+          <p:cNvPr id="11" name="TextBox 10"/>
+          <p:cNvSpPr txBox="1"/>
+          <p:nvPr/>
+        </p:nvSpPr>
+        <p:spPr>
+          <a:xfrm>
+            <a:off x="713232" y="3840480"/>
+            <a:ext cx="10789920" cy="3840480"/>
+          </a:xfrm>
+          <a:prstGeom prst="rect">
+            <a:avLst/>
+          </a:prstGeom>
+          <a:noFill/>
+        </p:spPr>
+        <p:txBody>
+          <a:bodyPr wrap="square" anchor="t" lIns="0" rIns="0" tIns="0" bIns="0">
+            <a:spAutoFit/>
+          </a:bodyPr>
+          <a:lstStyle/>
+          <a:p>
+            <a:pPr>
+              <a:spcAft>
+                <a:spcPts val="1000"/>
+              </a:spcAft>
+            </a:pPr>
+            <a:r>
+              <a:rPr sz="1700" b="1">
+                <a:solidFill>
+                  <a:srgbClr val="22D3EE"/>
+                </a:solidFill>
+                <a:latin typeface="Segoe UI"/>
+              </a:rPr>
+              <a:t>»  </a:t>
+            </a:r>
+            <a:r>
+              <a:rPr sz="1700" b="0">
+                <a:solidFill>
+                  <a:srgbClr val="C4D2E4"/>
+                </a:solidFill>
+                <a:latin typeface="Segoe UI"/>
+              </a:rPr>
+              <a:t>Engineering: multi-link chaining + deeper exploit composition</a:t>
+            </a:r>
+          </a:p>
+          <a:p>
+            <a:pPr>
+              <a:spcAft>
+                <a:spcPts val="1000"/>
+              </a:spcAft>
+            </a:pPr>
+            <a:r>
+              <a:rPr sz="1700" b="1">
+                <a:solidFill>
+                  <a:srgbClr val="22D3EE"/>
+                </a:solidFill>
+                <a:latin typeface="Segoe UI"/>
+              </a:rPr>
+              <a:t>»  </a:t>
+            </a:r>
+            <a:r>
+              <a:rPr sz="1700" b="0">
+                <a:solidFill>
+                  <a:srgbClr val="C4D2E4"/>
+                </a:solidFill>
+                <a:latin typeface="Segoe UI"/>
+              </a:rPr>
+              <a:t>Policy library: ready-made oracles for common stacks</a:t>
+            </a:r>
+          </a:p>
+          <a:p>
+            <a:pPr>
+              <a:spcAft>
+                <a:spcPts val="1000"/>
+              </a:spcAft>
+            </a:pPr>
+            <a:r>
+              <a:rPr sz="1700" b="1">
+                <a:solidFill>
+                  <a:srgbClr val="22D3EE"/>
+                </a:solidFill>
+                <a:latin typeface="Segoe UI"/>
+              </a:rPr>
+              <a:t>»  </a:t>
+            </a:r>
+            <a:r>
+              <a:rPr sz="1700" b="0">
+                <a:solidFill>
+                  <a:srgbClr val="C4D2E4"/>
+                </a:solidFill>
+                <a:latin typeface="Segoe UI"/>
+              </a:rPr>
+              <a:t>Integrations: CI/CD gate, ticketing, SIEM export</a:t>
+            </a:r>
+          </a:p>
+          <a:p>
+            <a:pPr>
+              <a:spcAft>
+                <a:spcPts val="1000"/>
+              </a:spcAft>
+            </a:pPr>
+            <a:r>
+              <a:rPr sz="1700" b="1">
+                <a:solidFill>
+                  <a:srgbClr val="22D3EE"/>
+                </a:solidFill>
+                <a:latin typeface="Segoe UI"/>
+              </a:rPr>
+              <a:t>»  </a:t>
+            </a:r>
+            <a:r>
+              <a:rPr sz="1700" b="0">
+                <a:solidFill>
+                  <a:srgbClr val="C4D2E4"/>
+                </a:solidFill>
+                <a:latin typeface="Segoe UI"/>
+              </a:rPr>
+              <a:t>Design partners: regulated, air-gap-first customers</a:t>
+            </a:r>
+          </a:p>
+          <a:p>
+            <a:pPr>
+              <a:spcAft>
+                <a:spcPts val="1000"/>
+              </a:spcAft>
+            </a:pPr>
+            <a:r>
+              <a:rPr sz="1700" b="1">
+                <a:solidFill>
+                  <a:srgbClr val="22D3EE"/>
+                </a:solidFill>
+                <a:latin typeface="Segoe UI"/>
+              </a:rPr>
+              <a:t>»  </a:t>
+            </a:r>
+            <a:r>
+              <a:rPr sz="1700" b="0">
+                <a:solidFill>
+                  <a:srgbClr val="C4D2E4"/>
+                </a:solidFill>
+                <a:latin typeface="Segoe UI"/>
+              </a:rPr>
+              <a:t>Outcome: from autonomous finder to autonomous fixer</a:t>
+            </a:r>
+          </a:p>
+        </p:txBody>
+      </p:sp>
+      <p:sp>
+        <p:nvSpPr>
+          <p:cNvPr id="12" name="TextBox 11"/>
+          <p:cNvSpPr txBox="1"/>
+          <p:nvPr/>
+        </p:nvSpPr>
+        <p:spPr>
+          <a:xfrm>
+            <a:off x="566928" y="6382512"/>
+            <a:ext cx="8229600" cy="365760"/>
+          </a:xfrm>
+          <a:prstGeom prst="rect">
+            <a:avLst/>
+          </a:prstGeom>
+          <a:noFill/>
+        </p:spPr>
+        <p:txBody>
+          <a:bodyPr wrap="square" anchor="t" lIns="0" rIns="0" tIns="0" bIns="0">
+            <a:spAutoFit/>
+          </a:bodyPr>
+          <a:lstStyle/>
+          <a:p>
+            <a:r>
+              <a:rPr sz="1000" b="1">
+                <a:solidFill>
+                  <a:srgbClr val="22D3EE"/>
+                </a:solidFill>
+                <a:latin typeface="Consolas"/>
+              </a:rPr>
+              <a:t>SENTINEL</a:t>
+            </a:r>
+            <a:r>
+              <a:rPr sz="1000" b="0">
+                <a:solidFill>
+                  <a:srgbClr val="6B7A90"/>
+                </a:solidFill>
+                <a:latin typeface="Consolas"/>
+              </a:rPr>
+              <a:t>   ·   find → reason → prove → patch → prove</a:t>
+            </a:r>
+          </a:p>
+        </p:txBody>
+      </p:sp>
+      <p:sp>
+        <p:nvSpPr>
+          <p:cNvPr id="13" name="TextBox 12"/>
+          <p:cNvSpPr txBox="1"/>
+          <p:nvPr/>
+        </p:nvSpPr>
+        <p:spPr>
+          <a:xfrm>
+            <a:off x="10789920" y="6382512"/>
+            <a:ext cx="914400" cy="365760"/>
+          </a:xfrm>
+          <a:prstGeom prst="rect">
+            <a:avLst/>
+          </a:prstGeom>
+          <a:noFill/>
+        </p:spPr>
+        <p:txBody>
+          <a:bodyPr wrap="square" anchor="t" lIns="0" rIns="0" tIns="0" bIns="0">
+            <a:spAutoFit/>
+          </a:bodyPr>
+          <a:lstStyle/>
+          <a:p>
+            <a:pPr algn="r"/>
+            <a:r>
+              <a:rPr sz="1000" b="0">
+                <a:solidFill>
+                  <a:srgbClr val="6B7A90"/>
+                </a:solidFill>
+                <a:latin typeface="Consolas"/>
+              </a:rPr>
+              <a:t>37 / 38</a:t>
+            </a:r>
+          </a:p>
+        </p:txBody>
+      </p:sp>
+    </p:spTree>
+  </p:cSld>
+  <p:clrMapOvr>
+    <a:masterClrMapping/>
+  </p:clrMapOvr>
+</p:sld>
+</file>
+
+<file path=ppt/slides/slide38.xml><?xml version="1.0" encoding="utf-8"?>
 <p:sld xmlns:a="http://schemas.openxmlformats.org/drawingml/2006/main" xmlns:p="http://schemas.openxmlformats.org/presentationml/2006/main" xmlns:r="http://schemas.openxmlformats.org/officeDocument/2006/relationships">
   <p:cSld>
     <p:spTree>
@@ -18440,7 +20675,7 @@
                 </a:solidFill>
                 <a:latin typeface="Consolas"/>
               </a:rPr>
-              <a:t>04 / 33</a:t>
+              <a:t>04 / 38</a:t>
             </a:r>
           </a:p>
         </p:txBody>
@@ -18876,7 +21111,7 @@
                 </a:solidFill>
                 <a:latin typeface="Consolas"/>
               </a:rPr>
-              <a:t>05 / 33</a:t>
+              <a:t>05 / 38</a:t>
             </a:r>
           </a:p>
         </p:txBody>
@@ -19448,7 +21683,7 @@
                 </a:solidFill>
                 <a:latin typeface="Consolas"/>
               </a:rPr>
-              <a:t>07 / 33</a:t>
+              <a:t>07 / 38</a:t>
             </a:r>
           </a:p>
         </p:txBody>
@@ -19884,7 +22119,7 @@
                 </a:solidFill>
                 <a:latin typeface="Consolas"/>
               </a:rPr>
-              <a:t>08 / 33</a:t>
+              <a:t>08 / 38</a:t>
             </a:r>
           </a:p>
         </p:txBody>
@@ -20320,7 +22555,7 @@
                 </a:solidFill>
                 <a:latin typeface="Consolas"/>
               </a:rPr>
-              <a:t>09 / 33</a:t>
+              <a:t>09 / 38</a:t>
             </a:r>
           </a:p>
         </p:txBody>
